--- a/hokkyss_showcase_deck.pptx
+++ b/hokkyss_showcase_deck.pptx
@@ -1904,7 +1904,7 @@
             </a:r>
           </a:p>
           <a:p>
-            <a:pPr marL="285750" indent="-285750">
+            <a:pPr>
               <a:buFont typeface="Arial" panose="020B0604020202020204" pitchFamily="34" charset="0"/>
               <a:buChar char="•"/>
             </a:pPr>
@@ -1931,7 +1931,7 @@
             </a:r>
           </a:p>
           <a:p>
-            <a:pPr lvl="1" marL="742950" indent="-285750">
+            <a:pPr lvl="1">
               <a:buFont typeface="Arial" panose="020B0604020202020204" pitchFamily="34" charset="0"/>
               <a:buChar char="•"/>
             </a:pPr>
@@ -1944,7 +1944,7 @@
             </a:r>
           </a:p>
           <a:p>
-            <a:pPr lvl="1" marL="742950" indent="-285750">
+            <a:pPr lvl="1">
               <a:buFont typeface="Arial" panose="020B0604020202020204" pitchFamily="34" charset="0"/>
               <a:buChar char="•"/>
             </a:pPr>
@@ -1957,7 +1957,7 @@
             </a:r>
           </a:p>
           <a:p>
-            <a:pPr marL="285750" indent="-285750">
+            <a:pPr>
               <a:buFont typeface="Arial" panose="020B0604020202020204" pitchFamily="34" charset="0"/>
               <a:buChar char="•"/>
             </a:pPr>
@@ -1984,7 +1984,7 @@
             </a:r>
           </a:p>
           <a:p>
-            <a:pPr marL="342900" indent="-342900">
+            <a:pPr>
               <a:buAutoNum type="arabicPeriod"/>
             </a:pPr>
             <a:r>
@@ -1996,7 +1996,7 @@
             </a:r>
           </a:p>
           <a:p>
-            <a:pPr marL="342900" indent="-342900">
+            <a:pPr>
               <a:buAutoNum type="arabicPeriod"/>
             </a:pPr>
             <a:r>
@@ -2077,7 +2077,7 @@
             </a:r>
           </a:p>
           <a:p>
-            <a:pPr marL="285750" indent="-285750">
+            <a:pPr>
               <a:buFont typeface="Arial" panose="020B0604020202020204" pitchFamily="34" charset="0"/>
               <a:buChar char="•"/>
             </a:pPr>
@@ -2090,7 +2090,7 @@
             </a:r>
           </a:p>
           <a:p>
-            <a:pPr marL="285750" indent="-285750">
+            <a:pPr>
               <a:buFont typeface="Arial" panose="020B0604020202020204" pitchFamily="34" charset="0"/>
               <a:buChar char="•"/>
             </a:pPr>
@@ -2103,7 +2103,7 @@
             </a:r>
           </a:p>
           <a:p>
-            <a:pPr marL="285750" indent="-285750">
+            <a:pPr>
               <a:buFont typeface="Arial" panose="020B0604020202020204" pitchFamily="34" charset="0"/>
               <a:buChar char="•"/>
             </a:pPr>
@@ -2185,7 +2185,7 @@
             </a:r>
           </a:p>
           <a:p>
-            <a:pPr marL="285750" indent="-285750">
+            <a:pPr>
               <a:buFont typeface="Arial" panose="020B0604020202020204" pitchFamily="34" charset="0"/>
               <a:buChar char="•"/>
             </a:pPr>
@@ -2198,7 +2198,7 @@
             </a:r>
           </a:p>
           <a:p>
-            <a:pPr marL="285750" indent="-285750">
+            <a:pPr>
               <a:buFont typeface="Arial" panose="020B0604020202020204" pitchFamily="34" charset="0"/>
               <a:buChar char="•"/>
             </a:pPr>
@@ -2211,7 +2211,7 @@
             </a:r>
           </a:p>
           <a:p>
-            <a:pPr marL="285750" indent="-285750">
+            <a:pPr>
               <a:buFont typeface="Arial" panose="020B0604020202020204" pitchFamily="34" charset="0"/>
               <a:buChar char="•"/>
             </a:pPr>
@@ -2293,7 +2293,7 @@
             </a:r>
           </a:p>
           <a:p>
-            <a:pPr marL="285750" indent="-285750">
+            <a:pPr>
               <a:buFont typeface="Arial" panose="020B0604020202020204" pitchFamily="34" charset="0"/>
               <a:buChar char="•"/>
             </a:pPr>
@@ -2306,7 +2306,7 @@
             </a:r>
           </a:p>
           <a:p>
-            <a:pPr marL="285750" indent="-285750">
+            <a:pPr>
               <a:buFont typeface="Arial" panose="020B0604020202020204" pitchFamily="34" charset="0"/>
               <a:buChar char="•"/>
             </a:pPr>
@@ -2319,7 +2319,7 @@
             </a:r>
           </a:p>
           <a:p>
-            <a:pPr marL="285750" indent="-285750">
+            <a:pPr>
               <a:buFont typeface="Arial" panose="020B0604020202020204" pitchFamily="34" charset="0"/>
               <a:buChar char="•"/>
             </a:pPr>
@@ -2401,7 +2401,7 @@
             </a:r>
           </a:p>
           <a:p>
-            <a:pPr marL="285750" indent="-285750">
+            <a:pPr>
               <a:buFont typeface="Arial" panose="020B0604020202020204" pitchFamily="34" charset="0"/>
               <a:buChar char="•"/>
             </a:pPr>
@@ -2414,7 +2414,7 @@
             </a:r>
           </a:p>
           <a:p>
-            <a:pPr marL="285750" indent="-285750">
+            <a:pPr>
               <a:buFont typeface="Arial" panose="020B0604020202020204" pitchFamily="34" charset="0"/>
               <a:buChar char="•"/>
             </a:pPr>
@@ -2489,7 +2489,7 @@
             </a:r>
           </a:p>
           <a:p>
-            <a:pPr marL="285750" indent="-285750">
+            <a:pPr>
               <a:buFont typeface="Arial" panose="020B0604020202020204" pitchFamily="34" charset="0"/>
               <a:buChar char="•"/>
             </a:pPr>
@@ -2502,7 +2502,7 @@
             </a:r>
           </a:p>
           <a:p>
-            <a:pPr marL="285750" indent="-285750">
+            <a:pPr>
               <a:buFont typeface="Arial" panose="020B0604020202020204" pitchFamily="34" charset="0"/>
               <a:buChar char="•"/>
             </a:pPr>
@@ -2515,7 +2515,7 @@
             </a:r>
           </a:p>
           <a:p>
-            <a:pPr lvl="1" marL="742950" indent="-285750">
+            <a:pPr lvl="1">
               <a:buFont typeface="Arial" panose="020B0604020202020204" pitchFamily="34" charset="0"/>
               <a:buChar char="•"/>
             </a:pPr>
@@ -2528,7 +2528,7 @@
             </a:r>
           </a:p>
           <a:p>
-            <a:pPr lvl="1" marL="742950" indent="-285750">
+            <a:pPr lvl="1">
               <a:buFont typeface="Arial" panose="020B0604020202020204" pitchFamily="34" charset="0"/>
               <a:buChar char="•"/>
             </a:pPr>
@@ -2541,7 +2541,7 @@
             </a:r>
           </a:p>
           <a:p>
-            <a:pPr lvl="2" marL="1200150" indent="-285750">
+            <a:pPr lvl="2">
               <a:buFont typeface="Arial" panose="020B0604020202020204" pitchFamily="34" charset="0"/>
               <a:buChar char="•"/>
             </a:pPr>
@@ -2554,7 +2554,7 @@
             </a:r>
           </a:p>
           <a:p>
-            <a:pPr lvl="3" marL="1657350" indent="-285750">
+            <a:pPr lvl="3">
               <a:buFont typeface="Arial" panose="020B0604020202020204" pitchFamily="34" charset="0"/>
               <a:buChar char="•"/>
             </a:pPr>
@@ -2567,7 +2567,7 @@
             </a:r>
           </a:p>
           <a:p>
-            <a:pPr marL="342900" indent="-342900">
+            <a:pPr>
               <a:buAutoNum type="arabicPeriod"/>
             </a:pPr>
             <a:r>
@@ -2641,7 +2641,7 @@
             </a:r>
           </a:p>
           <a:p>
-            <a:pPr marL="285750" indent="-285750">
+            <a:pPr>
               <a:buFont typeface="Arial" panose="020B0604020202020204" pitchFamily="34" charset="0"/>
               <a:buChar char="•"/>
             </a:pPr>
@@ -2654,7 +2654,7 @@
             </a:r>
           </a:p>
           <a:p>
-            <a:pPr marL="285750" indent="-285750">
+            <a:pPr>
               <a:buFont typeface="Arial" panose="020B0604020202020204" pitchFamily="34" charset="0"/>
               <a:buChar char="•"/>
             </a:pPr>
@@ -2667,7 +2667,7 @@
             </a:r>
           </a:p>
           <a:p>
-            <a:pPr lvl="1" marL="742950" indent="-285750">
+            <a:pPr lvl="1">
               <a:buFont typeface="Arial" panose="020B0604020202020204" pitchFamily="34" charset="0"/>
               <a:buChar char="•"/>
             </a:pPr>
@@ -2680,7 +2680,7 @@
             </a:r>
           </a:p>
           <a:p>
-            <a:pPr lvl="1" marL="742950" indent="-285750">
+            <a:pPr lvl="1">
               <a:buFont typeface="Arial" panose="020B0604020202020204" pitchFamily="34" charset="0"/>
               <a:buChar char="•"/>
             </a:pPr>
@@ -2755,7 +2755,7 @@
             </a:r>
           </a:p>
           <a:p>
-            <a:pPr marL="285750" indent="-285750">
+            <a:pPr>
               <a:buFont typeface="Arial" panose="020B0604020202020204" pitchFamily="34" charset="0"/>
               <a:buChar char="•"/>
             </a:pPr>
@@ -2768,7 +2768,7 @@
             </a:r>
           </a:p>
           <a:p>
-            <a:pPr marL="285750" indent="-285750">
+            <a:pPr>
               <a:buFont typeface="Arial" panose="020B0604020202020204" pitchFamily="34" charset="0"/>
               <a:buChar char="•"/>
             </a:pPr>
@@ -2781,7 +2781,7 @@
             </a:r>
           </a:p>
           <a:p>
-            <a:pPr lvl="1" marL="742950" indent="-285750">
+            <a:pPr lvl="1">
               <a:buFont typeface="Arial" panose="020B0604020202020204" pitchFamily="34" charset="0"/>
               <a:buChar char="•"/>
             </a:pPr>
@@ -2863,7 +2863,7 @@
             </a:r>
           </a:p>
           <a:p>
-            <a:pPr marL="285750" indent="-285750">
+            <a:pPr>
               <a:buFont typeface="Arial" panose="020B0604020202020204" pitchFamily="34" charset="0"/>
               <a:buChar char="•"/>
             </a:pPr>
@@ -2876,7 +2876,7 @@
             </a:r>
           </a:p>
           <a:p>
-            <a:pPr marL="285750" indent="-285750">
+            <a:pPr>
               <a:buFont typeface="Arial" panose="020B0604020202020204" pitchFamily="34" charset="0"/>
               <a:buChar char="•"/>
             </a:pPr>
@@ -2958,7 +2958,7 @@
             </a:r>
           </a:p>
           <a:p>
-            <a:pPr marL="285750" indent="-285750">
+            <a:pPr>
               <a:buFont typeface="Arial" panose="020B0604020202020204" pitchFamily="34" charset="0"/>
               <a:buChar char="•"/>
             </a:pPr>
@@ -2971,7 +2971,7 @@
             </a:r>
           </a:p>
           <a:p>
-            <a:pPr marL="285750" indent="-285750">
+            <a:pPr>
               <a:buFont typeface="Arial" panose="020B0604020202020204" pitchFamily="34" charset="0"/>
               <a:buChar char="•"/>
             </a:pPr>
@@ -2984,7 +2984,7 @@
             </a:r>
           </a:p>
           <a:p>
-            <a:pPr marL="285750" indent="-285750">
+            <a:pPr>
               <a:buFont typeface="Arial" panose="020B0604020202020204" pitchFamily="34" charset="0"/>
               <a:buChar char="•"/>
             </a:pPr>
@@ -3066,7 +3066,7 @@
             </a:r>
           </a:p>
           <a:p>
-            <a:pPr marL="285750" indent="-285750">
+            <a:pPr>
               <a:buFont typeface="Arial" panose="020B0604020202020204" pitchFamily="34" charset="0"/>
               <a:buChar char="•"/>
             </a:pPr>
@@ -3079,7 +3079,7 @@
             </a:r>
           </a:p>
           <a:p>
-            <a:pPr marL="285750" indent="-285750">
+            <a:pPr>
               <a:buFont typeface="Arial" panose="020B0604020202020204" pitchFamily="34" charset="0"/>
               <a:buChar char="•"/>
             </a:pPr>
@@ -3092,7 +3092,7 @@
             </a:r>
           </a:p>
           <a:p>
-            <a:pPr marL="285750" indent="-285750">
+            <a:pPr>
               <a:buFont typeface="Arial" panose="020B0604020202020204" pitchFamily="34" charset="0"/>
               <a:buChar char="•"/>
             </a:pPr>
@@ -3174,7 +3174,7 @@
             </a:r>
           </a:p>
           <a:p>
-            <a:pPr marL="285750" indent="-285750">
+            <a:pPr>
               <a:buFont typeface="Arial" panose="020B0604020202020204" pitchFamily="34" charset="0"/>
               <a:buChar char="•"/>
             </a:pPr>
@@ -3187,7 +3187,7 @@
             </a:r>
           </a:p>
           <a:p>
-            <a:pPr marL="285750" indent="-285750">
+            <a:pPr>
               <a:buFont typeface="Arial" panose="020B0604020202020204" pitchFamily="34" charset="0"/>
               <a:buChar char="•"/>
             </a:pPr>
@@ -3200,7 +3200,7 @@
             </a:r>
           </a:p>
           <a:p>
-            <a:pPr marL="285750" indent="-285750">
+            <a:pPr>
               <a:buFont typeface="Arial" panose="020B0604020202020204" pitchFamily="34" charset="0"/>
               <a:buChar char="•"/>
             </a:pPr>
@@ -4192,7 +4192,7 @@
             <a:bodyPr/>
             <a:lstStyle/>
             <a:p>
-              <a:pPr marL="285750" indent="-285750">
+              <a:pPr>
                 <a:buFont typeface="Arial" panose="020B0604020202020204" pitchFamily="34" charset="0"/>
                 <a:buChar char="•"/>
               </a:pPr>
@@ -4208,7 +4208,7 @@
               </a:r>
             </a:p>
             <a:p>
-              <a:pPr marL="285750" indent="-285750">
+              <a:pPr>
                 <a:buFont typeface="Arial" panose="020B0604020202020204" pitchFamily="34" charset="0"/>
                 <a:buChar char="•"/>
               </a:pPr>
@@ -4224,7 +4224,7 @@
               </a:r>
             </a:p>
             <a:p>
-              <a:pPr marL="285750" indent="-285750">
+              <a:pPr>
                 <a:buFont typeface="Arial" panose="020B0604020202020204" pitchFamily="34" charset="0"/>
                 <a:buChar char="•"/>
               </a:pPr>
@@ -4349,7 +4349,7 @@
             <a:bodyPr/>
             <a:lstStyle/>
             <a:p>
-              <a:pPr marL="285750" indent="-285750">
+              <a:pPr>
                 <a:buFont typeface="Arial" panose="020B0604020202020204" pitchFamily="34" charset="0"/>
                 <a:buChar char="•"/>
               </a:pPr>
@@ -4365,7 +4365,7 @@
               </a:r>
             </a:p>
             <a:p>
-              <a:pPr marL="285750" indent="-285750">
+              <a:pPr>
                 <a:buFont typeface="Arial" panose="020B0604020202020204" pitchFamily="34" charset="0"/>
                 <a:buChar char="•"/>
               </a:pPr>
@@ -4381,7 +4381,7 @@
               </a:r>
             </a:p>
             <a:p>
-              <a:pPr marL="285750" indent="-285750">
+              <a:pPr>
                 <a:buFont typeface="Arial" panose="020B0604020202020204" pitchFamily="34" charset="0"/>
                 <a:buChar char="•"/>
               </a:pPr>
@@ -4506,7 +4506,7 @@
             <a:bodyPr/>
             <a:lstStyle/>
             <a:p>
-              <a:pPr marL="285750" indent="-285750">
+              <a:pPr>
                 <a:buFont typeface="Arial" panose="020B0604020202020204" pitchFamily="34" charset="0"/>
                 <a:buChar char="•"/>
               </a:pPr>
@@ -4522,7 +4522,7 @@
               </a:r>
             </a:p>
             <a:p>
-              <a:pPr marL="285750" indent="-285750">
+              <a:pPr>
                 <a:buFont typeface="Arial" panose="020B0604020202020204" pitchFamily="34" charset="0"/>
                 <a:buChar char="•"/>
               </a:pPr>
@@ -4538,7 +4538,7 @@
               </a:r>
             </a:p>
             <a:p>
-              <a:pPr marL="285750" indent="-285750">
+              <a:pPr>
                 <a:buFont typeface="Arial" panose="020B0604020202020204" pitchFamily="34" charset="0"/>
                 <a:buChar char="•"/>
               </a:pPr>
@@ -10085,7 +10085,7 @@
           <a:bodyPr/>
           <a:lstStyle/>
           <a:p>
-            <a:pPr marL="285750" indent="-285750">
+            <a:pPr>
               <a:buFont typeface="Arial" panose="020B0604020202020204" pitchFamily="34" charset="0"/>
               <a:buChar char="•"/>
             </a:pPr>
@@ -10101,7 +10101,7 @@
             </a:r>
           </a:p>
           <a:p>
-            <a:pPr lvl="1" marL="742950" indent="-285750">
+            <a:pPr lvl="1">
               <a:buFont typeface="Arial" panose="020B0604020202020204" pitchFamily="34" charset="0"/>
               <a:buChar char="•"/>
             </a:pPr>
@@ -10117,7 +10117,7 @@
             </a:r>
           </a:p>
           <a:p>
-            <a:pPr lvl="2" marL="1200150" indent="-285750">
+            <a:pPr lvl="2">
               <a:buFont typeface="Arial" panose="020B0604020202020204" pitchFamily="34" charset="0"/>
               <a:buChar char="•"/>
             </a:pPr>
@@ -10163,7 +10163,7 @@
             </a:r>
           </a:p>
           <a:p>
-            <a:pPr lvl="2" marL="1200150" indent="-285750">
+            <a:pPr lvl="2">
               <a:buFont typeface="Arial" panose="020B0604020202020204" pitchFamily="34" charset="0"/>
               <a:buChar char="•"/>
             </a:pPr>
@@ -10209,7 +10209,7 @@
             </a:r>
           </a:p>
           <a:p>
-            <a:pPr lvl="2" marL="1200150" indent="-285750">
+            <a:pPr lvl="2">
               <a:buFont typeface="Arial" panose="020B0604020202020204" pitchFamily="34" charset="0"/>
               <a:buChar char="•"/>
             </a:pPr>
@@ -10255,7 +10255,7 @@
             </a:r>
           </a:p>
           <a:p>
-            <a:pPr marL="285750" indent="-285750">
+            <a:pPr>
               <a:buFont typeface="Arial" panose="020B0604020202020204" pitchFamily="34" charset="0"/>
               <a:buChar char="•"/>
             </a:pPr>
@@ -10271,7 +10271,7 @@
             </a:r>
           </a:p>
           <a:p>
-            <a:pPr lvl="1" marL="742950" indent="-285750">
+            <a:pPr lvl="1">
               <a:buFont typeface="Arial" panose="020B0604020202020204" pitchFamily="34" charset="0"/>
               <a:buChar char="•"/>
             </a:pPr>
@@ -10287,7 +10287,7 @@
             </a:r>
           </a:p>
           <a:p>
-            <a:pPr lvl="2" marL="1200150" indent="-285750">
+            <a:pPr lvl="2">
               <a:buFont typeface="Arial" panose="020B0604020202020204" pitchFamily="34" charset="0"/>
               <a:buChar char="•"/>
             </a:pPr>
@@ -11378,7 +11378,7 @@
           <a:bodyPr/>
           <a:lstStyle/>
           <a:p>
-            <a:pPr marL="285750" indent="-285750">
+            <a:pPr>
               <a:buFont typeface="Arial" panose="020B0604020202020204" pitchFamily="34" charset="0"/>
               <a:buChar char="•"/>
             </a:pPr>
@@ -11394,7 +11394,7 @@
             </a:r>
           </a:p>
           <a:p>
-            <a:pPr marL="285750" indent="-285750">
+            <a:pPr>
               <a:buFont typeface="Arial" panose="020B0604020202020204" pitchFamily="34" charset="0"/>
               <a:buChar char="•"/>
             </a:pPr>
@@ -11410,7 +11410,7 @@
             </a:r>
           </a:p>
           <a:p>
-            <a:pPr marL="285750" indent="-285750">
+            <a:pPr>
               <a:buFont typeface="Arial" panose="020B0604020202020204" pitchFamily="34" charset="0"/>
               <a:buChar char="•"/>
             </a:pPr>
@@ -11426,7 +11426,7 @@
             </a:r>
           </a:p>
           <a:p>
-            <a:pPr marL="285750" indent="-285750">
+            <a:pPr>
               <a:buFont typeface="Arial" panose="020B0604020202020204" pitchFamily="34" charset="0"/>
               <a:buChar char="•"/>
             </a:pPr>
@@ -11713,7 +11713,7 @@
           <a:bodyPr/>
           <a:lstStyle/>
           <a:p>
-            <a:pPr marL="285750" indent="-285750">
+            <a:pPr>
               <a:buFont typeface="Arial" panose="020B0604020202020204" pitchFamily="34" charset="0"/>
               <a:buChar char="•"/>
             </a:pPr>
@@ -11727,6 +11727,16 @@
               </a:rPr>
               <a:t>Core Infrastructure Fleet</a:t>
             </a:r>
+            <a:r>
+              <a:rPr sz="1050">
+                <a:solidFill>
+                  <a:srgbClr val="94A3B8"/>
+                </a:solidFill>
+                <a:latin typeface="+mn-lt"/>
+                <a:cs typeface="+mn-lt"/>
+              </a:rPr>
+              <a:t>↳ Shift+Enter: soft break continuation under same bullet</a:t>
+            </a:r>
             <a:br>
               <a:rPr sz="1050">
                 <a:solidFill>
@@ -11736,19 +11746,9 @@
                 <a:cs typeface="+mn-lt"/>
               </a:rPr>
             </a:br>
-            <a:r>
-              <a:rPr sz="1050">
-                <a:solidFill>
-                  <a:srgbClr val="94A3B8"/>
-                </a:solidFill>
-                <a:latin typeface="+mn-lt"/>
-                <a:cs typeface="+mn-lt"/>
-              </a:rPr>
-              <a:t>↳ Shift+Enter: soft break continuation under same bullet</a:t>
-            </a:r>
-          </a:p>
-          <a:p>
-            <a:pPr lvl="1" marL="742950" indent="-285750">
+          </a:p>
+          <a:p>
+            <a:pPr lvl="1">
               <a:buFont typeface="Arial" panose="020B0604020202020204" pitchFamily="34" charset="0"/>
               <a:buChar char="•"/>
             </a:pPr>
@@ -11762,6 +11762,16 @@
               </a:rPr>
               <a:t>Edge Routing Layer (Anycast DNS)</a:t>
             </a:r>
+            <a:r>
+              <a:rPr sz="1050">
+                <a:solidFill>
+                  <a:srgbClr val="94A3B8"/>
+                </a:solidFill>
+                <a:latin typeface="+mn-lt"/>
+                <a:cs typeface="+mn-lt"/>
+              </a:rPr>
+              <a:t>↳ Tab indent: sub-ms global route resolution</a:t>
+            </a:r>
             <a:br>
               <a:rPr sz="1050">
                 <a:solidFill>
@@ -11771,19 +11781,9 @@
                 <a:cs typeface="+mn-lt"/>
               </a:rPr>
             </a:br>
-            <a:r>
-              <a:rPr sz="1050">
-                <a:solidFill>
-                  <a:srgbClr val="94A3B8"/>
-                </a:solidFill>
-                <a:latin typeface="+mn-lt"/>
-                <a:cs typeface="+mn-lt"/>
-              </a:rPr>
-              <a:t>↳ Tab indent: sub-ms global route resolution</a:t>
-            </a:r>
-          </a:p>
-          <a:p>
-            <a:pPr lvl="2" marL="1200150" indent="-285750">
+          </a:p>
+          <a:p>
+            <a:pPr lvl="2">
               <a:buFont typeface="Arial" panose="020B0604020202020204" pitchFamily="34" charset="0"/>
               <a:buChar char="•"/>
             </a:pPr>
@@ -11797,6 +11797,16 @@
               </a:rPr>
               <a:t>TLS 1.3 Security Envelope</a:t>
             </a:r>
+            <a:r>
+              <a:rPr sz="1050">
+                <a:solidFill>
+                  <a:srgbClr val="94A3B8"/>
+                </a:solidFill>
+                <a:latin typeface="+mn-lt"/>
+                <a:cs typeface="+mn-lt"/>
+              </a:rPr>
+              <a:t>↳ Tab Tab: 0-RTT session resumption</a:t>
+            </a:r>
             <a:br>
               <a:rPr sz="1050">
                 <a:solidFill>
@@ -11806,19 +11816,9 @@
                 <a:cs typeface="+mn-lt"/>
               </a:rPr>
             </a:br>
-            <a:r>
-              <a:rPr sz="1050">
-                <a:solidFill>
-                  <a:srgbClr val="94A3B8"/>
-                </a:solidFill>
-                <a:latin typeface="+mn-lt"/>
-                <a:cs typeface="+mn-lt"/>
-              </a:rPr>
-              <a:t>↳ Tab Tab: 0-RTT session resumption</a:t>
-            </a:r>
-          </a:p>
-          <a:p>
-            <a:pPr lvl="3" marL="1657350" indent="-285750">
+          </a:p>
+          <a:p>
+            <a:pPr lvl="3">
               <a:buFont typeface="Arial" panose="020B0604020202020204" pitchFamily="34" charset="0"/>
               <a:buChar char="•"/>
             </a:pPr>
@@ -11834,7 +11834,7 @@
             </a:r>
           </a:p>
           <a:p>
-            <a:pPr marL="285750" indent="-285750">
+            <a:pPr>
               <a:buFont typeface="Arial" panose="020B0604020202020204" pitchFamily="34" charset="0"/>
               <a:buChar char="•"/>
             </a:pPr>
@@ -11848,6 +11848,16 @@
               </a:rPr>
               <a:t>Global State &amp; Cache Synchronization</a:t>
             </a:r>
+            <a:r>
+              <a:rPr sz="1050">
+                <a:solidFill>
+                  <a:srgbClr val="94A3B8"/>
+                </a:solidFill>
+                <a:latin typeface="+mn-lt"/>
+                <a:cs typeface="+mn-lt"/>
+              </a:rPr>
+              <a:t>↳ Shift+Tab: returns to level 0 root bullet</a:t>
+            </a:r>
             <a:br>
               <a:rPr sz="1050">
                 <a:solidFill>
@@ -11857,19 +11867,9 @@
                 <a:cs typeface="+mn-lt"/>
               </a:rPr>
             </a:br>
-            <a:r>
-              <a:rPr sz="1050">
-                <a:solidFill>
-                  <a:srgbClr val="94A3B8"/>
-                </a:solidFill>
-                <a:latin typeface="+mn-lt"/>
-                <a:cs typeface="+mn-lt"/>
-              </a:rPr>
-              <a:t>↳ Shift+Tab: returns to level 0 root bullet</a:t>
-            </a:r>
-          </a:p>
-          <a:p>
-            <a:pPr lvl="1" marL="742950" indent="-285750">
+          </a:p>
+          <a:p>
+            <a:pPr lvl="1">
               <a:buFont typeface="Arial" panose="020B0604020202020204" pitchFamily="34" charset="0"/>
               <a:buChar char="•"/>
             </a:pPr>
@@ -11975,7 +11975,7 @@
           <a:bodyPr/>
           <a:lstStyle/>
           <a:p>
-            <a:pPr marL="342900" indent="-342900">
+            <a:pPr>
               <a:buAutoNum type="arabicPeriod"/>
             </a:pPr>
             <a:r>
@@ -11988,6 +11988,16 @@
               </a:rPr>
               <a:t>Phase 1: Ingestion &amp; Parsing</a:t>
             </a:r>
+            <a:r>
+              <a:rPr sz="1050">
+                <a:solidFill>
+                  <a:srgbClr val="94A3B8"/>
+                </a:solidFill>
+                <a:latin typeface="+mn-lt"/>
+                <a:cs typeface="+mn-lt"/>
+              </a:rPr>
+              <a:t>Decompresses container with fflate &amp; streams XML parts</a:t>
+            </a:r>
             <a:br>
               <a:rPr sz="1050">
                 <a:solidFill>
@@ -11997,19 +12007,9 @@
                 <a:cs typeface="+mn-lt"/>
               </a:rPr>
             </a:br>
-            <a:r>
-              <a:rPr sz="1050">
-                <a:solidFill>
-                  <a:srgbClr val="94A3B8"/>
-                </a:solidFill>
-                <a:latin typeface="+mn-lt"/>
-                <a:cs typeface="+mn-lt"/>
-              </a:rPr>
-              <a:t>Decompresses container with fflate &amp; streams XML parts</a:t>
-            </a:r>
-          </a:p>
-          <a:p>
-            <a:pPr lvl="1" marL="742950" indent="-285750">
+          </a:p>
+          <a:p>
+            <a:pPr lvl="1">
               <a:buFont typeface="Arial" panose="020B0604020202020204" pitchFamily="34" charset="0"/>
               <a:buChar char="•"/>
             </a:pPr>
@@ -12025,7 +12025,7 @@
             </a:r>
           </a:p>
           <a:p>
-            <a:pPr marL="342900" indent="-342900">
+            <a:pPr>
               <a:buAutoNum type="arabicPeriod"/>
             </a:pPr>
             <a:r>
@@ -12038,6 +12038,16 @@
               </a:rPr>
               <a:t>Phase 2: AST Mutation &amp; Modeling</a:t>
             </a:r>
+            <a:r>
+              <a:rPr sz="1050">
+                <a:solidFill>
+                  <a:srgbClr val="94A3B8"/>
+                </a:solidFill>
+                <a:latin typeface="+mn-lt"/>
+                <a:cs typeface="+mn-lt"/>
+              </a:rPr>
+              <a:t>Applies shapes, tables, shadows, gradients, and formulas</a:t>
+            </a:r>
             <a:br>
               <a:rPr sz="1050">
                 <a:solidFill>
@@ -12047,19 +12057,9 @@
                 <a:cs typeface="+mn-lt"/>
               </a:rPr>
             </a:br>
-            <a:r>
-              <a:rPr sz="1050">
-                <a:solidFill>
-                  <a:srgbClr val="94A3B8"/>
-                </a:solidFill>
-                <a:latin typeface="+mn-lt"/>
-                <a:cs typeface="+mn-lt"/>
-              </a:rPr>
-              <a:t>Applies shapes, tables, shadows, gradients, and formulas</a:t>
-            </a:r>
-          </a:p>
-          <a:p>
-            <a:pPr lvl="1" marL="742950" indent="-285750">
+          </a:p>
+          <a:p>
+            <a:pPr lvl="1">
               <a:buFont typeface="Arial" panose="020B0604020202020204" pitchFamily="34" charset="0"/>
               <a:buChar char="•"/>
             </a:pPr>
@@ -12075,7 +12075,7 @@
             </a:r>
           </a:p>
           <a:p>
-            <a:pPr marL="342900" indent="-342900">
+            <a:pPr>
               <a:buAutoNum type="arabicPeriod"/>
             </a:pPr>
             <a:r>
@@ -12088,6 +12088,16 @@
               </a:rPr>
               <a:t>Phase 3: Serialization &amp; Packaging</a:t>
             </a:r>
+            <a:r>
+              <a:rPr sz="1050">
+                <a:solidFill>
+                  <a:srgbClr val="94A3B8"/>
+                </a:solidFill>
+                <a:latin typeface="+mn-lt"/>
+                <a:cs typeface="+mn-lt"/>
+              </a:rPr>
+              <a:t>Emits deterministic OpenXML parts and compiles binary</a:t>
+            </a:r>
             <a:br>
               <a:rPr sz="1050">
                 <a:solidFill>
@@ -12097,19 +12107,9 @@
                 <a:cs typeface="+mn-lt"/>
               </a:rPr>
             </a:br>
-            <a:r>
-              <a:rPr sz="1050">
-                <a:solidFill>
-                  <a:srgbClr val="94A3B8"/>
-                </a:solidFill>
-                <a:latin typeface="+mn-lt"/>
-                <a:cs typeface="+mn-lt"/>
-              </a:rPr>
-              <a:t>Emits deterministic OpenXML parts and compiles binary</a:t>
-            </a:r>
-          </a:p>
-          <a:p>
-            <a:pPr lvl="1" marL="742950" indent="-285750">
+          </a:p>
+          <a:p>
+            <a:pPr lvl="1">
               <a:buFont typeface="Arial" panose="020B0604020202020204" pitchFamily="34" charset="0"/>
               <a:buChar char="•"/>
             </a:pPr>
@@ -12280,7 +12280,7 @@
           <a:bodyPr/>
           <a:lstStyle/>
           <a:p>
-            <a:pPr marL="285750" indent="-285750">
+            <a:pPr>
               <a:buFont typeface="Arial" panose="020B0604020202020204" pitchFamily="34" charset="0"/>
               <a:buChar char="•"/>
             </a:pPr>
@@ -12294,6 +12294,16 @@
               </a:rPr>
               <a:t>A1: High Availability &amp; Multi-Region Fleet (Level 0 Root Bullet)</a:t>
             </a:r>
+            <a:r>
+              <a:rPr sz="1200">
+                <a:solidFill>
+                  <a:srgbClr val="94A3B8"/>
+                </a:solidFill>
+                <a:latin typeface="+mn-lt"/>
+                <a:cs typeface="+mn-lt"/>
+              </a:rPr>
+              <a:t>↳ Shift+Enter: multi-line statement cleanly indented beneath the same bullet point without spawning an extra glyph.</a:t>
+            </a:r>
             <a:br>
               <a:rPr sz="1200">
                 <a:solidFill>
@@ -12303,19 +12313,9 @@
                 <a:cs typeface="+mn-lt"/>
               </a:rPr>
             </a:br>
-            <a:r>
-              <a:rPr sz="1200">
-                <a:solidFill>
-                  <a:srgbClr val="94A3B8"/>
-                </a:solidFill>
-                <a:latin typeface="+mn-lt"/>
-                <a:cs typeface="+mn-lt"/>
-              </a:rPr>
-              <a:t>↳ Shift+Enter: multi-line statement cleanly indented beneath the same bullet point without spawning an extra glyph.</a:t>
-            </a:r>
-          </a:p>
-          <a:p>
-            <a:pPr lvl="1" marL="742950" indent="-285750">
+          </a:p>
+          <a:p>
+            <a:pPr lvl="1">
               <a:buFont typeface="Arial" panose="020B0604020202020204" pitchFamily="34" charset="0"/>
               <a:buChar char="•"/>
             </a:pPr>
@@ -12329,6 +12329,16 @@
               </a:rPr>
               <a:t>B1: Anycast Edge Routing Layer with 300+ Global PoPs (Level 1 / Tab)</a:t>
             </a:r>
+            <a:r>
+              <a:rPr sz="1200">
+                <a:solidFill>
+                  <a:srgbClr val="94A3B8"/>
+                </a:solidFill>
+                <a:latin typeface="+mn-lt"/>
+                <a:cs typeface="+mn-lt"/>
+              </a:rPr>
+              <a:t>↳ Automatically inherits level 1 margin and hanging indent directly from the Slide Master without inline overrides.</a:t>
+            </a:r>
             <a:br>
               <a:rPr sz="1200">
                 <a:solidFill>
@@ -12338,19 +12348,9 @@
                 <a:cs typeface="+mn-lt"/>
               </a:rPr>
             </a:br>
-            <a:r>
-              <a:rPr sz="1200">
-                <a:solidFill>
-                  <a:srgbClr val="94A3B8"/>
-                </a:solidFill>
-                <a:latin typeface="+mn-lt"/>
-                <a:cs typeface="+mn-lt"/>
-              </a:rPr>
-              <a:t>↳ Automatically inherits level 1 margin and hanging indent directly from the Slide Master without inline overrides.</a:t>
-            </a:r>
-          </a:p>
-          <a:p>
-            <a:pPr lvl="2" marL="1200150" indent="-285750">
+          </a:p>
+          <a:p>
+            <a:pPr lvl="2">
               <a:buFont typeface="Arial" panose="020B0604020202020204" pitchFamily="34" charset="0"/>
               <a:buChar char="•"/>
             </a:pPr>
@@ -12364,6 +12364,16 @@
               </a:rPr>
               <a:t>C1: Zero-RTT TLS 1.3 Handshake &amp; Heuristic DDoS Protection (Level 2 / Tab Tab)</a:t>
             </a:r>
+            <a:r>
+              <a:rPr sz="1200">
+                <a:solidFill>
+                  <a:srgbClr val="94A3B8"/>
+                </a:solidFill>
+                <a:latin typeface="+mn-lt"/>
+                <a:cs typeface="+mn-lt"/>
+              </a:rPr>
+              <a:t>↳ P99 latency SLA: &lt; 1.2ms across all geographic regions with zero cold starts.</a:t>
+            </a:r>
             <a:br>
               <a:rPr sz="1200">
                 <a:solidFill>
@@ -12373,19 +12383,9 @@
                 <a:cs typeface="+mn-lt"/>
               </a:rPr>
             </a:br>
-            <a:r>
-              <a:rPr sz="1200">
-                <a:solidFill>
-                  <a:srgbClr val="94A3B8"/>
-                </a:solidFill>
-                <a:latin typeface="+mn-lt"/>
-                <a:cs typeface="+mn-lt"/>
-              </a:rPr>
-              <a:t>↳ P99 latency SLA: &lt; 1.2ms across all geographic regions with zero cold starts.</a:t>
-            </a:r>
-          </a:p>
-          <a:p>
-            <a:pPr lvl="3" marL="1657350" indent="-285750">
+          </a:p>
+          <a:p>
+            <a:pPr lvl="3">
               <a:buFont typeface="Arial" panose="020B0604020202020204" pitchFamily="34" charset="0"/>
               <a:buChar char="•"/>
             </a:pPr>
@@ -12401,7 +12401,7 @@
             </a:r>
           </a:p>
           <a:p>
-            <a:pPr marL="285750" indent="-285750">
+            <a:pPr>
               <a:buFont typeface="Arial" panose="020B0604020202020204" pitchFamily="34" charset="0"/>
               <a:buChar char="•"/>
             </a:pPr>
@@ -12415,6 +12415,16 @@
               </a:rPr>
               <a:t>A2: Automated State &amp; Cache Synchronization (Level 0 / Shift+Tab)</a:t>
             </a:r>
+            <a:r>
+              <a:rPr sz="1200">
+                <a:solidFill>
+                  <a:srgbClr val="94A3B8"/>
+                </a:solidFill>
+                <a:latin typeface="+mn-lt"/>
+                <a:cs typeface="+mn-lt"/>
+              </a:rPr>
+              <a:t>↳ Shift+Tab returns seamlessly to the root bullet level, matching PowerPoint desktop editing behavior.</a:t>
+            </a:r>
             <a:br>
               <a:rPr sz="1200">
                 <a:solidFill>
@@ -12424,19 +12434,9 @@
                 <a:cs typeface="+mn-lt"/>
               </a:rPr>
             </a:br>
-            <a:r>
-              <a:rPr sz="1200">
-                <a:solidFill>
-                  <a:srgbClr val="94A3B8"/>
-                </a:solidFill>
-                <a:latin typeface="+mn-lt"/>
-                <a:cs typeface="+mn-lt"/>
-              </a:rPr>
-              <a:t>↳ Shift+Tab returns seamlessly to the root bullet level, matching PowerPoint desktop editing behavior.</a:t>
-            </a:r>
-          </a:p>
-          <a:p>
-            <a:pPr lvl="1" marL="742950" indent="-285750">
+          </a:p>
+          <a:p>
+            <a:pPr lvl="1">
               <a:buFont typeface="Arial" panose="020B0604020202020204" pitchFamily="34" charset="0"/>
               <a:buChar char="•"/>
             </a:pPr>
@@ -12675,7 +12675,7 @@
           <a:bodyPr/>
           <a:lstStyle/>
           <a:p>
-            <a:pPr marL="285750" indent="-285750">
+            <a:pPr>
               <a:buFont typeface="Arial" panose="020B0604020202020204" pitchFamily="34" charset="0"/>
               <a:buChar char="•"/>
             </a:pPr>
@@ -12704,6 +12704,16 @@
               </a:rPr>
               <a:t>↳ level: 1, bullet: false — Block explanation indented under Level 0</a:t>
             </a:r>
+            <a:r>
+              <a:rPr sz="1050">
+                <a:solidFill>
+                  <a:srgbClr val="64748B"/>
+                </a:solidFill>
+                <a:latin typeface="+mn-lt"/>
+                <a:cs typeface="+mn-lt"/>
+              </a:rPr>
+              <a:t>Maintains strict linearizable consistency across all state machine nodes.</a:t>
+            </a:r>
             <a:br>
               <a:rPr sz="1050">
                 <a:solidFill>
@@ -12713,16 +12723,6 @@
                 <a:cs typeface="+mn-lt"/>
               </a:rPr>
             </a:br>
-            <a:r>
-              <a:rPr sz="1050">
-                <a:solidFill>
-                  <a:srgbClr val="64748B"/>
-                </a:solidFill>
-                <a:latin typeface="+mn-lt"/>
-                <a:cs typeface="+mn-lt"/>
-              </a:rPr>
-              <a:t>Maintains strict linearizable consistency across all state machine nodes.</a:t>
-            </a:r>
           </a:p>
           <a:p>
             <a:pPr lvl="2">
@@ -12750,7 +12750,7 @@
             </a:r>
           </a:p>
           <a:p>
-            <a:pPr marL="285750" indent="-285750">
+            <a:pPr>
               <a:buFont typeface="Arial" panose="020B0604020202020204" pitchFamily="34" charset="0"/>
               <a:buChar char="•"/>
             </a:pPr>
@@ -12779,6 +12779,16 @@
               </a:rPr>
               <a:t>↳ level: 1, bullet: false — Block commentary (no bullet glyph)</a:t>
             </a:r>
+            <a:r>
+              <a:rPr sz="1050">
+                <a:solidFill>
+                  <a:srgbClr val="64748B"/>
+                </a:solidFill>
+                <a:latin typeface="+mn-lt"/>
+                <a:cs typeface="+mn-lt"/>
+              </a:rPr>
+              <a:t>Automatic failover orchestration with zero operational downtime.</a:t>
+            </a:r>
             <a:br>
               <a:rPr sz="1050">
                 <a:solidFill>
@@ -12788,16 +12798,6 @@
                 <a:cs typeface="+mn-lt"/>
               </a:rPr>
             </a:br>
-            <a:r>
-              <a:rPr sz="1050">
-                <a:solidFill>
-                  <a:srgbClr val="64748B"/>
-                </a:solidFill>
-                <a:latin typeface="+mn-lt"/>
-                <a:cs typeface="+mn-lt"/>
-              </a:rPr>
-              <a:t>Automatic failover orchestration with zero operational downtime.</a:t>
-            </a:r>
           </a:p>
           <a:p>
             <a:pPr lvl="2">

--- a/hokkyss_showcase_deck.pptx
+++ b/hokkyss_showcase_deck.pptx
@@ -1740,7 +1740,7 @@
 </file>
 
 <file path=ppt/notesSlides/notesSlide1.xml><?xml version="1.0" encoding="utf-8"?>
-<p:notes xmlns:a="http://schemas.openxmlformats.org/drawingml/2006/main" xmlns:r="http://schemas.openxmlformats.org/officeDocument/2006/relationships" xmlns:p="http://schemas.openxmlformats.org/presentationml/2006/main">
+<p:notes xmlns:a="http://schemas.openxmlformats.org/drawingml/2006/main" xmlns:p="http://schemas.openxmlformats.org/presentationml/2006/main" xmlns:r="http://schemas.openxmlformats.org/officeDocument/2006/relationships">
   <p:cSld>
     <p:spTree>
       <p:nvGrpSpPr>
@@ -1760,7 +1760,7 @@
         <p:nvSpPr>
           <p:cNvPr id="2" name="Slide Image Placeholder 1"/>
           <p:cNvSpPr>
-            <a:spLocks noGrp="1" noRot="1" noChangeAspect="1"/>
+            <a:spLocks noChangeAspect="1" noGrp="1" noRot="1"/>
           </p:cNvSpPr>
           <p:nvPr>
             <p:ph type="sldImg"/>
@@ -1775,7 +1775,7 @@
             <a:spLocks noGrp="1"/>
           </p:cNvSpPr>
           <p:nvPr>
-            <p:ph type="body" idx="1"/>
+            <p:ph idx="1" type="body"/>
           </p:nvPr>
         </p:nvSpPr>
         <p:spPr/>
@@ -1920,7 +1920,7 @@
 </file>
 
 <file path=ppt/notesSlides/notesSlide10.xml><?xml version="1.0" encoding="utf-8"?>
-<p:notes xmlns:a="http://schemas.openxmlformats.org/drawingml/2006/main" xmlns:r="http://schemas.openxmlformats.org/officeDocument/2006/relationships" xmlns:p="http://schemas.openxmlformats.org/presentationml/2006/main">
+<p:notes xmlns:a="http://schemas.openxmlformats.org/drawingml/2006/main" xmlns:p="http://schemas.openxmlformats.org/presentationml/2006/main" xmlns:r="http://schemas.openxmlformats.org/officeDocument/2006/relationships">
   <p:cSld>
     <p:spTree>
       <p:nvGrpSpPr>
@@ -1940,7 +1940,7 @@
         <p:nvSpPr>
           <p:cNvPr id="2" name="Slide Image Placeholder 1"/>
           <p:cNvSpPr>
-            <a:spLocks noGrp="1" noRot="1" noChangeAspect="1"/>
+            <a:spLocks noChangeAspect="1" noGrp="1" noRot="1"/>
           </p:cNvSpPr>
           <p:nvPr>
             <p:ph type="sldImg"/>
@@ -1955,7 +1955,7 @@
             <a:spLocks noGrp="1"/>
           </p:cNvSpPr>
           <p:nvPr>
-            <p:ph type="body" idx="1"/>
+            <p:ph idx="1" type="body"/>
           </p:nvPr>
         </p:nvSpPr>
         <p:spPr/>
@@ -2026,7 +2026,7 @@
 </file>
 
 <file path=ppt/notesSlides/notesSlide2.xml><?xml version="1.0" encoding="utf-8"?>
-<p:notes xmlns:a="http://schemas.openxmlformats.org/drawingml/2006/main" xmlns:r="http://schemas.openxmlformats.org/officeDocument/2006/relationships" xmlns:p="http://schemas.openxmlformats.org/presentationml/2006/main">
+<p:notes xmlns:a="http://schemas.openxmlformats.org/drawingml/2006/main" xmlns:p="http://schemas.openxmlformats.org/presentationml/2006/main" xmlns:r="http://schemas.openxmlformats.org/officeDocument/2006/relationships">
   <p:cSld>
     <p:spTree>
       <p:nvGrpSpPr>
@@ -2046,7 +2046,7 @@
         <p:nvSpPr>
           <p:cNvPr id="2" name="Slide Image Placeholder 1"/>
           <p:cNvSpPr>
-            <a:spLocks noGrp="1" noRot="1" noChangeAspect="1"/>
+            <a:spLocks noChangeAspect="1" noGrp="1" noRot="1"/>
           </p:cNvSpPr>
           <p:nvPr>
             <p:ph type="sldImg"/>
@@ -2061,7 +2061,7 @@
             <a:spLocks noGrp="1"/>
           </p:cNvSpPr>
           <p:nvPr>
-            <p:ph type="body" idx="1"/>
+            <p:ph idx="1" type="body"/>
           </p:nvPr>
         </p:nvSpPr>
         <p:spPr/>
@@ -2120,7 +2120,7 @@
 </file>
 
 <file path=ppt/notesSlides/notesSlide3.xml><?xml version="1.0" encoding="utf-8"?>
-<p:notes xmlns:a="http://schemas.openxmlformats.org/drawingml/2006/main" xmlns:r="http://schemas.openxmlformats.org/officeDocument/2006/relationships" xmlns:p="http://schemas.openxmlformats.org/presentationml/2006/main">
+<p:notes xmlns:a="http://schemas.openxmlformats.org/drawingml/2006/main" xmlns:p="http://schemas.openxmlformats.org/presentationml/2006/main" xmlns:r="http://schemas.openxmlformats.org/officeDocument/2006/relationships">
   <p:cSld>
     <p:spTree>
       <p:nvGrpSpPr>
@@ -2140,7 +2140,7 @@
         <p:nvSpPr>
           <p:cNvPr id="2" name="Slide Image Placeholder 1"/>
           <p:cNvSpPr>
-            <a:spLocks noGrp="1" noRot="1" noChangeAspect="1"/>
+            <a:spLocks noChangeAspect="1" noGrp="1" noRot="1"/>
           </p:cNvSpPr>
           <p:nvPr>
             <p:ph type="sldImg"/>
@@ -2155,7 +2155,7 @@
             <a:spLocks noGrp="1"/>
           </p:cNvSpPr>
           <p:nvPr>
-            <p:ph type="body" idx="1"/>
+            <p:ph idx="1" type="body"/>
           </p:nvPr>
         </p:nvSpPr>
         <p:spPr/>
@@ -2255,7 +2255,7 @@
 </file>
 
 <file path=ppt/notesSlides/notesSlide4.xml><?xml version="1.0" encoding="utf-8"?>
-<p:notes xmlns:a="http://schemas.openxmlformats.org/drawingml/2006/main" xmlns:r="http://schemas.openxmlformats.org/officeDocument/2006/relationships" xmlns:p="http://schemas.openxmlformats.org/presentationml/2006/main">
+<p:notes xmlns:a="http://schemas.openxmlformats.org/drawingml/2006/main" xmlns:p="http://schemas.openxmlformats.org/presentationml/2006/main" xmlns:r="http://schemas.openxmlformats.org/officeDocument/2006/relationships">
   <p:cSld>
     <p:spTree>
       <p:nvGrpSpPr>
@@ -2275,7 +2275,7 @@
         <p:nvSpPr>
           <p:cNvPr id="2" name="Slide Image Placeholder 1"/>
           <p:cNvSpPr>
-            <a:spLocks noGrp="1" noRot="1" noChangeAspect="1"/>
+            <a:spLocks noChangeAspect="1" noGrp="1" noRot="1"/>
           </p:cNvSpPr>
           <p:nvPr>
             <p:ph type="sldImg"/>
@@ -2290,7 +2290,7 @@
             <a:spLocks noGrp="1"/>
           </p:cNvSpPr>
           <p:nvPr>
-            <p:ph type="body" idx="1"/>
+            <p:ph idx="1" type="body"/>
           </p:nvPr>
         </p:nvSpPr>
         <p:spPr/>
@@ -2349,7 +2349,7 @@
 </file>
 
 <file path=ppt/notesSlides/notesSlide5.xml><?xml version="1.0" encoding="utf-8"?>
-<p:notes xmlns:a="http://schemas.openxmlformats.org/drawingml/2006/main" xmlns:r="http://schemas.openxmlformats.org/officeDocument/2006/relationships" xmlns:p="http://schemas.openxmlformats.org/presentationml/2006/main">
+<p:notes xmlns:a="http://schemas.openxmlformats.org/drawingml/2006/main" xmlns:p="http://schemas.openxmlformats.org/presentationml/2006/main" xmlns:r="http://schemas.openxmlformats.org/officeDocument/2006/relationships">
   <p:cSld>
     <p:spTree>
       <p:nvGrpSpPr>
@@ -2369,7 +2369,7 @@
         <p:nvSpPr>
           <p:cNvPr id="2" name="Slide Image Placeholder 1"/>
           <p:cNvSpPr>
-            <a:spLocks noGrp="1" noRot="1" noChangeAspect="1"/>
+            <a:spLocks noChangeAspect="1" noGrp="1" noRot="1"/>
           </p:cNvSpPr>
           <p:nvPr>
             <p:ph type="sldImg"/>
@@ -2384,7 +2384,7 @@
             <a:spLocks noGrp="1"/>
           </p:cNvSpPr>
           <p:nvPr>
-            <p:ph type="body" idx="1"/>
+            <p:ph idx="1" type="body"/>
           </p:nvPr>
         </p:nvSpPr>
         <p:spPr/>
@@ -2455,7 +2455,7 @@
 </file>
 
 <file path=ppt/notesSlides/notesSlide6.xml><?xml version="1.0" encoding="utf-8"?>
-<p:notes xmlns:a="http://schemas.openxmlformats.org/drawingml/2006/main" xmlns:r="http://schemas.openxmlformats.org/officeDocument/2006/relationships" xmlns:p="http://schemas.openxmlformats.org/presentationml/2006/main">
+<p:notes xmlns:a="http://schemas.openxmlformats.org/drawingml/2006/main" xmlns:p="http://schemas.openxmlformats.org/presentationml/2006/main" xmlns:r="http://schemas.openxmlformats.org/officeDocument/2006/relationships">
   <p:cSld>
     <p:spTree>
       <p:nvGrpSpPr>
@@ -2475,7 +2475,7 @@
         <p:nvSpPr>
           <p:cNvPr id="2" name="Slide Image Placeholder 1"/>
           <p:cNvSpPr>
-            <a:spLocks noGrp="1" noRot="1" noChangeAspect="1"/>
+            <a:spLocks noChangeAspect="1" noGrp="1" noRot="1"/>
           </p:cNvSpPr>
           <p:nvPr>
             <p:ph type="sldImg"/>
@@ -2490,7 +2490,7 @@
             <a:spLocks noGrp="1"/>
           </p:cNvSpPr>
           <p:nvPr>
-            <p:ph type="body" idx="1"/>
+            <p:ph idx="1" type="body"/>
           </p:nvPr>
         </p:nvSpPr>
         <p:spPr/>
@@ -2561,7 +2561,7 @@
 </file>
 
 <file path=ppt/notesSlides/notesSlide7.xml><?xml version="1.0" encoding="utf-8"?>
-<p:notes xmlns:a="http://schemas.openxmlformats.org/drawingml/2006/main" xmlns:r="http://schemas.openxmlformats.org/officeDocument/2006/relationships" xmlns:p="http://schemas.openxmlformats.org/presentationml/2006/main">
+<p:notes xmlns:a="http://schemas.openxmlformats.org/drawingml/2006/main" xmlns:p="http://schemas.openxmlformats.org/presentationml/2006/main" xmlns:r="http://schemas.openxmlformats.org/officeDocument/2006/relationships">
   <p:cSld>
     <p:spTree>
       <p:nvGrpSpPr>
@@ -2581,7 +2581,7 @@
         <p:nvSpPr>
           <p:cNvPr id="2" name="Slide Image Placeholder 1"/>
           <p:cNvSpPr>
-            <a:spLocks noGrp="1" noRot="1" noChangeAspect="1"/>
+            <a:spLocks noChangeAspect="1" noGrp="1" noRot="1"/>
           </p:cNvSpPr>
           <p:nvPr>
             <p:ph type="sldImg"/>
@@ -2596,7 +2596,7 @@
             <a:spLocks noGrp="1"/>
           </p:cNvSpPr>
           <p:nvPr>
-            <p:ph type="body" idx="1"/>
+            <p:ph idx="1" type="body"/>
           </p:nvPr>
         </p:nvSpPr>
         <p:spPr/>
@@ -2667,7 +2667,7 @@
 </file>
 
 <file path=ppt/notesSlides/notesSlide8.xml><?xml version="1.0" encoding="utf-8"?>
-<p:notes xmlns:a="http://schemas.openxmlformats.org/drawingml/2006/main" xmlns:r="http://schemas.openxmlformats.org/officeDocument/2006/relationships" xmlns:p="http://schemas.openxmlformats.org/presentationml/2006/main">
+<p:notes xmlns:a="http://schemas.openxmlformats.org/drawingml/2006/main" xmlns:p="http://schemas.openxmlformats.org/presentationml/2006/main" xmlns:r="http://schemas.openxmlformats.org/officeDocument/2006/relationships">
   <p:cSld>
     <p:spTree>
       <p:nvGrpSpPr>
@@ -2687,7 +2687,7 @@
         <p:nvSpPr>
           <p:cNvPr id="2" name="Slide Image Placeholder 1"/>
           <p:cNvSpPr>
-            <a:spLocks noGrp="1" noRot="1" noChangeAspect="1"/>
+            <a:spLocks noChangeAspect="1" noGrp="1" noRot="1"/>
           </p:cNvSpPr>
           <p:nvPr>
             <p:ph type="sldImg"/>
@@ -2702,7 +2702,7 @@
             <a:spLocks noGrp="1"/>
           </p:cNvSpPr>
           <p:nvPr>
-            <p:ph type="body" idx="1"/>
+            <p:ph idx="1" type="body"/>
           </p:nvPr>
         </p:nvSpPr>
         <p:spPr/>
@@ -2773,7 +2773,7 @@
 </file>
 
 <file path=ppt/notesSlides/notesSlide9.xml><?xml version="1.0" encoding="utf-8"?>
-<p:notes xmlns:a="http://schemas.openxmlformats.org/drawingml/2006/main" xmlns:r="http://schemas.openxmlformats.org/officeDocument/2006/relationships" xmlns:p="http://schemas.openxmlformats.org/presentationml/2006/main">
+<p:notes xmlns:a="http://schemas.openxmlformats.org/drawingml/2006/main" xmlns:p="http://schemas.openxmlformats.org/presentationml/2006/main" xmlns:r="http://schemas.openxmlformats.org/officeDocument/2006/relationships">
   <p:cSld>
     <p:spTree>
       <p:nvGrpSpPr>
@@ -2793,7 +2793,7 @@
         <p:nvSpPr>
           <p:cNvPr id="2" name="Slide Image Placeholder 1"/>
           <p:cNvSpPr>
-            <a:spLocks noGrp="1" noRot="1" noChangeAspect="1"/>
+            <a:spLocks noChangeAspect="1" noGrp="1" noRot="1"/>
           </p:cNvSpPr>
           <p:nvPr>
             <p:ph type="sldImg"/>
@@ -2808,7 +2808,7 @@
             <a:spLocks noGrp="1"/>
           </p:cNvSpPr>
           <p:nvPr>
-            <p:ph type="body" idx="1"/>
+            <p:ph idx="1" type="body"/>
           </p:nvPr>
         </p:nvSpPr>
         <p:spPr/>
@@ -2981,7 +2981,7 @@
 </file>
 
 <file path=ppt/slides/slide1.xml><?xml version="1.0" encoding="utf-8"?>
-<p:sld xmlns:a="http://schemas.openxmlformats.org/drawingml/2006/main" xmlns:r="http://schemas.openxmlformats.org/officeDocument/2006/relationships" xmlns:p="http://schemas.openxmlformats.org/presentationml/2006/main">
+<p:sld xmlns:a="http://schemas.openxmlformats.org/drawingml/2006/main" xmlns:p="http://schemas.openxmlformats.org/presentationml/2006/main" xmlns:r="http://schemas.openxmlformats.org/officeDocument/2006/relationships">
   <p:cSld>
     <p:bg>
       <p:bgPr>
@@ -3362,7 +3362,7 @@
 </file>
 
 <file path=ppt/slides/slide10.xml><?xml version="1.0" encoding="utf-8"?>
-<p:sld xmlns:a="http://schemas.openxmlformats.org/drawingml/2006/main" xmlns:r="http://schemas.openxmlformats.org/officeDocument/2006/relationships" xmlns:p="http://schemas.openxmlformats.org/presentationml/2006/main">
+<p:sld xmlns:a="http://schemas.openxmlformats.org/drawingml/2006/main" xmlns:p="http://schemas.openxmlformats.org/presentationml/2006/main" xmlns:r="http://schemas.openxmlformats.org/officeDocument/2006/relationships">
   <p:cSld>
     <p:bg>
       <p:bgPr>
@@ -3523,6 +3523,22 @@
           </a:p>
         </p:txBody>
       </p:sp>
+      <p:graphicFrame>
+        <p:nvGraphicFramePr>
+          <p:cNvPr id="6" name="Chart 5"/>
+          <p:cNvGraphicFramePr/>
+          <p:nvPr/>
+        </p:nvGraphicFramePr>
+        <p:xfrm>
+          <a:off x="1097280" y="2377440"/>
+          <a:ext cx="2926080" cy="3291840"/>
+        </p:xfrm>
+        <a:graphic>
+          <a:graphicData uri="http://schemas.openxmlformats.org/drawingml/2006/chart">
+            <c:chart xmlns:c="http://schemas.openxmlformats.org/drawingml/2006/chart" xmlns:r="http://schemas.openxmlformats.org/officeDocument/2006/relationships" r:id="rId2"/>
+          </a:graphicData>
+        </a:graphic>
+      </p:graphicFrame>
       <p:sp>
         <p:nvSpPr>
           <p:cNvPr id="7" name="roundRect 6"/>
@@ -3594,6 +3610,22 @@
           </a:p>
         </p:txBody>
       </p:sp>
+      <p:graphicFrame>
+        <p:nvGraphicFramePr>
+          <p:cNvPr id="9" name="Chart 8"/>
+          <p:cNvGraphicFramePr/>
+          <p:nvPr/>
+        </p:nvGraphicFramePr>
+        <p:xfrm>
+          <a:off x="4626864" y="2377440"/>
+          <a:ext cx="2926080" cy="3291840"/>
+        </p:xfrm>
+        <a:graphic>
+          <a:graphicData uri="http://schemas.openxmlformats.org/drawingml/2006/chart">
+            <c:chart xmlns:c="http://schemas.openxmlformats.org/drawingml/2006/chart" xmlns:r="http://schemas.openxmlformats.org/officeDocument/2006/relationships" r:id="rId3"/>
+          </a:graphicData>
+        </a:graphic>
+      </p:graphicFrame>
       <p:sp>
         <p:nvSpPr>
           <p:cNvPr id="10" name="roundRect 9"/>
@@ -3665,71 +3697,6 @@
           </a:p>
         </p:txBody>
       </p:sp>
-      <p:sp>
-        <p:nvSpPr>
-          <p:cNvPr id="13" name="Text Box 12"/>
-          <p:cNvSpPr/>
-          <p:nvPr/>
-        </p:nvSpPr>
-        <p:spPr>
-          <a:xfrm>
-            <a:off x="731520" y="6510528"/>
-            <a:ext cx="10725912" cy="228600"/>
-          </a:xfrm>
-          <a:prstGeom prst="rect">
-            <a:avLst/>
-          </a:prstGeom>
-        </p:spPr>
-        <p:txBody>
-          <a:bodyPr anchor="t"/>
-          <a:lstStyle/>
-          <a:p>
-            <a:pPr algn="ctr"/>
-            <a:r>
-              <a:rPr i="1" sz="800">
-                <a:solidFill>
-                  <a:srgbClr val="94A3B8"/>
-                </a:solidFill>
-                <a:latin typeface="+mn-lt"/>
-                <a:cs typeface="+mn-lt"/>
-              </a:rPr>
-              <a:t>* Disclaimer: All benchmark metrics, performance figures, and simulated architectures in this deck are synthetic demonstration values generated solely to showcase the authoring, formatting, and rendering capabilities of @hokkyss/pptx.</a:t>
-            </a:r>
-          </a:p>
-        </p:txBody>
-      </p:sp>
-      <p:graphicFrame>
-        <p:nvGraphicFramePr>
-          <p:cNvPr id="6" name="Chart 5"/>
-          <p:cNvGraphicFramePr/>
-          <p:nvPr/>
-        </p:nvGraphicFramePr>
-        <p:xfrm>
-          <a:off x="1097280" y="2377440"/>
-          <a:ext cx="2926080" cy="3291840"/>
-        </p:xfrm>
-        <a:graphic>
-          <a:graphicData uri="http://schemas.openxmlformats.org/drawingml/2006/chart">
-            <c:chart xmlns:c="http://schemas.openxmlformats.org/drawingml/2006/chart" xmlns:r="http://schemas.openxmlformats.org/officeDocument/2006/relationships" r:id="rId2"/>
-          </a:graphicData>
-        </a:graphic>
-      </p:graphicFrame>
-      <p:graphicFrame>
-        <p:nvGraphicFramePr>
-          <p:cNvPr id="9" name="Chart 8"/>
-          <p:cNvGraphicFramePr/>
-          <p:nvPr/>
-        </p:nvGraphicFramePr>
-        <p:xfrm>
-          <a:off x="4626864" y="2377440"/>
-          <a:ext cx="2926080" cy="3291840"/>
-        </p:xfrm>
-        <a:graphic>
-          <a:graphicData uri="http://schemas.openxmlformats.org/drawingml/2006/chart">
-            <c:chart xmlns:c="http://schemas.openxmlformats.org/drawingml/2006/chart" xmlns:r="http://schemas.openxmlformats.org/officeDocument/2006/relationships" r:id="rId3"/>
-          </a:graphicData>
-        </a:graphic>
-      </p:graphicFrame>
       <p:graphicFrame>
         <p:nvGraphicFramePr>
           <p:cNvPr id="12" name="Chart 11"/>
@@ -3746,6 +3713,39 @@
           </a:graphicData>
         </a:graphic>
       </p:graphicFrame>
+      <p:sp>
+        <p:nvSpPr>
+          <p:cNvPr id="13" name="Text Box 12"/>
+          <p:cNvSpPr/>
+          <p:nvPr/>
+        </p:nvSpPr>
+        <p:spPr>
+          <a:xfrm>
+            <a:off x="731520" y="6510528"/>
+            <a:ext cx="10725912" cy="228600"/>
+          </a:xfrm>
+          <a:prstGeom prst="rect">
+            <a:avLst/>
+          </a:prstGeom>
+        </p:spPr>
+        <p:txBody>
+          <a:bodyPr anchor="t"/>
+          <a:lstStyle/>
+          <a:p>
+            <a:pPr algn="ctr"/>
+            <a:r>
+              <a:rPr i="1" sz="800">
+                <a:solidFill>
+                  <a:srgbClr val="94A3B8"/>
+                </a:solidFill>
+                <a:latin typeface="+mn-lt"/>
+                <a:cs typeface="+mn-lt"/>
+              </a:rPr>
+              <a:t>* Disclaimer: All benchmark metrics, performance figures, and simulated architectures in this deck are synthetic demonstration values generated solely to showcase the authoring, formatting, and rendering capabilities of @hokkyss/pptx.</a:t>
+            </a:r>
+          </a:p>
+        </p:txBody>
+      </p:sp>
     </p:spTree>
   </p:cSld>
   <p:clrMapOvr>
@@ -3758,7 +3758,7 @@
 </file>
 
 <file path=ppt/slides/slide11.xml><?xml version="1.0" encoding="utf-8"?>
-<p:sld xmlns:a="http://schemas.openxmlformats.org/drawingml/2006/main" xmlns:r="http://schemas.openxmlformats.org/officeDocument/2006/relationships" xmlns:p="http://schemas.openxmlformats.org/presentationml/2006/main">
+<p:sld xmlns:a="http://schemas.openxmlformats.org/drawingml/2006/main" xmlns:p="http://schemas.openxmlformats.org/presentationml/2006/main" xmlns:r="http://schemas.openxmlformats.org/officeDocument/2006/relationships">
   <p:cSld>
     <p:bg>
       <p:bgPr>
@@ -3919,6 +3919,22 @@
           </a:p>
         </p:txBody>
       </p:sp>
+      <p:graphicFrame>
+        <p:nvGraphicFramePr>
+          <p:cNvPr id="6" name="Chart 5"/>
+          <p:cNvGraphicFramePr/>
+          <p:nvPr/>
+        </p:nvGraphicFramePr>
+        <p:xfrm>
+          <a:off x="1097280" y="2377440"/>
+          <a:ext cx="2926080" cy="3291840"/>
+        </p:xfrm>
+        <a:graphic>
+          <a:graphicData uri="http://schemas.openxmlformats.org/drawingml/2006/chart">
+            <c:chart xmlns:c="http://schemas.openxmlformats.org/drawingml/2006/chart" xmlns:r="http://schemas.openxmlformats.org/officeDocument/2006/relationships" r:id="rId2"/>
+          </a:graphicData>
+        </a:graphic>
+      </p:graphicFrame>
       <p:sp>
         <p:nvSpPr>
           <p:cNvPr id="7" name="roundRect 6"/>
@@ -3990,6 +4006,22 @@
           </a:p>
         </p:txBody>
       </p:sp>
+      <p:graphicFrame>
+        <p:nvGraphicFramePr>
+          <p:cNvPr id="9" name="Chart 8"/>
+          <p:cNvGraphicFramePr/>
+          <p:nvPr/>
+        </p:nvGraphicFramePr>
+        <p:xfrm>
+          <a:off x="4626864" y="2377440"/>
+          <a:ext cx="2926080" cy="3291840"/>
+        </p:xfrm>
+        <a:graphic>
+          <a:graphicData uri="http://schemas.openxmlformats.org/drawingml/2006/chart">
+            <c:chart xmlns:c="http://schemas.openxmlformats.org/drawingml/2006/chart" xmlns:r="http://schemas.openxmlformats.org/officeDocument/2006/relationships" r:id="rId3"/>
+          </a:graphicData>
+        </a:graphic>
+      </p:graphicFrame>
       <p:sp>
         <p:nvSpPr>
           <p:cNvPr id="10" name="roundRect 9"/>
@@ -4061,71 +4093,6 @@
           </a:p>
         </p:txBody>
       </p:sp>
-      <p:sp>
-        <p:nvSpPr>
-          <p:cNvPr id="13" name="Text Box 12"/>
-          <p:cNvSpPr/>
-          <p:nvPr/>
-        </p:nvSpPr>
-        <p:spPr>
-          <a:xfrm>
-            <a:off x="731520" y="6510528"/>
-            <a:ext cx="10725912" cy="228600"/>
-          </a:xfrm>
-          <a:prstGeom prst="rect">
-            <a:avLst/>
-          </a:prstGeom>
-        </p:spPr>
-        <p:txBody>
-          <a:bodyPr anchor="t"/>
-          <a:lstStyle/>
-          <a:p>
-            <a:pPr algn="ctr"/>
-            <a:r>
-              <a:rPr i="1" sz="800">
-                <a:solidFill>
-                  <a:srgbClr val="64748B"/>
-                </a:solidFill>
-                <a:latin typeface="+mn-lt"/>
-                <a:cs typeface="+mn-lt"/>
-              </a:rPr>
-              <a:t>* Disclaimer: All benchmark metrics, performance figures, and simulated architectures in this deck are synthetic demonstration values generated solely to showcase the authoring, formatting, and rendering capabilities of @hokkyss/pptx.</a:t>
-            </a:r>
-          </a:p>
-        </p:txBody>
-      </p:sp>
-      <p:graphicFrame>
-        <p:nvGraphicFramePr>
-          <p:cNvPr id="6" name="Chart 5"/>
-          <p:cNvGraphicFramePr/>
-          <p:nvPr/>
-        </p:nvGraphicFramePr>
-        <p:xfrm>
-          <a:off x="1097280" y="2377440"/>
-          <a:ext cx="2926080" cy="3291840"/>
-        </p:xfrm>
-        <a:graphic>
-          <a:graphicData uri="http://schemas.openxmlformats.org/drawingml/2006/chart">
-            <c:chart xmlns:c="http://schemas.openxmlformats.org/drawingml/2006/chart" xmlns:r="http://schemas.openxmlformats.org/officeDocument/2006/relationships" r:id="rId2"/>
-          </a:graphicData>
-        </a:graphic>
-      </p:graphicFrame>
-      <p:graphicFrame>
-        <p:nvGraphicFramePr>
-          <p:cNvPr id="9" name="Chart 8"/>
-          <p:cNvGraphicFramePr/>
-          <p:nvPr/>
-        </p:nvGraphicFramePr>
-        <p:xfrm>
-          <a:off x="4626864" y="2377440"/>
-          <a:ext cx="2926080" cy="3291840"/>
-        </p:xfrm>
-        <a:graphic>
-          <a:graphicData uri="http://schemas.openxmlformats.org/drawingml/2006/chart">
-            <c:chart xmlns:c="http://schemas.openxmlformats.org/drawingml/2006/chart" xmlns:r="http://schemas.openxmlformats.org/officeDocument/2006/relationships" r:id="rId3"/>
-          </a:graphicData>
-        </a:graphic>
-      </p:graphicFrame>
       <p:graphicFrame>
         <p:nvGraphicFramePr>
           <p:cNvPr id="12" name="Chart 11"/>
@@ -4142,6 +4109,39 @@
           </a:graphicData>
         </a:graphic>
       </p:graphicFrame>
+      <p:sp>
+        <p:nvSpPr>
+          <p:cNvPr id="13" name="Text Box 12"/>
+          <p:cNvSpPr/>
+          <p:nvPr/>
+        </p:nvSpPr>
+        <p:spPr>
+          <a:xfrm>
+            <a:off x="731520" y="6510528"/>
+            <a:ext cx="10725912" cy="228600"/>
+          </a:xfrm>
+          <a:prstGeom prst="rect">
+            <a:avLst/>
+          </a:prstGeom>
+        </p:spPr>
+        <p:txBody>
+          <a:bodyPr anchor="t"/>
+          <a:lstStyle/>
+          <a:p>
+            <a:pPr algn="ctr"/>
+            <a:r>
+              <a:rPr i="1" sz="800">
+                <a:solidFill>
+                  <a:srgbClr val="64748B"/>
+                </a:solidFill>
+                <a:latin typeface="+mn-lt"/>
+                <a:cs typeface="+mn-lt"/>
+              </a:rPr>
+              <a:t>* Disclaimer: All benchmark metrics, performance figures, and simulated architectures in this deck are synthetic demonstration values generated solely to showcase the authoring, formatting, and rendering capabilities of @hokkyss/pptx.</a:t>
+            </a:r>
+          </a:p>
+        </p:txBody>
+      </p:sp>
     </p:spTree>
   </p:cSld>
   <p:clrMapOvr>
@@ -4154,7 +4154,7 @@
 </file>
 
 <file path=ppt/slides/slide12.xml><?xml version="1.0" encoding="utf-8"?>
-<p:sld xmlns:a="http://schemas.openxmlformats.org/drawingml/2006/main" xmlns:r="http://schemas.openxmlformats.org/officeDocument/2006/relationships" xmlns:p="http://schemas.openxmlformats.org/presentationml/2006/main">
+<p:sld xmlns:a="http://schemas.openxmlformats.org/drawingml/2006/main" xmlns:p="http://schemas.openxmlformats.org/presentationml/2006/main" xmlns:r="http://schemas.openxmlformats.org/officeDocument/2006/relationships">
   <p:cSld>
     <p:bg>
       <p:bgPr>
@@ -5048,7 +5048,7 @@
 </file>
 
 <file path=ppt/slides/slide13.xml><?xml version="1.0" encoding="utf-8"?>
-<p:sld xmlns:a="http://schemas.openxmlformats.org/drawingml/2006/main" xmlns:r="http://schemas.openxmlformats.org/officeDocument/2006/relationships" xmlns:p="http://schemas.openxmlformats.org/presentationml/2006/main">
+<p:sld xmlns:a="http://schemas.openxmlformats.org/drawingml/2006/main" xmlns:p="http://schemas.openxmlformats.org/presentationml/2006/main" xmlns:r="http://schemas.openxmlformats.org/officeDocument/2006/relationships">
   <p:cSld>
     <p:bg>
       <p:bgPr>
@@ -5915,7 +5915,7 @@
 </file>
 
 <file path=ppt/slides/slide14.xml><?xml version="1.0" encoding="utf-8"?>
-<p:sld xmlns:a="http://schemas.openxmlformats.org/drawingml/2006/main" xmlns:r="http://schemas.openxmlformats.org/officeDocument/2006/relationships" xmlns:p="http://schemas.openxmlformats.org/presentationml/2006/main">
+<p:sld xmlns:a="http://schemas.openxmlformats.org/drawingml/2006/main" xmlns:p="http://schemas.openxmlformats.org/presentationml/2006/main" xmlns:r="http://schemas.openxmlformats.org/officeDocument/2006/relationships">
   <p:cSld>
     <p:bg>
       <p:bgPr>
@@ -6072,160 +6072,6 @@
                 <a:cs typeface="+mn-lt"/>
               </a:rPr>
               <a:t>⚡ Throughput &amp; Latency Benchmarks (Vitest)</a:t>
-            </a:r>
-          </a:p>
-        </p:txBody>
-      </p:sp>
-      <p:sp>
-        <p:nvSpPr>
-          <p:cNvPr id="7" name="roundRect 6"/>
-          <p:cNvSpPr/>
-          <p:nvPr/>
-        </p:nvSpPr>
-        <p:spPr>
-          <a:xfrm>
-            <a:off x="6217920" y="1828800"/>
-            <a:ext cx="5212080" cy="4480560"/>
-          </a:xfrm>
-          <a:prstGeom prst="roundRect">
-            <a:avLst/>
-          </a:prstGeom>
-          <a:solidFill>
-            <a:srgbClr val="1E293B"/>
-          </a:solidFill>
-          <a:ln w="13716">
-            <a:solidFill>
-              <a:srgbClr val="334155"/>
-            </a:solidFill>
-          </a:ln>
-          <a:effectLst>
-            <a:outerShdw blurRad="109728" dist="38100" dir="5400000">
-              <a:srgbClr val="000000">
-                <a:alpha val="30000"/>
-              </a:srgbClr>
-            </a:outerShdw>
-          </a:effectLst>
-        </p:spPr>
-        <p:txBody>
-          <a:bodyPr/>
-          <a:lstStyle/>
-          <a:p>
-            <a:endParaRPr/>
-          </a:p>
-        </p:txBody>
-      </p:sp>
-      <p:sp>
-        <p:nvSpPr>
-          <p:cNvPr id="8" name="Text Box 7"/>
-          <p:cNvSpPr/>
-          <p:nvPr/>
-        </p:nvSpPr>
-        <p:spPr>
-          <a:xfrm>
-            <a:off x="6400800" y="2011680"/>
-            <a:ext cx="4846320" cy="320040"/>
-          </a:xfrm>
-          <a:prstGeom prst="rect">
-            <a:avLst/>
-          </a:prstGeom>
-        </p:spPr>
-        <p:txBody>
-          <a:bodyPr anchor="t"/>
-          <a:lstStyle/>
-          <a:p>
-            <a:pPr algn="l"/>
-            <a:r>
-              <a:rPr b="1" sz="1300">
-                <a:solidFill>
-                  <a:srgbClr val="FFFFFF"/>
-                </a:solidFill>
-                <a:latin typeface="+mn-lt"/>
-                <a:cs typeface="+mn-lt"/>
-              </a:rPr>
-              <a:t>📦 Monorepo Gzip &amp; Brotli Footprint (Bundlephobia-Aligned)</a:t>
-            </a:r>
-          </a:p>
-        </p:txBody>
-      </p:sp>
-      <p:sp>
-        <p:nvSpPr>
-          <p:cNvPr id="10" name="roundRect 9">
-            <a:hlinkClick r:id="rId3" tooltip="Return to Hyperlinks Hub (Slide 12)" action="ppaction://hlinksldjump"/>
-          </p:cNvPr>
-          <p:cNvSpPr/>
-          <p:nvPr/>
-        </p:nvSpPr>
-        <p:spPr>
-          <a:xfrm>
-            <a:off x="9144000" y="731520"/>
-            <a:ext cx="2194560" cy="411480"/>
-          </a:xfrm>
-          <a:prstGeom prst="roundRect">
-            <a:avLst/>
-          </a:prstGeom>
-          <a:solidFill>
-            <a:srgbClr val="0284C7"/>
-          </a:solidFill>
-          <a:ln w="13716">
-            <a:solidFill>
-              <a:srgbClr val="38BDF8"/>
-            </a:solidFill>
-          </a:ln>
-          <a:effectLst>
-            <a:outerShdw blurRad="137160" dist="27432" dir="5400000">
-              <a:srgbClr val="0284C7">
-                <a:alpha val="30000"/>
-              </a:srgbClr>
-            </a:outerShdw>
-          </a:effectLst>
-        </p:spPr>
-        <p:txBody>
-          <a:bodyPr anchor="t"/>
-          <a:lstStyle/>
-          <a:p>
-            <a:pPr algn="ctr"/>
-            <a:r>
-              <a:rPr b="1" sz="1000">
-                <a:solidFill>
-                  <a:srgbClr val="FFFFFF"/>
-                </a:solidFill>
-                <a:latin typeface="+mn-lt"/>
-                <a:cs typeface="+mn-lt"/>
-              </a:rPr>
-              <a:t>⬅ Back to Nav Hub</a:t>
-            </a:r>
-          </a:p>
-        </p:txBody>
-      </p:sp>
-      <p:sp>
-        <p:nvSpPr>
-          <p:cNvPr id="11" name="Text Box 10"/>
-          <p:cNvSpPr/>
-          <p:nvPr/>
-        </p:nvSpPr>
-        <p:spPr>
-          <a:xfrm>
-            <a:off x="731520" y="6510528"/>
-            <a:ext cx="10725912" cy="228600"/>
-          </a:xfrm>
-          <a:prstGeom prst="rect">
-            <a:avLst/>
-          </a:prstGeom>
-        </p:spPr>
-        <p:txBody>
-          <a:bodyPr anchor="t"/>
-          <a:lstStyle/>
-          <a:p>
-            <a:pPr algn="ctr"/>
-            <a:r>
-              <a:rPr i="1" sz="800">
-                <a:solidFill>
-                  <a:srgbClr val="64748B"/>
-                </a:solidFill>
-                <a:latin typeface="+mn-lt"/>
-                <a:cs typeface="+mn-lt"/>
-              </a:rPr>
-              <a:t>* Disclaimer: All benchmark metrics, performance figures, and simulated architectures in this deck are synthetic demonstration values generated solely to showcase the authoring, formatting, and rendering capabilities of @hokkyss/pptx.</a:t>
             </a:r>
           </a:p>
         </p:txBody>
@@ -6271,7 +6117,7 @@
                       </a:r>
                     </a:p>
                   </a:txBody>
-                  <a:tcPr>
+                  <a:tcPr anchor="ctr">
                     <a:solidFill>
                       <a:srgbClr val="0284C7"/>
                     </a:solidFill>
@@ -6295,7 +6141,7 @@
                       </a:r>
                     </a:p>
                   </a:txBody>
-                  <a:tcPr>
+                  <a:tcPr anchor="ctr">
                     <a:solidFill>
                       <a:srgbClr val="0284C7"/>
                     </a:solidFill>
@@ -6319,7 +6165,7 @@
                       </a:r>
                     </a:p>
                   </a:txBody>
-                  <a:tcPr>
+                  <a:tcPr anchor="ctr">
                     <a:solidFill>
                       <a:srgbClr val="0284C7"/>
                     </a:solidFill>
@@ -6343,7 +6189,7 @@
                       </a:r>
                     </a:p>
                   </a:txBody>
-                  <a:tcPr>
+                  <a:tcPr anchor="ctr">
                     <a:solidFill>
                       <a:srgbClr val="0284C7"/>
                     </a:solidFill>
@@ -6369,7 +6215,7 @@
                       </a:r>
                     </a:p>
                   </a:txBody>
-                  <a:tcPr>
+                  <a:tcPr anchor="ctr">
                     <a:solidFill>
                       <a:srgbClr val="1E293B"/>
                     </a:solidFill>
@@ -6393,7 +6239,7 @@
                       </a:r>
                     </a:p>
                   </a:txBody>
-                  <a:tcPr>
+                  <a:tcPr anchor="ctr">
                     <a:solidFill>
                       <a:srgbClr val="1E293B"/>
                     </a:solidFill>
@@ -6417,7 +6263,7 @@
                       </a:r>
                     </a:p>
                   </a:txBody>
-                  <a:tcPr>
+                  <a:tcPr anchor="ctr">
                     <a:solidFill>
                       <a:srgbClr val="1E293B"/>
                     </a:solidFill>
@@ -6441,7 +6287,7 @@
                       </a:r>
                     </a:p>
                   </a:txBody>
-                  <a:tcPr>
+                  <a:tcPr anchor="ctr">
                     <a:solidFill>
                       <a:srgbClr val="1E293B"/>
                     </a:solidFill>
@@ -6467,7 +6313,7 @@
                       </a:r>
                     </a:p>
                   </a:txBody>
-                  <a:tcPr>
+                  <a:tcPr anchor="ctr">
                     <a:solidFill>
                       <a:srgbClr val="0F172A"/>
                     </a:solidFill>
@@ -6491,7 +6337,7 @@
                       </a:r>
                     </a:p>
                   </a:txBody>
-                  <a:tcPr>
+                  <a:tcPr anchor="ctr">
                     <a:solidFill>
                       <a:srgbClr val="0F172A"/>
                     </a:solidFill>
@@ -6515,7 +6361,7 @@
                       </a:r>
                     </a:p>
                   </a:txBody>
-                  <a:tcPr>
+                  <a:tcPr anchor="ctr">
                     <a:solidFill>
                       <a:srgbClr val="0F172A"/>
                     </a:solidFill>
@@ -6539,7 +6385,7 @@
                       </a:r>
                     </a:p>
                   </a:txBody>
-                  <a:tcPr>
+                  <a:tcPr anchor="ctr">
                     <a:solidFill>
                       <a:srgbClr val="0F172A"/>
                     </a:solidFill>
@@ -6565,7 +6411,7 @@
                       </a:r>
                     </a:p>
                   </a:txBody>
-                  <a:tcPr>
+                  <a:tcPr anchor="ctr">
                     <a:solidFill>
                       <a:srgbClr val="1E293B"/>
                     </a:solidFill>
@@ -6589,7 +6435,7 @@
                       </a:r>
                     </a:p>
                   </a:txBody>
-                  <a:tcPr>
+                  <a:tcPr anchor="ctr">
                     <a:solidFill>
                       <a:srgbClr val="1E293B"/>
                     </a:solidFill>
@@ -6613,7 +6459,7 @@
                       </a:r>
                     </a:p>
                   </a:txBody>
-                  <a:tcPr>
+                  <a:tcPr anchor="ctr">
                     <a:solidFill>
                       <a:srgbClr val="1E293B"/>
                     </a:solidFill>
@@ -6637,7 +6483,7 @@
                       </a:r>
                     </a:p>
                   </a:txBody>
-                  <a:tcPr>
+                  <a:tcPr anchor="ctr">
                     <a:solidFill>
                       <a:srgbClr val="1E293B"/>
                     </a:solidFill>
@@ -6663,7 +6509,7 @@
                       </a:r>
                     </a:p>
                   </a:txBody>
-                  <a:tcPr>
+                  <a:tcPr anchor="ctr">
                     <a:solidFill>
                       <a:srgbClr val="0F172A"/>
                     </a:solidFill>
@@ -6687,7 +6533,7 @@
                       </a:r>
                     </a:p>
                   </a:txBody>
-                  <a:tcPr>
+                  <a:tcPr anchor="ctr">
                     <a:solidFill>
                       <a:srgbClr val="0F172A"/>
                     </a:solidFill>
@@ -6711,7 +6557,7 @@
                       </a:r>
                     </a:p>
                   </a:txBody>
-                  <a:tcPr>
+                  <a:tcPr anchor="ctr">
                     <a:solidFill>
                       <a:srgbClr val="0F172A"/>
                     </a:solidFill>
@@ -6735,7 +6581,7 @@
                       </a:r>
                     </a:p>
                   </a:txBody>
-                  <a:tcPr>
+                  <a:tcPr anchor="ctr">
                     <a:solidFill>
                       <a:srgbClr val="0F172A"/>
                     </a:solidFill>
@@ -6761,7 +6607,7 @@
                       </a:r>
                     </a:p>
                   </a:txBody>
-                  <a:tcPr>
+                  <a:tcPr anchor="ctr">
                     <a:solidFill>
                       <a:srgbClr val="1E293B"/>
                     </a:solidFill>
@@ -6785,7 +6631,7 @@
                       </a:r>
                     </a:p>
                   </a:txBody>
-                  <a:tcPr>
+                  <a:tcPr anchor="ctr">
                     <a:solidFill>
                       <a:srgbClr val="1E293B"/>
                     </a:solidFill>
@@ -6809,7 +6655,7 @@
                       </a:r>
                     </a:p>
                   </a:txBody>
-                  <a:tcPr>
+                  <a:tcPr anchor="ctr">
                     <a:solidFill>
                       <a:srgbClr val="1E293B"/>
                     </a:solidFill>
@@ -6833,7 +6679,7 @@
                       </a:r>
                     </a:p>
                   </a:txBody>
-                  <a:tcPr>
+                  <a:tcPr anchor="ctr">
                     <a:solidFill>
                       <a:srgbClr val="1E293B"/>
                     </a:solidFill>
@@ -6859,7 +6705,7 @@
                       </a:r>
                     </a:p>
                   </a:txBody>
-                  <a:tcPr>
+                  <a:tcPr anchor="ctr">
                     <a:solidFill>
                       <a:srgbClr val="0F172A"/>
                     </a:solidFill>
@@ -6883,7 +6729,7 @@
                       </a:r>
                     </a:p>
                   </a:txBody>
-                  <a:tcPr>
+                  <a:tcPr anchor="ctr">
                     <a:solidFill>
                       <a:srgbClr val="0F172A"/>
                     </a:solidFill>
@@ -6907,7 +6753,7 @@
                       </a:r>
                     </a:p>
                   </a:txBody>
-                  <a:tcPr>
+                  <a:tcPr anchor="ctr">
                     <a:solidFill>
                       <a:srgbClr val="0F172A"/>
                     </a:solidFill>
@@ -6931,7 +6777,7 @@
                       </a:r>
                     </a:p>
                   </a:txBody>
-                  <a:tcPr>
+                  <a:tcPr anchor="ctr">
                     <a:solidFill>
                       <a:srgbClr val="0F172A"/>
                     </a:solidFill>
@@ -6942,6 +6788,77 @@
           </a:graphicData>
         </a:graphic>
       </p:graphicFrame>
+      <p:sp>
+        <p:nvSpPr>
+          <p:cNvPr id="7" name="roundRect 6"/>
+          <p:cNvSpPr/>
+          <p:nvPr/>
+        </p:nvSpPr>
+        <p:spPr>
+          <a:xfrm>
+            <a:off x="6217920" y="1828800"/>
+            <a:ext cx="5212080" cy="4480560"/>
+          </a:xfrm>
+          <a:prstGeom prst="roundRect">
+            <a:avLst/>
+          </a:prstGeom>
+          <a:solidFill>
+            <a:srgbClr val="1E293B"/>
+          </a:solidFill>
+          <a:ln w="13716">
+            <a:solidFill>
+              <a:srgbClr val="334155"/>
+            </a:solidFill>
+          </a:ln>
+          <a:effectLst>
+            <a:outerShdw blurRad="109728" dist="38100" dir="5400000">
+              <a:srgbClr val="000000">
+                <a:alpha val="30000"/>
+              </a:srgbClr>
+            </a:outerShdw>
+          </a:effectLst>
+        </p:spPr>
+        <p:txBody>
+          <a:bodyPr/>
+          <a:lstStyle/>
+          <a:p>
+            <a:endParaRPr/>
+          </a:p>
+        </p:txBody>
+      </p:sp>
+      <p:sp>
+        <p:nvSpPr>
+          <p:cNvPr id="8" name="Text Box 7"/>
+          <p:cNvSpPr/>
+          <p:nvPr/>
+        </p:nvSpPr>
+        <p:spPr>
+          <a:xfrm>
+            <a:off x="6400800" y="2011680"/>
+            <a:ext cx="4846320" cy="320040"/>
+          </a:xfrm>
+          <a:prstGeom prst="rect">
+            <a:avLst/>
+          </a:prstGeom>
+        </p:spPr>
+        <p:txBody>
+          <a:bodyPr anchor="t"/>
+          <a:lstStyle/>
+          <a:p>
+            <a:pPr algn="l"/>
+            <a:r>
+              <a:rPr b="1" sz="1300">
+                <a:solidFill>
+                  <a:srgbClr val="FFFFFF"/>
+                </a:solidFill>
+                <a:latin typeface="+mn-lt"/>
+                <a:cs typeface="+mn-lt"/>
+              </a:rPr>
+              <a:t>📦 Monorepo Gzip &amp; Brotli Footprint (Bundlephobia-Aligned)</a:t>
+            </a:r>
+          </a:p>
+        </p:txBody>
+      </p:sp>
       <p:graphicFrame>
         <p:nvGraphicFramePr>
           <p:cNvPr id="9" name="Chart 8"/>
@@ -6958,6 +6875,89 @@
           </a:graphicData>
         </a:graphic>
       </p:graphicFrame>
+      <p:sp>
+        <p:nvSpPr>
+          <p:cNvPr id="10" name="roundRect 9">
+            <a:hlinkClick r:id="rId3" tooltip="Return to Hyperlinks Hub (Slide 12)" action="ppaction://hlinksldjump"/>
+          </p:cNvPr>
+          <p:cNvSpPr/>
+          <p:nvPr/>
+        </p:nvSpPr>
+        <p:spPr>
+          <a:xfrm>
+            <a:off x="9144000" y="731520"/>
+            <a:ext cx="2194560" cy="411480"/>
+          </a:xfrm>
+          <a:prstGeom prst="roundRect">
+            <a:avLst/>
+          </a:prstGeom>
+          <a:solidFill>
+            <a:srgbClr val="0284C7"/>
+          </a:solidFill>
+          <a:ln w="13716">
+            <a:solidFill>
+              <a:srgbClr val="38BDF8"/>
+            </a:solidFill>
+          </a:ln>
+          <a:effectLst>
+            <a:outerShdw blurRad="137160" dist="27432" dir="5400000">
+              <a:srgbClr val="0284C7">
+                <a:alpha val="30000"/>
+              </a:srgbClr>
+            </a:outerShdw>
+          </a:effectLst>
+        </p:spPr>
+        <p:txBody>
+          <a:bodyPr anchor="t"/>
+          <a:lstStyle/>
+          <a:p>
+            <a:pPr algn="ctr"/>
+            <a:r>
+              <a:rPr b="1" sz="1000">
+                <a:solidFill>
+                  <a:srgbClr val="FFFFFF"/>
+                </a:solidFill>
+                <a:latin typeface="+mn-lt"/>
+                <a:cs typeface="+mn-lt"/>
+              </a:rPr>
+              <a:t>⬅ Back to Nav Hub</a:t>
+            </a:r>
+          </a:p>
+        </p:txBody>
+      </p:sp>
+      <p:sp>
+        <p:nvSpPr>
+          <p:cNvPr id="11" name="Text Box 10"/>
+          <p:cNvSpPr/>
+          <p:nvPr/>
+        </p:nvSpPr>
+        <p:spPr>
+          <a:xfrm>
+            <a:off x="731520" y="6510528"/>
+            <a:ext cx="10725912" cy="228600"/>
+          </a:xfrm>
+          <a:prstGeom prst="rect">
+            <a:avLst/>
+          </a:prstGeom>
+        </p:spPr>
+        <p:txBody>
+          <a:bodyPr anchor="t"/>
+          <a:lstStyle/>
+          <a:p>
+            <a:pPr algn="ctr"/>
+            <a:r>
+              <a:rPr i="1" sz="800">
+                <a:solidFill>
+                  <a:srgbClr val="64748B"/>
+                </a:solidFill>
+                <a:latin typeface="+mn-lt"/>
+                <a:cs typeface="+mn-lt"/>
+              </a:rPr>
+              <a:t>* Disclaimer: All benchmark metrics, performance figures, and simulated architectures in this deck are synthetic demonstration values generated solely to showcase the authoring, formatting, and rendering capabilities of @hokkyss/pptx.</a:t>
+            </a:r>
+          </a:p>
+        </p:txBody>
+      </p:sp>
     </p:spTree>
   </p:cSld>
   <p:clrMapOvr>
@@ -6970,7 +6970,7 @@
 </file>
 
 <file path=ppt/slides/slide2.xml><?xml version="1.0" encoding="utf-8"?>
-<p:sld xmlns:a="http://schemas.openxmlformats.org/drawingml/2006/main" xmlns:r="http://schemas.openxmlformats.org/officeDocument/2006/relationships" xmlns:p="http://schemas.openxmlformats.org/presentationml/2006/main">
+<p:sld xmlns:a="http://schemas.openxmlformats.org/drawingml/2006/main" xmlns:p="http://schemas.openxmlformats.org/presentationml/2006/main" xmlns:r="http://schemas.openxmlformats.org/officeDocument/2006/relationships">
   <p:cSld>
     <p:bg>
       <p:bgPr>
@@ -7502,7 +7502,7 @@
 </file>
 
 <file path=ppt/slides/slide3.xml><?xml version="1.0" encoding="utf-8"?>
-<p:sld xmlns:a="http://schemas.openxmlformats.org/drawingml/2006/main" xmlns:r="http://schemas.openxmlformats.org/officeDocument/2006/relationships" xmlns:p="http://schemas.openxmlformats.org/presentationml/2006/main">
+<p:sld xmlns:a="http://schemas.openxmlformats.org/drawingml/2006/main" xmlns:p="http://schemas.openxmlformats.org/presentationml/2006/main" xmlns:r="http://schemas.openxmlformats.org/officeDocument/2006/relationships">
   <p:cSld>
     <p:bg>
       <p:bgPr>
@@ -7588,39 +7588,6 @@
                 <a:cs typeface="+mn-lt"/>
               </a:rPr>
               <a:t>100-slide roundtrip parse &amp; compilation benchmarks across modern JavaScript engines</a:t>
-            </a:r>
-          </a:p>
-        </p:txBody>
-      </p:sp>
-      <p:sp>
-        <p:nvSpPr>
-          <p:cNvPr id="5" name="Text Box 4"/>
-          <p:cNvSpPr/>
-          <p:nvPr/>
-        </p:nvSpPr>
-        <p:spPr>
-          <a:xfrm>
-            <a:off x="731520" y="6510528"/>
-            <a:ext cx="10725912" cy="228600"/>
-          </a:xfrm>
-          <a:prstGeom prst="rect">
-            <a:avLst/>
-          </a:prstGeom>
-        </p:spPr>
-        <p:txBody>
-          <a:bodyPr anchor="t"/>
-          <a:lstStyle/>
-          <a:p>
-            <a:pPr algn="ctr"/>
-            <a:r>
-              <a:rPr i="1" sz="800">
-                <a:solidFill>
-                  <a:srgbClr val="94A3B8"/>
-                </a:solidFill>
-                <a:latin typeface="+mn-lt"/>
-                <a:cs typeface="+mn-lt"/>
-              </a:rPr>
-              <a:t>* Disclaimer: All benchmark metrics, performance figures, and simulated architectures in this deck are synthetic demonstration values generated solely to showcase the authoring, formatting, and rendering capabilities of @hokkyss/pptx.</a:t>
             </a:r>
           </a:p>
         </p:txBody>
@@ -7667,7 +7634,7 @@
                       </a:r>
                     </a:p>
                   </a:txBody>
-                  <a:tcPr>
+                  <a:tcPr anchor="ctr">
                     <a:solidFill>
                       <a:srgbClr val="0F172A"/>
                     </a:solidFill>
@@ -7691,7 +7658,7 @@
                       </a:r>
                     </a:p>
                   </a:txBody>
-                  <a:tcPr>
+                  <a:tcPr anchor="ctr">
                     <a:solidFill>
                       <a:srgbClr val="0F172A"/>
                     </a:solidFill>
@@ -7715,7 +7682,7 @@
                       </a:r>
                     </a:p>
                   </a:txBody>
-                  <a:tcPr>
+                  <a:tcPr anchor="ctr">
                     <a:solidFill>
                       <a:srgbClr val="0F172A"/>
                     </a:solidFill>
@@ -7739,7 +7706,7 @@
                       </a:r>
                     </a:p>
                   </a:txBody>
-                  <a:tcPr>
+                  <a:tcPr anchor="ctr">
                     <a:solidFill>
                       <a:srgbClr val="0F172A"/>
                     </a:solidFill>
@@ -7763,7 +7730,7 @@
                       </a:r>
                     </a:p>
                   </a:txBody>
-                  <a:tcPr>
+                  <a:tcPr anchor="ctr">
                     <a:solidFill>
                       <a:srgbClr val="0F172A"/>
                     </a:solidFill>
@@ -7789,7 +7756,7 @@
                       </a:r>
                     </a:p>
                   </a:txBody>
-                  <a:tcPr>
+                  <a:tcPr anchor="ctr">
                     <a:solidFill>
                       <a:srgbClr val="F8FAFC"/>
                     </a:solidFill>
@@ -7813,7 +7780,7 @@
                       </a:r>
                     </a:p>
                   </a:txBody>
-                  <a:tcPr>
+                  <a:tcPr anchor="ctr">
                     <a:solidFill>
                       <a:srgbClr val="F8FAFC"/>
                     </a:solidFill>
@@ -7837,7 +7804,7 @@
                       </a:r>
                     </a:p>
                   </a:txBody>
-                  <a:tcPr>
+                  <a:tcPr anchor="ctr">
                     <a:solidFill>
                       <a:srgbClr val="F8FAFC"/>
                     </a:solidFill>
@@ -7861,7 +7828,7 @@
                       </a:r>
                     </a:p>
                   </a:txBody>
-                  <a:tcPr>
+                  <a:tcPr anchor="ctr">
                     <a:solidFill>
                       <a:srgbClr val="F8FAFC"/>
                     </a:solidFill>
@@ -7885,7 +7852,7 @@
                       </a:r>
                     </a:p>
                   </a:txBody>
-                  <a:tcPr>
+                  <a:tcPr anchor="ctr">
                     <a:solidFill>
                       <a:srgbClr val="ECFDF5"/>
                     </a:solidFill>
@@ -7911,7 +7878,7 @@
                       </a:r>
                     </a:p>
                   </a:txBody>
-                  <a:tcPr>
+                  <a:tcPr anchor="ctr">
                     <a:solidFill>
                       <a:srgbClr val="FFFFFF"/>
                     </a:solidFill>
@@ -7935,7 +7902,7 @@
                       </a:r>
                     </a:p>
                   </a:txBody>
-                  <a:tcPr>
+                  <a:tcPr anchor="ctr">
                     <a:solidFill>
                       <a:srgbClr val="FFFFFF"/>
                     </a:solidFill>
@@ -7959,7 +7926,7 @@
                       </a:r>
                     </a:p>
                   </a:txBody>
-                  <a:tcPr>
+                  <a:tcPr anchor="ctr">
                     <a:solidFill>
                       <a:srgbClr val="FFFFFF"/>
                     </a:solidFill>
@@ -7983,7 +7950,7 @@
                       </a:r>
                     </a:p>
                   </a:txBody>
-                  <a:tcPr>
+                  <a:tcPr anchor="ctr">
                     <a:solidFill>
                       <a:srgbClr val="FFFFFF"/>
                     </a:solidFill>
@@ -8007,7 +7974,7 @@
                       </a:r>
                     </a:p>
                   </a:txBody>
-                  <a:tcPr>
+                  <a:tcPr anchor="ctr">
                     <a:solidFill>
                       <a:srgbClr val="ECFDF5"/>
                     </a:solidFill>
@@ -8033,7 +8000,7 @@
                       </a:r>
                     </a:p>
                   </a:txBody>
-                  <a:tcPr>
+                  <a:tcPr anchor="ctr">
                     <a:solidFill>
                       <a:srgbClr val="F8FAFC"/>
                     </a:solidFill>
@@ -8057,7 +8024,7 @@
                       </a:r>
                     </a:p>
                   </a:txBody>
-                  <a:tcPr>
+                  <a:tcPr anchor="ctr">
                     <a:solidFill>
                       <a:srgbClr val="F8FAFC"/>
                     </a:solidFill>
@@ -8081,7 +8048,7 @@
                       </a:r>
                     </a:p>
                   </a:txBody>
-                  <a:tcPr>
+                  <a:tcPr anchor="ctr">
                     <a:solidFill>
                       <a:srgbClr val="F8FAFC"/>
                     </a:solidFill>
@@ -8105,7 +8072,7 @@
                       </a:r>
                     </a:p>
                   </a:txBody>
-                  <a:tcPr>
+                  <a:tcPr anchor="ctr">
                     <a:solidFill>
                       <a:srgbClr val="F8FAFC"/>
                     </a:solidFill>
@@ -8129,7 +8096,7 @@
                       </a:r>
                     </a:p>
                   </a:txBody>
-                  <a:tcPr>
+                  <a:tcPr anchor="ctr">
                     <a:solidFill>
                       <a:srgbClr val="ECFDF5"/>
                     </a:solidFill>
@@ -8155,7 +8122,7 @@
                       </a:r>
                     </a:p>
                   </a:txBody>
-                  <a:tcPr>
+                  <a:tcPr anchor="ctr">
                     <a:solidFill>
                       <a:srgbClr val="FFFFFF"/>
                     </a:solidFill>
@@ -8179,7 +8146,7 @@
                       </a:r>
                     </a:p>
                   </a:txBody>
-                  <a:tcPr>
+                  <a:tcPr anchor="ctr">
                     <a:solidFill>
                       <a:srgbClr val="FFFFFF"/>
                     </a:solidFill>
@@ -8203,7 +8170,7 @@
                       </a:r>
                     </a:p>
                   </a:txBody>
-                  <a:tcPr>
+                  <a:tcPr anchor="ctr">
                     <a:solidFill>
                       <a:srgbClr val="FFFFFF"/>
                     </a:solidFill>
@@ -8227,7 +8194,7 @@
                       </a:r>
                     </a:p>
                   </a:txBody>
-                  <a:tcPr>
+                  <a:tcPr anchor="ctr">
                     <a:solidFill>
                       <a:srgbClr val="FFFFFF"/>
                     </a:solidFill>
@@ -8251,7 +8218,7 @@
                       </a:r>
                     </a:p>
                   </a:txBody>
-                  <a:tcPr>
+                  <a:tcPr anchor="ctr">
                     <a:solidFill>
                       <a:srgbClr val="ECFDF5"/>
                     </a:solidFill>
@@ -8277,7 +8244,7 @@
                       </a:r>
                     </a:p>
                   </a:txBody>
-                  <a:tcPr>
+                  <a:tcPr anchor="ctr">
                     <a:solidFill>
                       <a:srgbClr val="F8FAFC"/>
                     </a:solidFill>
@@ -8301,7 +8268,7 @@
                       </a:r>
                     </a:p>
                   </a:txBody>
-                  <a:tcPr>
+                  <a:tcPr anchor="ctr">
                     <a:solidFill>
                       <a:srgbClr val="F8FAFC"/>
                     </a:solidFill>
@@ -8325,7 +8292,7 @@
                       </a:r>
                     </a:p>
                   </a:txBody>
-                  <a:tcPr>
+                  <a:tcPr anchor="ctr">
                     <a:solidFill>
                       <a:srgbClr val="F8FAFC"/>
                     </a:solidFill>
@@ -8349,7 +8316,7 @@
                       </a:r>
                     </a:p>
                   </a:txBody>
-                  <a:tcPr>
+                  <a:tcPr anchor="ctr">
                     <a:solidFill>
                       <a:srgbClr val="F8FAFC"/>
                     </a:solidFill>
@@ -8373,7 +8340,7 @@
                       </a:r>
                     </a:p>
                   </a:txBody>
-                  <a:tcPr>
+                  <a:tcPr anchor="ctr">
                     <a:solidFill>
                       <a:srgbClr val="FEF2F2"/>
                     </a:solidFill>
@@ -8384,6 +8351,39 @@
           </a:graphicData>
         </a:graphic>
       </p:graphicFrame>
+      <p:sp>
+        <p:nvSpPr>
+          <p:cNvPr id="5" name="Text Box 4"/>
+          <p:cNvSpPr/>
+          <p:nvPr/>
+        </p:nvSpPr>
+        <p:spPr>
+          <a:xfrm>
+            <a:off x="731520" y="6510528"/>
+            <a:ext cx="10725912" cy="228600"/>
+          </a:xfrm>
+          <a:prstGeom prst="rect">
+            <a:avLst/>
+          </a:prstGeom>
+        </p:spPr>
+        <p:txBody>
+          <a:bodyPr anchor="t"/>
+          <a:lstStyle/>
+          <a:p>
+            <a:pPr algn="ctr"/>
+            <a:r>
+              <a:rPr i="1" sz="800">
+                <a:solidFill>
+                  <a:srgbClr val="94A3B8"/>
+                </a:solidFill>
+                <a:latin typeface="+mn-lt"/>
+                <a:cs typeface="+mn-lt"/>
+              </a:rPr>
+              <a:t>* Disclaimer: All benchmark metrics, performance figures, and simulated architectures in this deck are synthetic demonstration values generated solely to showcase the authoring, formatting, and rendering capabilities of @hokkyss/pptx.</a:t>
+            </a:r>
+          </a:p>
+        </p:txBody>
+      </p:sp>
     </p:spTree>
   </p:cSld>
   <p:clrMapOvr>
@@ -8396,7 +8396,7 @@
 </file>
 
 <file path=ppt/slides/slide4.xml><?xml version="1.0" encoding="utf-8"?>
-<p:sld xmlns:a="http://schemas.openxmlformats.org/drawingml/2006/main" xmlns:r="http://schemas.openxmlformats.org/officeDocument/2006/relationships" xmlns:p="http://schemas.openxmlformats.org/presentationml/2006/main">
+<p:sld xmlns:a="http://schemas.openxmlformats.org/drawingml/2006/main" xmlns:p="http://schemas.openxmlformats.org/presentationml/2006/main" xmlns:r="http://schemas.openxmlformats.org/officeDocument/2006/relationships">
   <p:cSld>
     <p:bg>
       <p:bgPr>
@@ -8802,7 +8802,7 @@
 </file>
 
 <file path=ppt/slides/slide5.xml><?xml version="1.0" encoding="utf-8"?>
-<p:sld xmlns:a="http://schemas.openxmlformats.org/drawingml/2006/main" xmlns:r="http://schemas.openxmlformats.org/officeDocument/2006/relationships" xmlns:p="http://schemas.openxmlformats.org/presentationml/2006/main">
+<p:sld xmlns:a="http://schemas.openxmlformats.org/drawingml/2006/main" xmlns:p="http://schemas.openxmlformats.org/presentationml/2006/main" xmlns:r="http://schemas.openxmlformats.org/officeDocument/2006/relationships">
   <p:cSld>
     <p:bg>
       <p:bgPr>
@@ -9450,7 +9450,7 @@
 </file>
 
 <file path=ppt/slides/slide6.xml><?xml version="1.0" encoding="utf-8"?>
-<p:sld xmlns:a="http://schemas.openxmlformats.org/drawingml/2006/main" xmlns:r="http://schemas.openxmlformats.org/officeDocument/2006/relationships" xmlns:p="http://schemas.openxmlformats.org/presentationml/2006/main">
+<p:sld xmlns:a="http://schemas.openxmlformats.org/drawingml/2006/main" xmlns:p="http://schemas.openxmlformats.org/presentationml/2006/main" xmlns:r="http://schemas.openxmlformats.org/officeDocument/2006/relationships">
   <p:cSld>
     <p:bg>
       <p:bgPr>
@@ -9578,6 +9578,30 @@
           </a:p>
         </p:txBody>
       </p:sp>
+      <p:pic>
+        <p:nvPicPr>
+          <p:cNvPr id="5" name="Picture 4"/>
+          <p:cNvPicPr>
+            <a:picLocks noChangeAspect="1"/>
+          </p:cNvPicPr>
+          <p:nvPr/>
+        </p:nvPicPr>
+        <p:blipFill>
+          <a:blip r:embed="rId2"/>
+          <a:stretch>
+            <a:fillRect/>
+          </a:stretch>
+        </p:blipFill>
+        <p:spPr>
+          <a:xfrm>
+            <a:off x="1188720" y="2103120"/>
+            <a:ext cx="4389120" cy="2468880"/>
+          </a:xfrm>
+          <a:prstGeom prst="rect">
+            <a:avLst/>
+          </a:prstGeom>
+        </p:spPr>
+      </p:pic>
       <p:sp>
         <p:nvSpPr>
           <p:cNvPr id="6" name="Text Box 5"/>
@@ -9708,176 +9732,6 @@
           </a:p>
         </p:txBody>
       </p:sp>
-      <p:sp>
-        <p:nvSpPr>
-          <p:cNvPr id="11" name="Text Box 10"/>
-          <p:cNvSpPr/>
-          <p:nvPr/>
-        </p:nvSpPr>
-        <p:spPr>
-          <a:xfrm>
-            <a:off x="6611112" y="3383280"/>
-            <a:ext cx="4389120" cy="365760"/>
-          </a:xfrm>
-          <a:prstGeom prst="rect">
-            <a:avLst/>
-          </a:prstGeom>
-        </p:spPr>
-        <p:txBody>
-          <a:bodyPr anchor="t"/>
-          <a:lstStyle/>
-          <a:p>
-            <a:pPr algn="l"/>
-            <a:r>
-              <a:rPr b="1" sz="1500">
-                <a:solidFill>
-                  <a:srgbClr val="0F172A"/>
-                </a:solidFill>
-                <a:latin typeface="+mn-lt"/>
-                <a:cs typeface="+mn-lt"/>
-              </a:rPr>
-              <a:t>Supported Image Codecs &amp; Features</a:t>
-            </a:r>
-          </a:p>
-        </p:txBody>
-      </p:sp>
-      <p:sp>
-        <p:nvSpPr>
-          <p:cNvPr id="12" name="Text Box 11"/>
-          <p:cNvSpPr/>
-          <p:nvPr/>
-        </p:nvSpPr>
-        <p:spPr>
-          <a:xfrm>
-            <a:off x="6611112" y="3840480"/>
-            <a:ext cx="4389120" cy="2011680"/>
-          </a:xfrm>
-          <a:prstGeom prst="rect">
-            <a:avLst/>
-          </a:prstGeom>
-        </p:spPr>
-        <p:txBody>
-          <a:bodyPr anchor="t"/>
-          <a:lstStyle/>
-          <a:p>
-            <a:pPr algn="l" lvl="0" marL="152400" indent="-152400">
-              <a:buChar char="•"/>
-            </a:pPr>
-            <a:r>
-              <a:rPr sz="1100">
-                <a:solidFill>
-                  <a:srgbClr val="475569"/>
-                </a:solidFill>
-                <a:latin typeface="+mn-lt"/>
-                <a:cs typeface="+mn-lt"/>
-              </a:rPr>
-              <a:t>PNG with 32-bit RGBA alpha transparency</a:t>
-            </a:r>
-          </a:p>
-          <a:p>
-            <a:pPr algn="l" lvl="0" marL="152400" indent="-152400">
-              <a:buChar char="•"/>
-            </a:pPr>
-            <a:r>
-              <a:rPr sz="1100">
-                <a:solidFill>
-                  <a:srgbClr val="475569"/>
-                </a:solidFill>
-                <a:latin typeface="+mn-lt"/>
-                <a:cs typeface="+mn-lt"/>
-              </a:rPr>
-              <a:t>JPEG / JPG progressive and baseline encoding</a:t>
-            </a:r>
-          </a:p>
-          <a:p>
-            <a:pPr algn="l" lvl="0" marL="152400" indent="-152400">
-              <a:buChar char="•"/>
-            </a:pPr>
-            <a:r>
-              <a:rPr sz="1100">
-                <a:solidFill>
-                  <a:srgbClr val="475569"/>
-                </a:solidFill>
-                <a:latin typeface="+mn-lt"/>
-                <a:cs typeface="+mn-lt"/>
-              </a:rPr>
-              <a:t>Zero-copy ArrayBuffer &amp; Uint8Array input</a:t>
-            </a:r>
-          </a:p>
-          <a:p>
-            <a:pPr algn="l" lvl="0" marL="152400" indent="-152400">
-              <a:buChar char="•"/>
-            </a:pPr>
-            <a:r>
-              <a:rPr sz="1100">
-                <a:solidFill>
-                  <a:srgbClr val="475569"/>
-                </a:solidFill>
-                <a:latin typeface="+mn-lt"/>
-                <a:cs typeface="+mn-lt"/>
-              </a:rPr>
-              <a:t>Placeholder resolution into slide layout picture frames</a:t>
-            </a:r>
-          </a:p>
-        </p:txBody>
-      </p:sp>
-      <p:sp>
-        <p:nvSpPr>
-          <p:cNvPr id="13" name="Text Box 12"/>
-          <p:cNvSpPr/>
-          <p:nvPr/>
-        </p:nvSpPr>
-        <p:spPr>
-          <a:xfrm>
-            <a:off x="731520" y="6510528"/>
-            <a:ext cx="10725912" cy="228600"/>
-          </a:xfrm>
-          <a:prstGeom prst="rect">
-            <a:avLst/>
-          </a:prstGeom>
-        </p:spPr>
-        <p:txBody>
-          <a:bodyPr anchor="t"/>
-          <a:lstStyle/>
-          <a:p>
-            <a:pPr algn="ctr"/>
-            <a:r>
-              <a:rPr i="1" sz="800">
-                <a:solidFill>
-                  <a:srgbClr val="94A3B8"/>
-                </a:solidFill>
-                <a:latin typeface="+mn-lt"/>
-                <a:cs typeface="+mn-lt"/>
-              </a:rPr>
-              <a:t>* Disclaimer: All benchmark metrics, performance figures, and simulated architectures in this deck are synthetic demonstration values generated solely to showcase the authoring, formatting, and rendering capabilities of @hokkyss/pptx.</a:t>
-            </a:r>
-          </a:p>
-        </p:txBody>
-      </p:sp>
-      <p:pic>
-        <p:nvPicPr>
-          <p:cNvPr id="5" name="Picture 4"/>
-          <p:cNvPicPr>
-            <a:picLocks noChangeAspect="1"/>
-          </p:cNvPicPr>
-          <p:nvPr/>
-        </p:nvPicPr>
-        <p:blipFill>
-          <a:blip r:embed="rId2"/>
-          <a:stretch>
-            <a:fillRect/>
-          </a:stretch>
-        </p:blipFill>
-        <p:spPr>
-          <a:xfrm>
-            <a:off x="1188720" y="2103120"/>
-            <a:ext cx="4389120" cy="2468880"/>
-          </a:xfrm>
-          <a:prstGeom prst="rect">
-            <a:avLst/>
-          </a:prstGeom>
-        </p:spPr>
-      </p:pic>
       <p:pic>
         <p:nvPicPr>
           <p:cNvPr id="10" name="Picture 9"/>
@@ -9902,6 +9756,152 @@
           </a:prstGeom>
         </p:spPr>
       </p:pic>
+      <p:sp>
+        <p:nvSpPr>
+          <p:cNvPr id="11" name="Text Box 10"/>
+          <p:cNvSpPr/>
+          <p:nvPr/>
+        </p:nvSpPr>
+        <p:spPr>
+          <a:xfrm>
+            <a:off x="6611112" y="3383280"/>
+            <a:ext cx="4389120" cy="365760"/>
+          </a:xfrm>
+          <a:prstGeom prst="rect">
+            <a:avLst/>
+          </a:prstGeom>
+        </p:spPr>
+        <p:txBody>
+          <a:bodyPr anchor="t"/>
+          <a:lstStyle/>
+          <a:p>
+            <a:pPr algn="l"/>
+            <a:r>
+              <a:rPr b="1" sz="1500">
+                <a:solidFill>
+                  <a:srgbClr val="0F172A"/>
+                </a:solidFill>
+                <a:latin typeface="+mn-lt"/>
+                <a:cs typeface="+mn-lt"/>
+              </a:rPr>
+              <a:t>Supported Image Codecs &amp; Features</a:t>
+            </a:r>
+          </a:p>
+        </p:txBody>
+      </p:sp>
+      <p:sp>
+        <p:nvSpPr>
+          <p:cNvPr id="12" name="Text Box 11"/>
+          <p:cNvSpPr/>
+          <p:nvPr/>
+        </p:nvSpPr>
+        <p:spPr>
+          <a:xfrm>
+            <a:off x="6611112" y="3840480"/>
+            <a:ext cx="4389120" cy="2011680"/>
+          </a:xfrm>
+          <a:prstGeom prst="rect">
+            <a:avLst/>
+          </a:prstGeom>
+        </p:spPr>
+        <p:txBody>
+          <a:bodyPr anchor="t"/>
+          <a:lstStyle/>
+          <a:p>
+            <a:pPr algn="l" lvl="0" marL="152400" indent="-152400">
+              <a:buChar char="•"/>
+            </a:pPr>
+            <a:r>
+              <a:rPr sz="1100">
+                <a:solidFill>
+                  <a:srgbClr val="475569"/>
+                </a:solidFill>
+                <a:latin typeface="+mn-lt"/>
+                <a:cs typeface="+mn-lt"/>
+              </a:rPr>
+              <a:t>PNG with 32-bit RGBA alpha transparency</a:t>
+            </a:r>
+          </a:p>
+          <a:p>
+            <a:pPr algn="l" lvl="0" marL="152400" indent="-152400">
+              <a:buChar char="•"/>
+            </a:pPr>
+            <a:r>
+              <a:rPr sz="1100">
+                <a:solidFill>
+                  <a:srgbClr val="475569"/>
+                </a:solidFill>
+                <a:latin typeface="+mn-lt"/>
+                <a:cs typeface="+mn-lt"/>
+              </a:rPr>
+              <a:t>JPEG / JPG progressive and baseline encoding</a:t>
+            </a:r>
+          </a:p>
+          <a:p>
+            <a:pPr algn="l" lvl="0" marL="152400" indent="-152400">
+              <a:buChar char="•"/>
+            </a:pPr>
+            <a:r>
+              <a:rPr sz="1100">
+                <a:solidFill>
+                  <a:srgbClr val="475569"/>
+                </a:solidFill>
+                <a:latin typeface="+mn-lt"/>
+                <a:cs typeface="+mn-lt"/>
+              </a:rPr>
+              <a:t>Zero-copy ArrayBuffer &amp; Uint8Array input</a:t>
+            </a:r>
+          </a:p>
+          <a:p>
+            <a:pPr algn="l" lvl="0" marL="152400" indent="-152400">
+              <a:buChar char="•"/>
+            </a:pPr>
+            <a:r>
+              <a:rPr sz="1100">
+                <a:solidFill>
+                  <a:srgbClr val="475569"/>
+                </a:solidFill>
+                <a:latin typeface="+mn-lt"/>
+                <a:cs typeface="+mn-lt"/>
+              </a:rPr>
+              <a:t>Placeholder resolution into slide layout picture frames</a:t>
+            </a:r>
+          </a:p>
+        </p:txBody>
+      </p:sp>
+      <p:sp>
+        <p:nvSpPr>
+          <p:cNvPr id="13" name="Text Box 12"/>
+          <p:cNvSpPr/>
+          <p:nvPr/>
+        </p:nvSpPr>
+        <p:spPr>
+          <a:xfrm>
+            <a:off x="731520" y="6510528"/>
+            <a:ext cx="10725912" cy="228600"/>
+          </a:xfrm>
+          <a:prstGeom prst="rect">
+            <a:avLst/>
+          </a:prstGeom>
+        </p:spPr>
+        <p:txBody>
+          <a:bodyPr anchor="t"/>
+          <a:lstStyle/>
+          <a:p>
+            <a:pPr algn="ctr"/>
+            <a:r>
+              <a:rPr i="1" sz="800">
+                <a:solidFill>
+                  <a:srgbClr val="94A3B8"/>
+                </a:solidFill>
+                <a:latin typeface="+mn-lt"/>
+                <a:cs typeface="+mn-lt"/>
+              </a:rPr>
+              <a:t>* Disclaimer: All benchmark metrics, performance figures, and simulated architectures in this deck are synthetic demonstration values generated solely to showcase the authoring, formatting, and rendering capabilities of @hokkyss/pptx.</a:t>
+            </a:r>
+          </a:p>
+        </p:txBody>
+      </p:sp>
     </p:spTree>
   </p:cSld>
   <p:clrMapOvr>
@@ -9914,7 +9914,7 @@
 </file>
 
 <file path=ppt/slides/slide7.xml><?xml version="1.0" encoding="utf-8"?>
-<p:sld xmlns:a="http://schemas.openxmlformats.org/drawingml/2006/main" xmlns:r="http://schemas.openxmlformats.org/officeDocument/2006/relationships" xmlns:p="http://schemas.openxmlformats.org/presentationml/2006/main">
+<p:sld xmlns:a="http://schemas.openxmlformats.org/drawingml/2006/main" xmlns:p="http://schemas.openxmlformats.org/presentationml/2006/main" xmlns:r="http://schemas.openxmlformats.org/officeDocument/2006/relationships">
   <p:cSld>
     <p:bg>
       <p:bgPr>
@@ -10531,7 +10531,7 @@
 </file>
 
 <file path=ppt/slides/slide8.xml><?xml version="1.0" encoding="utf-8"?>
-<p:sld xmlns:a="http://schemas.openxmlformats.org/drawingml/2006/main" xmlns:r="http://schemas.openxmlformats.org/officeDocument/2006/relationships" xmlns:p="http://schemas.openxmlformats.org/presentationml/2006/main">
+<p:sld xmlns:a="http://schemas.openxmlformats.org/drawingml/2006/main" xmlns:p="http://schemas.openxmlformats.org/presentationml/2006/main" xmlns:r="http://schemas.openxmlformats.org/officeDocument/2006/relationships">
   <p:cSld>
     <p:bg>
       <p:bgPr>
@@ -10617,72 +10617,6 @@
                 <a:cs typeface="+mn-lt"/>
               </a:rPr>
               <a:t>Demonstrating vector connectors (solid, dashed), coordinates, and composite group containers (addGroup)</a:t>
-            </a:r>
-          </a:p>
-        </p:txBody>
-      </p:sp>
-      <p:sp>
-        <p:nvSpPr>
-          <p:cNvPr id="19" name="Text Box 18"/>
-          <p:cNvSpPr/>
-          <p:nvPr/>
-        </p:nvSpPr>
-        <p:spPr>
-          <a:xfrm>
-            <a:off x="914400" y="5806440"/>
-            <a:ext cx="10241280" cy="365760"/>
-          </a:xfrm>
-          <a:prstGeom prst="rect">
-            <a:avLst/>
-          </a:prstGeom>
-        </p:spPr>
-        <p:txBody>
-          <a:bodyPr anchor="t"/>
-          <a:lstStyle/>
-          <a:p>
-            <a:pPr algn="ctr"/>
-            <a:r>
-              <a:rPr sz="1100">
-                <a:solidFill>
-                  <a:srgbClr val="64748B"/>
-                </a:solidFill>
-                <a:latin typeface="+mn-lt"/>
-                <a:cs typeface="+mn-lt"/>
-              </a:rPr>
-              <a:t>Isomorphic Pipeline Feedback Loop: 100% Roundtrip Bit-Exact Precision</a:t>
-            </a:r>
-          </a:p>
-        </p:txBody>
-      </p:sp>
-      <p:sp>
-        <p:nvSpPr>
-          <p:cNvPr id="20" name="Text Box 19"/>
-          <p:cNvSpPr/>
-          <p:nvPr/>
-        </p:nvSpPr>
-        <p:spPr>
-          <a:xfrm>
-            <a:off x="731520" y="6510528"/>
-            <a:ext cx="10725912" cy="228600"/>
-          </a:xfrm>
-          <a:prstGeom prst="rect">
-            <a:avLst/>
-          </a:prstGeom>
-        </p:spPr>
-        <p:txBody>
-          <a:bodyPr anchor="t"/>
-          <a:lstStyle/>
-          <a:p>
-            <a:pPr algn="ctr"/>
-            <a:r>
-              <a:rPr i="1" sz="800">
-                <a:solidFill>
-                  <a:srgbClr val="94A3B8"/>
-                </a:solidFill>
-                <a:latin typeface="+mn-lt"/>
-                <a:cs typeface="+mn-lt"/>
-              </a:rPr>
-              <a:t>* Disclaimer: All benchmark metrics, performance figures, and simulated architectures in this deck are synthetic demonstration values generated solely to showcase the authoring, formatting, and rendering capabilities of @hokkyss/pptx.</a:t>
             </a:r>
           </a:p>
         </p:txBody>
@@ -11229,6 +11163,72 @@
           </a:ln>
         </p:spPr>
       </p:cxnSp>
+      <p:sp>
+        <p:nvSpPr>
+          <p:cNvPr id="19" name="Text Box 18"/>
+          <p:cNvSpPr/>
+          <p:nvPr/>
+        </p:nvSpPr>
+        <p:spPr>
+          <a:xfrm>
+            <a:off x="914400" y="5806440"/>
+            <a:ext cx="10241280" cy="365760"/>
+          </a:xfrm>
+          <a:prstGeom prst="rect">
+            <a:avLst/>
+          </a:prstGeom>
+        </p:spPr>
+        <p:txBody>
+          <a:bodyPr anchor="t"/>
+          <a:lstStyle/>
+          <a:p>
+            <a:pPr algn="ctr"/>
+            <a:r>
+              <a:rPr sz="1100">
+                <a:solidFill>
+                  <a:srgbClr val="64748B"/>
+                </a:solidFill>
+                <a:latin typeface="+mn-lt"/>
+                <a:cs typeface="+mn-lt"/>
+              </a:rPr>
+              <a:t>Isomorphic Pipeline Feedback Loop: 100% Roundtrip Bit-Exact Precision</a:t>
+            </a:r>
+          </a:p>
+        </p:txBody>
+      </p:sp>
+      <p:sp>
+        <p:nvSpPr>
+          <p:cNvPr id="20" name="Text Box 19"/>
+          <p:cNvSpPr/>
+          <p:nvPr/>
+        </p:nvSpPr>
+        <p:spPr>
+          <a:xfrm>
+            <a:off x="731520" y="6510528"/>
+            <a:ext cx="10725912" cy="228600"/>
+          </a:xfrm>
+          <a:prstGeom prst="rect">
+            <a:avLst/>
+          </a:prstGeom>
+        </p:spPr>
+        <p:txBody>
+          <a:bodyPr anchor="t"/>
+          <a:lstStyle/>
+          <a:p>
+            <a:pPr algn="ctr"/>
+            <a:r>
+              <a:rPr i="1" sz="800">
+                <a:solidFill>
+                  <a:srgbClr val="94A3B8"/>
+                </a:solidFill>
+                <a:latin typeface="+mn-lt"/>
+                <a:cs typeface="+mn-lt"/>
+              </a:rPr>
+              <a:t>* Disclaimer: All benchmark metrics, performance figures, and simulated architectures in this deck are synthetic demonstration values generated solely to showcase the authoring, formatting, and rendering capabilities of @hokkyss/pptx.</a:t>
+            </a:r>
+          </a:p>
+        </p:txBody>
+      </p:sp>
     </p:spTree>
   </p:cSld>
   <p:clrMapOvr>
@@ -11241,7 +11241,7 @@
 </file>
 
 <file path=ppt/slides/slide9.xml><?xml version="1.0" encoding="utf-8"?>
-<p:sld xmlns:a="http://schemas.openxmlformats.org/drawingml/2006/main" xmlns:r="http://schemas.openxmlformats.org/officeDocument/2006/relationships" xmlns:p="http://schemas.openxmlformats.org/presentationml/2006/main">
+<p:sld xmlns:a="http://schemas.openxmlformats.org/drawingml/2006/main" xmlns:p="http://schemas.openxmlformats.org/presentationml/2006/main" xmlns:r="http://schemas.openxmlformats.org/officeDocument/2006/relationships">
   <p:cSld>
     <p:bg>
       <p:bgPr>
@@ -11369,261 +11369,6 @@
           </a:p>
         </p:txBody>
       </p:sp>
-      <p:sp>
-        <p:nvSpPr>
-          <p:cNvPr id="6" name="roundRect 5"/>
-          <p:cNvSpPr/>
-          <p:nvPr/>
-        </p:nvSpPr>
-        <p:spPr>
-          <a:xfrm>
-            <a:off x="7589520" y="1828800"/>
-            <a:ext cx="3657600" cy="1234440"/>
-          </a:xfrm>
-          <a:prstGeom prst="roundRect">
-            <a:avLst/>
-          </a:prstGeom>
-          <a:solidFill>
-            <a:srgbClr val="1E293B"/>
-          </a:solidFill>
-          <a:ln w="13716">
-            <a:solidFill>
-              <a:srgbClr val="0284C7"/>
-            </a:solidFill>
-          </a:ln>
-        </p:spPr>
-        <p:txBody>
-          <a:bodyPr anchor="t"/>
-          <a:lstStyle/>
-          <a:p>
-            <a:pPr algn="l"/>
-            <a:r>
-              <a:rPr b="1" sz="1300">
-                <a:solidFill>
-                  <a:srgbClr val="38BDF8"/>
-                </a:solidFill>
-                <a:latin typeface="+mn-lt"/>
-                <a:cs typeface="+mn-lt"/>
-              </a:rPr>
-              <a:t>⚡ Zero Native Bindings</a:t>
-            </a:r>
-          </a:p>
-        </p:txBody>
-      </p:sp>
-      <p:sp>
-        <p:nvSpPr>
-          <p:cNvPr id="7" name="Text Box 6"/>
-          <p:cNvSpPr/>
-          <p:nvPr/>
-        </p:nvSpPr>
-        <p:spPr>
-          <a:xfrm>
-            <a:off x="7772400" y="2240280"/>
-            <a:ext cx="3291840" cy="731520"/>
-          </a:xfrm>
-          <a:prstGeom prst="rect">
-            <a:avLst/>
-          </a:prstGeom>
-        </p:spPr>
-        <p:txBody>
-          <a:bodyPr anchor="t"/>
-          <a:lstStyle/>
-          <a:p>
-            <a:pPr algn="l"/>
-            <a:r>
-              <a:rPr sz="1000">
-                <a:solidFill>
-                  <a:srgbClr val="94A3B8"/>
-                </a:solidFill>
-                <a:latin typeface="+mn-lt"/>
-                <a:cs typeface="+mn-lt"/>
-              </a:rPr>
-              <a:t>Generates ECMA-376 compliant DrawingML charts directly from pure TypeScript arrays without spawning Python, Java, or Excel subprocesses.</a:t>
-            </a:r>
-          </a:p>
-        </p:txBody>
-      </p:sp>
-      <p:sp>
-        <p:nvSpPr>
-          <p:cNvPr id="8" name="roundRect 7"/>
-          <p:cNvSpPr/>
-          <p:nvPr/>
-        </p:nvSpPr>
-        <p:spPr>
-          <a:xfrm>
-            <a:off x="7589520" y="3246120"/>
-            <a:ext cx="3657600" cy="1234440"/>
-          </a:xfrm>
-          <a:prstGeom prst="roundRect">
-            <a:avLst/>
-          </a:prstGeom>
-          <a:solidFill>
-            <a:srgbClr val="1E293B"/>
-          </a:solidFill>
-          <a:ln w="13716">
-            <a:solidFill>
-              <a:srgbClr val="10B981"/>
-            </a:solidFill>
-          </a:ln>
-        </p:spPr>
-        <p:txBody>
-          <a:bodyPr anchor="t"/>
-          <a:lstStyle/>
-          <a:p>
-            <a:pPr algn="l"/>
-            <a:r>
-              <a:rPr b="1" sz="1300">
-                <a:solidFill>
-                  <a:srgbClr val="34D399"/>
-                </a:solidFill>
-                <a:latin typeface="+mn-lt"/>
-                <a:cs typeface="+mn-lt"/>
-              </a:rPr>
-              <a:t>📈 Fully Editable &amp; Scalable</a:t>
-            </a:r>
-          </a:p>
-        </p:txBody>
-      </p:sp>
-      <p:sp>
-        <p:nvSpPr>
-          <p:cNvPr id="9" name="Text Box 8"/>
-          <p:cNvSpPr/>
-          <p:nvPr/>
-        </p:nvSpPr>
-        <p:spPr>
-          <a:xfrm>
-            <a:off x="7772400" y="3657600"/>
-            <a:ext cx="3291840" cy="731520"/>
-          </a:xfrm>
-          <a:prstGeom prst="rect">
-            <a:avLst/>
-          </a:prstGeom>
-        </p:spPr>
-        <p:txBody>
-          <a:bodyPr anchor="t"/>
-          <a:lstStyle/>
-          <a:p>
-            <a:pPr algn="l"/>
-            <a:r>
-              <a:rPr sz="1000">
-                <a:solidFill>
-                  <a:srgbClr val="94A3B8"/>
-                </a:solidFill>
-                <a:latin typeface="+mn-lt"/>
-                <a:cs typeface="+mn-lt"/>
-              </a:rPr>
-              <a:t>Embedded as vector OpenXML chart spaces. Users can edit values, change themes, or modify series formatting natively inside Microsoft PowerPoint.</a:t>
-            </a:r>
-          </a:p>
-        </p:txBody>
-      </p:sp>
-      <p:sp>
-        <p:nvSpPr>
-          <p:cNvPr id="10" name="roundRect 9"/>
-          <p:cNvSpPr/>
-          <p:nvPr/>
-        </p:nvSpPr>
-        <p:spPr>
-          <a:xfrm>
-            <a:off x="7589520" y="4663440"/>
-            <a:ext cx="3657600" cy="1234440"/>
-          </a:xfrm>
-          <a:prstGeom prst="roundRect">
-            <a:avLst/>
-          </a:prstGeom>
-          <a:solidFill>
-            <a:srgbClr val="1E293B"/>
-          </a:solidFill>
-          <a:ln w="13716">
-            <a:solidFill>
-              <a:srgbClr val="6366F1"/>
-            </a:solidFill>
-          </a:ln>
-        </p:spPr>
-        <p:txBody>
-          <a:bodyPr anchor="t"/>
-          <a:lstStyle/>
-          <a:p>
-            <a:pPr algn="l"/>
-            <a:r>
-              <a:rPr b="1" sz="1300">
-                <a:solidFill>
-                  <a:srgbClr val="818CF8"/>
-                </a:solidFill>
-                <a:latin typeface="+mn-lt"/>
-                <a:cs typeface="+mn-lt"/>
-              </a:rPr>
-              <a:t>🎨 Multi-Type Chart Engine</a:t>
-            </a:r>
-          </a:p>
-        </p:txBody>
-      </p:sp>
-      <p:sp>
-        <p:nvSpPr>
-          <p:cNvPr id="11" name="Text Box 10"/>
-          <p:cNvSpPr/>
-          <p:nvPr/>
-        </p:nvSpPr>
-        <p:spPr>
-          <a:xfrm>
-            <a:off x="7772400" y="5074920"/>
-            <a:ext cx="3291840" cy="731520"/>
-          </a:xfrm>
-          <a:prstGeom prst="rect">
-            <a:avLst/>
-          </a:prstGeom>
-        </p:spPr>
-        <p:txBody>
-          <a:bodyPr anchor="t"/>
-          <a:lstStyle/>
-          <a:p>
-            <a:pPr algn="l"/>
-            <a:r>
-              <a:rPr sz="1000">
-                <a:solidFill>
-                  <a:srgbClr val="94A3B8"/>
-                </a:solidFill>
-                <a:latin typeface="+mn-lt"/>
-                <a:cs typeface="+mn-lt"/>
-              </a:rPr>
-              <a:t>Supports column, bar, line, area, and pie chart topologies with custom series coloring, categorical axes, and configurable legend alignments.</a:t>
-            </a:r>
-          </a:p>
-        </p:txBody>
-      </p:sp>
-      <p:sp>
-        <p:nvSpPr>
-          <p:cNvPr id="12" name="Text Box 11"/>
-          <p:cNvSpPr/>
-          <p:nvPr/>
-        </p:nvSpPr>
-        <p:spPr>
-          <a:xfrm>
-            <a:off x="731520" y="6510528"/>
-            <a:ext cx="10725912" cy="228600"/>
-          </a:xfrm>
-          <a:prstGeom prst="rect">
-            <a:avLst/>
-          </a:prstGeom>
-        </p:spPr>
-        <p:txBody>
-          <a:bodyPr anchor="t"/>
-          <a:lstStyle/>
-          <a:p>
-            <a:pPr algn="ctr"/>
-            <a:r>
-              <a:rPr i="1" sz="800">
-                <a:solidFill>
-                  <a:srgbClr val="64748B"/>
-                </a:solidFill>
-                <a:latin typeface="+mn-lt"/>
-                <a:cs typeface="+mn-lt"/>
-              </a:rPr>
-              <a:t>* Disclaimer: All benchmark metrics, performance figures, and simulated architectures in this deck are synthetic demonstration values generated solely to showcase the authoring, formatting, and rendering capabilities of @hokkyss/pptx.</a:t>
-            </a:r>
-          </a:p>
-        </p:txBody>
-      </p:sp>
       <p:graphicFrame>
         <p:nvGraphicFramePr>
           <p:cNvPr id="5" name="Chart 4"/>
@@ -11640,6 +11385,261 @@
           </a:graphicData>
         </a:graphic>
       </p:graphicFrame>
+      <p:sp>
+        <p:nvSpPr>
+          <p:cNvPr id="6" name="roundRect 5"/>
+          <p:cNvSpPr/>
+          <p:nvPr/>
+        </p:nvSpPr>
+        <p:spPr>
+          <a:xfrm>
+            <a:off x="7589520" y="1828800"/>
+            <a:ext cx="3657600" cy="1234440"/>
+          </a:xfrm>
+          <a:prstGeom prst="roundRect">
+            <a:avLst/>
+          </a:prstGeom>
+          <a:solidFill>
+            <a:srgbClr val="1E293B"/>
+          </a:solidFill>
+          <a:ln w="13716">
+            <a:solidFill>
+              <a:srgbClr val="0284C7"/>
+            </a:solidFill>
+          </a:ln>
+        </p:spPr>
+        <p:txBody>
+          <a:bodyPr anchor="t"/>
+          <a:lstStyle/>
+          <a:p>
+            <a:pPr algn="l"/>
+            <a:r>
+              <a:rPr b="1" sz="1300">
+                <a:solidFill>
+                  <a:srgbClr val="38BDF8"/>
+                </a:solidFill>
+                <a:latin typeface="+mn-lt"/>
+                <a:cs typeface="+mn-lt"/>
+              </a:rPr>
+              <a:t>⚡ Zero Native Bindings</a:t>
+            </a:r>
+          </a:p>
+        </p:txBody>
+      </p:sp>
+      <p:sp>
+        <p:nvSpPr>
+          <p:cNvPr id="7" name="Text Box 6"/>
+          <p:cNvSpPr/>
+          <p:nvPr/>
+        </p:nvSpPr>
+        <p:spPr>
+          <a:xfrm>
+            <a:off x="7772400" y="2240280"/>
+            <a:ext cx="3291840" cy="731520"/>
+          </a:xfrm>
+          <a:prstGeom prst="rect">
+            <a:avLst/>
+          </a:prstGeom>
+        </p:spPr>
+        <p:txBody>
+          <a:bodyPr anchor="t"/>
+          <a:lstStyle/>
+          <a:p>
+            <a:pPr algn="l"/>
+            <a:r>
+              <a:rPr sz="1000">
+                <a:solidFill>
+                  <a:srgbClr val="94A3B8"/>
+                </a:solidFill>
+                <a:latin typeface="+mn-lt"/>
+                <a:cs typeface="+mn-lt"/>
+              </a:rPr>
+              <a:t>Generates ECMA-376 compliant DrawingML charts directly from pure TypeScript arrays without spawning Python, Java, or Excel subprocesses.</a:t>
+            </a:r>
+          </a:p>
+        </p:txBody>
+      </p:sp>
+      <p:sp>
+        <p:nvSpPr>
+          <p:cNvPr id="8" name="roundRect 7"/>
+          <p:cNvSpPr/>
+          <p:nvPr/>
+        </p:nvSpPr>
+        <p:spPr>
+          <a:xfrm>
+            <a:off x="7589520" y="3246120"/>
+            <a:ext cx="3657600" cy="1234440"/>
+          </a:xfrm>
+          <a:prstGeom prst="roundRect">
+            <a:avLst/>
+          </a:prstGeom>
+          <a:solidFill>
+            <a:srgbClr val="1E293B"/>
+          </a:solidFill>
+          <a:ln w="13716">
+            <a:solidFill>
+              <a:srgbClr val="10B981"/>
+            </a:solidFill>
+          </a:ln>
+        </p:spPr>
+        <p:txBody>
+          <a:bodyPr anchor="t"/>
+          <a:lstStyle/>
+          <a:p>
+            <a:pPr algn="l"/>
+            <a:r>
+              <a:rPr b="1" sz="1300">
+                <a:solidFill>
+                  <a:srgbClr val="34D399"/>
+                </a:solidFill>
+                <a:latin typeface="+mn-lt"/>
+                <a:cs typeface="+mn-lt"/>
+              </a:rPr>
+              <a:t>📈 Fully Editable &amp; Scalable</a:t>
+            </a:r>
+          </a:p>
+        </p:txBody>
+      </p:sp>
+      <p:sp>
+        <p:nvSpPr>
+          <p:cNvPr id="9" name="Text Box 8"/>
+          <p:cNvSpPr/>
+          <p:nvPr/>
+        </p:nvSpPr>
+        <p:spPr>
+          <a:xfrm>
+            <a:off x="7772400" y="3657600"/>
+            <a:ext cx="3291840" cy="731520"/>
+          </a:xfrm>
+          <a:prstGeom prst="rect">
+            <a:avLst/>
+          </a:prstGeom>
+        </p:spPr>
+        <p:txBody>
+          <a:bodyPr anchor="t"/>
+          <a:lstStyle/>
+          <a:p>
+            <a:pPr algn="l"/>
+            <a:r>
+              <a:rPr sz="1000">
+                <a:solidFill>
+                  <a:srgbClr val="94A3B8"/>
+                </a:solidFill>
+                <a:latin typeface="+mn-lt"/>
+                <a:cs typeface="+mn-lt"/>
+              </a:rPr>
+              <a:t>Embedded as vector OpenXML chart spaces. Users can edit values, change themes, or modify series formatting natively inside Microsoft PowerPoint.</a:t>
+            </a:r>
+          </a:p>
+        </p:txBody>
+      </p:sp>
+      <p:sp>
+        <p:nvSpPr>
+          <p:cNvPr id="10" name="roundRect 9"/>
+          <p:cNvSpPr/>
+          <p:nvPr/>
+        </p:nvSpPr>
+        <p:spPr>
+          <a:xfrm>
+            <a:off x="7589520" y="4663440"/>
+            <a:ext cx="3657600" cy="1234440"/>
+          </a:xfrm>
+          <a:prstGeom prst="roundRect">
+            <a:avLst/>
+          </a:prstGeom>
+          <a:solidFill>
+            <a:srgbClr val="1E293B"/>
+          </a:solidFill>
+          <a:ln w="13716">
+            <a:solidFill>
+              <a:srgbClr val="6366F1"/>
+            </a:solidFill>
+          </a:ln>
+        </p:spPr>
+        <p:txBody>
+          <a:bodyPr anchor="t"/>
+          <a:lstStyle/>
+          <a:p>
+            <a:pPr algn="l"/>
+            <a:r>
+              <a:rPr b="1" sz="1300">
+                <a:solidFill>
+                  <a:srgbClr val="818CF8"/>
+                </a:solidFill>
+                <a:latin typeface="+mn-lt"/>
+                <a:cs typeface="+mn-lt"/>
+              </a:rPr>
+              <a:t>🎨 Multi-Type Chart Engine</a:t>
+            </a:r>
+          </a:p>
+        </p:txBody>
+      </p:sp>
+      <p:sp>
+        <p:nvSpPr>
+          <p:cNvPr id="11" name="Text Box 10"/>
+          <p:cNvSpPr/>
+          <p:nvPr/>
+        </p:nvSpPr>
+        <p:spPr>
+          <a:xfrm>
+            <a:off x="7772400" y="5074920"/>
+            <a:ext cx="3291840" cy="731520"/>
+          </a:xfrm>
+          <a:prstGeom prst="rect">
+            <a:avLst/>
+          </a:prstGeom>
+        </p:spPr>
+        <p:txBody>
+          <a:bodyPr anchor="t"/>
+          <a:lstStyle/>
+          <a:p>
+            <a:pPr algn="l"/>
+            <a:r>
+              <a:rPr sz="1000">
+                <a:solidFill>
+                  <a:srgbClr val="94A3B8"/>
+                </a:solidFill>
+                <a:latin typeface="+mn-lt"/>
+                <a:cs typeface="+mn-lt"/>
+              </a:rPr>
+              <a:t>Supports column, bar, line, area, and pie chart topologies with custom series coloring, categorical axes, and configurable legend alignments.</a:t>
+            </a:r>
+          </a:p>
+        </p:txBody>
+      </p:sp>
+      <p:sp>
+        <p:nvSpPr>
+          <p:cNvPr id="12" name="Text Box 11"/>
+          <p:cNvSpPr/>
+          <p:nvPr/>
+        </p:nvSpPr>
+        <p:spPr>
+          <a:xfrm>
+            <a:off x="731520" y="6510528"/>
+            <a:ext cx="10725912" cy="228600"/>
+          </a:xfrm>
+          <a:prstGeom prst="rect">
+            <a:avLst/>
+          </a:prstGeom>
+        </p:spPr>
+        <p:txBody>
+          <a:bodyPr anchor="t"/>
+          <a:lstStyle/>
+          <a:p>
+            <a:pPr algn="ctr"/>
+            <a:r>
+              <a:rPr i="1" sz="800">
+                <a:solidFill>
+                  <a:srgbClr val="64748B"/>
+                </a:solidFill>
+                <a:latin typeface="+mn-lt"/>
+                <a:cs typeface="+mn-lt"/>
+              </a:rPr>
+              <a:t>* Disclaimer: All benchmark metrics, performance figures, and simulated architectures in this deck are synthetic demonstration values generated solely to showcase the authoring, formatting, and rendering capabilities of @hokkyss/pptx.</a:t>
+            </a:r>
+          </a:p>
+        </p:txBody>
+      </p:sp>
     </p:spTree>
   </p:cSld>
   <p:clrMapOvr>

--- a/hokkyss_showcase_deck.pptx
+++ b/hokkyss_showcase_deck.pptx
@@ -33,92 +33,92 @@
     </a:defPPr>
     <a:lvl1pPr algn="l" defTabSz="914400" eaLnBrk="1" hangingPunct="1" latinLnBrk="0" marL="0" rtl="0">
       <a:defRPr kern="1200" sz="1800">
-        <a:cs typeface="+mn-cs"/>
-        <a:ea typeface="+mn-ea"/>
-        <a:latin typeface="+mn-lt"/>
         <a:solidFill>
           <a:schemeClr val="tx1"/>
         </a:solidFill>
+        <a:latin typeface="+mn-lt"/>
+        <a:ea typeface="+mn-ea"/>
+        <a:cs typeface="+mn-cs"/>
       </a:defRPr>
     </a:lvl1pPr>
     <a:lvl2pPr algn="l" defTabSz="914400" eaLnBrk="1" hangingPunct="1" latinLnBrk="0" marL="457200" rtl="0">
       <a:defRPr kern="1200" sz="1800">
-        <a:cs typeface="+mn-cs"/>
-        <a:ea typeface="+mn-ea"/>
-        <a:latin typeface="+mn-lt"/>
         <a:solidFill>
           <a:schemeClr val="tx1"/>
         </a:solidFill>
+        <a:latin typeface="+mn-lt"/>
+        <a:ea typeface="+mn-ea"/>
+        <a:cs typeface="+mn-cs"/>
       </a:defRPr>
     </a:lvl2pPr>
     <a:lvl3pPr algn="l" defTabSz="914400" eaLnBrk="1" hangingPunct="1" latinLnBrk="0" marL="914400" rtl="0">
       <a:defRPr kern="1200" sz="1800">
-        <a:cs typeface="+mn-cs"/>
-        <a:ea typeface="+mn-ea"/>
-        <a:latin typeface="+mn-lt"/>
         <a:solidFill>
           <a:schemeClr val="tx1"/>
         </a:solidFill>
+        <a:latin typeface="+mn-lt"/>
+        <a:ea typeface="+mn-ea"/>
+        <a:cs typeface="+mn-cs"/>
       </a:defRPr>
     </a:lvl3pPr>
     <a:lvl4pPr algn="l" defTabSz="914400" eaLnBrk="1" hangingPunct="1" latinLnBrk="0" marL="1371600" rtl="0">
       <a:defRPr kern="1200" sz="1800">
-        <a:cs typeface="+mn-cs"/>
-        <a:ea typeface="+mn-ea"/>
-        <a:latin typeface="+mn-lt"/>
         <a:solidFill>
           <a:schemeClr val="tx1"/>
         </a:solidFill>
+        <a:latin typeface="+mn-lt"/>
+        <a:ea typeface="+mn-ea"/>
+        <a:cs typeface="+mn-cs"/>
       </a:defRPr>
     </a:lvl4pPr>
     <a:lvl5pPr algn="l" defTabSz="914400" eaLnBrk="1" hangingPunct="1" latinLnBrk="0" marL="1828800" rtl="0">
       <a:defRPr kern="1200" sz="1800">
-        <a:cs typeface="+mn-cs"/>
-        <a:ea typeface="+mn-ea"/>
-        <a:latin typeface="+mn-lt"/>
         <a:solidFill>
           <a:schemeClr val="tx1"/>
         </a:solidFill>
+        <a:latin typeface="+mn-lt"/>
+        <a:ea typeface="+mn-ea"/>
+        <a:cs typeface="+mn-cs"/>
       </a:defRPr>
     </a:lvl5pPr>
     <a:lvl6pPr algn="l" defTabSz="914400" eaLnBrk="1" hangingPunct="1" latinLnBrk="0" marL="2286000" rtl="0">
       <a:defRPr kern="1200" sz="1800">
-        <a:cs typeface="+mn-cs"/>
-        <a:ea typeface="+mn-ea"/>
-        <a:latin typeface="+mn-lt"/>
         <a:solidFill>
           <a:schemeClr val="tx1"/>
         </a:solidFill>
+        <a:latin typeface="+mn-lt"/>
+        <a:ea typeface="+mn-ea"/>
+        <a:cs typeface="+mn-cs"/>
       </a:defRPr>
     </a:lvl6pPr>
     <a:lvl7pPr algn="l" defTabSz="914400" eaLnBrk="1" hangingPunct="1" latinLnBrk="0" marL="2743200" rtl="0">
       <a:defRPr kern="1200" sz="1800">
-        <a:cs typeface="+mn-cs"/>
-        <a:ea typeface="+mn-ea"/>
-        <a:latin typeface="+mn-lt"/>
         <a:solidFill>
           <a:schemeClr val="tx1"/>
         </a:solidFill>
+        <a:latin typeface="+mn-lt"/>
+        <a:ea typeface="+mn-ea"/>
+        <a:cs typeface="+mn-cs"/>
       </a:defRPr>
     </a:lvl7pPr>
     <a:lvl8pPr algn="l" defTabSz="914400" eaLnBrk="1" hangingPunct="1" latinLnBrk="0" marL="3200400" rtl="0">
       <a:defRPr kern="1200" sz="1800">
-        <a:cs typeface="+mn-cs"/>
-        <a:ea typeface="+mn-ea"/>
-        <a:latin typeface="+mn-lt"/>
         <a:solidFill>
           <a:schemeClr val="tx1"/>
         </a:solidFill>
+        <a:latin typeface="+mn-lt"/>
+        <a:ea typeface="+mn-ea"/>
+        <a:cs typeface="+mn-cs"/>
       </a:defRPr>
     </a:lvl8pPr>
     <a:lvl9pPr algn="l" defTabSz="914400" eaLnBrk="1" hangingPunct="1" latinLnBrk="0" marL="3657600" rtl="0">
       <a:defRPr kern="1200" sz="1800">
-        <a:cs typeface="+mn-cs"/>
-        <a:ea typeface="+mn-ea"/>
-        <a:latin typeface="+mn-lt"/>
         <a:solidFill>
           <a:schemeClr val="tx1"/>
         </a:solidFill>
+        <a:latin typeface="+mn-lt"/>
+        <a:ea typeface="+mn-ea"/>
+        <a:cs typeface="+mn-cs"/>
       </a:defRPr>
     </a:lvl9pPr>
   </p:defaultTextStyle>
@@ -1836,7 +1836,7 @@
 </file>
 
 <file path=ppt/notesSlides/notesSlide1.xml><?xml version="1.0" encoding="utf-8"?>
-<p:notes xmlns:a="http://schemas.openxmlformats.org/drawingml/2006/main" xmlns:r="http://schemas.openxmlformats.org/officeDocument/2006/relationships" xmlns:p="http://schemas.openxmlformats.org/presentationml/2006/main">
+<p:notes xmlns:a="http://schemas.openxmlformats.org/drawingml/2006/main" xmlns:p="http://schemas.openxmlformats.org/presentationml/2006/main" xmlns:r="http://schemas.openxmlformats.org/officeDocument/2006/relationships">
   <p:cSld>
     <p:spTree>
       <p:nvGrpSpPr>
@@ -1856,7 +1856,7 @@
         <p:nvSpPr>
           <p:cNvPr id="2" name="Slide Image Placeholder 1"/>
           <p:cNvSpPr>
-            <a:spLocks noGrp="1" noRot="1" noChangeAspect="1"/>
+            <a:spLocks noChangeAspect="1" noGrp="1" noRot="1"/>
           </p:cNvSpPr>
           <p:nvPr>
             <p:ph type="sldImg"/>
@@ -1871,14 +1871,15 @@
             <a:spLocks noGrp="1"/>
           </p:cNvSpPr>
           <p:nvPr>
-            <p:ph type="body" idx="1"/>
+            <p:ph idx="1" type="body"/>
           </p:nvPr>
         </p:nvSpPr>
         <p:spPr/>
         <p:txBody>
-          <a:bodyPr/>
-          <a:lstStyle/>
-          <a:p>
+          <a:bodyPr anchor="t"/>
+          <a:lstStyle/>
+          <a:p>
+            <a:pPr algn="l" lvl="0"/>
             <a:r>
               <a:rPr b="1">
                 <a:latin typeface="+mn-lt"/>
@@ -1895,6 +1896,7 @@
             </a:r>
           </a:p>
           <a:p>
+            <a:pPr algn="l" lvl="0"/>
             <a:r>
               <a:rPr>
                 <a:latin typeface="+mn-lt"/>
@@ -1904,8 +1906,7 @@
             </a:r>
           </a:p>
           <a:p>
-            <a:pPr>
-              <a:buFont typeface="Arial" panose="020B0604020202020204" pitchFamily="34" charset="0"/>
+            <a:pPr algn="l" lvl="0" marL="152400" indent="-152400">
               <a:buChar char="•"/>
             </a:pPr>
             <a:r>
@@ -1931,8 +1932,7 @@
             </a:r>
           </a:p>
           <a:p>
-            <a:pPr lvl="1">
-              <a:buFont typeface="Arial" panose="020B0604020202020204" pitchFamily="34" charset="0"/>
+            <a:pPr algn="l" lvl="1" marL="381000" indent="-152400">
               <a:buChar char="•"/>
             </a:pPr>
             <a:r>
@@ -1944,8 +1944,7 @@
             </a:r>
           </a:p>
           <a:p>
-            <a:pPr lvl="1">
-              <a:buFont typeface="Arial" panose="020B0604020202020204" pitchFamily="34" charset="0"/>
+            <a:pPr algn="l" lvl="1" marL="381000" indent="-152400">
               <a:buChar char="•"/>
             </a:pPr>
             <a:r>
@@ -1957,8 +1956,7 @@
             </a:r>
           </a:p>
           <a:p>
-            <a:pPr>
-              <a:buFont typeface="Arial" panose="020B0604020202020204" pitchFamily="34" charset="0"/>
+            <a:pPr algn="l" lvl="0" marL="152400" indent="-152400">
               <a:buChar char="•"/>
             </a:pPr>
             <a:r>
@@ -1984,7 +1982,7 @@
             </a:r>
           </a:p>
           <a:p>
-            <a:pPr>
+            <a:pPr algn="l" lvl="0" marL="203200" indent="-203200">
               <a:buAutoNum type="arabicPeriod"/>
             </a:pPr>
             <a:r>
@@ -1996,7 +1994,7 @@
             </a:r>
           </a:p>
           <a:p>
-            <a:pPr>
+            <a:pPr algn="l" lvl="0" marL="203200" indent="-203200">
               <a:buAutoNum type="arabicPeriod"/>
             </a:pPr>
             <a:r>
@@ -2018,7 +2016,7 @@
 </file>
 
 <file path=ppt/notesSlides/notesSlide10.xml><?xml version="1.0" encoding="utf-8"?>
-<p:notes xmlns:a="http://schemas.openxmlformats.org/drawingml/2006/main" xmlns:r="http://schemas.openxmlformats.org/officeDocument/2006/relationships" xmlns:p="http://schemas.openxmlformats.org/presentationml/2006/main">
+<p:notes xmlns:a="http://schemas.openxmlformats.org/drawingml/2006/main" xmlns:p="http://schemas.openxmlformats.org/presentationml/2006/main" xmlns:r="http://schemas.openxmlformats.org/officeDocument/2006/relationships">
   <p:cSld>
     <p:spTree>
       <p:nvGrpSpPr>
@@ -2038,7 +2036,7 @@
         <p:nvSpPr>
           <p:cNvPr id="2" name="Slide Image Placeholder 1"/>
           <p:cNvSpPr>
-            <a:spLocks noGrp="1" noRot="1" noChangeAspect="1"/>
+            <a:spLocks noChangeAspect="1" noGrp="1" noRot="1"/>
           </p:cNvSpPr>
           <p:nvPr>
             <p:ph type="sldImg"/>
@@ -2053,14 +2051,15 @@
             <a:spLocks noGrp="1"/>
           </p:cNvSpPr>
           <p:nvPr>
-            <p:ph type="body" idx="1"/>
+            <p:ph idx="1" type="body"/>
           </p:nvPr>
         </p:nvSpPr>
         <p:spPr/>
         <p:txBody>
-          <a:bodyPr/>
-          <a:lstStyle/>
-          <a:p>
+          <a:bodyPr anchor="t"/>
+          <a:lstStyle/>
+          <a:p>
+            <a:pPr algn="l" lvl="0"/>
             <a:r>
               <a:rPr b="1">
                 <a:latin typeface="+mn-lt"/>
@@ -2077,8 +2076,7 @@
             </a:r>
           </a:p>
           <a:p>
-            <a:pPr>
-              <a:buFont typeface="Arial" panose="020B0604020202020204" pitchFamily="34" charset="0"/>
+            <a:pPr algn="l" lvl="0" marL="152400" indent="-152400">
               <a:buChar char="•"/>
             </a:pPr>
             <a:r>
@@ -2090,8 +2088,7 @@
             </a:r>
           </a:p>
           <a:p>
-            <a:pPr>
-              <a:buFont typeface="Arial" panose="020B0604020202020204" pitchFamily="34" charset="0"/>
+            <a:pPr algn="l" lvl="0" marL="152400" indent="-152400">
               <a:buChar char="•"/>
             </a:pPr>
             <a:r>
@@ -2103,8 +2100,7 @@
             </a:r>
           </a:p>
           <a:p>
-            <a:pPr>
-              <a:buFont typeface="Arial" panose="020B0604020202020204" pitchFamily="34" charset="0"/>
+            <a:pPr algn="l" lvl="0" marL="152400" indent="-152400">
               <a:buChar char="•"/>
             </a:pPr>
             <a:r>
@@ -2126,7 +2122,7 @@
 </file>
 
 <file path=ppt/notesSlides/notesSlide11.xml><?xml version="1.0" encoding="utf-8"?>
-<p:notes xmlns:a="http://schemas.openxmlformats.org/drawingml/2006/main" xmlns:r="http://schemas.openxmlformats.org/officeDocument/2006/relationships" xmlns:p="http://schemas.openxmlformats.org/presentationml/2006/main">
+<p:notes xmlns:a="http://schemas.openxmlformats.org/drawingml/2006/main" xmlns:p="http://schemas.openxmlformats.org/presentationml/2006/main" xmlns:r="http://schemas.openxmlformats.org/officeDocument/2006/relationships">
   <p:cSld>
     <p:spTree>
       <p:nvGrpSpPr>
@@ -2146,7 +2142,7 @@
         <p:nvSpPr>
           <p:cNvPr id="2" name="Slide Image Placeholder 1"/>
           <p:cNvSpPr>
-            <a:spLocks noGrp="1" noRot="1" noChangeAspect="1"/>
+            <a:spLocks noChangeAspect="1" noGrp="1" noRot="1"/>
           </p:cNvSpPr>
           <p:nvPr>
             <p:ph type="sldImg"/>
@@ -2161,14 +2157,15 @@
             <a:spLocks noGrp="1"/>
           </p:cNvSpPr>
           <p:nvPr>
-            <p:ph type="body" idx="1"/>
+            <p:ph idx="1" type="body"/>
           </p:nvPr>
         </p:nvSpPr>
         <p:spPr/>
         <p:txBody>
-          <a:bodyPr/>
-          <a:lstStyle/>
-          <a:p>
+          <a:bodyPr anchor="t"/>
+          <a:lstStyle/>
+          <a:p>
+            <a:pPr algn="l" lvl="0"/>
             <a:r>
               <a:rPr b="1">
                 <a:latin typeface="+mn-lt"/>
@@ -2185,8 +2182,7 @@
             </a:r>
           </a:p>
           <a:p>
-            <a:pPr>
-              <a:buFont typeface="Arial" panose="020B0604020202020204" pitchFamily="34" charset="0"/>
+            <a:pPr algn="l" lvl="0" marL="152400" indent="-152400">
               <a:buChar char="•"/>
             </a:pPr>
             <a:r>
@@ -2198,8 +2194,7 @@
             </a:r>
           </a:p>
           <a:p>
-            <a:pPr>
-              <a:buFont typeface="Arial" panose="020B0604020202020204" pitchFamily="34" charset="0"/>
+            <a:pPr algn="l" lvl="0" marL="152400" indent="-152400">
               <a:buChar char="•"/>
             </a:pPr>
             <a:r>
@@ -2211,8 +2206,7 @@
             </a:r>
           </a:p>
           <a:p>
-            <a:pPr>
-              <a:buFont typeface="Arial" panose="020B0604020202020204" pitchFamily="34" charset="0"/>
+            <a:pPr algn="l" lvl="0" marL="152400" indent="-152400">
               <a:buChar char="•"/>
             </a:pPr>
             <a:r>
@@ -2234,7 +2228,7 @@
 </file>
 
 <file path=ppt/notesSlides/notesSlide12.xml><?xml version="1.0" encoding="utf-8"?>
-<p:notes xmlns:a="http://schemas.openxmlformats.org/drawingml/2006/main" xmlns:r="http://schemas.openxmlformats.org/officeDocument/2006/relationships" xmlns:p="http://schemas.openxmlformats.org/presentationml/2006/main">
+<p:notes xmlns:a="http://schemas.openxmlformats.org/drawingml/2006/main" xmlns:p="http://schemas.openxmlformats.org/presentationml/2006/main" xmlns:r="http://schemas.openxmlformats.org/officeDocument/2006/relationships">
   <p:cSld>
     <p:spTree>
       <p:nvGrpSpPr>
@@ -2254,7 +2248,7 @@
         <p:nvSpPr>
           <p:cNvPr id="2" name="Slide Image Placeholder 1"/>
           <p:cNvSpPr>
-            <a:spLocks noGrp="1" noRot="1" noChangeAspect="1"/>
+            <a:spLocks noChangeAspect="1" noGrp="1" noRot="1"/>
           </p:cNvSpPr>
           <p:nvPr>
             <p:ph type="sldImg"/>
@@ -2269,14 +2263,15 @@
             <a:spLocks noGrp="1"/>
           </p:cNvSpPr>
           <p:nvPr>
-            <p:ph type="body" idx="1"/>
+            <p:ph idx="1" type="body"/>
           </p:nvPr>
         </p:nvSpPr>
         <p:spPr/>
         <p:txBody>
-          <a:bodyPr/>
-          <a:lstStyle/>
-          <a:p>
+          <a:bodyPr anchor="t"/>
+          <a:lstStyle/>
+          <a:p>
+            <a:pPr algn="l" lvl="0"/>
             <a:r>
               <a:rPr b="1">
                 <a:latin typeface="+mn-lt"/>
@@ -2293,8 +2288,7 @@
             </a:r>
           </a:p>
           <a:p>
-            <a:pPr>
-              <a:buFont typeface="Arial" panose="020B0604020202020204" pitchFamily="34" charset="0"/>
+            <a:pPr algn="l" lvl="0" marL="152400" indent="-152400">
               <a:buChar char="•"/>
             </a:pPr>
             <a:r>
@@ -2306,8 +2300,7 @@
             </a:r>
           </a:p>
           <a:p>
-            <a:pPr>
-              <a:buFont typeface="Arial" panose="020B0604020202020204" pitchFamily="34" charset="0"/>
+            <a:pPr algn="l" lvl="0" marL="152400" indent="-152400">
               <a:buChar char="•"/>
             </a:pPr>
             <a:r>
@@ -2319,8 +2312,7 @@
             </a:r>
           </a:p>
           <a:p>
-            <a:pPr>
-              <a:buFont typeface="Arial" panose="020B0604020202020204" pitchFamily="34" charset="0"/>
+            <a:pPr algn="l" lvl="0" marL="152400" indent="-152400">
               <a:buChar char="•"/>
             </a:pPr>
             <a:r>
@@ -2342,7 +2334,7 @@
 </file>
 
 <file path=ppt/notesSlides/notesSlide2.xml><?xml version="1.0" encoding="utf-8"?>
-<p:notes xmlns:a="http://schemas.openxmlformats.org/drawingml/2006/main" xmlns:r="http://schemas.openxmlformats.org/officeDocument/2006/relationships" xmlns:p="http://schemas.openxmlformats.org/presentationml/2006/main">
+<p:notes xmlns:a="http://schemas.openxmlformats.org/drawingml/2006/main" xmlns:p="http://schemas.openxmlformats.org/presentationml/2006/main" xmlns:r="http://schemas.openxmlformats.org/officeDocument/2006/relationships">
   <p:cSld>
     <p:spTree>
       <p:nvGrpSpPr>
@@ -2362,7 +2354,7 @@
         <p:nvSpPr>
           <p:cNvPr id="2" name="Slide Image Placeholder 1"/>
           <p:cNvSpPr>
-            <a:spLocks noGrp="1" noRot="1" noChangeAspect="1"/>
+            <a:spLocks noChangeAspect="1" noGrp="1" noRot="1"/>
           </p:cNvSpPr>
           <p:nvPr>
             <p:ph type="sldImg"/>
@@ -2377,14 +2369,15 @@
             <a:spLocks noGrp="1"/>
           </p:cNvSpPr>
           <p:nvPr>
-            <p:ph type="body" idx="1"/>
+            <p:ph idx="1" type="body"/>
           </p:nvPr>
         </p:nvSpPr>
         <p:spPr/>
         <p:txBody>
-          <a:bodyPr/>
-          <a:lstStyle/>
-          <a:p>
+          <a:bodyPr anchor="t"/>
+          <a:lstStyle/>
+          <a:p>
+            <a:pPr algn="l" lvl="0"/>
             <a:r>
               <a:rPr b="1">
                 <a:latin typeface="+mn-lt"/>
@@ -2401,8 +2394,7 @@
             </a:r>
           </a:p>
           <a:p>
-            <a:pPr>
-              <a:buFont typeface="Arial" panose="020B0604020202020204" pitchFamily="34" charset="0"/>
+            <a:pPr algn="l" lvl="0" marL="152400" indent="-152400">
               <a:buChar char="•"/>
             </a:pPr>
             <a:r>
@@ -2414,8 +2406,7 @@
             </a:r>
           </a:p>
           <a:p>
-            <a:pPr>
-              <a:buFont typeface="Arial" panose="020B0604020202020204" pitchFamily="34" charset="0"/>
+            <a:pPr algn="l" lvl="0" marL="152400" indent="-152400">
               <a:buChar char="•"/>
             </a:pPr>
             <a:r>
@@ -2437,7 +2428,7 @@
 </file>
 
 <file path=ppt/notesSlides/notesSlide3.xml><?xml version="1.0" encoding="utf-8"?>
-<p:notes xmlns:a="http://schemas.openxmlformats.org/drawingml/2006/main" xmlns:r="http://schemas.openxmlformats.org/officeDocument/2006/relationships" xmlns:p="http://schemas.openxmlformats.org/presentationml/2006/main">
+<p:notes xmlns:a="http://schemas.openxmlformats.org/drawingml/2006/main" xmlns:p="http://schemas.openxmlformats.org/presentationml/2006/main" xmlns:r="http://schemas.openxmlformats.org/officeDocument/2006/relationships">
   <p:cSld>
     <p:spTree>
       <p:nvGrpSpPr>
@@ -2457,7 +2448,7 @@
         <p:nvSpPr>
           <p:cNvPr id="2" name="Slide Image Placeholder 1"/>
           <p:cNvSpPr>
-            <a:spLocks noGrp="1" noRot="1" noChangeAspect="1"/>
+            <a:spLocks noChangeAspect="1" noGrp="1" noRot="1"/>
           </p:cNvSpPr>
           <p:nvPr>
             <p:ph type="sldImg"/>
@@ -2472,14 +2463,15 @@
             <a:spLocks noGrp="1"/>
           </p:cNvSpPr>
           <p:nvPr>
-            <p:ph type="body" idx="1"/>
+            <p:ph idx="1" type="body"/>
           </p:nvPr>
         </p:nvSpPr>
         <p:spPr/>
         <p:txBody>
-          <a:bodyPr/>
-          <a:lstStyle/>
-          <a:p>
+          <a:bodyPr anchor="t"/>
+          <a:lstStyle/>
+          <a:p>
+            <a:pPr algn="l" lvl="0"/>
             <a:r>
               <a:rPr b="1" u="sng">
                 <a:latin typeface="+mn-lt"/>
@@ -2489,8 +2481,7 @@
             </a:r>
           </a:p>
           <a:p>
-            <a:pPr>
-              <a:buFont typeface="Arial" panose="020B0604020202020204" pitchFamily="34" charset="0"/>
+            <a:pPr algn="l" lvl="0" marL="152400" indent="-152400">
               <a:buChar char="•"/>
             </a:pPr>
             <a:r>
@@ -2502,8 +2493,7 @@
             </a:r>
           </a:p>
           <a:p>
-            <a:pPr>
-              <a:buFont typeface="Arial" panose="020B0604020202020204" pitchFamily="34" charset="0"/>
+            <a:pPr algn="l" lvl="0" marL="152400" indent="-152400">
               <a:buChar char="•"/>
             </a:pPr>
             <a:r>
@@ -2515,8 +2505,7 @@
             </a:r>
           </a:p>
           <a:p>
-            <a:pPr lvl="1">
-              <a:buFont typeface="Arial" panose="020B0604020202020204" pitchFamily="34" charset="0"/>
+            <a:pPr algn="l" lvl="1" marL="381000" indent="-152400">
               <a:buChar char="•"/>
             </a:pPr>
             <a:r>
@@ -2528,8 +2517,7 @@
             </a:r>
           </a:p>
           <a:p>
-            <a:pPr lvl="1">
-              <a:buFont typeface="Arial" panose="020B0604020202020204" pitchFamily="34" charset="0"/>
+            <a:pPr algn="l" lvl="1" marL="381000" indent="-152400">
               <a:buChar char="•"/>
             </a:pPr>
             <a:r>
@@ -2541,8 +2529,7 @@
             </a:r>
           </a:p>
           <a:p>
-            <a:pPr lvl="2">
-              <a:buFont typeface="Arial" panose="020B0604020202020204" pitchFamily="34" charset="0"/>
+            <a:pPr algn="l" lvl="2" marL="609600" indent="-152400">
               <a:buChar char="•"/>
             </a:pPr>
             <a:r>
@@ -2554,8 +2541,7 @@
             </a:r>
           </a:p>
           <a:p>
-            <a:pPr lvl="3">
-              <a:buFont typeface="Arial" panose="020B0604020202020204" pitchFamily="34" charset="0"/>
+            <a:pPr algn="l" lvl="3" marL="838200" indent="-152400">
               <a:buChar char="•"/>
             </a:pPr>
             <a:r>
@@ -2567,7 +2553,7 @@
             </a:r>
           </a:p>
           <a:p>
-            <a:pPr>
+            <a:pPr algn="l" lvl="0" marL="203200" indent="-203200">
               <a:buAutoNum type="arabicPeriod"/>
             </a:pPr>
             <a:r>
@@ -2589,7 +2575,7 @@
 </file>
 
 <file path=ppt/notesSlides/notesSlide4.xml><?xml version="1.0" encoding="utf-8"?>
-<p:notes xmlns:a="http://schemas.openxmlformats.org/drawingml/2006/main" xmlns:r="http://schemas.openxmlformats.org/officeDocument/2006/relationships" xmlns:p="http://schemas.openxmlformats.org/presentationml/2006/main">
+<p:notes xmlns:a="http://schemas.openxmlformats.org/drawingml/2006/main" xmlns:p="http://schemas.openxmlformats.org/presentationml/2006/main" xmlns:r="http://schemas.openxmlformats.org/officeDocument/2006/relationships">
   <p:cSld>
     <p:spTree>
       <p:nvGrpSpPr>
@@ -2609,7 +2595,7 @@
         <p:nvSpPr>
           <p:cNvPr id="2" name="Slide Image Placeholder 1"/>
           <p:cNvSpPr>
-            <a:spLocks noGrp="1" noRot="1" noChangeAspect="1"/>
+            <a:spLocks noChangeAspect="1" noGrp="1" noRot="1"/>
           </p:cNvSpPr>
           <p:nvPr>
             <p:ph type="sldImg"/>
@@ -2624,14 +2610,15 @@
             <a:spLocks noGrp="1"/>
           </p:cNvSpPr>
           <p:nvPr>
-            <p:ph type="body" idx="1"/>
+            <p:ph idx="1" type="body"/>
           </p:nvPr>
         </p:nvSpPr>
         <p:spPr/>
         <p:txBody>
-          <a:bodyPr/>
-          <a:lstStyle/>
-          <a:p>
+          <a:bodyPr anchor="t"/>
+          <a:lstStyle/>
+          <a:p>
+            <a:pPr algn="l" lvl="0"/>
             <a:r>
               <a:rPr b="1" u="sng">
                 <a:latin typeface="+mn-lt"/>
@@ -2641,8 +2628,7 @@
             </a:r>
           </a:p>
           <a:p>
-            <a:pPr>
-              <a:buFont typeface="Arial" panose="020B0604020202020204" pitchFamily="34" charset="0"/>
+            <a:pPr algn="l" lvl="0" marL="152400" indent="-152400">
               <a:buChar char="•"/>
             </a:pPr>
             <a:r>
@@ -2654,8 +2640,7 @@
             </a:r>
           </a:p>
           <a:p>
-            <a:pPr>
-              <a:buFont typeface="Arial" panose="020B0604020202020204" pitchFamily="34" charset="0"/>
+            <a:pPr algn="l" lvl="0" marL="152400" indent="-152400">
               <a:buChar char="•"/>
             </a:pPr>
             <a:r>
@@ -2667,8 +2652,7 @@
             </a:r>
           </a:p>
           <a:p>
-            <a:pPr lvl="1">
-              <a:buFont typeface="Arial" panose="020B0604020202020204" pitchFamily="34" charset="0"/>
+            <a:pPr algn="l" lvl="1" marL="381000" indent="-152400">
               <a:buChar char="•"/>
             </a:pPr>
             <a:r>
@@ -2680,8 +2664,7 @@
             </a:r>
           </a:p>
           <a:p>
-            <a:pPr lvl="1">
-              <a:buFont typeface="Arial" panose="020B0604020202020204" pitchFamily="34" charset="0"/>
+            <a:pPr algn="l" lvl="1" marL="381000" indent="-152400">
               <a:buChar char="•"/>
             </a:pPr>
             <a:r>
@@ -2703,7 +2686,7 @@
 </file>
 
 <file path=ppt/notesSlides/notesSlide5.xml><?xml version="1.0" encoding="utf-8"?>
-<p:notes xmlns:a="http://schemas.openxmlformats.org/drawingml/2006/main" xmlns:r="http://schemas.openxmlformats.org/officeDocument/2006/relationships" xmlns:p="http://schemas.openxmlformats.org/presentationml/2006/main">
+<p:notes xmlns:a="http://schemas.openxmlformats.org/drawingml/2006/main" xmlns:p="http://schemas.openxmlformats.org/presentationml/2006/main" xmlns:r="http://schemas.openxmlformats.org/officeDocument/2006/relationships">
   <p:cSld>
     <p:spTree>
       <p:nvGrpSpPr>
@@ -2723,7 +2706,7 @@
         <p:nvSpPr>
           <p:cNvPr id="2" name="Slide Image Placeholder 1"/>
           <p:cNvSpPr>
-            <a:spLocks noGrp="1" noRot="1" noChangeAspect="1"/>
+            <a:spLocks noChangeAspect="1" noGrp="1" noRot="1"/>
           </p:cNvSpPr>
           <p:nvPr>
             <p:ph type="sldImg"/>
@@ -2738,14 +2721,15 @@
             <a:spLocks noGrp="1"/>
           </p:cNvSpPr>
           <p:nvPr>
-            <p:ph type="body" idx="1"/>
+            <p:ph idx="1" type="body"/>
           </p:nvPr>
         </p:nvSpPr>
         <p:spPr/>
         <p:txBody>
-          <a:bodyPr/>
-          <a:lstStyle/>
-          <a:p>
+          <a:bodyPr anchor="t"/>
+          <a:lstStyle/>
+          <a:p>
+            <a:pPr algn="l" lvl="0"/>
             <a:r>
               <a:rPr b="1" u="sng">
                 <a:latin typeface="+mn-lt"/>
@@ -2755,8 +2739,7 @@
             </a:r>
           </a:p>
           <a:p>
-            <a:pPr>
-              <a:buFont typeface="Arial" panose="020B0604020202020204" pitchFamily="34" charset="0"/>
+            <a:pPr algn="l" lvl="0" marL="152400" indent="-152400">
               <a:buChar char="•"/>
             </a:pPr>
             <a:r>
@@ -2768,8 +2751,7 @@
             </a:r>
           </a:p>
           <a:p>
-            <a:pPr>
-              <a:buFont typeface="Arial" panose="020B0604020202020204" pitchFamily="34" charset="0"/>
+            <a:pPr algn="l" lvl="0" marL="152400" indent="-152400">
               <a:buChar char="•"/>
             </a:pPr>
             <a:r>
@@ -2781,8 +2763,7 @@
             </a:r>
           </a:p>
           <a:p>
-            <a:pPr lvl="1">
-              <a:buFont typeface="Arial" panose="020B0604020202020204" pitchFamily="34" charset="0"/>
+            <a:pPr algn="l" lvl="1" marL="381000" indent="-152400">
               <a:buChar char="•"/>
             </a:pPr>
             <a:r>
@@ -2804,7 +2785,7 @@
 </file>
 
 <file path=ppt/notesSlides/notesSlide6.xml><?xml version="1.0" encoding="utf-8"?>
-<p:notes xmlns:a="http://schemas.openxmlformats.org/drawingml/2006/main" xmlns:r="http://schemas.openxmlformats.org/officeDocument/2006/relationships" xmlns:p="http://schemas.openxmlformats.org/presentationml/2006/main">
+<p:notes xmlns:a="http://schemas.openxmlformats.org/drawingml/2006/main" xmlns:p="http://schemas.openxmlformats.org/presentationml/2006/main" xmlns:r="http://schemas.openxmlformats.org/officeDocument/2006/relationships">
   <p:cSld>
     <p:spTree>
       <p:nvGrpSpPr>
@@ -2824,7 +2805,7 @@
         <p:nvSpPr>
           <p:cNvPr id="2" name="Slide Image Placeholder 1"/>
           <p:cNvSpPr>
-            <a:spLocks noGrp="1" noRot="1" noChangeAspect="1"/>
+            <a:spLocks noChangeAspect="1" noGrp="1" noRot="1"/>
           </p:cNvSpPr>
           <p:nvPr>
             <p:ph type="sldImg"/>
@@ -2839,14 +2820,15 @@
             <a:spLocks noGrp="1"/>
           </p:cNvSpPr>
           <p:nvPr>
-            <p:ph type="body" idx="1"/>
+            <p:ph idx="1" type="body"/>
           </p:nvPr>
         </p:nvSpPr>
         <p:spPr/>
         <p:txBody>
-          <a:bodyPr/>
-          <a:lstStyle/>
-          <a:p>
+          <a:bodyPr anchor="t"/>
+          <a:lstStyle/>
+          <a:p>
+            <a:pPr algn="l" lvl="0"/>
             <a:r>
               <a:rPr b="1">
                 <a:latin typeface="+mn-lt"/>
@@ -2863,8 +2845,7 @@
             </a:r>
           </a:p>
           <a:p>
-            <a:pPr>
-              <a:buFont typeface="Arial" panose="020B0604020202020204" pitchFamily="34" charset="0"/>
+            <a:pPr algn="l" lvl="0" marL="152400" indent="-152400">
               <a:buChar char="•"/>
             </a:pPr>
             <a:r>
@@ -2876,8 +2857,7 @@
             </a:r>
           </a:p>
           <a:p>
-            <a:pPr>
-              <a:buFont typeface="Arial" panose="020B0604020202020204" pitchFamily="34" charset="0"/>
+            <a:pPr algn="l" lvl="0" marL="152400" indent="-152400">
               <a:buChar char="•"/>
             </a:pPr>
             <a:r>
@@ -2899,7 +2879,7 @@
 </file>
 
 <file path=ppt/notesSlides/notesSlide7.xml><?xml version="1.0" encoding="utf-8"?>
-<p:notes xmlns:a="http://schemas.openxmlformats.org/drawingml/2006/main" xmlns:r="http://schemas.openxmlformats.org/officeDocument/2006/relationships" xmlns:p="http://schemas.openxmlformats.org/presentationml/2006/main">
+<p:notes xmlns:a="http://schemas.openxmlformats.org/drawingml/2006/main" xmlns:p="http://schemas.openxmlformats.org/presentationml/2006/main" xmlns:r="http://schemas.openxmlformats.org/officeDocument/2006/relationships">
   <p:cSld>
     <p:spTree>
       <p:nvGrpSpPr>
@@ -2919,7 +2899,7 @@
         <p:nvSpPr>
           <p:cNvPr id="2" name="Slide Image Placeholder 1"/>
           <p:cNvSpPr>
-            <a:spLocks noGrp="1" noRot="1" noChangeAspect="1"/>
+            <a:spLocks noChangeAspect="1" noGrp="1" noRot="1"/>
           </p:cNvSpPr>
           <p:nvPr>
             <p:ph type="sldImg"/>
@@ -2934,14 +2914,15 @@
             <a:spLocks noGrp="1"/>
           </p:cNvSpPr>
           <p:nvPr>
-            <p:ph type="body" idx="1"/>
+            <p:ph idx="1" type="body"/>
           </p:nvPr>
         </p:nvSpPr>
         <p:spPr/>
         <p:txBody>
-          <a:bodyPr/>
-          <a:lstStyle/>
-          <a:p>
+          <a:bodyPr anchor="t"/>
+          <a:lstStyle/>
+          <a:p>
+            <a:pPr algn="l" lvl="0"/>
             <a:r>
               <a:rPr b="1">
                 <a:latin typeface="+mn-lt"/>
@@ -2958,8 +2939,7 @@
             </a:r>
           </a:p>
           <a:p>
-            <a:pPr>
-              <a:buFont typeface="Arial" panose="020B0604020202020204" pitchFamily="34" charset="0"/>
+            <a:pPr algn="l" lvl="0" marL="152400" indent="-152400">
               <a:buChar char="•"/>
             </a:pPr>
             <a:r>
@@ -2971,8 +2951,7 @@
             </a:r>
           </a:p>
           <a:p>
-            <a:pPr>
-              <a:buFont typeface="Arial" panose="020B0604020202020204" pitchFamily="34" charset="0"/>
+            <a:pPr algn="l" lvl="0" marL="152400" indent="-152400">
               <a:buChar char="•"/>
             </a:pPr>
             <a:r>
@@ -2984,8 +2963,7 @@
             </a:r>
           </a:p>
           <a:p>
-            <a:pPr>
-              <a:buFont typeface="Arial" panose="020B0604020202020204" pitchFamily="34" charset="0"/>
+            <a:pPr algn="l" lvl="0" marL="152400" indent="-152400">
               <a:buChar char="•"/>
             </a:pPr>
             <a:r>
@@ -3007,7 +2985,7 @@
 </file>
 
 <file path=ppt/notesSlides/notesSlide8.xml><?xml version="1.0" encoding="utf-8"?>
-<p:notes xmlns:a="http://schemas.openxmlformats.org/drawingml/2006/main" xmlns:r="http://schemas.openxmlformats.org/officeDocument/2006/relationships" xmlns:p="http://schemas.openxmlformats.org/presentationml/2006/main">
+<p:notes xmlns:a="http://schemas.openxmlformats.org/drawingml/2006/main" xmlns:p="http://schemas.openxmlformats.org/presentationml/2006/main" xmlns:r="http://schemas.openxmlformats.org/officeDocument/2006/relationships">
   <p:cSld>
     <p:spTree>
       <p:nvGrpSpPr>
@@ -3027,7 +3005,7 @@
         <p:nvSpPr>
           <p:cNvPr id="2" name="Slide Image Placeholder 1"/>
           <p:cNvSpPr>
-            <a:spLocks noGrp="1" noRot="1" noChangeAspect="1"/>
+            <a:spLocks noChangeAspect="1" noGrp="1" noRot="1"/>
           </p:cNvSpPr>
           <p:nvPr>
             <p:ph type="sldImg"/>
@@ -3042,14 +3020,15 @@
             <a:spLocks noGrp="1"/>
           </p:cNvSpPr>
           <p:nvPr>
-            <p:ph type="body" idx="1"/>
+            <p:ph idx="1" type="body"/>
           </p:nvPr>
         </p:nvSpPr>
         <p:spPr/>
         <p:txBody>
-          <a:bodyPr/>
-          <a:lstStyle/>
-          <a:p>
+          <a:bodyPr anchor="t"/>
+          <a:lstStyle/>
+          <a:p>
+            <a:pPr algn="l" lvl="0"/>
             <a:r>
               <a:rPr b="1">
                 <a:latin typeface="+mn-lt"/>
@@ -3066,8 +3045,7 @@
             </a:r>
           </a:p>
           <a:p>
-            <a:pPr>
-              <a:buFont typeface="Arial" panose="020B0604020202020204" pitchFamily="34" charset="0"/>
+            <a:pPr algn="l" lvl="0" marL="152400" indent="-152400">
               <a:buChar char="•"/>
             </a:pPr>
             <a:r>
@@ -3079,8 +3057,7 @@
             </a:r>
           </a:p>
           <a:p>
-            <a:pPr>
-              <a:buFont typeface="Arial" panose="020B0604020202020204" pitchFamily="34" charset="0"/>
+            <a:pPr algn="l" lvl="0" marL="152400" indent="-152400">
               <a:buChar char="•"/>
             </a:pPr>
             <a:r>
@@ -3092,8 +3069,7 @@
             </a:r>
           </a:p>
           <a:p>
-            <a:pPr>
-              <a:buFont typeface="Arial" panose="020B0604020202020204" pitchFamily="34" charset="0"/>
+            <a:pPr algn="l" lvl="0" marL="152400" indent="-152400">
               <a:buChar char="•"/>
             </a:pPr>
             <a:r>
@@ -3115,7 +3091,7 @@
 </file>
 
 <file path=ppt/notesSlides/notesSlide9.xml><?xml version="1.0" encoding="utf-8"?>
-<p:notes xmlns:a="http://schemas.openxmlformats.org/drawingml/2006/main" xmlns:r="http://schemas.openxmlformats.org/officeDocument/2006/relationships" xmlns:p="http://schemas.openxmlformats.org/presentationml/2006/main">
+<p:notes xmlns:a="http://schemas.openxmlformats.org/drawingml/2006/main" xmlns:p="http://schemas.openxmlformats.org/presentationml/2006/main" xmlns:r="http://schemas.openxmlformats.org/officeDocument/2006/relationships">
   <p:cSld>
     <p:spTree>
       <p:nvGrpSpPr>
@@ -3135,7 +3111,7 @@
         <p:nvSpPr>
           <p:cNvPr id="2" name="Slide Image Placeholder 1"/>
           <p:cNvSpPr>
-            <a:spLocks noGrp="1" noRot="1" noChangeAspect="1"/>
+            <a:spLocks noChangeAspect="1" noGrp="1" noRot="1"/>
           </p:cNvSpPr>
           <p:nvPr>
             <p:ph type="sldImg"/>
@@ -3150,14 +3126,15 @@
             <a:spLocks noGrp="1"/>
           </p:cNvSpPr>
           <p:nvPr>
-            <p:ph type="body" idx="1"/>
+            <p:ph idx="1" type="body"/>
           </p:nvPr>
         </p:nvSpPr>
         <p:spPr/>
         <p:txBody>
-          <a:bodyPr/>
-          <a:lstStyle/>
-          <a:p>
+          <a:bodyPr anchor="t"/>
+          <a:lstStyle/>
+          <a:p>
+            <a:pPr algn="l" lvl="0"/>
             <a:r>
               <a:rPr b="1">
                 <a:latin typeface="+mn-lt"/>
@@ -3174,8 +3151,7 @@
             </a:r>
           </a:p>
           <a:p>
-            <a:pPr>
-              <a:buFont typeface="Arial" panose="020B0604020202020204" pitchFamily="34" charset="0"/>
+            <a:pPr algn="l" lvl="0" marL="152400" indent="-152400">
               <a:buChar char="•"/>
             </a:pPr>
             <a:r>
@@ -3187,8 +3163,7 @@
             </a:r>
           </a:p>
           <a:p>
-            <a:pPr>
-              <a:buFont typeface="Arial" panose="020B0604020202020204" pitchFamily="34" charset="0"/>
+            <a:pPr algn="l" lvl="0" marL="152400" indent="-152400">
               <a:buChar char="•"/>
             </a:pPr>
             <a:r>
@@ -3200,8 +3175,7 @@
             </a:r>
           </a:p>
           <a:p>
-            <a:pPr>
-              <a:buFont typeface="Arial" panose="020B0604020202020204" pitchFamily="34" charset="0"/>
+            <a:pPr algn="l" lvl="0" marL="152400" indent="-152400">
               <a:buChar char="•"/>
             </a:pPr>
             <a:r>
@@ -3559,7 +3533,7 @@
 </file>
 
 <file path=ppt/slides/slide1.xml><?xml version="1.0" encoding="utf-8"?>
-<p:sld xmlns:a="http://schemas.openxmlformats.org/drawingml/2006/main" xmlns:r="http://schemas.openxmlformats.org/officeDocument/2006/relationships" xmlns:p="http://schemas.openxmlformats.org/presentationml/2006/main">
+<p:sld xmlns:a="http://schemas.openxmlformats.org/drawingml/2006/main" xmlns:p="http://schemas.openxmlformats.org/presentationml/2006/main" xmlns:r="http://schemas.openxmlformats.org/officeDocument/2006/relationships">
   <p:cSld>
     <p:bg>
       <p:bgPr>
@@ -3614,7 +3588,7 @@
           </a:effectLst>
         </p:spPr>
         <p:txBody>
-          <a:bodyPr/>
+          <a:bodyPr anchor="t"/>
           <a:lstStyle/>
           <a:p>
             <a:pPr algn="ctr"/>
@@ -3649,7 +3623,7 @@
           </a:prstGeom>
         </p:spPr>
         <p:txBody>
-          <a:bodyPr/>
+          <a:bodyPr anchor="t"/>
           <a:lstStyle/>
           <a:p>
             <a:pPr algn="ctr"/>
@@ -3683,7 +3657,7 @@
           </a:prstGeom>
         </p:spPr>
         <p:txBody>
-          <a:bodyPr/>
+          <a:bodyPr anchor="t"/>
           <a:lstStyle/>
           <a:p>
             <a:pPr algn="ctr"/>
@@ -3731,9 +3705,10 @@
           </a:effectLst>
         </p:spPr>
         <p:txBody>
-          <a:bodyPr/>
-          <a:lstStyle/>
-          <a:p>
+          <a:bodyPr anchor="t"/>
+          <a:lstStyle/>
+          <a:p>
+            <a:pPr algn="l"/>
             <a:r>
               <a:rPr b="1" sz="1400">
                 <a:solidFill>
@@ -3746,9 +3721,11 @@
             </a:r>
           </a:p>
           <a:p>
+            <a:pPr algn="l"/>
             <a:endParaRPr/>
           </a:p>
           <a:p>
+            <a:pPr algn="l"/>
             <a:r>
               <a:rPr sz="1200">
                 <a:solidFill>
@@ -3793,9 +3770,10 @@
           </a:effectLst>
         </p:spPr>
         <p:txBody>
-          <a:bodyPr/>
-          <a:lstStyle/>
-          <a:p>
+          <a:bodyPr anchor="t"/>
+          <a:lstStyle/>
+          <a:p>
+            <a:pPr algn="l"/>
             <a:r>
               <a:rPr b="1" sz="1400">
                 <a:solidFill>
@@ -3808,9 +3786,11 @@
             </a:r>
           </a:p>
           <a:p>
+            <a:pPr algn="l"/>
             <a:endParaRPr/>
           </a:p>
           <a:p>
+            <a:pPr algn="l"/>
             <a:r>
               <a:rPr sz="1200">
                 <a:solidFill>
@@ -3855,9 +3835,10 @@
           </a:effectLst>
         </p:spPr>
         <p:txBody>
-          <a:bodyPr/>
-          <a:lstStyle/>
-          <a:p>
+          <a:bodyPr anchor="t"/>
+          <a:lstStyle/>
+          <a:p>
+            <a:pPr algn="l"/>
             <a:r>
               <a:rPr b="1" sz="1400">
                 <a:solidFill>
@@ -3870,9 +3851,11 @@
             </a:r>
           </a:p>
           <a:p>
+            <a:pPr algn="l"/>
             <a:endParaRPr/>
           </a:p>
           <a:p>
+            <a:pPr algn="l"/>
             <a:r>
               <a:rPr sz="1200">
                 <a:solidFill>
@@ -3902,7 +3885,7 @@
           </a:prstGeom>
         </p:spPr>
         <p:txBody>
-          <a:bodyPr/>
+          <a:bodyPr anchor="t"/>
           <a:lstStyle/>
           <a:p>
             <a:pPr algn="ctr"/>
@@ -3931,7 +3914,7 @@
 </file>
 
 <file path=ppt/slides/slide10.xml><?xml version="1.0" encoding="utf-8"?>
-<p:sld xmlns:a="http://schemas.openxmlformats.org/drawingml/2006/main" xmlns:r="http://schemas.openxmlformats.org/officeDocument/2006/relationships" xmlns:p="http://schemas.openxmlformats.org/presentationml/2006/main">
+<p:sld xmlns:a="http://schemas.openxmlformats.org/drawingml/2006/main" xmlns:p="http://schemas.openxmlformats.org/presentationml/2006/main" xmlns:r="http://schemas.openxmlformats.org/officeDocument/2006/relationships">
   <p:cSld>
     <p:bg>
       <p:bgPr>
@@ -3971,9 +3954,10 @@
           </a:prstGeom>
         </p:spPr>
         <p:txBody>
-          <a:bodyPr/>
-          <a:lstStyle/>
-          <a:p>
+          <a:bodyPr anchor="t"/>
+          <a:lstStyle/>
+          <a:p>
+            <a:pPr algn="l"/>
             <a:r>
               <a:rPr b="1" sz="2400">
                 <a:solidFill>
@@ -4003,9 +3987,10 @@
           </a:prstGeom>
         </p:spPr>
         <p:txBody>
-          <a:bodyPr/>
-          <a:lstStyle/>
-          <a:p>
+          <a:bodyPr anchor="t"/>
+          <a:lstStyle/>
+          <a:p>
+            <a:pPr algn="l"/>
             <a:r>
               <a:rPr sz="1400">
                 <a:solidFill>
@@ -4015,72 +4000,6 @@
                 <a:cs typeface="+mn-lt"/>
               </a:rPr>
               <a:t>Demonstrating vector connectors (solid, dashed), coordinates, and composite group containers (addGroup)</a:t>
-            </a:r>
-          </a:p>
-        </p:txBody>
-      </p:sp>
-      <p:sp>
-        <p:nvSpPr>
-          <p:cNvPr id="19" name="Text Box 18"/>
-          <p:cNvSpPr txBox="1"/>
-          <p:nvPr/>
-        </p:nvSpPr>
-        <p:spPr>
-          <a:xfrm>
-            <a:off x="914400" y="5806440"/>
-            <a:ext cx="10241280" cy="365760"/>
-          </a:xfrm>
-          <a:prstGeom prst="rect">
-            <a:avLst/>
-          </a:prstGeom>
-        </p:spPr>
-        <p:txBody>
-          <a:bodyPr/>
-          <a:lstStyle/>
-          <a:p>
-            <a:pPr algn="ctr"/>
-            <a:r>
-              <a:rPr sz="1100">
-                <a:solidFill>
-                  <a:srgbClr val="64748B"/>
-                </a:solidFill>
-                <a:latin typeface="+mn-lt"/>
-                <a:cs typeface="+mn-lt"/>
-              </a:rPr>
-              <a:t>Isomorphic Pipeline Feedback Loop: 100% Roundtrip Bit-Exact Precision</a:t>
-            </a:r>
-          </a:p>
-        </p:txBody>
-      </p:sp>
-      <p:sp>
-        <p:nvSpPr>
-          <p:cNvPr id="20" name="Text Box 19"/>
-          <p:cNvSpPr txBox="1"/>
-          <p:nvPr/>
-        </p:nvSpPr>
-        <p:spPr>
-          <a:xfrm>
-            <a:off x="731520" y="6510528"/>
-            <a:ext cx="10725912" cy="228600"/>
-          </a:xfrm>
-          <a:prstGeom prst="rect">
-            <a:avLst/>
-          </a:prstGeom>
-        </p:spPr>
-        <p:txBody>
-          <a:bodyPr/>
-          <a:lstStyle/>
-          <a:p>
-            <a:pPr algn="ctr"/>
-            <a:r>
-              <a:rPr i="1" sz="800">
-                <a:solidFill>
-                  <a:srgbClr val="94A3B8"/>
-                </a:solidFill>
-                <a:latin typeface="+mn-lt"/>
-                <a:cs typeface="+mn-lt"/>
-              </a:rPr>
-              <a:t>* Disclaimer: All benchmark metrics, performance figures, and simulated architectures in this deck are synthetic demonstration values generated solely to showcase the authoring, formatting, and rendering capabilities of @hokkyss/pptx.</a:t>
             </a:r>
           </a:p>
         </p:txBody>
@@ -4156,7 +4075,7 @@
             </a:solidFill>
           </p:spPr>
           <p:txBody>
-            <a:bodyPr/>
+            <a:bodyPr anchor="t"/>
             <a:lstStyle/>
             <a:p>
               <a:pPr algn="ctr"/>
@@ -4189,11 +4108,10 @@
             </a:prstGeom>
           </p:spPr>
           <p:txBody>
-            <a:bodyPr/>
+            <a:bodyPr anchor="t"/>
             <a:lstStyle/>
             <a:p>
-              <a:pPr>
-                <a:buFont typeface="Arial" panose="020B0604020202020204" pitchFamily="34" charset="0"/>
+              <a:pPr algn="l" lvl="0" marL="152400" indent="-152400">
                 <a:buChar char="•"/>
               </a:pPr>
               <a:r>
@@ -4208,8 +4126,7 @@
               </a:r>
             </a:p>
             <a:p>
-              <a:pPr>
-                <a:buFont typeface="Arial" panose="020B0604020202020204" pitchFamily="34" charset="0"/>
+              <a:pPr algn="l" lvl="0" marL="152400" indent="-152400">
                 <a:buChar char="•"/>
               </a:pPr>
               <a:r>
@@ -4224,8 +4141,7 @@
               </a:r>
             </a:p>
             <a:p>
-              <a:pPr>
-                <a:buFont typeface="Arial" panose="020B0604020202020204" pitchFamily="34" charset="0"/>
+              <a:pPr algn="l" lvl="0" marL="152400" indent="-152400">
                 <a:buChar char="•"/>
               </a:pPr>
               <a:r>
@@ -4313,7 +4229,7 @@
             </a:solidFill>
           </p:spPr>
           <p:txBody>
-            <a:bodyPr/>
+            <a:bodyPr anchor="t"/>
             <a:lstStyle/>
             <a:p>
               <a:pPr algn="ctr"/>
@@ -4346,11 +4262,10 @@
             </a:prstGeom>
           </p:spPr>
           <p:txBody>
-            <a:bodyPr/>
+            <a:bodyPr anchor="t"/>
             <a:lstStyle/>
             <a:p>
-              <a:pPr>
-                <a:buFont typeface="Arial" panose="020B0604020202020204" pitchFamily="34" charset="0"/>
+              <a:pPr algn="l" lvl="0" marL="152400" indent="-152400">
                 <a:buChar char="•"/>
               </a:pPr>
               <a:r>
@@ -4365,8 +4280,7 @@
               </a:r>
             </a:p>
             <a:p>
-              <a:pPr>
-                <a:buFont typeface="Arial" panose="020B0604020202020204" pitchFamily="34" charset="0"/>
+              <a:pPr algn="l" lvl="0" marL="152400" indent="-152400">
                 <a:buChar char="•"/>
               </a:pPr>
               <a:r>
@@ -4381,8 +4295,7 @@
               </a:r>
             </a:p>
             <a:p>
-              <a:pPr>
-                <a:buFont typeface="Arial" panose="020B0604020202020204" pitchFamily="34" charset="0"/>
+              <a:pPr algn="l" lvl="0" marL="152400" indent="-152400">
                 <a:buChar char="•"/>
               </a:pPr>
               <a:r>
@@ -4470,7 +4383,7 @@
             </a:solidFill>
           </p:spPr>
           <p:txBody>
-            <a:bodyPr/>
+            <a:bodyPr anchor="t"/>
             <a:lstStyle/>
             <a:p>
               <a:pPr algn="ctr"/>
@@ -4503,11 +4416,10 @@
             </a:prstGeom>
           </p:spPr>
           <p:txBody>
-            <a:bodyPr/>
+            <a:bodyPr anchor="t"/>
             <a:lstStyle/>
             <a:p>
-              <a:pPr>
-                <a:buFont typeface="Arial" panose="020B0604020202020204" pitchFamily="34" charset="0"/>
+              <a:pPr algn="l" lvl="0" marL="152400" indent="-152400">
                 <a:buChar char="•"/>
               </a:pPr>
               <a:r>
@@ -4522,8 +4434,7 @@
               </a:r>
             </a:p>
             <a:p>
-              <a:pPr>
-                <a:buFont typeface="Arial" panose="020B0604020202020204" pitchFamily="34" charset="0"/>
+              <a:pPr algn="l" lvl="0" marL="152400" indent="-152400">
                 <a:buChar char="•"/>
               </a:pPr>
               <a:r>
@@ -4538,8 +4449,7 @@
               </a:r>
             </a:p>
             <a:p>
-              <a:pPr>
-                <a:buFont typeface="Arial" panose="020B0604020202020204" pitchFamily="34" charset="0"/>
+              <a:pPr algn="l" lvl="0" marL="152400" indent="-152400">
                 <a:buChar char="•"/>
               </a:pPr>
               <a:r>
@@ -4636,6 +4546,72 @@
           </a:ln>
         </p:spPr>
       </p:cxnSp>
+      <p:sp>
+        <p:nvSpPr>
+          <p:cNvPr id="19" name="Text Box 18"/>
+          <p:cNvSpPr txBox="1"/>
+          <p:nvPr/>
+        </p:nvSpPr>
+        <p:spPr>
+          <a:xfrm>
+            <a:off x="914400" y="5806440"/>
+            <a:ext cx="10241280" cy="365760"/>
+          </a:xfrm>
+          <a:prstGeom prst="rect">
+            <a:avLst/>
+          </a:prstGeom>
+        </p:spPr>
+        <p:txBody>
+          <a:bodyPr anchor="t"/>
+          <a:lstStyle/>
+          <a:p>
+            <a:pPr algn="ctr"/>
+            <a:r>
+              <a:rPr sz="1100">
+                <a:solidFill>
+                  <a:srgbClr val="64748B"/>
+                </a:solidFill>
+                <a:latin typeface="+mn-lt"/>
+                <a:cs typeface="+mn-lt"/>
+              </a:rPr>
+              <a:t>Isomorphic Pipeline Feedback Loop: 100% Roundtrip Bit-Exact Precision</a:t>
+            </a:r>
+          </a:p>
+        </p:txBody>
+      </p:sp>
+      <p:sp>
+        <p:nvSpPr>
+          <p:cNvPr id="20" name="Text Box 19"/>
+          <p:cNvSpPr txBox="1"/>
+          <p:nvPr/>
+        </p:nvSpPr>
+        <p:spPr>
+          <a:xfrm>
+            <a:off x="731520" y="6510528"/>
+            <a:ext cx="10725912" cy="228600"/>
+          </a:xfrm>
+          <a:prstGeom prst="rect">
+            <a:avLst/>
+          </a:prstGeom>
+        </p:spPr>
+        <p:txBody>
+          <a:bodyPr anchor="t"/>
+          <a:lstStyle/>
+          <a:p>
+            <a:pPr algn="ctr"/>
+            <a:r>
+              <a:rPr i="1" sz="800">
+                <a:solidFill>
+                  <a:srgbClr val="94A3B8"/>
+                </a:solidFill>
+                <a:latin typeface="+mn-lt"/>
+                <a:cs typeface="+mn-lt"/>
+              </a:rPr>
+              <a:t>* Disclaimer: All benchmark metrics, performance figures, and simulated architectures in this deck are synthetic demonstration values generated solely to showcase the authoring, formatting, and rendering capabilities of @hokkyss/pptx.</a:t>
+            </a:r>
+          </a:p>
+        </p:txBody>
+      </p:sp>
     </p:spTree>
   </p:cSld>
   <p:clrMapOvr>
@@ -4648,7 +4624,7 @@
 </file>
 
 <file path=ppt/slides/slide11.xml><?xml version="1.0" encoding="utf-8"?>
-<p:sld xmlns:a="http://schemas.openxmlformats.org/drawingml/2006/main" xmlns:r="http://schemas.openxmlformats.org/officeDocument/2006/relationships" xmlns:p="http://schemas.openxmlformats.org/presentationml/2006/main">
+<p:sld xmlns:a="http://schemas.openxmlformats.org/drawingml/2006/main" xmlns:p="http://schemas.openxmlformats.org/presentationml/2006/main" xmlns:r="http://schemas.openxmlformats.org/officeDocument/2006/relationships">
   <p:cSld>
     <p:bg>
       <p:bgPr>
@@ -4688,9 +4664,10 @@
           </a:prstGeom>
         </p:spPr>
         <p:txBody>
-          <a:bodyPr/>
-          <a:lstStyle/>
-          <a:p>
+          <a:bodyPr anchor="t"/>
+          <a:lstStyle/>
+          <a:p>
+            <a:pPr algn="l"/>
             <a:r>
               <a:rPr b="1" sz="2400">
                 <a:solidFill>
@@ -4720,9 +4697,10 @@
           </a:prstGeom>
         </p:spPr>
         <p:txBody>
-          <a:bodyPr/>
-          <a:lstStyle/>
-          <a:p>
+          <a:bodyPr anchor="t"/>
+          <a:lstStyle/>
+          <a:p>
+            <a:pPr algn="l"/>
             <a:r>
               <a:rPr sz="1400">
                 <a:solidFill>
@@ -4774,255 +4752,6 @@
           </a:p>
         </p:txBody>
       </p:sp>
-      <p:sp>
-        <p:nvSpPr>
-          <p:cNvPr id="6" name="roundRect 5"/>
-          <p:cNvSpPr/>
-          <p:nvPr/>
-        </p:nvSpPr>
-        <p:spPr>
-          <a:xfrm>
-            <a:off x="7589520" y="1828800"/>
-            <a:ext cx="3657600" cy="1234440"/>
-          </a:xfrm>
-          <a:prstGeom prst="roundRect">
-            <a:avLst/>
-          </a:prstGeom>
-          <a:solidFill>
-            <a:srgbClr val="1E293B"/>
-          </a:solidFill>
-          <a:ln w="13716">
-            <a:solidFill>
-              <a:srgbClr val="0284C7"/>
-            </a:solidFill>
-          </a:ln>
-        </p:spPr>
-        <p:txBody>
-          <a:bodyPr/>
-          <a:lstStyle/>
-          <a:p>
-            <a:r>
-              <a:rPr b="1" sz="1300">
-                <a:solidFill>
-                  <a:srgbClr val="38BDF8"/>
-                </a:solidFill>
-                <a:latin typeface="+mn-lt"/>
-                <a:cs typeface="+mn-lt"/>
-              </a:rPr>
-              <a:t>⚡ Zero Native Bindings</a:t>
-            </a:r>
-          </a:p>
-        </p:txBody>
-      </p:sp>
-      <p:sp>
-        <p:nvSpPr>
-          <p:cNvPr id="7" name="Text Box 6"/>
-          <p:cNvSpPr txBox="1"/>
-          <p:nvPr/>
-        </p:nvSpPr>
-        <p:spPr>
-          <a:xfrm>
-            <a:off x="7772400" y="2240280"/>
-            <a:ext cx="3291840" cy="731520"/>
-          </a:xfrm>
-          <a:prstGeom prst="rect">
-            <a:avLst/>
-          </a:prstGeom>
-        </p:spPr>
-        <p:txBody>
-          <a:bodyPr/>
-          <a:lstStyle/>
-          <a:p>
-            <a:r>
-              <a:rPr sz="1000">
-                <a:solidFill>
-                  <a:srgbClr val="94A3B8"/>
-                </a:solidFill>
-                <a:latin typeface="+mn-lt"/>
-                <a:cs typeface="+mn-lt"/>
-              </a:rPr>
-              <a:t>Generates ECMA-376 compliant DrawingML charts directly from pure TypeScript arrays without spawning Python, Java, or Excel subprocesses.</a:t>
-            </a:r>
-          </a:p>
-        </p:txBody>
-      </p:sp>
-      <p:sp>
-        <p:nvSpPr>
-          <p:cNvPr id="8" name="roundRect 7"/>
-          <p:cNvSpPr/>
-          <p:nvPr/>
-        </p:nvSpPr>
-        <p:spPr>
-          <a:xfrm>
-            <a:off x="7589520" y="3246120"/>
-            <a:ext cx="3657600" cy="1234440"/>
-          </a:xfrm>
-          <a:prstGeom prst="roundRect">
-            <a:avLst/>
-          </a:prstGeom>
-          <a:solidFill>
-            <a:srgbClr val="1E293B"/>
-          </a:solidFill>
-          <a:ln w="13716">
-            <a:solidFill>
-              <a:srgbClr val="10B981"/>
-            </a:solidFill>
-          </a:ln>
-        </p:spPr>
-        <p:txBody>
-          <a:bodyPr/>
-          <a:lstStyle/>
-          <a:p>
-            <a:r>
-              <a:rPr b="1" sz="1300">
-                <a:solidFill>
-                  <a:srgbClr val="34D399"/>
-                </a:solidFill>
-                <a:latin typeface="+mn-lt"/>
-                <a:cs typeface="+mn-lt"/>
-              </a:rPr>
-              <a:t>📈 Fully Editable &amp; Scalable</a:t>
-            </a:r>
-          </a:p>
-        </p:txBody>
-      </p:sp>
-      <p:sp>
-        <p:nvSpPr>
-          <p:cNvPr id="9" name="Text Box 8"/>
-          <p:cNvSpPr txBox="1"/>
-          <p:nvPr/>
-        </p:nvSpPr>
-        <p:spPr>
-          <a:xfrm>
-            <a:off x="7772400" y="3657600"/>
-            <a:ext cx="3291840" cy="731520"/>
-          </a:xfrm>
-          <a:prstGeom prst="rect">
-            <a:avLst/>
-          </a:prstGeom>
-        </p:spPr>
-        <p:txBody>
-          <a:bodyPr/>
-          <a:lstStyle/>
-          <a:p>
-            <a:r>
-              <a:rPr sz="1000">
-                <a:solidFill>
-                  <a:srgbClr val="94A3B8"/>
-                </a:solidFill>
-                <a:latin typeface="+mn-lt"/>
-                <a:cs typeface="+mn-lt"/>
-              </a:rPr>
-              <a:t>Embedded as vector OpenXML chart spaces. Users can edit values, change themes, or modify series formatting natively inside Microsoft PowerPoint.</a:t>
-            </a:r>
-          </a:p>
-        </p:txBody>
-      </p:sp>
-      <p:sp>
-        <p:nvSpPr>
-          <p:cNvPr id="10" name="roundRect 9"/>
-          <p:cNvSpPr/>
-          <p:nvPr/>
-        </p:nvSpPr>
-        <p:spPr>
-          <a:xfrm>
-            <a:off x="7589520" y="4663440"/>
-            <a:ext cx="3657600" cy="1234440"/>
-          </a:xfrm>
-          <a:prstGeom prst="roundRect">
-            <a:avLst/>
-          </a:prstGeom>
-          <a:solidFill>
-            <a:srgbClr val="1E293B"/>
-          </a:solidFill>
-          <a:ln w="13716">
-            <a:solidFill>
-              <a:srgbClr val="6366F1"/>
-            </a:solidFill>
-          </a:ln>
-        </p:spPr>
-        <p:txBody>
-          <a:bodyPr/>
-          <a:lstStyle/>
-          <a:p>
-            <a:r>
-              <a:rPr b="1" sz="1300">
-                <a:solidFill>
-                  <a:srgbClr val="818CF8"/>
-                </a:solidFill>
-                <a:latin typeface="+mn-lt"/>
-                <a:cs typeface="+mn-lt"/>
-              </a:rPr>
-              <a:t>🎨 Multi-Type Chart Engine</a:t>
-            </a:r>
-          </a:p>
-        </p:txBody>
-      </p:sp>
-      <p:sp>
-        <p:nvSpPr>
-          <p:cNvPr id="11" name="Text Box 10"/>
-          <p:cNvSpPr txBox="1"/>
-          <p:nvPr/>
-        </p:nvSpPr>
-        <p:spPr>
-          <a:xfrm>
-            <a:off x="7772400" y="5074920"/>
-            <a:ext cx="3291840" cy="731520"/>
-          </a:xfrm>
-          <a:prstGeom prst="rect">
-            <a:avLst/>
-          </a:prstGeom>
-        </p:spPr>
-        <p:txBody>
-          <a:bodyPr/>
-          <a:lstStyle/>
-          <a:p>
-            <a:r>
-              <a:rPr sz="1000">
-                <a:solidFill>
-                  <a:srgbClr val="94A3B8"/>
-                </a:solidFill>
-                <a:latin typeface="+mn-lt"/>
-                <a:cs typeface="+mn-lt"/>
-              </a:rPr>
-              <a:t>Supports column, bar, line, area, and pie chart topologies with custom series coloring, categorical axes, and configurable legend alignments.</a:t>
-            </a:r>
-          </a:p>
-        </p:txBody>
-      </p:sp>
-      <p:sp>
-        <p:nvSpPr>
-          <p:cNvPr id="12" name="Text Box 11"/>
-          <p:cNvSpPr txBox="1"/>
-          <p:nvPr/>
-        </p:nvSpPr>
-        <p:spPr>
-          <a:xfrm>
-            <a:off x="731520" y="6510528"/>
-            <a:ext cx="10725912" cy="228600"/>
-          </a:xfrm>
-          <a:prstGeom prst="rect">
-            <a:avLst/>
-          </a:prstGeom>
-        </p:spPr>
-        <p:txBody>
-          <a:bodyPr/>
-          <a:lstStyle/>
-          <a:p>
-            <a:pPr algn="ctr"/>
-            <a:r>
-              <a:rPr i="1" sz="800">
-                <a:solidFill>
-                  <a:srgbClr val="64748B"/>
-                </a:solidFill>
-                <a:latin typeface="+mn-lt"/>
-                <a:cs typeface="+mn-lt"/>
-              </a:rPr>
-              <a:t>* Disclaimer: All benchmark metrics, performance figures, and simulated architectures in this deck are synthetic demonstration values generated solely to showcase the authoring, formatting, and rendering capabilities of @hokkyss/pptx.</a:t>
-            </a:r>
-          </a:p>
-        </p:txBody>
-      </p:sp>
       <p:graphicFrame>
         <p:nvGraphicFramePr>
           <p:cNvPr id="5" name="Chart 4"/>
@@ -5039,6 +4768,261 @@
           </a:graphicData>
         </a:graphic>
       </p:graphicFrame>
+      <p:sp>
+        <p:nvSpPr>
+          <p:cNvPr id="6" name="roundRect 5"/>
+          <p:cNvSpPr/>
+          <p:nvPr/>
+        </p:nvSpPr>
+        <p:spPr>
+          <a:xfrm>
+            <a:off x="7589520" y="1828800"/>
+            <a:ext cx="3657600" cy="1234440"/>
+          </a:xfrm>
+          <a:prstGeom prst="roundRect">
+            <a:avLst/>
+          </a:prstGeom>
+          <a:solidFill>
+            <a:srgbClr val="1E293B"/>
+          </a:solidFill>
+          <a:ln w="13716">
+            <a:solidFill>
+              <a:srgbClr val="0284C7"/>
+            </a:solidFill>
+          </a:ln>
+        </p:spPr>
+        <p:txBody>
+          <a:bodyPr anchor="t"/>
+          <a:lstStyle/>
+          <a:p>
+            <a:pPr algn="l"/>
+            <a:r>
+              <a:rPr b="1" sz="1300">
+                <a:solidFill>
+                  <a:srgbClr val="38BDF8"/>
+                </a:solidFill>
+                <a:latin typeface="+mn-lt"/>
+                <a:cs typeface="+mn-lt"/>
+              </a:rPr>
+              <a:t>⚡ Zero Native Bindings</a:t>
+            </a:r>
+          </a:p>
+        </p:txBody>
+      </p:sp>
+      <p:sp>
+        <p:nvSpPr>
+          <p:cNvPr id="7" name="Text Box 6"/>
+          <p:cNvSpPr txBox="1"/>
+          <p:nvPr/>
+        </p:nvSpPr>
+        <p:spPr>
+          <a:xfrm>
+            <a:off x="7772400" y="2240280"/>
+            <a:ext cx="3291840" cy="731520"/>
+          </a:xfrm>
+          <a:prstGeom prst="rect">
+            <a:avLst/>
+          </a:prstGeom>
+        </p:spPr>
+        <p:txBody>
+          <a:bodyPr anchor="t"/>
+          <a:lstStyle/>
+          <a:p>
+            <a:pPr algn="l"/>
+            <a:r>
+              <a:rPr sz="1000">
+                <a:solidFill>
+                  <a:srgbClr val="94A3B8"/>
+                </a:solidFill>
+                <a:latin typeface="+mn-lt"/>
+                <a:cs typeface="+mn-lt"/>
+              </a:rPr>
+              <a:t>Generates ECMA-376 compliant DrawingML charts directly from pure TypeScript arrays without spawning Python, Java, or Excel subprocesses.</a:t>
+            </a:r>
+          </a:p>
+        </p:txBody>
+      </p:sp>
+      <p:sp>
+        <p:nvSpPr>
+          <p:cNvPr id="8" name="roundRect 7"/>
+          <p:cNvSpPr/>
+          <p:nvPr/>
+        </p:nvSpPr>
+        <p:spPr>
+          <a:xfrm>
+            <a:off x="7589520" y="3246120"/>
+            <a:ext cx="3657600" cy="1234440"/>
+          </a:xfrm>
+          <a:prstGeom prst="roundRect">
+            <a:avLst/>
+          </a:prstGeom>
+          <a:solidFill>
+            <a:srgbClr val="1E293B"/>
+          </a:solidFill>
+          <a:ln w="13716">
+            <a:solidFill>
+              <a:srgbClr val="10B981"/>
+            </a:solidFill>
+          </a:ln>
+        </p:spPr>
+        <p:txBody>
+          <a:bodyPr anchor="t"/>
+          <a:lstStyle/>
+          <a:p>
+            <a:pPr algn="l"/>
+            <a:r>
+              <a:rPr b="1" sz="1300">
+                <a:solidFill>
+                  <a:srgbClr val="34D399"/>
+                </a:solidFill>
+                <a:latin typeface="+mn-lt"/>
+                <a:cs typeface="+mn-lt"/>
+              </a:rPr>
+              <a:t>📈 Fully Editable &amp; Scalable</a:t>
+            </a:r>
+          </a:p>
+        </p:txBody>
+      </p:sp>
+      <p:sp>
+        <p:nvSpPr>
+          <p:cNvPr id="9" name="Text Box 8"/>
+          <p:cNvSpPr txBox="1"/>
+          <p:nvPr/>
+        </p:nvSpPr>
+        <p:spPr>
+          <a:xfrm>
+            <a:off x="7772400" y="3657600"/>
+            <a:ext cx="3291840" cy="731520"/>
+          </a:xfrm>
+          <a:prstGeom prst="rect">
+            <a:avLst/>
+          </a:prstGeom>
+        </p:spPr>
+        <p:txBody>
+          <a:bodyPr anchor="t"/>
+          <a:lstStyle/>
+          <a:p>
+            <a:pPr algn="l"/>
+            <a:r>
+              <a:rPr sz="1000">
+                <a:solidFill>
+                  <a:srgbClr val="94A3B8"/>
+                </a:solidFill>
+                <a:latin typeface="+mn-lt"/>
+                <a:cs typeface="+mn-lt"/>
+              </a:rPr>
+              <a:t>Embedded as vector OpenXML chart spaces. Users can edit values, change themes, or modify series formatting natively inside Microsoft PowerPoint.</a:t>
+            </a:r>
+          </a:p>
+        </p:txBody>
+      </p:sp>
+      <p:sp>
+        <p:nvSpPr>
+          <p:cNvPr id="10" name="roundRect 9"/>
+          <p:cNvSpPr/>
+          <p:nvPr/>
+        </p:nvSpPr>
+        <p:spPr>
+          <a:xfrm>
+            <a:off x="7589520" y="4663440"/>
+            <a:ext cx="3657600" cy="1234440"/>
+          </a:xfrm>
+          <a:prstGeom prst="roundRect">
+            <a:avLst/>
+          </a:prstGeom>
+          <a:solidFill>
+            <a:srgbClr val="1E293B"/>
+          </a:solidFill>
+          <a:ln w="13716">
+            <a:solidFill>
+              <a:srgbClr val="6366F1"/>
+            </a:solidFill>
+          </a:ln>
+        </p:spPr>
+        <p:txBody>
+          <a:bodyPr anchor="t"/>
+          <a:lstStyle/>
+          <a:p>
+            <a:pPr algn="l"/>
+            <a:r>
+              <a:rPr b="1" sz="1300">
+                <a:solidFill>
+                  <a:srgbClr val="818CF8"/>
+                </a:solidFill>
+                <a:latin typeface="+mn-lt"/>
+                <a:cs typeface="+mn-lt"/>
+              </a:rPr>
+              <a:t>🎨 Multi-Type Chart Engine</a:t>
+            </a:r>
+          </a:p>
+        </p:txBody>
+      </p:sp>
+      <p:sp>
+        <p:nvSpPr>
+          <p:cNvPr id="11" name="Text Box 10"/>
+          <p:cNvSpPr txBox="1"/>
+          <p:nvPr/>
+        </p:nvSpPr>
+        <p:spPr>
+          <a:xfrm>
+            <a:off x="7772400" y="5074920"/>
+            <a:ext cx="3291840" cy="731520"/>
+          </a:xfrm>
+          <a:prstGeom prst="rect">
+            <a:avLst/>
+          </a:prstGeom>
+        </p:spPr>
+        <p:txBody>
+          <a:bodyPr anchor="t"/>
+          <a:lstStyle/>
+          <a:p>
+            <a:pPr algn="l"/>
+            <a:r>
+              <a:rPr sz="1000">
+                <a:solidFill>
+                  <a:srgbClr val="94A3B8"/>
+                </a:solidFill>
+                <a:latin typeface="+mn-lt"/>
+                <a:cs typeface="+mn-lt"/>
+              </a:rPr>
+              <a:t>Supports column, bar, line, area, and pie chart topologies with custom series coloring, categorical axes, and configurable legend alignments.</a:t>
+            </a:r>
+          </a:p>
+        </p:txBody>
+      </p:sp>
+      <p:sp>
+        <p:nvSpPr>
+          <p:cNvPr id="12" name="Text Box 11"/>
+          <p:cNvSpPr txBox="1"/>
+          <p:nvPr/>
+        </p:nvSpPr>
+        <p:spPr>
+          <a:xfrm>
+            <a:off x="731520" y="6510528"/>
+            <a:ext cx="10725912" cy="228600"/>
+          </a:xfrm>
+          <a:prstGeom prst="rect">
+            <a:avLst/>
+          </a:prstGeom>
+        </p:spPr>
+        <p:txBody>
+          <a:bodyPr anchor="t"/>
+          <a:lstStyle/>
+          <a:p>
+            <a:pPr algn="ctr"/>
+            <a:r>
+              <a:rPr i="1" sz="800">
+                <a:solidFill>
+                  <a:srgbClr val="64748B"/>
+                </a:solidFill>
+                <a:latin typeface="+mn-lt"/>
+                <a:cs typeface="+mn-lt"/>
+              </a:rPr>
+              <a:t>* Disclaimer: All benchmark metrics, performance figures, and simulated architectures in this deck are synthetic demonstration values generated solely to showcase the authoring, formatting, and rendering capabilities of @hokkyss/pptx.</a:t>
+            </a:r>
+          </a:p>
+        </p:txBody>
+      </p:sp>
     </p:spTree>
   </p:cSld>
   <p:clrMapOvr>
@@ -5051,7 +5035,7 @@
 </file>
 
 <file path=ppt/slides/slide12.xml><?xml version="1.0" encoding="utf-8"?>
-<p:sld xmlns:a="http://schemas.openxmlformats.org/drawingml/2006/main" xmlns:r="http://schemas.openxmlformats.org/officeDocument/2006/relationships" xmlns:p="http://schemas.openxmlformats.org/presentationml/2006/main">
+<p:sld xmlns:a="http://schemas.openxmlformats.org/drawingml/2006/main" xmlns:p="http://schemas.openxmlformats.org/presentationml/2006/main" xmlns:r="http://schemas.openxmlformats.org/officeDocument/2006/relationships">
   <p:cSld>
     <p:bg>
       <p:bgPr>
@@ -5091,9 +5075,10 @@
           </a:prstGeom>
         </p:spPr>
         <p:txBody>
-          <a:bodyPr/>
-          <a:lstStyle/>
-          <a:p>
+          <a:bodyPr anchor="t"/>
+          <a:lstStyle/>
+          <a:p>
+            <a:pPr algn="l"/>
             <a:r>
               <a:rPr b="1" sz="2400">
                 <a:solidFill>
@@ -5123,9 +5108,10 @@
           </a:prstGeom>
         </p:spPr>
         <p:txBody>
-          <a:bodyPr/>
-          <a:lstStyle/>
-          <a:p>
+          <a:bodyPr anchor="t"/>
+          <a:lstStyle/>
+          <a:p>
+            <a:pPr algn="l"/>
             <a:r>
               <a:rPr sz="1400">
                 <a:solidFill>
@@ -5193,9 +5179,10 @@
           </a:prstGeom>
         </p:spPr>
         <p:txBody>
-          <a:bodyPr/>
-          <a:lstStyle/>
-          <a:p>
+          <a:bodyPr anchor="t"/>
+          <a:lstStyle/>
+          <a:p>
+            <a:pPr algn="l"/>
             <a:r>
               <a:rPr b="1" sz="1200">
                 <a:solidFill>
@@ -5209,6 +5196,22 @@
           </a:p>
         </p:txBody>
       </p:sp>
+      <p:graphicFrame>
+        <p:nvGraphicFramePr>
+          <p:cNvPr id="6" name="Chart 5"/>
+          <p:cNvGraphicFramePr/>
+          <p:nvPr/>
+        </p:nvGraphicFramePr>
+        <p:xfrm>
+          <a:off x="1097280" y="2377440"/>
+          <a:ext cx="2926080" cy="3291840"/>
+        </p:xfrm>
+        <a:graphic>
+          <a:graphicData uri="http://schemas.openxmlformats.org/drawingml/2006/chart">
+            <c:chart xmlns:c="http://schemas.openxmlformats.org/drawingml/2006/chart" xmlns:r="http://schemas.openxmlformats.org/officeDocument/2006/relationships" r:id="rId2"/>
+          </a:graphicData>
+        </a:graphic>
+      </p:graphicFrame>
       <p:sp>
         <p:nvSpPr>
           <p:cNvPr id="7" name="roundRect 6"/>
@@ -5263,9 +5266,10 @@
           </a:prstGeom>
         </p:spPr>
         <p:txBody>
-          <a:bodyPr/>
-          <a:lstStyle/>
-          <a:p>
+          <a:bodyPr anchor="t"/>
+          <a:lstStyle/>
+          <a:p>
+            <a:pPr algn="l"/>
             <a:r>
               <a:rPr b="1" sz="1200">
                 <a:solidFill>
@@ -5279,6 +5283,22 @@
           </a:p>
         </p:txBody>
       </p:sp>
+      <p:graphicFrame>
+        <p:nvGraphicFramePr>
+          <p:cNvPr id="9" name="Chart 8"/>
+          <p:cNvGraphicFramePr/>
+          <p:nvPr/>
+        </p:nvGraphicFramePr>
+        <p:xfrm>
+          <a:off x="4626864" y="2377440"/>
+          <a:ext cx="2926080" cy="3291840"/>
+        </p:xfrm>
+        <a:graphic>
+          <a:graphicData uri="http://schemas.openxmlformats.org/drawingml/2006/chart">
+            <c:chart xmlns:c="http://schemas.openxmlformats.org/drawingml/2006/chart" xmlns:r="http://schemas.openxmlformats.org/officeDocument/2006/relationships" r:id="rId3"/>
+          </a:graphicData>
+        </a:graphic>
+      </p:graphicFrame>
       <p:sp>
         <p:nvSpPr>
           <p:cNvPr id="10" name="roundRect 9"/>
@@ -5333,9 +5353,10 @@
           </a:prstGeom>
         </p:spPr>
         <p:txBody>
-          <a:bodyPr/>
-          <a:lstStyle/>
-          <a:p>
+          <a:bodyPr anchor="t"/>
+          <a:lstStyle/>
+          <a:p>
+            <a:pPr algn="l"/>
             <a:r>
               <a:rPr b="1" sz="1200">
                 <a:solidFill>
@@ -5349,71 +5370,6 @@
           </a:p>
         </p:txBody>
       </p:sp>
-      <p:sp>
-        <p:nvSpPr>
-          <p:cNvPr id="13" name="Text Box 12"/>
-          <p:cNvSpPr txBox="1"/>
-          <p:nvPr/>
-        </p:nvSpPr>
-        <p:spPr>
-          <a:xfrm>
-            <a:off x="731520" y="6510528"/>
-            <a:ext cx="10725912" cy="228600"/>
-          </a:xfrm>
-          <a:prstGeom prst="rect">
-            <a:avLst/>
-          </a:prstGeom>
-        </p:spPr>
-        <p:txBody>
-          <a:bodyPr/>
-          <a:lstStyle/>
-          <a:p>
-            <a:pPr algn="ctr"/>
-            <a:r>
-              <a:rPr i="1" sz="800">
-                <a:solidFill>
-                  <a:srgbClr val="94A3B8"/>
-                </a:solidFill>
-                <a:latin typeface="+mn-lt"/>
-                <a:cs typeface="+mn-lt"/>
-              </a:rPr>
-              <a:t>* Disclaimer: All benchmark metrics, performance figures, and simulated architectures in this deck are synthetic demonstration values generated solely to showcase the authoring, formatting, and rendering capabilities of @hokkyss/pptx.</a:t>
-            </a:r>
-          </a:p>
-        </p:txBody>
-      </p:sp>
-      <p:graphicFrame>
-        <p:nvGraphicFramePr>
-          <p:cNvPr id="6" name="Chart 5"/>
-          <p:cNvGraphicFramePr/>
-          <p:nvPr/>
-        </p:nvGraphicFramePr>
-        <p:xfrm>
-          <a:off x="1097280" y="2377440"/>
-          <a:ext cx="2926080" cy="3291840"/>
-        </p:xfrm>
-        <a:graphic>
-          <a:graphicData uri="http://schemas.openxmlformats.org/drawingml/2006/chart">
-            <c:chart xmlns:c="http://schemas.openxmlformats.org/drawingml/2006/chart" xmlns:r="http://schemas.openxmlformats.org/officeDocument/2006/relationships" r:id="rId2"/>
-          </a:graphicData>
-        </a:graphic>
-      </p:graphicFrame>
-      <p:graphicFrame>
-        <p:nvGraphicFramePr>
-          <p:cNvPr id="9" name="Chart 8"/>
-          <p:cNvGraphicFramePr/>
-          <p:nvPr/>
-        </p:nvGraphicFramePr>
-        <p:xfrm>
-          <a:off x="4626864" y="2377440"/>
-          <a:ext cx="2926080" cy="3291840"/>
-        </p:xfrm>
-        <a:graphic>
-          <a:graphicData uri="http://schemas.openxmlformats.org/drawingml/2006/chart">
-            <c:chart xmlns:c="http://schemas.openxmlformats.org/drawingml/2006/chart" xmlns:r="http://schemas.openxmlformats.org/officeDocument/2006/relationships" r:id="rId3"/>
-          </a:graphicData>
-        </a:graphic>
-      </p:graphicFrame>
       <p:graphicFrame>
         <p:nvGraphicFramePr>
           <p:cNvPr id="12" name="Chart 11"/>
@@ -5430,6 +5386,39 @@
           </a:graphicData>
         </a:graphic>
       </p:graphicFrame>
+      <p:sp>
+        <p:nvSpPr>
+          <p:cNvPr id="13" name="Text Box 12"/>
+          <p:cNvSpPr txBox="1"/>
+          <p:nvPr/>
+        </p:nvSpPr>
+        <p:spPr>
+          <a:xfrm>
+            <a:off x="731520" y="6510528"/>
+            <a:ext cx="10725912" cy="228600"/>
+          </a:xfrm>
+          <a:prstGeom prst="rect">
+            <a:avLst/>
+          </a:prstGeom>
+        </p:spPr>
+        <p:txBody>
+          <a:bodyPr anchor="t"/>
+          <a:lstStyle/>
+          <a:p>
+            <a:pPr algn="ctr"/>
+            <a:r>
+              <a:rPr i="1" sz="800">
+                <a:solidFill>
+                  <a:srgbClr val="94A3B8"/>
+                </a:solidFill>
+                <a:latin typeface="+mn-lt"/>
+                <a:cs typeface="+mn-lt"/>
+              </a:rPr>
+              <a:t>* Disclaimer: All benchmark metrics, performance figures, and simulated architectures in this deck are synthetic demonstration values generated solely to showcase the authoring, formatting, and rendering capabilities of @hokkyss/pptx.</a:t>
+            </a:r>
+          </a:p>
+        </p:txBody>
+      </p:sp>
     </p:spTree>
   </p:cSld>
   <p:clrMapOvr>
@@ -5442,7 +5431,7 @@
 </file>
 
 <file path=ppt/slides/slide13.xml><?xml version="1.0" encoding="utf-8"?>
-<p:sld xmlns:a="http://schemas.openxmlformats.org/drawingml/2006/main" xmlns:r="http://schemas.openxmlformats.org/officeDocument/2006/relationships" xmlns:p="http://schemas.openxmlformats.org/presentationml/2006/main">
+<p:sld xmlns:a="http://schemas.openxmlformats.org/drawingml/2006/main" xmlns:p="http://schemas.openxmlformats.org/presentationml/2006/main" xmlns:r="http://schemas.openxmlformats.org/officeDocument/2006/relationships">
   <p:cSld>
     <p:bg>
       <p:bgPr>
@@ -5482,9 +5471,10 @@
           </a:prstGeom>
         </p:spPr>
         <p:txBody>
-          <a:bodyPr/>
-          <a:lstStyle/>
-          <a:p>
+          <a:bodyPr anchor="t"/>
+          <a:lstStyle/>
+          <a:p>
+            <a:pPr algn="l"/>
             <a:r>
               <a:rPr b="1" sz="2400">
                 <a:solidFill>
@@ -5514,9 +5504,10 @@
           </a:prstGeom>
         </p:spPr>
         <p:txBody>
-          <a:bodyPr/>
-          <a:lstStyle/>
-          <a:p>
+          <a:bodyPr anchor="t"/>
+          <a:lstStyle/>
+          <a:p>
+            <a:pPr algn="l"/>
             <a:r>
               <a:rPr sz="1400">
                 <a:solidFill>
@@ -5584,9 +5575,10 @@
           </a:prstGeom>
         </p:spPr>
         <p:txBody>
-          <a:bodyPr/>
-          <a:lstStyle/>
-          <a:p>
+          <a:bodyPr anchor="t"/>
+          <a:lstStyle/>
+          <a:p>
+            <a:pPr algn="l"/>
             <a:r>
               <a:rPr b="1" sz="1200">
                 <a:solidFill>
@@ -5600,6 +5592,22 @@
           </a:p>
         </p:txBody>
       </p:sp>
+      <p:graphicFrame>
+        <p:nvGraphicFramePr>
+          <p:cNvPr id="6" name="Chart 5"/>
+          <p:cNvGraphicFramePr/>
+          <p:nvPr/>
+        </p:nvGraphicFramePr>
+        <p:xfrm>
+          <a:off x="1097280" y="2377440"/>
+          <a:ext cx="2926080" cy="3291840"/>
+        </p:xfrm>
+        <a:graphic>
+          <a:graphicData uri="http://schemas.openxmlformats.org/drawingml/2006/chart">
+            <c:chart xmlns:c="http://schemas.openxmlformats.org/drawingml/2006/chart" xmlns:r="http://schemas.openxmlformats.org/officeDocument/2006/relationships" r:id="rId2"/>
+          </a:graphicData>
+        </a:graphic>
+      </p:graphicFrame>
       <p:sp>
         <p:nvSpPr>
           <p:cNvPr id="7" name="roundRect 6"/>
@@ -5654,9 +5662,10 @@
           </a:prstGeom>
         </p:spPr>
         <p:txBody>
-          <a:bodyPr/>
-          <a:lstStyle/>
-          <a:p>
+          <a:bodyPr anchor="t"/>
+          <a:lstStyle/>
+          <a:p>
+            <a:pPr algn="l"/>
             <a:r>
               <a:rPr b="1" sz="1200">
                 <a:solidFill>
@@ -5670,6 +5679,22 @@
           </a:p>
         </p:txBody>
       </p:sp>
+      <p:graphicFrame>
+        <p:nvGraphicFramePr>
+          <p:cNvPr id="9" name="Chart 8"/>
+          <p:cNvGraphicFramePr/>
+          <p:nvPr/>
+        </p:nvGraphicFramePr>
+        <p:xfrm>
+          <a:off x="4626864" y="2377440"/>
+          <a:ext cx="2926080" cy="3291840"/>
+        </p:xfrm>
+        <a:graphic>
+          <a:graphicData uri="http://schemas.openxmlformats.org/drawingml/2006/chart">
+            <c:chart xmlns:c="http://schemas.openxmlformats.org/drawingml/2006/chart" xmlns:r="http://schemas.openxmlformats.org/officeDocument/2006/relationships" r:id="rId3"/>
+          </a:graphicData>
+        </a:graphic>
+      </p:graphicFrame>
       <p:sp>
         <p:nvSpPr>
           <p:cNvPr id="10" name="roundRect 9"/>
@@ -5724,9 +5749,10 @@
           </a:prstGeom>
         </p:spPr>
         <p:txBody>
-          <a:bodyPr/>
-          <a:lstStyle/>
-          <a:p>
+          <a:bodyPr anchor="t"/>
+          <a:lstStyle/>
+          <a:p>
+            <a:pPr algn="l"/>
             <a:r>
               <a:rPr b="1" sz="1200">
                 <a:solidFill>
@@ -5740,71 +5766,6 @@
           </a:p>
         </p:txBody>
       </p:sp>
-      <p:sp>
-        <p:nvSpPr>
-          <p:cNvPr id="13" name="Text Box 12"/>
-          <p:cNvSpPr txBox="1"/>
-          <p:nvPr/>
-        </p:nvSpPr>
-        <p:spPr>
-          <a:xfrm>
-            <a:off x="731520" y="6510528"/>
-            <a:ext cx="10725912" cy="228600"/>
-          </a:xfrm>
-          <a:prstGeom prst="rect">
-            <a:avLst/>
-          </a:prstGeom>
-        </p:spPr>
-        <p:txBody>
-          <a:bodyPr/>
-          <a:lstStyle/>
-          <a:p>
-            <a:pPr algn="ctr"/>
-            <a:r>
-              <a:rPr i="1" sz="800">
-                <a:solidFill>
-                  <a:srgbClr val="64748B"/>
-                </a:solidFill>
-                <a:latin typeface="+mn-lt"/>
-                <a:cs typeface="+mn-lt"/>
-              </a:rPr>
-              <a:t>* Disclaimer: All benchmark metrics, performance figures, and simulated architectures in this deck are synthetic demonstration values generated solely to showcase the authoring, formatting, and rendering capabilities of @hokkyss/pptx.</a:t>
-            </a:r>
-          </a:p>
-        </p:txBody>
-      </p:sp>
-      <p:graphicFrame>
-        <p:nvGraphicFramePr>
-          <p:cNvPr id="6" name="Chart 5"/>
-          <p:cNvGraphicFramePr/>
-          <p:nvPr/>
-        </p:nvGraphicFramePr>
-        <p:xfrm>
-          <a:off x="1097280" y="2377440"/>
-          <a:ext cx="2926080" cy="3291840"/>
-        </p:xfrm>
-        <a:graphic>
-          <a:graphicData uri="http://schemas.openxmlformats.org/drawingml/2006/chart">
-            <c:chart xmlns:c="http://schemas.openxmlformats.org/drawingml/2006/chart" xmlns:r="http://schemas.openxmlformats.org/officeDocument/2006/relationships" r:id="rId2"/>
-          </a:graphicData>
-        </a:graphic>
-      </p:graphicFrame>
-      <p:graphicFrame>
-        <p:nvGraphicFramePr>
-          <p:cNvPr id="9" name="Chart 8"/>
-          <p:cNvGraphicFramePr/>
-          <p:nvPr/>
-        </p:nvGraphicFramePr>
-        <p:xfrm>
-          <a:off x="4626864" y="2377440"/>
-          <a:ext cx="2926080" cy="3291840"/>
-        </p:xfrm>
-        <a:graphic>
-          <a:graphicData uri="http://schemas.openxmlformats.org/drawingml/2006/chart">
-            <c:chart xmlns:c="http://schemas.openxmlformats.org/drawingml/2006/chart" xmlns:r="http://schemas.openxmlformats.org/officeDocument/2006/relationships" r:id="rId3"/>
-          </a:graphicData>
-        </a:graphic>
-      </p:graphicFrame>
       <p:graphicFrame>
         <p:nvGraphicFramePr>
           <p:cNvPr id="12" name="Chart 11"/>
@@ -5821,6 +5782,39 @@
           </a:graphicData>
         </a:graphic>
       </p:graphicFrame>
+      <p:sp>
+        <p:nvSpPr>
+          <p:cNvPr id="13" name="Text Box 12"/>
+          <p:cNvSpPr txBox="1"/>
+          <p:nvPr/>
+        </p:nvSpPr>
+        <p:spPr>
+          <a:xfrm>
+            <a:off x="731520" y="6510528"/>
+            <a:ext cx="10725912" cy="228600"/>
+          </a:xfrm>
+          <a:prstGeom prst="rect">
+            <a:avLst/>
+          </a:prstGeom>
+        </p:spPr>
+        <p:txBody>
+          <a:bodyPr anchor="t"/>
+          <a:lstStyle/>
+          <a:p>
+            <a:pPr algn="ctr"/>
+            <a:r>
+              <a:rPr i="1" sz="800">
+                <a:solidFill>
+                  <a:srgbClr val="64748B"/>
+                </a:solidFill>
+                <a:latin typeface="+mn-lt"/>
+                <a:cs typeface="+mn-lt"/>
+              </a:rPr>
+              <a:t>* Disclaimer: All benchmark metrics, performance figures, and simulated architectures in this deck are synthetic demonstration values generated solely to showcase the authoring, formatting, and rendering capabilities of @hokkyss/pptx.</a:t>
+            </a:r>
+          </a:p>
+        </p:txBody>
+      </p:sp>
     </p:spTree>
   </p:cSld>
   <p:clrMapOvr>
@@ -5833,7 +5827,7 @@
 </file>
 
 <file path=ppt/slides/slide14.xml><?xml version="1.0" encoding="utf-8"?>
-<p:sld xmlns:a="http://schemas.openxmlformats.org/drawingml/2006/main" xmlns:r="http://schemas.openxmlformats.org/officeDocument/2006/relationships" xmlns:p="http://schemas.openxmlformats.org/presentationml/2006/main">
+<p:sld xmlns:a="http://schemas.openxmlformats.org/drawingml/2006/main" xmlns:p="http://schemas.openxmlformats.org/presentationml/2006/main" xmlns:r="http://schemas.openxmlformats.org/officeDocument/2006/relationships">
   <p:cSld>
     <p:bg>
       <p:bgPr>
@@ -5873,9 +5867,10 @@
           </a:prstGeom>
         </p:spPr>
         <p:txBody>
-          <a:bodyPr/>
-          <a:lstStyle/>
-          <a:p>
+          <a:bodyPr anchor="t"/>
+          <a:lstStyle/>
+          <a:p>
+            <a:pPr algn="l"/>
             <a:r>
               <a:rPr b="1" sz="2400">
                 <a:solidFill>
@@ -5905,9 +5900,10 @@
           </a:prstGeom>
         </p:spPr>
         <p:txBody>
-          <a:bodyPr/>
-          <a:lstStyle/>
-          <a:p>
+          <a:bodyPr anchor="t"/>
+          <a:lstStyle/>
+          <a:p>
+            <a:pPr algn="l"/>
             <a:r>
               <a:rPr sz="1400">
                 <a:solidFill>
@@ -5975,9 +5971,10 @@
           </a:prstGeom>
         </p:spPr>
         <p:txBody>
-          <a:bodyPr/>
-          <a:lstStyle/>
-          <a:p>
+          <a:bodyPr anchor="t"/>
+          <a:lstStyle/>
+          <a:p>
+            <a:pPr algn="l"/>
             <a:r>
               <a:rPr b="1" sz="1300">
                 <a:solidFill>
@@ -6007,9 +6004,10 @@
           </a:prstGeom>
         </p:spPr>
         <p:txBody>
-          <a:bodyPr/>
-          <a:lstStyle/>
-          <a:p>
+          <a:bodyPr anchor="t"/>
+          <a:lstStyle/>
+          <a:p>
+            <a:pPr algn="l"/>
             <a:r>
               <a:rPr sz="1050">
                 <a:solidFill>
@@ -6049,9 +6047,10 @@
           </a:ln>
         </p:spPr>
         <p:txBody>
-          <a:bodyPr/>
-          <a:lstStyle/>
-          <a:p>
+          <a:bodyPr anchor="t"/>
+          <a:lstStyle/>
+          <a:p>
+            <a:pPr algn="l"/>
             <a:r>
               <a:rPr b="1" sz="1100">
                 <a:solidFill>
@@ -6064,6 +6063,7 @@
             </a:r>
           </a:p>
           <a:p>
+            <a:pPr algn="l"/>
             <a:r>
               <a:rPr sz="950">
                 <a:solidFill>
@@ -6103,9 +6103,10 @@
           </a:ln>
         </p:spPr>
         <p:txBody>
-          <a:bodyPr/>
-          <a:lstStyle/>
-          <a:p>
+          <a:bodyPr anchor="t"/>
+          <a:lstStyle/>
+          <a:p>
+            <a:pPr algn="l"/>
             <a:r>
               <a:rPr b="1" sz="1100">
                 <a:solidFill>
@@ -6118,6 +6119,7 @@
             </a:r>
           </a:p>
           <a:p>
+            <a:pPr algn="l"/>
             <a:r>
               <a:rPr sz="950">
                 <a:solidFill>
@@ -6157,9 +6159,10 @@
           </a:ln>
         </p:spPr>
         <p:txBody>
-          <a:bodyPr/>
-          <a:lstStyle/>
-          <a:p>
+          <a:bodyPr anchor="t"/>
+          <a:lstStyle/>
+          <a:p>
+            <a:pPr algn="l"/>
             <a:r>
               <a:rPr b="1" sz="1100">
                 <a:solidFill>
@@ -6172,6 +6175,7 @@
             </a:r>
           </a:p>
           <a:p>
+            <a:pPr algn="l"/>
             <a:r>
               <a:rPr sz="950">
                 <a:solidFill>
@@ -6211,9 +6215,10 @@
           </a:ln>
         </p:spPr>
         <p:txBody>
-          <a:bodyPr/>
-          <a:lstStyle/>
-          <a:p>
+          <a:bodyPr anchor="t"/>
+          <a:lstStyle/>
+          <a:p>
+            <a:pPr algn="l"/>
             <a:r>
               <a:rPr b="1" sz="1100">
                 <a:solidFill>
@@ -6226,6 +6231,7 @@
             </a:r>
           </a:p>
           <a:p>
+            <a:pPr algn="l"/>
             <a:r>
               <a:rPr sz="950">
                 <a:solidFill>
@@ -6293,9 +6299,10 @@
           </a:prstGeom>
         </p:spPr>
         <p:txBody>
-          <a:bodyPr/>
-          <a:lstStyle/>
-          <a:p>
+          <a:bodyPr anchor="t"/>
+          <a:lstStyle/>
+          <a:p>
+            <a:pPr algn="l"/>
             <a:r>
               <a:rPr b="1" sz="1300">
                 <a:solidFill>
@@ -6325,9 +6332,10 @@
           </a:prstGeom>
         </p:spPr>
         <p:txBody>
-          <a:bodyPr/>
-          <a:lstStyle/>
-          <a:p>
+          <a:bodyPr anchor="t"/>
+          <a:lstStyle/>
+          <a:p>
+            <a:pPr algn="l" lvl="0"/>
             <a:r>
               <a:rPr>
                 <a:latin typeface="+mn-lt"/>
@@ -6355,6 +6363,7 @@
             </a:r>
           </a:p>
           <a:p>
+            <a:pPr algn="l" lvl="0"/>
             <a:r>
               <a:rPr>
                 <a:latin typeface="+mn-lt"/>
@@ -6382,6 +6391,7 @@
             </a:r>
           </a:p>
           <a:p>
+            <a:pPr algn="l" lvl="0"/>
             <a:r>
               <a:rPr>
                 <a:latin typeface="+mn-lt"/>
@@ -6464,9 +6474,10 @@
           </a:prstGeom>
         </p:spPr>
         <p:txBody>
-          <a:bodyPr/>
-          <a:lstStyle/>
-          <a:p>
+          <a:bodyPr anchor="t"/>
+          <a:lstStyle/>
+          <a:p>
+            <a:pPr algn="l"/>
             <a:r>
               <a:rPr b="1" sz="1300">
                 <a:solidFill>
@@ -6496,9 +6507,10 @@
           </a:prstGeom>
         </p:spPr>
         <p:txBody>
-          <a:bodyPr/>
-          <a:lstStyle/>
-          <a:p>
+          <a:bodyPr anchor="t"/>
+          <a:lstStyle/>
+          <a:p>
+            <a:pPr algn="l"/>
             <a:r>
               <a:rPr sz="1000">
                 <a:solidFill>
@@ -6533,7 +6545,7 @@
           </a:solidFill>
         </p:spPr>
         <p:txBody>
-          <a:bodyPr/>
+          <a:bodyPr anchor="t"/>
           <a:lstStyle/>
           <a:p>
             <a:pPr algn="ctr"/>
@@ -6571,7 +6583,7 @@
           </a:solidFill>
         </p:spPr>
         <p:txBody>
-          <a:bodyPr/>
+          <a:bodyPr anchor="t"/>
           <a:lstStyle/>
           <a:p>
             <a:pPr algn="ctr"/>
@@ -6609,7 +6621,7 @@
           </a:solidFill>
         </p:spPr>
         <p:txBody>
-          <a:bodyPr/>
+          <a:bodyPr anchor="t"/>
           <a:lstStyle/>
           <a:p>
             <a:pPr algn="ctr"/>
@@ -6647,7 +6659,7 @@
           </a:solidFill>
         </p:spPr>
         <p:txBody>
-          <a:bodyPr/>
+          <a:bodyPr anchor="t"/>
           <a:lstStyle/>
           <a:p>
             <a:pPr algn="ctr"/>
@@ -6680,7 +6692,7 @@
           </a:prstGeom>
         </p:spPr>
         <p:txBody>
-          <a:bodyPr/>
+          <a:bodyPr anchor="t"/>
           <a:lstStyle/>
           <a:p>
             <a:pPr algn="ctr"/>
@@ -6709,7 +6721,7 @@
 </file>
 
 <file path=ppt/slides/slide15.xml><?xml version="1.0" encoding="utf-8"?>
-<p:sld xmlns:a="http://schemas.openxmlformats.org/drawingml/2006/main" xmlns:r="http://schemas.openxmlformats.org/officeDocument/2006/relationships" xmlns:p="http://schemas.openxmlformats.org/presentationml/2006/main">
+<p:sld xmlns:a="http://schemas.openxmlformats.org/drawingml/2006/main" xmlns:p="http://schemas.openxmlformats.org/presentationml/2006/main" xmlns:r="http://schemas.openxmlformats.org/officeDocument/2006/relationships">
   <p:cSld>
     <p:bg>
       <p:bgPr>
@@ -6760,9 +6772,10 @@
           </a:prstGeom>
         </p:spPr>
         <p:txBody>
-          <a:bodyPr/>
-          <a:lstStyle/>
-          <a:p>
+          <a:bodyPr anchor="t"/>
+          <a:lstStyle/>
+          <a:p>
+            <a:pPr algn="l"/>
             <a:r>
               <a:rPr b="1" sz="2400">
                 <a:solidFill>
@@ -6792,9 +6805,10 @@
           </a:prstGeom>
         </p:spPr>
         <p:txBody>
-          <a:bodyPr/>
-          <a:lstStyle/>
-          <a:p>
+          <a:bodyPr anchor="t"/>
+          <a:lstStyle/>
+          <a:p>
+            <a:pPr algn="l"/>
             <a:r>
               <a:rPr sz="1400">
                 <a:solidFill>
@@ -6841,7 +6855,7 @@
           </a:effectLst>
         </p:spPr>
         <p:txBody>
-          <a:bodyPr/>
+          <a:bodyPr anchor="t"/>
           <a:lstStyle/>
           <a:p>
             <a:pPr algn="ctr"/>
@@ -6899,7 +6913,7 @@
           </a:effectLst>
         </p:spPr>
         <p:txBody>
-          <a:bodyPr/>
+          <a:bodyPr anchor="t"/>
           <a:lstStyle/>
           <a:p>
             <a:pPr algn="ctr"/>
@@ -6970,9 +6984,10 @@
           </a:prstGeom>
         </p:spPr>
         <p:txBody>
-          <a:bodyPr/>
-          <a:lstStyle/>
-          <a:p>
+          <a:bodyPr anchor="t"/>
+          <a:lstStyle/>
+          <a:p>
+            <a:pPr algn="l"/>
             <a:r>
               <a:rPr b="1" sz="1300">
                 <a:solidFill>
@@ -7028,9 +7043,10 @@
           </a:effectLst>
         </p:spPr>
         <p:txBody>
-          <a:bodyPr/>
-          <a:lstStyle/>
-          <a:p>
+          <a:bodyPr anchor="t"/>
+          <a:lstStyle/>
+          <a:p>
+            <a:pPr algn="l"/>
             <a:r>
               <a:rPr b="1" sz="1200">
                 <a:solidFill>
@@ -7043,6 +7059,7 @@
             </a:r>
           </a:p>
           <a:p>
+            <a:pPr algn="l"/>
             <a:r>
               <a:rPr sz="950">
                 <a:solidFill>
@@ -7098,9 +7115,10 @@
           </a:effectLst>
         </p:spPr>
         <p:txBody>
-          <a:bodyPr/>
-          <a:lstStyle/>
-          <a:p>
+          <a:bodyPr anchor="t"/>
+          <a:lstStyle/>
+          <a:p>
+            <a:pPr algn="l"/>
             <a:r>
               <a:rPr b="1" sz="1200">
                 <a:solidFill>
@@ -7113,6 +7131,7 @@
             </a:r>
           </a:p>
           <a:p>
+            <a:pPr algn="l"/>
             <a:r>
               <a:rPr sz="950">
                 <a:solidFill>
@@ -7168,9 +7187,10 @@
           </a:effectLst>
         </p:spPr>
         <p:txBody>
-          <a:bodyPr/>
-          <a:lstStyle/>
-          <a:p>
+          <a:bodyPr anchor="t"/>
+          <a:lstStyle/>
+          <a:p>
+            <a:pPr algn="l"/>
             <a:r>
               <a:rPr b="1" sz="1200">
                 <a:solidFill>
@@ -7183,6 +7203,7 @@
             </a:r>
           </a:p>
           <a:p>
+            <a:pPr algn="l"/>
             <a:r>
               <a:rPr sz="950">
                 <a:solidFill>
@@ -7250,9 +7271,10 @@
           </a:prstGeom>
         </p:spPr>
         <p:txBody>
-          <a:bodyPr/>
-          <a:lstStyle/>
-          <a:p>
+          <a:bodyPr anchor="t"/>
+          <a:lstStyle/>
+          <a:p>
+            <a:pPr algn="l"/>
             <a:r>
               <a:rPr b="1" sz="1300">
                 <a:solidFill>
@@ -7333,9 +7355,10 @@
           </a:prstGeom>
         </p:spPr>
         <p:txBody>
-          <a:bodyPr/>
-          <a:lstStyle/>
-          <a:p>
+          <a:bodyPr anchor="t"/>
+          <a:lstStyle/>
+          <a:p>
+            <a:pPr algn="l"/>
             <a:r>
               <a:rPr sz="1000">
                 <a:solidFill>
@@ -7348,6 +7371,7 @@
             </a:r>
           </a:p>
           <a:p>
+            <a:pPr algn="l"/>
             <a:r>
               <a:rPr sz="1000">
                 <a:solidFill>
@@ -7409,9 +7433,10 @@
           </a:effectLst>
         </p:spPr>
         <p:txBody>
-          <a:bodyPr/>
-          <a:lstStyle/>
-          <a:p>
+          <a:bodyPr anchor="t"/>
+          <a:lstStyle/>
+          <a:p>
+            <a:pPr algn="l"/>
             <a:r>
               <a:rPr b="1" sz="1100">
                 <a:solidFill>
@@ -7424,6 +7449,7 @@
             </a:r>
           </a:p>
           <a:p>
+            <a:pPr algn="l"/>
             <a:r>
               <a:rPr sz="950">
                 <a:solidFill>
@@ -7461,9 +7487,10 @@
           </a:ln>
         </p:spPr>
         <p:txBody>
-          <a:bodyPr/>
-          <a:lstStyle/>
-          <a:p>
+          <a:bodyPr anchor="t"/>
+          <a:lstStyle/>
+          <a:p>
+            <a:pPr algn="l"/>
             <a:r>
               <a:rPr b="1" sz="900">
                 <a:solidFill>
@@ -7476,6 +7503,7 @@
             </a:r>
           </a:p>
           <a:p>
+            <a:pPr algn="l"/>
             <a:r>
               <a:rPr sz="900">
                 <a:solidFill>
@@ -7488,6 +7516,7 @@
             </a:r>
           </a:p>
           <a:p>
+            <a:pPr algn="l"/>
             <a:r>
               <a:rPr sz="900">
                 <a:solidFill>
@@ -7500,6 +7529,7 @@
             </a:r>
           </a:p>
           <a:p>
+            <a:pPr algn="l"/>
             <a:r>
               <a:rPr sz="900">
                 <a:solidFill>
@@ -7529,7 +7559,7 @@
           </a:prstGeom>
         </p:spPr>
         <p:txBody>
-          <a:bodyPr/>
+          <a:bodyPr anchor="t"/>
           <a:lstStyle/>
           <a:p>
             <a:pPr algn="ctr"/>
@@ -7558,7 +7588,7 @@
 </file>
 
 <file path=ppt/slides/slide16.xml><?xml version="1.0" encoding="utf-8"?>
-<p:sld xmlns:a="http://schemas.openxmlformats.org/drawingml/2006/main" xmlns:r="http://schemas.openxmlformats.org/officeDocument/2006/relationships" xmlns:p="http://schemas.openxmlformats.org/presentationml/2006/main">
+<p:sld xmlns:a="http://schemas.openxmlformats.org/drawingml/2006/main" xmlns:p="http://schemas.openxmlformats.org/presentationml/2006/main" xmlns:r="http://schemas.openxmlformats.org/officeDocument/2006/relationships">
   <p:cSld>
     <p:bg>
       <p:bgPr>
@@ -7598,9 +7628,10 @@
           </a:prstGeom>
         </p:spPr>
         <p:txBody>
-          <a:bodyPr/>
-          <a:lstStyle/>
-          <a:p>
+          <a:bodyPr anchor="t"/>
+          <a:lstStyle/>
+          <a:p>
+            <a:pPr algn="l"/>
             <a:r>
               <a:rPr b="1" sz="2400">
                 <a:solidFill>
@@ -7630,9 +7661,10 @@
           </a:prstGeom>
         </p:spPr>
         <p:txBody>
-          <a:bodyPr/>
-          <a:lstStyle/>
-          <a:p>
+          <a:bodyPr anchor="t"/>
+          <a:lstStyle/>
+          <a:p>
+            <a:pPr algn="l"/>
             <a:r>
               <a:rPr sz="1400">
                 <a:solidFill>
@@ -7700,9 +7732,10 @@
           </a:prstGeom>
         </p:spPr>
         <p:txBody>
-          <a:bodyPr/>
-          <a:lstStyle/>
-          <a:p>
+          <a:bodyPr anchor="t"/>
+          <a:lstStyle/>
+          <a:p>
+            <a:pPr algn="l"/>
             <a:r>
               <a:rPr b="1" sz="1300">
                 <a:solidFill>
@@ -7712,159 +7745,6 @@
                 <a:cs typeface="+mn-lt"/>
               </a:rPr>
               <a:t>⚡ Throughput &amp; Latency Benchmarks (Vitest)</a:t>
-            </a:r>
-          </a:p>
-        </p:txBody>
-      </p:sp>
-      <p:sp>
-        <p:nvSpPr>
-          <p:cNvPr id="7" name="roundRect 6"/>
-          <p:cNvSpPr/>
-          <p:nvPr/>
-        </p:nvSpPr>
-        <p:spPr>
-          <a:xfrm>
-            <a:off x="6217920" y="1828800"/>
-            <a:ext cx="5212080" cy="4480560"/>
-          </a:xfrm>
-          <a:prstGeom prst="roundRect">
-            <a:avLst/>
-          </a:prstGeom>
-          <a:solidFill>
-            <a:srgbClr val="1E293B"/>
-          </a:solidFill>
-          <a:ln w="13716">
-            <a:solidFill>
-              <a:srgbClr val="334155"/>
-            </a:solidFill>
-          </a:ln>
-          <a:effectLst>
-            <a:outerShdw blurRad="109728" dist="38100" dir="5400000">
-              <a:srgbClr val="000000">
-                <a:alpha val="30000"/>
-              </a:srgbClr>
-            </a:outerShdw>
-          </a:effectLst>
-        </p:spPr>
-        <p:txBody>
-          <a:bodyPr/>
-          <a:lstStyle/>
-          <a:p>
-            <a:endParaRPr/>
-          </a:p>
-        </p:txBody>
-      </p:sp>
-      <p:sp>
-        <p:nvSpPr>
-          <p:cNvPr id="8" name="Text Box 7"/>
-          <p:cNvSpPr txBox="1"/>
-          <p:nvPr/>
-        </p:nvSpPr>
-        <p:spPr>
-          <a:xfrm>
-            <a:off x="6400800" y="2011680"/>
-            <a:ext cx="4846320" cy="320040"/>
-          </a:xfrm>
-          <a:prstGeom prst="rect">
-            <a:avLst/>
-          </a:prstGeom>
-        </p:spPr>
-        <p:txBody>
-          <a:bodyPr/>
-          <a:lstStyle/>
-          <a:p>
-            <a:r>
-              <a:rPr b="1" sz="1300">
-                <a:solidFill>
-                  <a:srgbClr val="FFFFFF"/>
-                </a:solidFill>
-                <a:latin typeface="+mn-lt"/>
-                <a:cs typeface="+mn-lt"/>
-              </a:rPr>
-              <a:t>📦 Monorepo Gzip &amp; Brotli Footprint (Bundlephobia-Aligned)</a:t>
-            </a:r>
-          </a:p>
-        </p:txBody>
-      </p:sp>
-      <p:sp>
-        <p:nvSpPr>
-          <p:cNvPr id="10" name="roundRect 9">
-            <a:hlinkClick r:id="rId3" tooltip="Return to Hyperlinks Hub (Slide 14)" action="ppaction://hlinksldjump"/>
-          </p:cNvPr>
-          <p:cNvSpPr/>
-          <p:nvPr/>
-        </p:nvSpPr>
-        <p:spPr>
-          <a:xfrm>
-            <a:off x="9144000" y="731520"/>
-            <a:ext cx="2194560" cy="411480"/>
-          </a:xfrm>
-          <a:prstGeom prst="roundRect">
-            <a:avLst/>
-          </a:prstGeom>
-          <a:solidFill>
-            <a:srgbClr val="0284C7"/>
-          </a:solidFill>
-          <a:ln w="13716">
-            <a:solidFill>
-              <a:srgbClr val="38BDF8"/>
-            </a:solidFill>
-          </a:ln>
-          <a:effectLst>
-            <a:outerShdw blurRad="137160" dist="27432" dir="5400000">
-              <a:srgbClr val="0284C7">
-                <a:alpha val="30000"/>
-              </a:srgbClr>
-            </a:outerShdw>
-          </a:effectLst>
-        </p:spPr>
-        <p:txBody>
-          <a:bodyPr/>
-          <a:lstStyle/>
-          <a:p>
-            <a:pPr algn="ctr"/>
-            <a:r>
-              <a:rPr b="1" sz="1000">
-                <a:solidFill>
-                  <a:srgbClr val="FFFFFF"/>
-                </a:solidFill>
-                <a:latin typeface="+mn-lt"/>
-                <a:cs typeface="+mn-lt"/>
-              </a:rPr>
-              <a:t>⬅ Back to Nav Hub</a:t>
-            </a:r>
-          </a:p>
-        </p:txBody>
-      </p:sp>
-      <p:sp>
-        <p:nvSpPr>
-          <p:cNvPr id="11" name="Text Box 10"/>
-          <p:cNvSpPr txBox="1"/>
-          <p:nvPr/>
-        </p:nvSpPr>
-        <p:spPr>
-          <a:xfrm>
-            <a:off x="731520" y="6510528"/>
-            <a:ext cx="10725912" cy="228600"/>
-          </a:xfrm>
-          <a:prstGeom prst="rect">
-            <a:avLst/>
-          </a:prstGeom>
-        </p:spPr>
-        <p:txBody>
-          <a:bodyPr/>
-          <a:lstStyle/>
-          <a:p>
-            <a:pPr algn="ctr"/>
-            <a:r>
-              <a:rPr i="1" sz="800">
-                <a:solidFill>
-                  <a:srgbClr val="64748B"/>
-                </a:solidFill>
-                <a:latin typeface="+mn-lt"/>
-                <a:cs typeface="+mn-lt"/>
-              </a:rPr>
-              <a:t>* Disclaimer: All benchmark metrics, performance figures, and simulated architectures in this deck are synthetic demonstration values generated solely to showcase the authoring, formatting, and rendering capabilities of @hokkyss/pptx.</a:t>
             </a:r>
           </a:p>
         </p:txBody>
@@ -7897,6 +7777,7 @@
                     <a:bodyPr anchor="ctr"/>
                     <a:lstStyle/>
                     <a:p>
+                      <a:pPr algn="l"/>
                       <a:r>
                         <a:rPr b="1" sz="1000">
                           <a:solidFill>
@@ -7909,7 +7790,7 @@
                       </a:r>
                     </a:p>
                   </a:txBody>
-                  <a:tcPr>
+                  <a:tcPr anchor="ctr">
                     <a:solidFill>
                       <a:srgbClr val="0284C7"/>
                     </a:solidFill>
@@ -7933,7 +7814,7 @@
                       </a:r>
                     </a:p>
                   </a:txBody>
-                  <a:tcPr>
+                  <a:tcPr anchor="ctr">
                     <a:solidFill>
                       <a:srgbClr val="0284C7"/>
                     </a:solidFill>
@@ -7957,7 +7838,7 @@
                       </a:r>
                     </a:p>
                   </a:txBody>
-                  <a:tcPr>
+                  <a:tcPr anchor="ctr">
                     <a:solidFill>
                       <a:srgbClr val="0284C7"/>
                     </a:solidFill>
@@ -7981,7 +7862,7 @@
                       </a:r>
                     </a:p>
                   </a:txBody>
-                  <a:tcPr>
+                  <a:tcPr anchor="ctr">
                     <a:solidFill>
                       <a:srgbClr val="0284C7"/>
                     </a:solidFill>
@@ -7994,6 +7875,7 @@
                     <a:bodyPr anchor="ctr"/>
                     <a:lstStyle/>
                     <a:p>
+                      <a:pPr algn="l"/>
                       <a:r>
                         <a:rPr b="1" sz="950">
                           <a:solidFill>
@@ -8006,7 +7888,7 @@
                       </a:r>
                     </a:p>
                   </a:txBody>
-                  <a:tcPr>
+                  <a:tcPr anchor="ctr">
                     <a:solidFill>
                       <a:srgbClr val="1E293B"/>
                     </a:solidFill>
@@ -8030,7 +7912,7 @@
                       </a:r>
                     </a:p>
                   </a:txBody>
-                  <a:tcPr>
+                  <a:tcPr anchor="ctr">
                     <a:solidFill>
                       <a:srgbClr val="1E293B"/>
                     </a:solidFill>
@@ -8054,7 +7936,7 @@
                       </a:r>
                     </a:p>
                   </a:txBody>
-                  <a:tcPr>
+                  <a:tcPr anchor="ctr">
                     <a:solidFill>
                       <a:srgbClr val="1E293B"/>
                     </a:solidFill>
@@ -8078,7 +7960,7 @@
                       </a:r>
                     </a:p>
                   </a:txBody>
-                  <a:tcPr>
+                  <a:tcPr anchor="ctr">
                     <a:solidFill>
                       <a:srgbClr val="1E293B"/>
                     </a:solidFill>
@@ -8091,6 +7973,7 @@
                     <a:bodyPr anchor="ctr"/>
                     <a:lstStyle/>
                     <a:p>
+                      <a:pPr algn="l"/>
                       <a:r>
                         <a:rPr b="1" sz="950">
                           <a:solidFill>
@@ -8103,7 +7986,7 @@
                       </a:r>
                     </a:p>
                   </a:txBody>
-                  <a:tcPr>
+                  <a:tcPr anchor="ctr">
                     <a:solidFill>
                       <a:srgbClr val="0F172A"/>
                     </a:solidFill>
@@ -8127,7 +8010,7 @@
                       </a:r>
                     </a:p>
                   </a:txBody>
-                  <a:tcPr>
+                  <a:tcPr anchor="ctr">
                     <a:solidFill>
                       <a:srgbClr val="0F172A"/>
                     </a:solidFill>
@@ -8151,7 +8034,7 @@
                       </a:r>
                     </a:p>
                   </a:txBody>
-                  <a:tcPr>
+                  <a:tcPr anchor="ctr">
                     <a:solidFill>
                       <a:srgbClr val="0F172A"/>
                     </a:solidFill>
@@ -8175,7 +8058,7 @@
                       </a:r>
                     </a:p>
                   </a:txBody>
-                  <a:tcPr>
+                  <a:tcPr anchor="ctr">
                     <a:solidFill>
                       <a:srgbClr val="0F172A"/>
                     </a:solidFill>
@@ -8188,6 +8071,7 @@
                     <a:bodyPr anchor="ctr"/>
                     <a:lstStyle/>
                     <a:p>
+                      <a:pPr algn="l"/>
                       <a:r>
                         <a:rPr b="1" sz="950">
                           <a:solidFill>
@@ -8200,7 +8084,7 @@
                       </a:r>
                     </a:p>
                   </a:txBody>
-                  <a:tcPr>
+                  <a:tcPr anchor="ctr">
                     <a:solidFill>
                       <a:srgbClr val="1E293B"/>
                     </a:solidFill>
@@ -8224,7 +8108,7 @@
                       </a:r>
                     </a:p>
                   </a:txBody>
-                  <a:tcPr>
+                  <a:tcPr anchor="ctr">
                     <a:solidFill>
                       <a:srgbClr val="1E293B"/>
                     </a:solidFill>
@@ -8248,7 +8132,7 @@
                       </a:r>
                     </a:p>
                   </a:txBody>
-                  <a:tcPr>
+                  <a:tcPr anchor="ctr">
                     <a:solidFill>
                       <a:srgbClr val="1E293B"/>
                     </a:solidFill>
@@ -8272,7 +8156,7 @@
                       </a:r>
                     </a:p>
                   </a:txBody>
-                  <a:tcPr>
+                  <a:tcPr anchor="ctr">
                     <a:solidFill>
                       <a:srgbClr val="1E293B"/>
                     </a:solidFill>
@@ -8285,6 +8169,7 @@
                     <a:bodyPr anchor="ctr"/>
                     <a:lstStyle/>
                     <a:p>
+                      <a:pPr algn="l"/>
                       <a:r>
                         <a:rPr b="1" sz="950">
                           <a:solidFill>
@@ -8297,7 +8182,7 @@
                       </a:r>
                     </a:p>
                   </a:txBody>
-                  <a:tcPr>
+                  <a:tcPr anchor="ctr">
                     <a:solidFill>
                       <a:srgbClr val="0F172A"/>
                     </a:solidFill>
@@ -8321,7 +8206,7 @@
                       </a:r>
                     </a:p>
                   </a:txBody>
-                  <a:tcPr>
+                  <a:tcPr anchor="ctr">
                     <a:solidFill>
                       <a:srgbClr val="0F172A"/>
                     </a:solidFill>
@@ -8345,7 +8230,7 @@
                       </a:r>
                     </a:p>
                   </a:txBody>
-                  <a:tcPr>
+                  <a:tcPr anchor="ctr">
                     <a:solidFill>
                       <a:srgbClr val="0F172A"/>
                     </a:solidFill>
@@ -8369,7 +8254,7 @@
                       </a:r>
                     </a:p>
                   </a:txBody>
-                  <a:tcPr>
+                  <a:tcPr anchor="ctr">
                     <a:solidFill>
                       <a:srgbClr val="0F172A"/>
                     </a:solidFill>
@@ -8382,6 +8267,7 @@
                     <a:bodyPr anchor="ctr"/>
                     <a:lstStyle/>
                     <a:p>
+                      <a:pPr algn="l"/>
                       <a:r>
                         <a:rPr b="1" sz="950">
                           <a:solidFill>
@@ -8394,7 +8280,7 @@
                       </a:r>
                     </a:p>
                   </a:txBody>
-                  <a:tcPr>
+                  <a:tcPr anchor="ctr">
                     <a:solidFill>
                       <a:srgbClr val="1E293B"/>
                     </a:solidFill>
@@ -8418,7 +8304,7 @@
                       </a:r>
                     </a:p>
                   </a:txBody>
-                  <a:tcPr>
+                  <a:tcPr anchor="ctr">
                     <a:solidFill>
                       <a:srgbClr val="1E293B"/>
                     </a:solidFill>
@@ -8442,7 +8328,7 @@
                       </a:r>
                     </a:p>
                   </a:txBody>
-                  <a:tcPr>
+                  <a:tcPr anchor="ctr">
                     <a:solidFill>
                       <a:srgbClr val="1E293B"/>
                     </a:solidFill>
@@ -8466,7 +8352,7 @@
                       </a:r>
                     </a:p>
                   </a:txBody>
-                  <a:tcPr>
+                  <a:tcPr anchor="ctr">
                     <a:solidFill>
                       <a:srgbClr val="1E293B"/>
                     </a:solidFill>
@@ -8479,6 +8365,7 @@
                     <a:bodyPr anchor="ctr"/>
                     <a:lstStyle/>
                     <a:p>
+                      <a:pPr algn="l"/>
                       <a:r>
                         <a:rPr b="1" sz="950">
                           <a:solidFill>
@@ -8491,7 +8378,7 @@
                       </a:r>
                     </a:p>
                   </a:txBody>
-                  <a:tcPr>
+                  <a:tcPr anchor="ctr">
                     <a:solidFill>
                       <a:srgbClr val="0F172A"/>
                     </a:solidFill>
@@ -8515,7 +8402,7 @@
                       </a:r>
                     </a:p>
                   </a:txBody>
-                  <a:tcPr>
+                  <a:tcPr anchor="ctr">
                     <a:solidFill>
                       <a:srgbClr val="0F172A"/>
                     </a:solidFill>
@@ -8539,7 +8426,7 @@
                       </a:r>
                     </a:p>
                   </a:txBody>
-                  <a:tcPr>
+                  <a:tcPr anchor="ctr">
                     <a:solidFill>
                       <a:srgbClr val="0F172A"/>
                     </a:solidFill>
@@ -8563,7 +8450,7 @@
                       </a:r>
                     </a:p>
                   </a:txBody>
-                  <a:tcPr>
+                  <a:tcPr anchor="ctr">
                     <a:solidFill>
                       <a:srgbClr val="0F172A"/>
                     </a:solidFill>
@@ -8574,6 +8461,77 @@
           </a:graphicData>
         </a:graphic>
       </p:graphicFrame>
+      <p:sp>
+        <p:nvSpPr>
+          <p:cNvPr id="7" name="roundRect 6"/>
+          <p:cNvSpPr/>
+          <p:nvPr/>
+        </p:nvSpPr>
+        <p:spPr>
+          <a:xfrm>
+            <a:off x="6217920" y="1828800"/>
+            <a:ext cx="5212080" cy="4480560"/>
+          </a:xfrm>
+          <a:prstGeom prst="roundRect">
+            <a:avLst/>
+          </a:prstGeom>
+          <a:solidFill>
+            <a:srgbClr val="1E293B"/>
+          </a:solidFill>
+          <a:ln w="13716">
+            <a:solidFill>
+              <a:srgbClr val="334155"/>
+            </a:solidFill>
+          </a:ln>
+          <a:effectLst>
+            <a:outerShdw blurRad="109728" dist="38100" dir="5400000">
+              <a:srgbClr val="000000">
+                <a:alpha val="30000"/>
+              </a:srgbClr>
+            </a:outerShdw>
+          </a:effectLst>
+        </p:spPr>
+        <p:txBody>
+          <a:bodyPr/>
+          <a:lstStyle/>
+          <a:p>
+            <a:endParaRPr/>
+          </a:p>
+        </p:txBody>
+      </p:sp>
+      <p:sp>
+        <p:nvSpPr>
+          <p:cNvPr id="8" name="Text Box 7"/>
+          <p:cNvSpPr txBox="1"/>
+          <p:nvPr/>
+        </p:nvSpPr>
+        <p:spPr>
+          <a:xfrm>
+            <a:off x="6400800" y="2011680"/>
+            <a:ext cx="4846320" cy="320040"/>
+          </a:xfrm>
+          <a:prstGeom prst="rect">
+            <a:avLst/>
+          </a:prstGeom>
+        </p:spPr>
+        <p:txBody>
+          <a:bodyPr anchor="t"/>
+          <a:lstStyle/>
+          <a:p>
+            <a:pPr algn="l"/>
+            <a:r>
+              <a:rPr b="1" sz="1300">
+                <a:solidFill>
+                  <a:srgbClr val="FFFFFF"/>
+                </a:solidFill>
+                <a:latin typeface="+mn-lt"/>
+                <a:cs typeface="+mn-lt"/>
+              </a:rPr>
+              <a:t>📦 Monorepo Gzip &amp; Brotli Footprint (Bundlephobia-Aligned)</a:t>
+            </a:r>
+          </a:p>
+        </p:txBody>
+      </p:sp>
       <p:graphicFrame>
         <p:nvGraphicFramePr>
           <p:cNvPr id="9" name="Chart 8"/>
@@ -8590,6 +8548,89 @@
           </a:graphicData>
         </a:graphic>
       </p:graphicFrame>
+      <p:sp>
+        <p:nvSpPr>
+          <p:cNvPr id="10" name="roundRect 9">
+            <a:hlinkClick r:id="rId3" tooltip="Return to Hyperlinks Hub (Slide 14)" action="ppaction://hlinksldjump"/>
+          </p:cNvPr>
+          <p:cNvSpPr/>
+          <p:nvPr/>
+        </p:nvSpPr>
+        <p:spPr>
+          <a:xfrm>
+            <a:off x="9144000" y="731520"/>
+            <a:ext cx="2194560" cy="411480"/>
+          </a:xfrm>
+          <a:prstGeom prst="roundRect">
+            <a:avLst/>
+          </a:prstGeom>
+          <a:solidFill>
+            <a:srgbClr val="0284C7"/>
+          </a:solidFill>
+          <a:ln w="13716">
+            <a:solidFill>
+              <a:srgbClr val="38BDF8"/>
+            </a:solidFill>
+          </a:ln>
+          <a:effectLst>
+            <a:outerShdw blurRad="137160" dist="27432" dir="5400000">
+              <a:srgbClr val="0284C7">
+                <a:alpha val="30000"/>
+              </a:srgbClr>
+            </a:outerShdw>
+          </a:effectLst>
+        </p:spPr>
+        <p:txBody>
+          <a:bodyPr anchor="t"/>
+          <a:lstStyle/>
+          <a:p>
+            <a:pPr algn="ctr"/>
+            <a:r>
+              <a:rPr b="1" sz="1000">
+                <a:solidFill>
+                  <a:srgbClr val="FFFFFF"/>
+                </a:solidFill>
+                <a:latin typeface="+mn-lt"/>
+                <a:cs typeface="+mn-lt"/>
+              </a:rPr>
+              <a:t>⬅ Back to Nav Hub</a:t>
+            </a:r>
+          </a:p>
+        </p:txBody>
+      </p:sp>
+      <p:sp>
+        <p:nvSpPr>
+          <p:cNvPr id="11" name="Text Box 10"/>
+          <p:cNvSpPr txBox="1"/>
+          <p:nvPr/>
+        </p:nvSpPr>
+        <p:spPr>
+          <a:xfrm>
+            <a:off x="731520" y="6510528"/>
+            <a:ext cx="10725912" cy="228600"/>
+          </a:xfrm>
+          <a:prstGeom prst="rect">
+            <a:avLst/>
+          </a:prstGeom>
+        </p:spPr>
+        <p:txBody>
+          <a:bodyPr anchor="t"/>
+          <a:lstStyle/>
+          <a:p>
+            <a:pPr algn="ctr"/>
+            <a:r>
+              <a:rPr i="1" sz="800">
+                <a:solidFill>
+                  <a:srgbClr val="64748B"/>
+                </a:solidFill>
+                <a:latin typeface="+mn-lt"/>
+                <a:cs typeface="+mn-lt"/>
+              </a:rPr>
+              <a:t>* Disclaimer: All benchmark metrics, performance figures, and simulated architectures in this deck are synthetic demonstration values generated solely to showcase the authoring, formatting, and rendering capabilities of @hokkyss/pptx.</a:t>
+            </a:r>
+          </a:p>
+        </p:txBody>
+      </p:sp>
     </p:spTree>
   </p:cSld>
   <p:clrMapOvr>
@@ -8602,7 +8643,7 @@
 </file>
 
 <file path=ppt/slides/slide2.xml><?xml version="1.0" encoding="utf-8"?>
-<p:sld xmlns:a="http://schemas.openxmlformats.org/drawingml/2006/main" xmlns:r="http://schemas.openxmlformats.org/officeDocument/2006/relationships" xmlns:p="http://schemas.openxmlformats.org/presentationml/2006/main">
+<p:sld xmlns:a="http://schemas.openxmlformats.org/drawingml/2006/main" xmlns:p="http://schemas.openxmlformats.org/presentationml/2006/main" xmlns:r="http://schemas.openxmlformats.org/officeDocument/2006/relationships">
   <p:cSld>
     <p:bg>
       <p:bgPr>
@@ -8642,9 +8683,10 @@
           </a:prstGeom>
         </p:spPr>
         <p:txBody>
-          <a:bodyPr/>
-          <a:lstStyle/>
-          <a:p>
+          <a:bodyPr anchor="t"/>
+          <a:lstStyle/>
+          <a:p>
+            <a:pPr algn="l"/>
             <a:r>
               <a:rPr b="1" sz="2400">
                 <a:solidFill>
@@ -8674,9 +8716,10 @@
           </a:prstGeom>
         </p:spPr>
         <p:txBody>
-          <a:bodyPr/>
-          <a:lstStyle/>
-          <a:p>
+          <a:bodyPr anchor="t"/>
+          <a:lstStyle/>
+          <a:p>
+            <a:pPr algn="l"/>
             <a:r>
               <a:rPr sz="1400">
                 <a:solidFill>
@@ -8723,9 +8766,10 @@
           </a:effectLst>
         </p:spPr>
         <p:txBody>
-          <a:bodyPr/>
-          <a:lstStyle/>
-          <a:p>
+          <a:bodyPr anchor="t"/>
+          <a:lstStyle/>
+          <a:p>
+            <a:pPr algn="l"/>
             <a:r>
               <a:rPr b="1" sz="1300">
                 <a:solidFill>
@@ -8738,6 +8782,7 @@
             </a:r>
           </a:p>
           <a:p>
+            <a:pPr algn="l"/>
             <a:r>
               <a:rPr sz="1000">
                 <a:solidFill>
@@ -8779,9 +8824,10 @@
           </a:effectLst>
         </p:spPr>
         <p:txBody>
-          <a:bodyPr/>
-          <a:lstStyle/>
-          <a:p>
+          <a:bodyPr anchor="t"/>
+          <a:lstStyle/>
+          <a:p>
+            <a:pPr algn="l"/>
             <a:r>
               <a:rPr b="1" sz="1300">
                 <a:solidFill>
@@ -8794,6 +8840,7 @@
             </a:r>
           </a:p>
           <a:p>
+            <a:pPr algn="l"/>
             <a:r>
               <a:rPr sz="1000">
                 <a:solidFill>
@@ -8835,9 +8882,10 @@
           </a:effectLst>
         </p:spPr>
         <p:txBody>
-          <a:bodyPr/>
-          <a:lstStyle/>
-          <a:p>
+          <a:bodyPr anchor="t"/>
+          <a:lstStyle/>
+          <a:p>
+            <a:pPr algn="l"/>
             <a:r>
               <a:rPr b="1" sz="1300">
                 <a:solidFill>
@@ -8850,6 +8898,7 @@
             </a:r>
           </a:p>
           <a:p>
+            <a:pPr algn="l"/>
             <a:r>
               <a:rPr sz="1000">
                 <a:solidFill>
@@ -8891,9 +8940,10 @@
           </a:effectLst>
         </p:spPr>
         <p:txBody>
-          <a:bodyPr/>
-          <a:lstStyle/>
-          <a:p>
+          <a:bodyPr anchor="t"/>
+          <a:lstStyle/>
+          <a:p>
+            <a:pPr algn="l"/>
             <a:r>
               <a:rPr b="1" sz="1300">
                 <a:solidFill>
@@ -8906,6 +8956,7 @@
             </a:r>
           </a:p>
           <a:p>
+            <a:pPr algn="l"/>
             <a:r>
               <a:rPr sz="1000">
                 <a:solidFill>
@@ -8938,7 +8989,7 @@
           </a:solidFill>
         </p:spPr>
         <p:txBody>
-          <a:bodyPr/>
+          <a:bodyPr anchor="t"/>
           <a:lstStyle/>
           <a:p>
             <a:pPr algn="ctr"/>
@@ -8979,7 +9030,7 @@
           </a:ln>
         </p:spPr>
         <p:txBody>
-          <a:bodyPr/>
+          <a:bodyPr anchor="t"/>
           <a:lstStyle/>
           <a:p>
             <a:pPr algn="ctr"/>
@@ -9021,7 +9072,7 @@
           </a:ln>
         </p:spPr>
         <p:txBody>
-          <a:bodyPr/>
+          <a:bodyPr anchor="t"/>
           <a:lstStyle/>
           <a:p>
             <a:pPr algn="ctr"/>
@@ -9062,7 +9113,7 @@
           </a:ln>
         </p:spPr>
         <p:txBody>
-          <a:bodyPr/>
+          <a:bodyPr anchor="t"/>
           <a:lstStyle/>
           <a:p>
             <a:pPr algn="ctr"/>
@@ -9095,7 +9146,7 @@
           </a:prstGeom>
         </p:spPr>
         <p:txBody>
-          <a:bodyPr/>
+          <a:bodyPr anchor="t"/>
           <a:lstStyle/>
           <a:p>
             <a:pPr algn="ctr"/>
@@ -9124,7 +9175,7 @@
 </file>
 
 <file path=ppt/slides/slide3.xml><?xml version="1.0" encoding="utf-8"?>
-<p:sld xmlns:a="http://schemas.openxmlformats.org/drawingml/2006/main" xmlns:r="http://schemas.openxmlformats.org/officeDocument/2006/relationships" xmlns:p="http://schemas.openxmlformats.org/presentationml/2006/main">
+<p:sld xmlns:a="http://schemas.openxmlformats.org/drawingml/2006/main" xmlns:p="http://schemas.openxmlformats.org/presentationml/2006/main" xmlns:r="http://schemas.openxmlformats.org/officeDocument/2006/relationships">
   <p:cSld>
     <p:bg>
       <p:bgPr>
@@ -9164,9 +9215,10 @@
           </a:prstGeom>
         </p:spPr>
         <p:txBody>
-          <a:bodyPr/>
-          <a:lstStyle/>
-          <a:p>
+          <a:bodyPr anchor="t"/>
+          <a:lstStyle/>
+          <a:p>
+            <a:pPr algn="l"/>
             <a:r>
               <a:rPr b="1" sz="2400">
                 <a:solidFill>
@@ -9196,9 +9248,10 @@
           </a:prstGeom>
         </p:spPr>
         <p:txBody>
-          <a:bodyPr/>
-          <a:lstStyle/>
-          <a:p>
+          <a:bodyPr anchor="t"/>
+          <a:lstStyle/>
+          <a:p>
+            <a:pPr algn="l"/>
             <a:r>
               <a:rPr sz="1400">
                 <a:solidFill>
@@ -9208,39 +9261,6 @@
                 <a:cs typeface="+mn-lt"/>
               </a:rPr>
               <a:t>100-slide roundtrip parse &amp; compilation benchmarks across modern JavaScript engines</a:t>
-            </a:r>
-          </a:p>
-        </p:txBody>
-      </p:sp>
-      <p:sp>
-        <p:nvSpPr>
-          <p:cNvPr id="5" name="Text Box 4"/>
-          <p:cNvSpPr txBox="1"/>
-          <p:nvPr/>
-        </p:nvSpPr>
-        <p:spPr>
-          <a:xfrm>
-            <a:off x="731520" y="6510528"/>
-            <a:ext cx="10725912" cy="228600"/>
-          </a:xfrm>
-          <a:prstGeom prst="rect">
-            <a:avLst/>
-          </a:prstGeom>
-        </p:spPr>
-        <p:txBody>
-          <a:bodyPr/>
-          <a:lstStyle/>
-          <a:p>
-            <a:pPr algn="ctr"/>
-            <a:r>
-              <a:rPr i="1" sz="800">
-                <a:solidFill>
-                  <a:srgbClr val="94A3B8"/>
-                </a:solidFill>
-                <a:latin typeface="+mn-lt"/>
-                <a:cs typeface="+mn-lt"/>
-              </a:rPr>
-              <a:t>* Disclaimer: All benchmark metrics, performance figures, and simulated architectures in this deck are synthetic demonstration values generated solely to showcase the authoring, formatting, and rendering capabilities of @hokkyss/pptx.</a:t>
             </a:r>
           </a:p>
         </p:txBody>
@@ -9274,6 +9294,7 @@
                     <a:bodyPr anchor="ctr"/>
                     <a:lstStyle/>
                     <a:p>
+                      <a:pPr algn="l"/>
                       <a:r>
                         <a:rPr b="1">
                           <a:solidFill>
@@ -9286,7 +9307,7 @@
                       </a:r>
                     </a:p>
                   </a:txBody>
-                  <a:tcPr>
+                  <a:tcPr anchor="ctr">
                     <a:solidFill>
                       <a:srgbClr val="0F172A"/>
                     </a:solidFill>
@@ -9310,7 +9331,7 @@
                       </a:r>
                     </a:p>
                   </a:txBody>
-                  <a:tcPr>
+                  <a:tcPr anchor="ctr">
                     <a:solidFill>
                       <a:srgbClr val="0F172A"/>
                     </a:solidFill>
@@ -9334,7 +9355,7 @@
                       </a:r>
                     </a:p>
                   </a:txBody>
-                  <a:tcPr>
+                  <a:tcPr anchor="ctr">
                     <a:solidFill>
                       <a:srgbClr val="0F172A"/>
                     </a:solidFill>
@@ -9358,7 +9379,7 @@
                       </a:r>
                     </a:p>
                   </a:txBody>
-                  <a:tcPr>
+                  <a:tcPr anchor="ctr">
                     <a:solidFill>
                       <a:srgbClr val="0F172A"/>
                     </a:solidFill>
@@ -9382,7 +9403,7 @@
                       </a:r>
                     </a:p>
                   </a:txBody>
-                  <a:tcPr>
+                  <a:tcPr anchor="ctr">
                     <a:solidFill>
                       <a:srgbClr val="0F172A"/>
                     </a:solidFill>
@@ -9395,6 +9416,7 @@
                     <a:bodyPr anchor="ctr"/>
                     <a:lstStyle/>
                     <a:p>
+                      <a:pPr algn="l"/>
                       <a:r>
                         <a:rPr b="1">
                           <a:solidFill>
@@ -9407,7 +9429,7 @@
                       </a:r>
                     </a:p>
                   </a:txBody>
-                  <a:tcPr>
+                  <a:tcPr anchor="ctr">
                     <a:solidFill>
                       <a:srgbClr val="F8FAFC"/>
                     </a:solidFill>
@@ -9431,7 +9453,7 @@
                       </a:r>
                     </a:p>
                   </a:txBody>
-                  <a:tcPr>
+                  <a:tcPr anchor="ctr">
                     <a:solidFill>
                       <a:srgbClr val="F8FAFC"/>
                     </a:solidFill>
@@ -9455,7 +9477,7 @@
                       </a:r>
                     </a:p>
                   </a:txBody>
-                  <a:tcPr>
+                  <a:tcPr anchor="ctr">
                     <a:solidFill>
                       <a:srgbClr val="F8FAFC"/>
                     </a:solidFill>
@@ -9479,7 +9501,7 @@
                       </a:r>
                     </a:p>
                   </a:txBody>
-                  <a:tcPr>
+                  <a:tcPr anchor="ctr">
                     <a:solidFill>
                       <a:srgbClr val="F8FAFC"/>
                     </a:solidFill>
@@ -9503,7 +9525,7 @@
                       </a:r>
                     </a:p>
                   </a:txBody>
-                  <a:tcPr>
+                  <a:tcPr anchor="ctr">
                     <a:solidFill>
                       <a:srgbClr val="ECFDF5"/>
                     </a:solidFill>
@@ -9516,6 +9538,7 @@
                     <a:bodyPr anchor="ctr"/>
                     <a:lstStyle/>
                     <a:p>
+                      <a:pPr algn="l"/>
                       <a:r>
                         <a:rPr b="1">
                           <a:solidFill>
@@ -9528,7 +9551,7 @@
                       </a:r>
                     </a:p>
                   </a:txBody>
-                  <a:tcPr>
+                  <a:tcPr anchor="ctr">
                     <a:solidFill>
                       <a:srgbClr val="FFFFFF"/>
                     </a:solidFill>
@@ -9552,7 +9575,7 @@
                       </a:r>
                     </a:p>
                   </a:txBody>
-                  <a:tcPr>
+                  <a:tcPr anchor="ctr">
                     <a:solidFill>
                       <a:srgbClr val="FFFFFF"/>
                     </a:solidFill>
@@ -9576,7 +9599,7 @@
                       </a:r>
                     </a:p>
                   </a:txBody>
-                  <a:tcPr>
+                  <a:tcPr anchor="ctr">
                     <a:solidFill>
                       <a:srgbClr val="FFFFFF"/>
                     </a:solidFill>
@@ -9600,7 +9623,7 @@
                       </a:r>
                     </a:p>
                   </a:txBody>
-                  <a:tcPr>
+                  <a:tcPr anchor="ctr">
                     <a:solidFill>
                       <a:srgbClr val="FFFFFF"/>
                     </a:solidFill>
@@ -9624,7 +9647,7 @@
                       </a:r>
                     </a:p>
                   </a:txBody>
-                  <a:tcPr>
+                  <a:tcPr anchor="ctr">
                     <a:solidFill>
                       <a:srgbClr val="ECFDF5"/>
                     </a:solidFill>
@@ -9637,6 +9660,7 @@
                     <a:bodyPr anchor="ctr"/>
                     <a:lstStyle/>
                     <a:p>
+                      <a:pPr algn="l"/>
                       <a:r>
                         <a:rPr b="1">
                           <a:solidFill>
@@ -9649,7 +9673,7 @@
                       </a:r>
                     </a:p>
                   </a:txBody>
-                  <a:tcPr>
+                  <a:tcPr anchor="ctr">
                     <a:solidFill>
                       <a:srgbClr val="F8FAFC"/>
                     </a:solidFill>
@@ -9673,7 +9697,7 @@
                       </a:r>
                     </a:p>
                   </a:txBody>
-                  <a:tcPr>
+                  <a:tcPr anchor="ctr">
                     <a:solidFill>
                       <a:srgbClr val="F8FAFC"/>
                     </a:solidFill>
@@ -9697,7 +9721,7 @@
                       </a:r>
                     </a:p>
                   </a:txBody>
-                  <a:tcPr>
+                  <a:tcPr anchor="ctr">
                     <a:solidFill>
                       <a:srgbClr val="F8FAFC"/>
                     </a:solidFill>
@@ -9721,7 +9745,7 @@
                       </a:r>
                     </a:p>
                   </a:txBody>
-                  <a:tcPr>
+                  <a:tcPr anchor="ctr">
                     <a:solidFill>
                       <a:srgbClr val="F8FAFC"/>
                     </a:solidFill>
@@ -9745,7 +9769,7 @@
                       </a:r>
                     </a:p>
                   </a:txBody>
-                  <a:tcPr>
+                  <a:tcPr anchor="ctr">
                     <a:solidFill>
                       <a:srgbClr val="ECFDF5"/>
                     </a:solidFill>
@@ -9758,6 +9782,7 @@
                     <a:bodyPr anchor="ctr"/>
                     <a:lstStyle/>
                     <a:p>
+                      <a:pPr algn="l"/>
                       <a:r>
                         <a:rPr b="1">
                           <a:solidFill>
@@ -9770,7 +9795,7 @@
                       </a:r>
                     </a:p>
                   </a:txBody>
-                  <a:tcPr>
+                  <a:tcPr anchor="ctr">
                     <a:solidFill>
                       <a:srgbClr val="FFFFFF"/>
                     </a:solidFill>
@@ -9794,7 +9819,7 @@
                       </a:r>
                     </a:p>
                   </a:txBody>
-                  <a:tcPr>
+                  <a:tcPr anchor="ctr">
                     <a:solidFill>
                       <a:srgbClr val="FFFFFF"/>
                     </a:solidFill>
@@ -9818,7 +9843,7 @@
                       </a:r>
                     </a:p>
                   </a:txBody>
-                  <a:tcPr>
+                  <a:tcPr anchor="ctr">
                     <a:solidFill>
                       <a:srgbClr val="FFFFFF"/>
                     </a:solidFill>
@@ -9842,7 +9867,7 @@
                       </a:r>
                     </a:p>
                   </a:txBody>
-                  <a:tcPr>
+                  <a:tcPr anchor="ctr">
                     <a:solidFill>
                       <a:srgbClr val="FFFFFF"/>
                     </a:solidFill>
@@ -9866,7 +9891,7 @@
                       </a:r>
                     </a:p>
                   </a:txBody>
-                  <a:tcPr>
+                  <a:tcPr anchor="ctr">
                     <a:solidFill>
                       <a:srgbClr val="ECFDF5"/>
                     </a:solidFill>
@@ -9879,6 +9904,7 @@
                     <a:bodyPr anchor="ctr"/>
                     <a:lstStyle/>
                     <a:p>
+                      <a:pPr algn="l"/>
                       <a:r>
                         <a:rPr b="1">
                           <a:solidFill>
@@ -9891,7 +9917,7 @@
                       </a:r>
                     </a:p>
                   </a:txBody>
-                  <a:tcPr>
+                  <a:tcPr anchor="ctr">
                     <a:solidFill>
                       <a:srgbClr val="F8FAFC"/>
                     </a:solidFill>
@@ -9915,7 +9941,7 @@
                       </a:r>
                     </a:p>
                   </a:txBody>
-                  <a:tcPr>
+                  <a:tcPr anchor="ctr">
                     <a:solidFill>
                       <a:srgbClr val="F8FAFC"/>
                     </a:solidFill>
@@ -9939,7 +9965,7 @@
                       </a:r>
                     </a:p>
                   </a:txBody>
-                  <a:tcPr>
+                  <a:tcPr anchor="ctr">
                     <a:solidFill>
                       <a:srgbClr val="F8FAFC"/>
                     </a:solidFill>
@@ -9963,7 +9989,7 @@
                       </a:r>
                     </a:p>
                   </a:txBody>
-                  <a:tcPr>
+                  <a:tcPr anchor="ctr">
                     <a:solidFill>
                       <a:srgbClr val="F8FAFC"/>
                     </a:solidFill>
@@ -9987,7 +10013,7 @@
                       </a:r>
                     </a:p>
                   </a:txBody>
-                  <a:tcPr>
+                  <a:tcPr anchor="ctr">
                     <a:solidFill>
                       <a:srgbClr val="FEF2F2"/>
                     </a:solidFill>
@@ -9998,6 +10024,39 @@
           </a:graphicData>
         </a:graphic>
       </p:graphicFrame>
+      <p:sp>
+        <p:nvSpPr>
+          <p:cNvPr id="5" name="Text Box 4"/>
+          <p:cNvSpPr txBox="1"/>
+          <p:nvPr/>
+        </p:nvSpPr>
+        <p:spPr>
+          <a:xfrm>
+            <a:off x="731520" y="6510528"/>
+            <a:ext cx="10725912" cy="228600"/>
+          </a:xfrm>
+          <a:prstGeom prst="rect">
+            <a:avLst/>
+          </a:prstGeom>
+        </p:spPr>
+        <p:txBody>
+          <a:bodyPr anchor="t"/>
+          <a:lstStyle/>
+          <a:p>
+            <a:pPr algn="ctr"/>
+            <a:r>
+              <a:rPr i="1" sz="800">
+                <a:solidFill>
+                  <a:srgbClr val="94A3B8"/>
+                </a:solidFill>
+                <a:latin typeface="+mn-lt"/>
+                <a:cs typeface="+mn-lt"/>
+              </a:rPr>
+              <a:t>* Disclaimer: All benchmark metrics, performance figures, and simulated architectures in this deck are synthetic demonstration values generated solely to showcase the authoring, formatting, and rendering capabilities of @hokkyss/pptx.</a:t>
+            </a:r>
+          </a:p>
+        </p:txBody>
+      </p:sp>
     </p:spTree>
   </p:cSld>
   <p:clrMapOvr>
@@ -10010,7 +10069,7 @@
 </file>
 
 <file path=ppt/slides/slide4.xml><?xml version="1.0" encoding="utf-8"?>
-<p:sld xmlns:a="http://schemas.openxmlformats.org/drawingml/2006/main" xmlns:r="http://schemas.openxmlformats.org/officeDocument/2006/relationships" xmlns:p="http://schemas.openxmlformats.org/presentationml/2006/main">
+<p:sld xmlns:a="http://schemas.openxmlformats.org/drawingml/2006/main" xmlns:p="http://schemas.openxmlformats.org/presentationml/2006/main" xmlns:r="http://schemas.openxmlformats.org/officeDocument/2006/relationships">
   <p:cSld>
     <p:bg>
       <p:bgPr>
@@ -10050,9 +10109,10 @@
           </a:prstGeom>
         </p:spPr>
         <p:txBody>
-          <a:bodyPr/>
-          <a:lstStyle/>
-          <a:p>
+          <a:bodyPr anchor="t"/>
+          <a:lstStyle/>
+          <a:p>
+            <a:pPr algn="l"/>
             <a:r>
               <a:rPr b="1" sz="2400">
                 <a:solidFill>
@@ -10082,11 +10142,10 @@
           </a:prstGeom>
         </p:spPr>
         <p:txBody>
-          <a:bodyPr/>
-          <a:lstStyle/>
-          <a:p>
-            <a:pPr>
-              <a:buFont typeface="Arial" panose="020B0604020202020204" pitchFamily="34" charset="0"/>
+          <a:bodyPr anchor="t"/>
+          <a:lstStyle/>
+          <a:p>
+            <a:pPr algn="l" lvl="0" marL="152400" indent="-152400">
               <a:buChar char="•"/>
             </a:pPr>
             <a:r>
@@ -10101,8 +10160,7 @@
             </a:r>
           </a:p>
           <a:p>
-            <a:pPr lvl="1">
-              <a:buFont typeface="Arial" panose="020B0604020202020204" pitchFamily="34" charset="0"/>
+            <a:pPr algn="l" lvl="1" marL="381000" indent="-152400">
               <a:buChar char="•"/>
             </a:pPr>
             <a:r>
@@ -10117,8 +10175,7 @@
             </a:r>
           </a:p>
           <a:p>
-            <a:pPr lvl="2">
-              <a:buFont typeface="Arial" panose="020B0604020202020204" pitchFamily="34" charset="0"/>
+            <a:pPr algn="l" lvl="2" marL="609600" indent="-152400">
               <a:buChar char="•"/>
             </a:pPr>
             <a:r>
@@ -10163,8 +10220,7 @@
             </a:r>
           </a:p>
           <a:p>
-            <a:pPr lvl="2">
-              <a:buFont typeface="Arial" panose="020B0604020202020204" pitchFamily="34" charset="0"/>
+            <a:pPr algn="l" lvl="2" marL="609600" indent="-152400">
               <a:buChar char="•"/>
             </a:pPr>
             <a:r>
@@ -10209,8 +10265,7 @@
             </a:r>
           </a:p>
           <a:p>
-            <a:pPr lvl="2">
-              <a:buFont typeface="Arial" panose="020B0604020202020204" pitchFamily="34" charset="0"/>
+            <a:pPr algn="l" lvl="2" marL="609600" indent="-152400">
               <a:buChar char="•"/>
             </a:pPr>
             <a:r>
@@ -10255,8 +10310,7 @@
             </a:r>
           </a:p>
           <a:p>
-            <a:pPr>
-              <a:buFont typeface="Arial" panose="020B0604020202020204" pitchFamily="34" charset="0"/>
+            <a:pPr algn="l" lvl="0" marL="152400" indent="-152400">
               <a:buChar char="•"/>
             </a:pPr>
             <a:r>
@@ -10271,8 +10325,7 @@
             </a:r>
           </a:p>
           <a:p>
-            <a:pPr lvl="1">
-              <a:buFont typeface="Arial" panose="020B0604020202020204" pitchFamily="34" charset="0"/>
+            <a:pPr algn="l" lvl="1" marL="381000" indent="-152400">
               <a:buChar char="•"/>
             </a:pPr>
             <a:r>
@@ -10287,8 +10340,7 @@
             </a:r>
           </a:p>
           <a:p>
-            <a:pPr lvl="2">
-              <a:buFont typeface="Arial" panose="020B0604020202020204" pitchFamily="34" charset="0"/>
+            <a:pPr algn="l" lvl="2" marL="609600" indent="-152400">
               <a:buChar char="•"/>
             </a:pPr>
             <a:r>
@@ -10410,7 +10462,7 @@
           </a:prstGeom>
         </p:spPr>
         <p:txBody>
-          <a:bodyPr/>
+          <a:bodyPr anchor="t"/>
           <a:lstStyle/>
           <a:p>
             <a:pPr algn="ctr"/>
@@ -10439,7 +10491,7 @@
 </file>
 
 <file path=ppt/slides/slide5.xml><?xml version="1.0" encoding="utf-8"?>
-<p:sld xmlns:a="http://schemas.openxmlformats.org/drawingml/2006/main" xmlns:r="http://schemas.openxmlformats.org/officeDocument/2006/relationships" xmlns:p="http://schemas.openxmlformats.org/presentationml/2006/main">
+<p:sld xmlns:a="http://schemas.openxmlformats.org/drawingml/2006/main" xmlns:p="http://schemas.openxmlformats.org/presentationml/2006/main" xmlns:r="http://schemas.openxmlformats.org/officeDocument/2006/relationships">
   <p:cSld>
     <p:bg>
       <p:bgPr>
@@ -10479,9 +10531,10 @@
           </a:prstGeom>
         </p:spPr>
         <p:txBody>
-          <a:bodyPr/>
-          <a:lstStyle/>
-          <a:p>
+          <a:bodyPr anchor="t"/>
+          <a:lstStyle/>
+          <a:p>
+            <a:pPr algn="l"/>
             <a:r>
               <a:rPr b="1" sz="2400">
                 <a:solidFill>
@@ -10511,9 +10564,10 @@
           </a:prstGeom>
         </p:spPr>
         <p:txBody>
-          <a:bodyPr/>
-          <a:lstStyle/>
-          <a:p>
+          <a:bodyPr anchor="t"/>
+          <a:lstStyle/>
+          <a:p>
+            <a:pPr algn="l"/>
             <a:r>
               <a:rPr sz="1400">
                 <a:solidFill>
@@ -10589,7 +10643,7 @@
           </a:ln>
         </p:spPr>
         <p:txBody>
-          <a:bodyPr/>
+          <a:bodyPr anchor="t"/>
           <a:lstStyle/>
           <a:p>
             <a:pPr algn="ctr"/>
@@ -10622,9 +10676,10 @@
           </a:prstGeom>
         </p:spPr>
         <p:txBody>
-          <a:bodyPr/>
-          <a:lstStyle/>
-          <a:p>
+          <a:bodyPr anchor="t"/>
+          <a:lstStyle/>
+          <a:p>
+            <a:pPr algn="l"/>
             <a:r>
               <a:rPr b="1" sz="1600">
                 <a:solidFill>
@@ -10654,9 +10709,10 @@
           </a:prstGeom>
         </p:spPr>
         <p:txBody>
-          <a:bodyPr/>
-          <a:lstStyle/>
-          <a:p>
+          <a:bodyPr anchor="t"/>
+          <a:lstStyle/>
+          <a:p>
+            <a:pPr algn="l" lvl="0"/>
             <a:r>
               <a:rPr sz="1100">
                 <a:solidFill>
@@ -10669,6 +10725,7 @@
             </a:r>
           </a:p>
           <a:p>
+            <a:pPr algn="l" lvl="0"/>
             <a:r>
               <a:rPr sz="1100">
                 <a:solidFill>
@@ -10681,6 +10738,7 @@
             </a:r>
           </a:p>
           <a:p>
+            <a:pPr algn="l" lvl="0"/>
             <a:r>
               <a:rPr sz="1100">
                 <a:solidFill>
@@ -10756,7 +10814,7 @@
           </a:ln>
         </p:spPr>
         <p:txBody>
-          <a:bodyPr/>
+          <a:bodyPr anchor="t"/>
           <a:lstStyle/>
           <a:p>
             <a:pPr algn="ctr"/>
@@ -10789,9 +10847,10 @@
           </a:prstGeom>
         </p:spPr>
         <p:txBody>
-          <a:bodyPr/>
-          <a:lstStyle/>
-          <a:p>
+          <a:bodyPr anchor="t"/>
+          <a:lstStyle/>
+          <a:p>
+            <a:pPr algn="l"/>
             <a:r>
               <a:rPr b="1" sz="1600">
                 <a:solidFill>
@@ -10821,9 +10880,10 @@
           </a:prstGeom>
         </p:spPr>
         <p:txBody>
-          <a:bodyPr/>
-          <a:lstStyle/>
-          <a:p>
+          <a:bodyPr anchor="t"/>
+          <a:lstStyle/>
+          <a:p>
+            <a:pPr algn="l" lvl="0"/>
             <a:r>
               <a:rPr sz="1100">
                 <a:solidFill>
@@ -10836,6 +10896,7 @@
             </a:r>
           </a:p>
           <a:p>
+            <a:pPr algn="l" lvl="0"/>
             <a:r>
               <a:rPr sz="1100">
                 <a:solidFill>
@@ -10848,6 +10909,7 @@
             </a:r>
           </a:p>
           <a:p>
+            <a:pPr algn="l" lvl="0"/>
             <a:r>
               <a:rPr sz="1100">
                 <a:solidFill>
@@ -10923,7 +10985,7 @@
           </a:ln>
         </p:spPr>
         <p:txBody>
-          <a:bodyPr/>
+          <a:bodyPr anchor="t"/>
           <a:lstStyle/>
           <a:p>
             <a:pPr algn="ctr"/>
@@ -10956,9 +11018,10 @@
           </a:prstGeom>
         </p:spPr>
         <p:txBody>
-          <a:bodyPr/>
-          <a:lstStyle/>
-          <a:p>
+          <a:bodyPr anchor="t"/>
+          <a:lstStyle/>
+          <a:p>
+            <a:pPr algn="l"/>
             <a:r>
               <a:rPr b="1" sz="1600">
                 <a:solidFill>
@@ -10988,9 +11051,10 @@
           </a:prstGeom>
         </p:spPr>
         <p:txBody>
-          <a:bodyPr/>
-          <a:lstStyle/>
-          <a:p>
+          <a:bodyPr anchor="t"/>
+          <a:lstStyle/>
+          <a:p>
+            <a:pPr algn="l" lvl="0"/>
             <a:r>
               <a:rPr sz="1100">
                 <a:solidFill>
@@ -11003,6 +11067,7 @@
             </a:r>
           </a:p>
           <a:p>
+            <a:pPr algn="l" lvl="0"/>
             <a:r>
               <a:rPr sz="1100">
                 <a:solidFill>
@@ -11015,6 +11080,7 @@
             </a:r>
           </a:p>
           <a:p>
+            <a:pPr algn="l" lvl="0"/>
             <a:r>
               <a:rPr sz="1100">
                 <a:solidFill>
@@ -11044,7 +11110,7 @@
           </a:prstGeom>
         </p:spPr>
         <p:txBody>
-          <a:bodyPr/>
+          <a:bodyPr anchor="t"/>
           <a:lstStyle/>
           <a:p>
             <a:pPr algn="ctr"/>
@@ -11073,7 +11139,7 @@
 </file>
 
 <file path=ppt/slides/slide6.xml><?xml version="1.0" encoding="utf-8"?>
-<p:sld xmlns:a="http://schemas.openxmlformats.org/drawingml/2006/main" xmlns:r="http://schemas.openxmlformats.org/officeDocument/2006/relationships" xmlns:p="http://schemas.openxmlformats.org/presentationml/2006/main">
+<p:sld xmlns:a="http://schemas.openxmlformats.org/drawingml/2006/main" xmlns:p="http://schemas.openxmlformats.org/presentationml/2006/main" xmlns:r="http://schemas.openxmlformats.org/officeDocument/2006/relationships">
   <p:cSld>
     <p:bg>
       <p:bgPr>
@@ -11113,9 +11179,10 @@
           </a:prstGeom>
         </p:spPr>
         <p:txBody>
-          <a:bodyPr/>
-          <a:lstStyle/>
-          <a:p>
+          <a:bodyPr anchor="t"/>
+          <a:lstStyle/>
+          <a:p>
+            <a:pPr algn="l"/>
             <a:r>
               <a:rPr b="1" sz="2400">
                 <a:solidFill>
@@ -11145,9 +11212,10 @@
           </a:prstGeom>
         </p:spPr>
         <p:txBody>
-          <a:bodyPr/>
-          <a:lstStyle/>
-          <a:p>
+          <a:bodyPr anchor="t"/>
+          <a:lstStyle/>
+          <a:p>
+            <a:pPr algn="l"/>
             <a:r>
               <a:rPr sz="1400">
                 <a:solidFill>
@@ -11199,6 +11267,30 @@
           </a:p>
         </p:txBody>
       </p:sp>
+      <p:pic>
+        <p:nvPicPr>
+          <p:cNvPr id="5" name="Picture 4"/>
+          <p:cNvPicPr>
+            <a:picLocks noChangeAspect="1"/>
+          </p:cNvPicPr>
+          <p:nvPr/>
+        </p:nvPicPr>
+        <p:blipFill>
+          <a:blip r:embed="rId2"/>
+          <a:stretch>
+            <a:fillRect/>
+          </a:stretch>
+        </p:blipFill>
+        <p:spPr>
+          <a:xfrm>
+            <a:off x="1188720" y="2103120"/>
+            <a:ext cx="4389120" cy="2468880"/>
+          </a:xfrm>
+          <a:prstGeom prst="rect">
+            <a:avLst/>
+          </a:prstGeom>
+        </p:spPr>
+      </p:pic>
       <p:sp>
         <p:nvSpPr>
           <p:cNvPr id="6" name="Text Box 5"/>
@@ -11215,9 +11307,10 @@
           </a:prstGeom>
         </p:spPr>
         <p:txBody>
-          <a:bodyPr/>
-          <a:lstStyle/>
-          <a:p>
+          <a:bodyPr anchor="t"/>
+          <a:lstStyle/>
+          <a:p>
+            <a:pPr algn="l"/>
             <a:r>
               <a:rPr b="1" sz="1500">
                 <a:solidFill>
@@ -11247,9 +11340,10 @@
           </a:prstGeom>
         </p:spPr>
         <p:txBody>
-          <a:bodyPr/>
-          <a:lstStyle/>
-          <a:p>
+          <a:bodyPr anchor="t"/>
+          <a:lstStyle/>
+          <a:p>
+            <a:pPr algn="l"/>
             <a:r>
               <a:rPr sz="1100">
                 <a:solidFill>
@@ -11327,179 +11421,6 @@
           </a:p>
         </p:txBody>
       </p:sp>
-      <p:sp>
-        <p:nvSpPr>
-          <p:cNvPr id="11" name="Text Box 10"/>
-          <p:cNvSpPr txBox="1"/>
-          <p:nvPr/>
-        </p:nvSpPr>
-        <p:spPr>
-          <a:xfrm>
-            <a:off x="6611112" y="3383280"/>
-            <a:ext cx="4389120" cy="365760"/>
-          </a:xfrm>
-          <a:prstGeom prst="rect">
-            <a:avLst/>
-          </a:prstGeom>
-        </p:spPr>
-        <p:txBody>
-          <a:bodyPr/>
-          <a:lstStyle/>
-          <a:p>
-            <a:r>
-              <a:rPr b="1" sz="1500">
-                <a:solidFill>
-                  <a:srgbClr val="0F172A"/>
-                </a:solidFill>
-                <a:latin typeface="+mn-lt"/>
-                <a:cs typeface="+mn-lt"/>
-              </a:rPr>
-              <a:t>Supported Image Codecs &amp; Features</a:t>
-            </a:r>
-          </a:p>
-        </p:txBody>
-      </p:sp>
-      <p:sp>
-        <p:nvSpPr>
-          <p:cNvPr id="12" name="Text Box 11"/>
-          <p:cNvSpPr txBox="1"/>
-          <p:nvPr/>
-        </p:nvSpPr>
-        <p:spPr>
-          <a:xfrm>
-            <a:off x="6611112" y="3840480"/>
-            <a:ext cx="4389120" cy="2011680"/>
-          </a:xfrm>
-          <a:prstGeom prst="rect">
-            <a:avLst/>
-          </a:prstGeom>
-        </p:spPr>
-        <p:txBody>
-          <a:bodyPr/>
-          <a:lstStyle/>
-          <a:p>
-            <a:pPr>
-              <a:buFont typeface="Arial" panose="020B0604020202020204" pitchFamily="34" charset="0"/>
-              <a:buChar char="•"/>
-            </a:pPr>
-            <a:r>
-              <a:rPr sz="1100">
-                <a:solidFill>
-                  <a:srgbClr val="475569"/>
-                </a:solidFill>
-                <a:latin typeface="+mn-lt"/>
-                <a:cs typeface="+mn-lt"/>
-              </a:rPr>
-              <a:t>PNG with 32-bit RGBA alpha transparency</a:t>
-            </a:r>
-          </a:p>
-          <a:p>
-            <a:pPr>
-              <a:buFont typeface="Arial" panose="020B0604020202020204" pitchFamily="34" charset="0"/>
-              <a:buChar char="•"/>
-            </a:pPr>
-            <a:r>
-              <a:rPr sz="1100">
-                <a:solidFill>
-                  <a:srgbClr val="475569"/>
-                </a:solidFill>
-                <a:latin typeface="+mn-lt"/>
-                <a:cs typeface="+mn-lt"/>
-              </a:rPr>
-              <a:t>JPEG / JPG progressive and baseline encoding</a:t>
-            </a:r>
-          </a:p>
-          <a:p>
-            <a:pPr>
-              <a:buFont typeface="Arial" panose="020B0604020202020204" pitchFamily="34" charset="0"/>
-              <a:buChar char="•"/>
-            </a:pPr>
-            <a:r>
-              <a:rPr sz="1100">
-                <a:solidFill>
-                  <a:srgbClr val="475569"/>
-                </a:solidFill>
-                <a:latin typeface="+mn-lt"/>
-                <a:cs typeface="+mn-lt"/>
-              </a:rPr>
-              <a:t>Zero-copy ArrayBuffer &amp; Uint8Array input</a:t>
-            </a:r>
-          </a:p>
-          <a:p>
-            <a:pPr>
-              <a:buFont typeface="Arial" panose="020B0604020202020204" pitchFamily="34" charset="0"/>
-              <a:buChar char="•"/>
-            </a:pPr>
-            <a:r>
-              <a:rPr sz="1100">
-                <a:solidFill>
-                  <a:srgbClr val="475569"/>
-                </a:solidFill>
-                <a:latin typeface="+mn-lt"/>
-                <a:cs typeface="+mn-lt"/>
-              </a:rPr>
-              <a:t>Placeholder resolution into slide layout picture frames</a:t>
-            </a:r>
-          </a:p>
-        </p:txBody>
-      </p:sp>
-      <p:sp>
-        <p:nvSpPr>
-          <p:cNvPr id="13" name="Text Box 12"/>
-          <p:cNvSpPr txBox="1"/>
-          <p:nvPr/>
-        </p:nvSpPr>
-        <p:spPr>
-          <a:xfrm>
-            <a:off x="731520" y="6510528"/>
-            <a:ext cx="10725912" cy="228600"/>
-          </a:xfrm>
-          <a:prstGeom prst="rect">
-            <a:avLst/>
-          </a:prstGeom>
-        </p:spPr>
-        <p:txBody>
-          <a:bodyPr/>
-          <a:lstStyle/>
-          <a:p>
-            <a:pPr algn="ctr"/>
-            <a:r>
-              <a:rPr i="1" sz="800">
-                <a:solidFill>
-                  <a:srgbClr val="94A3B8"/>
-                </a:solidFill>
-                <a:latin typeface="+mn-lt"/>
-                <a:cs typeface="+mn-lt"/>
-              </a:rPr>
-              <a:t>* Disclaimer: All benchmark metrics, performance figures, and simulated architectures in this deck are synthetic demonstration values generated solely to showcase the authoring, formatting, and rendering capabilities of @hokkyss/pptx.</a:t>
-            </a:r>
-          </a:p>
-        </p:txBody>
-      </p:sp>
-      <p:pic>
-        <p:nvPicPr>
-          <p:cNvPr id="5" name="Picture 4"/>
-          <p:cNvPicPr>
-            <a:picLocks noChangeAspect="1"/>
-          </p:cNvPicPr>
-          <p:nvPr/>
-        </p:nvPicPr>
-        <p:blipFill>
-          <a:blip r:embed="rId2"/>
-          <a:stretch>
-            <a:fillRect/>
-          </a:stretch>
-        </p:blipFill>
-        <p:spPr>
-          <a:xfrm>
-            <a:off x="1188720" y="2103120"/>
-            <a:ext cx="4389120" cy="2468880"/>
-          </a:xfrm>
-          <a:prstGeom prst="rect">
-            <a:avLst/>
-          </a:prstGeom>
-        </p:spPr>
-      </p:pic>
       <p:pic>
         <p:nvPicPr>
           <p:cNvPr id="10" name="Picture 9"/>
@@ -11524,6 +11445,152 @@
           </a:prstGeom>
         </p:spPr>
       </p:pic>
+      <p:sp>
+        <p:nvSpPr>
+          <p:cNvPr id="11" name="Text Box 10"/>
+          <p:cNvSpPr txBox="1"/>
+          <p:nvPr/>
+        </p:nvSpPr>
+        <p:spPr>
+          <a:xfrm>
+            <a:off x="6611112" y="3383280"/>
+            <a:ext cx="4389120" cy="365760"/>
+          </a:xfrm>
+          <a:prstGeom prst="rect">
+            <a:avLst/>
+          </a:prstGeom>
+        </p:spPr>
+        <p:txBody>
+          <a:bodyPr anchor="t"/>
+          <a:lstStyle/>
+          <a:p>
+            <a:pPr algn="l"/>
+            <a:r>
+              <a:rPr b="1" sz="1500">
+                <a:solidFill>
+                  <a:srgbClr val="0F172A"/>
+                </a:solidFill>
+                <a:latin typeface="+mn-lt"/>
+                <a:cs typeface="+mn-lt"/>
+              </a:rPr>
+              <a:t>Supported Image Codecs &amp; Features</a:t>
+            </a:r>
+          </a:p>
+        </p:txBody>
+      </p:sp>
+      <p:sp>
+        <p:nvSpPr>
+          <p:cNvPr id="12" name="Text Box 11"/>
+          <p:cNvSpPr txBox="1"/>
+          <p:nvPr/>
+        </p:nvSpPr>
+        <p:spPr>
+          <a:xfrm>
+            <a:off x="6611112" y="3840480"/>
+            <a:ext cx="4389120" cy="2011680"/>
+          </a:xfrm>
+          <a:prstGeom prst="rect">
+            <a:avLst/>
+          </a:prstGeom>
+        </p:spPr>
+        <p:txBody>
+          <a:bodyPr anchor="t"/>
+          <a:lstStyle/>
+          <a:p>
+            <a:pPr algn="l" lvl="0" marL="152400" indent="-152400">
+              <a:buChar char="•"/>
+            </a:pPr>
+            <a:r>
+              <a:rPr sz="1100">
+                <a:solidFill>
+                  <a:srgbClr val="475569"/>
+                </a:solidFill>
+                <a:latin typeface="+mn-lt"/>
+                <a:cs typeface="+mn-lt"/>
+              </a:rPr>
+              <a:t>PNG with 32-bit RGBA alpha transparency</a:t>
+            </a:r>
+          </a:p>
+          <a:p>
+            <a:pPr algn="l" lvl="0" marL="152400" indent="-152400">
+              <a:buChar char="•"/>
+            </a:pPr>
+            <a:r>
+              <a:rPr sz="1100">
+                <a:solidFill>
+                  <a:srgbClr val="475569"/>
+                </a:solidFill>
+                <a:latin typeface="+mn-lt"/>
+                <a:cs typeface="+mn-lt"/>
+              </a:rPr>
+              <a:t>JPEG / JPG progressive and baseline encoding</a:t>
+            </a:r>
+          </a:p>
+          <a:p>
+            <a:pPr algn="l" lvl="0" marL="152400" indent="-152400">
+              <a:buChar char="•"/>
+            </a:pPr>
+            <a:r>
+              <a:rPr sz="1100">
+                <a:solidFill>
+                  <a:srgbClr val="475569"/>
+                </a:solidFill>
+                <a:latin typeface="+mn-lt"/>
+                <a:cs typeface="+mn-lt"/>
+              </a:rPr>
+              <a:t>Zero-copy ArrayBuffer &amp; Uint8Array input</a:t>
+            </a:r>
+          </a:p>
+          <a:p>
+            <a:pPr algn="l" lvl="0" marL="152400" indent="-152400">
+              <a:buChar char="•"/>
+            </a:pPr>
+            <a:r>
+              <a:rPr sz="1100">
+                <a:solidFill>
+                  <a:srgbClr val="475569"/>
+                </a:solidFill>
+                <a:latin typeface="+mn-lt"/>
+                <a:cs typeface="+mn-lt"/>
+              </a:rPr>
+              <a:t>Placeholder resolution into slide layout picture frames</a:t>
+            </a:r>
+          </a:p>
+        </p:txBody>
+      </p:sp>
+      <p:sp>
+        <p:nvSpPr>
+          <p:cNvPr id="13" name="Text Box 12"/>
+          <p:cNvSpPr txBox="1"/>
+          <p:nvPr/>
+        </p:nvSpPr>
+        <p:spPr>
+          <a:xfrm>
+            <a:off x="731520" y="6510528"/>
+            <a:ext cx="10725912" cy="228600"/>
+          </a:xfrm>
+          <a:prstGeom prst="rect">
+            <a:avLst/>
+          </a:prstGeom>
+        </p:spPr>
+        <p:txBody>
+          <a:bodyPr anchor="t"/>
+          <a:lstStyle/>
+          <a:p>
+            <a:pPr algn="ctr"/>
+            <a:r>
+              <a:rPr i="1" sz="800">
+                <a:solidFill>
+                  <a:srgbClr val="94A3B8"/>
+                </a:solidFill>
+                <a:latin typeface="+mn-lt"/>
+                <a:cs typeface="+mn-lt"/>
+              </a:rPr>
+              <a:t>* Disclaimer: All benchmark metrics, performance figures, and simulated architectures in this deck are synthetic demonstration values generated solely to showcase the authoring, formatting, and rendering capabilities of @hokkyss/pptx.</a:t>
+            </a:r>
+          </a:p>
+        </p:txBody>
+      </p:sp>
     </p:spTree>
   </p:cSld>
   <p:clrMapOvr>
@@ -11536,7 +11603,7 @@
 </file>
 
 <file path=ppt/slides/slide7.xml><?xml version="1.0" encoding="utf-8"?>
-<p:sld xmlns:a="http://schemas.openxmlformats.org/drawingml/2006/main" xmlns:r="http://schemas.openxmlformats.org/officeDocument/2006/relationships" xmlns:p="http://schemas.openxmlformats.org/presentationml/2006/main">
+<p:sld xmlns:a="http://schemas.openxmlformats.org/drawingml/2006/main" xmlns:p="http://schemas.openxmlformats.org/presentationml/2006/main" xmlns:r="http://schemas.openxmlformats.org/officeDocument/2006/relationships">
   <p:cSld>
     <p:bg>
       <p:bgPr>
@@ -11576,9 +11643,10 @@
           </a:prstGeom>
         </p:spPr>
         <p:txBody>
-          <a:bodyPr/>
-          <a:lstStyle/>
-          <a:p>
+          <a:bodyPr anchor="t"/>
+          <a:lstStyle/>
+          <a:p>
+            <a:pPr algn="l"/>
             <a:r>
               <a:rPr b="1" sz="2400">
                 <a:solidFill>
@@ -11608,9 +11676,10 @@
           </a:prstGeom>
         </p:spPr>
         <p:txBody>
-          <a:bodyPr/>
-          <a:lstStyle/>
-          <a:p>
+          <a:bodyPr anchor="t"/>
+          <a:lstStyle/>
+          <a:p>
+            <a:pPr algn="l"/>
             <a:r>
               <a:rPr sz="1300">
                 <a:solidFill>
@@ -11678,9 +11747,10 @@
           </a:prstGeom>
         </p:spPr>
         <p:txBody>
-          <a:bodyPr/>
-          <a:lstStyle/>
-          <a:p>
+          <a:bodyPr anchor="t"/>
+          <a:lstStyle/>
+          <a:p>
+            <a:pPr algn="l"/>
             <a:r>
               <a:rPr b="1" sz="1500">
                 <a:solidFill>
@@ -11710,11 +11780,10 @@
           </a:prstGeom>
         </p:spPr>
         <p:txBody>
-          <a:bodyPr/>
-          <a:lstStyle/>
-          <a:p>
-            <a:pPr>
-              <a:buFont typeface="Arial" panose="020B0604020202020204" pitchFamily="34" charset="0"/>
+          <a:bodyPr anchor="t"/>
+          <a:lstStyle/>
+          <a:p>
+            <a:pPr algn="l" lvl="0" marL="152400" indent="-152400">
               <a:buChar char="•"/>
             </a:pPr>
             <a:r>
@@ -11727,16 +11796,6 @@
               </a:rPr>
               <a:t>Core Infrastructure Fleet</a:t>
             </a:r>
-            <a:r>
-              <a:rPr sz="1050">
-                <a:solidFill>
-                  <a:srgbClr val="94A3B8"/>
-                </a:solidFill>
-                <a:latin typeface="+mn-lt"/>
-                <a:cs typeface="+mn-lt"/>
-              </a:rPr>
-              <a:t>↳ Shift+Enter: soft break continuation under same bullet</a:t>
-            </a:r>
             <a:br>
               <a:rPr sz="1050">
                 <a:solidFill>
@@ -11746,10 +11805,19 @@
                 <a:cs typeface="+mn-lt"/>
               </a:rPr>
             </a:br>
-          </a:p>
-          <a:p>
-            <a:pPr lvl="1">
-              <a:buFont typeface="Arial" panose="020B0604020202020204" pitchFamily="34" charset="0"/>
+            <a:r>
+              <a:rPr sz="1050">
+                <a:solidFill>
+                  <a:srgbClr val="94A3B8"/>
+                </a:solidFill>
+                <a:latin typeface="+mn-lt"/>
+                <a:cs typeface="+mn-lt"/>
+              </a:rPr>
+              <a:t>↳ Shift+Enter: soft break continuation under same bullet</a:t>
+            </a:r>
+          </a:p>
+          <a:p>
+            <a:pPr algn="l" lvl="1" marL="381000" indent="-152400">
               <a:buChar char="•"/>
             </a:pPr>
             <a:r>
@@ -11762,16 +11830,6 @@
               </a:rPr>
               <a:t>Edge Routing Layer (Anycast DNS)</a:t>
             </a:r>
-            <a:r>
-              <a:rPr sz="1050">
-                <a:solidFill>
-                  <a:srgbClr val="94A3B8"/>
-                </a:solidFill>
-                <a:latin typeface="+mn-lt"/>
-                <a:cs typeface="+mn-lt"/>
-              </a:rPr>
-              <a:t>↳ Tab indent: sub-ms global route resolution</a:t>
-            </a:r>
             <a:br>
               <a:rPr sz="1050">
                 <a:solidFill>
@@ -11781,10 +11839,19 @@
                 <a:cs typeface="+mn-lt"/>
               </a:rPr>
             </a:br>
-          </a:p>
-          <a:p>
-            <a:pPr lvl="2">
-              <a:buFont typeface="Arial" panose="020B0604020202020204" pitchFamily="34" charset="0"/>
+            <a:r>
+              <a:rPr sz="1050">
+                <a:solidFill>
+                  <a:srgbClr val="94A3B8"/>
+                </a:solidFill>
+                <a:latin typeface="+mn-lt"/>
+                <a:cs typeface="+mn-lt"/>
+              </a:rPr>
+              <a:t>↳ Tab indent: sub-ms global route resolution</a:t>
+            </a:r>
+          </a:p>
+          <a:p>
+            <a:pPr algn="l" lvl="2" marL="609600" indent="-152400">
               <a:buChar char="•"/>
             </a:pPr>
             <a:r>
@@ -11797,16 +11864,6 @@
               </a:rPr>
               <a:t>TLS 1.3 Security Envelope</a:t>
             </a:r>
-            <a:r>
-              <a:rPr sz="1050">
-                <a:solidFill>
-                  <a:srgbClr val="94A3B8"/>
-                </a:solidFill>
-                <a:latin typeface="+mn-lt"/>
-                <a:cs typeface="+mn-lt"/>
-              </a:rPr>
-              <a:t>↳ Tab Tab: 0-RTT session resumption</a:t>
-            </a:r>
             <a:br>
               <a:rPr sz="1050">
                 <a:solidFill>
@@ -11816,10 +11873,19 @@
                 <a:cs typeface="+mn-lt"/>
               </a:rPr>
             </a:br>
-          </a:p>
-          <a:p>
-            <a:pPr lvl="3">
-              <a:buFont typeface="Arial" panose="020B0604020202020204" pitchFamily="34" charset="0"/>
+            <a:r>
+              <a:rPr sz="1050">
+                <a:solidFill>
+                  <a:srgbClr val="94A3B8"/>
+                </a:solidFill>
+                <a:latin typeface="+mn-lt"/>
+                <a:cs typeface="+mn-lt"/>
+              </a:rPr>
+              <a:t>↳ Tab Tab: 0-RTT session resumption</a:t>
+            </a:r>
+          </a:p>
+          <a:p>
+            <a:pPr algn="l" lvl="3" marL="838200" indent="-152400">
               <a:buChar char="•"/>
             </a:pPr>
             <a:r>
@@ -11834,8 +11900,7 @@
             </a:r>
           </a:p>
           <a:p>
-            <a:pPr>
-              <a:buFont typeface="Arial" panose="020B0604020202020204" pitchFamily="34" charset="0"/>
+            <a:pPr algn="l" lvl="0" marL="152400" indent="-152400">
               <a:buChar char="•"/>
             </a:pPr>
             <a:r>
@@ -11848,16 +11913,6 @@
               </a:rPr>
               <a:t>Global State &amp; Cache Synchronization</a:t>
             </a:r>
-            <a:r>
-              <a:rPr sz="1050">
-                <a:solidFill>
-                  <a:srgbClr val="94A3B8"/>
-                </a:solidFill>
-                <a:latin typeface="+mn-lt"/>
-                <a:cs typeface="+mn-lt"/>
-              </a:rPr>
-              <a:t>↳ Shift+Tab: returns to level 0 root bullet</a:t>
-            </a:r>
             <a:br>
               <a:rPr sz="1050">
                 <a:solidFill>
@@ -11867,10 +11922,19 @@
                 <a:cs typeface="+mn-lt"/>
               </a:rPr>
             </a:br>
-          </a:p>
-          <a:p>
-            <a:pPr lvl="1">
-              <a:buFont typeface="Arial" panose="020B0604020202020204" pitchFamily="34" charset="0"/>
+            <a:r>
+              <a:rPr sz="1050">
+                <a:solidFill>
+                  <a:srgbClr val="94A3B8"/>
+                </a:solidFill>
+                <a:latin typeface="+mn-lt"/>
+                <a:cs typeface="+mn-lt"/>
+              </a:rPr>
+              <a:t>↳ Shift+Tab: returns to level 0 root bullet</a:t>
+            </a:r>
+          </a:p>
+          <a:p>
+            <a:pPr algn="l" lvl="1" marL="381000" indent="-152400">
               <a:buChar char="•"/>
             </a:pPr>
             <a:r>
@@ -11940,9 +12004,10 @@
           </a:prstGeom>
         </p:spPr>
         <p:txBody>
-          <a:bodyPr/>
-          <a:lstStyle/>
-          <a:p>
+          <a:bodyPr anchor="t"/>
+          <a:lstStyle/>
+          <a:p>
+            <a:pPr algn="l"/>
             <a:r>
               <a:rPr b="1" sz="1500">
                 <a:solidFill>
@@ -11972,10 +12037,10 @@
           </a:prstGeom>
         </p:spPr>
         <p:txBody>
-          <a:bodyPr/>
-          <a:lstStyle/>
-          <a:p>
-            <a:pPr>
+          <a:bodyPr anchor="t"/>
+          <a:lstStyle/>
+          <a:p>
+            <a:pPr algn="l" lvl="0" marL="203200" indent="-203200">
               <a:buAutoNum type="arabicPeriod"/>
             </a:pPr>
             <a:r>
@@ -11988,16 +12053,6 @@
               </a:rPr>
               <a:t>Phase 1: Ingestion &amp; Parsing</a:t>
             </a:r>
-            <a:r>
-              <a:rPr sz="1050">
-                <a:solidFill>
-                  <a:srgbClr val="94A3B8"/>
-                </a:solidFill>
-                <a:latin typeface="+mn-lt"/>
-                <a:cs typeface="+mn-lt"/>
-              </a:rPr>
-              <a:t>Decompresses container with fflate &amp; streams XML parts</a:t>
-            </a:r>
             <a:br>
               <a:rPr sz="1050">
                 <a:solidFill>
@@ -12007,10 +12062,19 @@
                 <a:cs typeface="+mn-lt"/>
               </a:rPr>
             </a:br>
-          </a:p>
-          <a:p>
-            <a:pPr lvl="1">
-              <a:buFont typeface="Arial" panose="020B0604020202020204" pitchFamily="34" charset="0"/>
+            <a:r>
+              <a:rPr sz="1050">
+                <a:solidFill>
+                  <a:srgbClr val="94A3B8"/>
+                </a:solidFill>
+                <a:latin typeface="+mn-lt"/>
+                <a:cs typeface="+mn-lt"/>
+              </a:rPr>
+              <a:t>Decompresses container with fflate &amp; streams XML parts</a:t>
+            </a:r>
+          </a:p>
+          <a:p>
+            <a:pPr algn="l" lvl="1" marL="381000" indent="-152400">
               <a:buChar char="•"/>
             </a:pPr>
             <a:r>
@@ -12025,7 +12089,7 @@
             </a:r>
           </a:p>
           <a:p>
-            <a:pPr>
+            <a:pPr algn="l" lvl="0" marL="203200" indent="-203200">
               <a:buAutoNum type="arabicPeriod"/>
             </a:pPr>
             <a:r>
@@ -12038,16 +12102,6 @@
               </a:rPr>
               <a:t>Phase 2: AST Mutation &amp; Modeling</a:t>
             </a:r>
-            <a:r>
-              <a:rPr sz="1050">
-                <a:solidFill>
-                  <a:srgbClr val="94A3B8"/>
-                </a:solidFill>
-                <a:latin typeface="+mn-lt"/>
-                <a:cs typeface="+mn-lt"/>
-              </a:rPr>
-              <a:t>Applies shapes, tables, shadows, gradients, and formulas</a:t>
-            </a:r>
             <a:br>
               <a:rPr sz="1050">
                 <a:solidFill>
@@ -12057,10 +12111,19 @@
                 <a:cs typeface="+mn-lt"/>
               </a:rPr>
             </a:br>
-          </a:p>
-          <a:p>
-            <a:pPr lvl="1">
-              <a:buFont typeface="Arial" panose="020B0604020202020204" pitchFamily="34" charset="0"/>
+            <a:r>
+              <a:rPr sz="1050">
+                <a:solidFill>
+                  <a:srgbClr val="94A3B8"/>
+                </a:solidFill>
+                <a:latin typeface="+mn-lt"/>
+                <a:cs typeface="+mn-lt"/>
+              </a:rPr>
+              <a:t>Applies shapes, tables, shadows, gradients, and formulas</a:t>
+            </a:r>
+          </a:p>
+          <a:p>
+            <a:pPr algn="l" lvl="1" marL="381000" indent="-152400">
               <a:buChar char="•"/>
             </a:pPr>
             <a:r>
@@ -12075,7 +12138,7 @@
             </a:r>
           </a:p>
           <a:p>
-            <a:pPr>
+            <a:pPr algn="l" lvl="0" marL="203200" indent="-203200">
               <a:buAutoNum type="arabicPeriod"/>
             </a:pPr>
             <a:r>
@@ -12088,16 +12151,6 @@
               </a:rPr>
               <a:t>Phase 3: Serialization &amp; Packaging</a:t>
             </a:r>
-            <a:r>
-              <a:rPr sz="1050">
-                <a:solidFill>
-                  <a:srgbClr val="94A3B8"/>
-                </a:solidFill>
-                <a:latin typeface="+mn-lt"/>
-                <a:cs typeface="+mn-lt"/>
-              </a:rPr>
-              <a:t>Emits deterministic OpenXML parts and compiles binary</a:t>
-            </a:r>
             <a:br>
               <a:rPr sz="1050">
                 <a:solidFill>
@@ -12107,10 +12160,19 @@
                 <a:cs typeface="+mn-lt"/>
               </a:rPr>
             </a:br>
-          </a:p>
-          <a:p>
-            <a:pPr lvl="1">
-              <a:buFont typeface="Arial" panose="020B0604020202020204" pitchFamily="34" charset="0"/>
+            <a:r>
+              <a:rPr sz="1050">
+                <a:solidFill>
+                  <a:srgbClr val="94A3B8"/>
+                </a:solidFill>
+                <a:latin typeface="+mn-lt"/>
+                <a:cs typeface="+mn-lt"/>
+              </a:rPr>
+              <a:t>Emits deterministic OpenXML parts and compiles binary</a:t>
+            </a:r>
+          </a:p>
+          <a:p>
+            <a:pPr algn="l" lvl="1" marL="381000" indent="-152400">
               <a:buChar char="•"/>
             </a:pPr>
             <a:r>
@@ -12142,7 +12204,7 @@
           </a:prstGeom>
         </p:spPr>
         <p:txBody>
-          <a:bodyPr/>
+          <a:bodyPr anchor="t"/>
           <a:lstStyle/>
           <a:p>
             <a:pPr algn="ctr"/>
@@ -12171,7 +12233,7 @@
 </file>
 
 <file path=ppt/slides/slide8.xml><?xml version="1.0" encoding="utf-8"?>
-<p:sld xmlns:a="http://schemas.openxmlformats.org/drawingml/2006/main" xmlns:r="http://schemas.openxmlformats.org/officeDocument/2006/relationships" xmlns:p="http://schemas.openxmlformats.org/presentationml/2006/main">
+<p:sld xmlns:a="http://schemas.openxmlformats.org/drawingml/2006/main" xmlns:p="http://schemas.openxmlformats.org/presentationml/2006/main" xmlns:r="http://schemas.openxmlformats.org/officeDocument/2006/relationships">
   <p:cSld>
     <p:bg>
       <p:bgPr>
@@ -12213,9 +12275,10 @@
           </a:prstGeom>
         </p:spPr>
         <p:txBody>
-          <a:bodyPr/>
-          <a:lstStyle/>
-          <a:p>
+          <a:bodyPr anchor="t"/>
+          <a:lstStyle/>
+          <a:p>
+            <a:pPr algn="l"/>
             <a:r>
               <a:rPr b="1" sz="2400">
                 <a:solidFill>
@@ -12245,9 +12308,10 @@
           </a:prstGeom>
         </p:spPr>
         <p:txBody>
-          <a:bodyPr/>
-          <a:lstStyle/>
-          <a:p>
+          <a:bodyPr anchor="t"/>
+          <a:lstStyle/>
+          <a:p>
+            <a:pPr algn="l"/>
             <a:r>
               <a:rPr sz="1300">
                 <a:solidFill>
@@ -12277,11 +12341,10 @@
           </a:prstGeom>
         </p:spPr>
         <p:txBody>
-          <a:bodyPr/>
-          <a:lstStyle/>
-          <a:p>
-            <a:pPr>
-              <a:buFont typeface="Arial" panose="020B0604020202020204" pitchFamily="34" charset="0"/>
+          <a:bodyPr anchor="t"/>
+          <a:lstStyle/>
+          <a:p>
+            <a:pPr algn="l" lvl="0" marL="152400" indent="-152400">
               <a:buChar char="•"/>
             </a:pPr>
             <a:r>
@@ -12294,16 +12357,6 @@
               </a:rPr>
               <a:t>A1: High Availability &amp; Multi-Region Fleet (Level 0 Root Bullet)</a:t>
             </a:r>
-            <a:r>
-              <a:rPr sz="1200">
-                <a:solidFill>
-                  <a:srgbClr val="94A3B8"/>
-                </a:solidFill>
-                <a:latin typeface="+mn-lt"/>
-                <a:cs typeface="+mn-lt"/>
-              </a:rPr>
-              <a:t>↳ Shift+Enter: multi-line statement cleanly indented beneath the same bullet point without spawning an extra glyph.</a:t>
-            </a:r>
             <a:br>
               <a:rPr sz="1200">
                 <a:solidFill>
@@ -12313,10 +12366,19 @@
                 <a:cs typeface="+mn-lt"/>
               </a:rPr>
             </a:br>
-          </a:p>
-          <a:p>
-            <a:pPr lvl="1">
-              <a:buFont typeface="Arial" panose="020B0604020202020204" pitchFamily="34" charset="0"/>
+            <a:r>
+              <a:rPr sz="1200">
+                <a:solidFill>
+                  <a:srgbClr val="94A3B8"/>
+                </a:solidFill>
+                <a:latin typeface="+mn-lt"/>
+                <a:cs typeface="+mn-lt"/>
+              </a:rPr>
+              <a:t>↳ Shift+Enter: multi-line statement cleanly indented beneath the same bullet point without spawning an extra glyph.</a:t>
+            </a:r>
+          </a:p>
+          <a:p>
+            <a:pPr algn="l" lvl="1" marL="381000" indent="-152400">
               <a:buChar char="•"/>
             </a:pPr>
             <a:r>
@@ -12329,16 +12391,6 @@
               </a:rPr>
               <a:t>B1: Anycast Edge Routing Layer with 300+ Global PoPs (Level 1 / Tab)</a:t>
             </a:r>
-            <a:r>
-              <a:rPr sz="1200">
-                <a:solidFill>
-                  <a:srgbClr val="94A3B8"/>
-                </a:solidFill>
-                <a:latin typeface="+mn-lt"/>
-                <a:cs typeface="+mn-lt"/>
-              </a:rPr>
-              <a:t>↳ Automatically inherits level 1 margin and hanging indent directly from the Slide Master without inline overrides.</a:t>
-            </a:r>
             <a:br>
               <a:rPr sz="1200">
                 <a:solidFill>
@@ -12348,10 +12400,19 @@
                 <a:cs typeface="+mn-lt"/>
               </a:rPr>
             </a:br>
-          </a:p>
-          <a:p>
-            <a:pPr lvl="2">
-              <a:buFont typeface="Arial" panose="020B0604020202020204" pitchFamily="34" charset="0"/>
+            <a:r>
+              <a:rPr sz="1200">
+                <a:solidFill>
+                  <a:srgbClr val="94A3B8"/>
+                </a:solidFill>
+                <a:latin typeface="+mn-lt"/>
+                <a:cs typeface="+mn-lt"/>
+              </a:rPr>
+              <a:t>↳ Automatically inherits level 1 margin and hanging indent directly from the Slide Master without inline overrides.</a:t>
+            </a:r>
+          </a:p>
+          <a:p>
+            <a:pPr algn="l" lvl="2" marL="609600" indent="-152400">
               <a:buChar char="•"/>
             </a:pPr>
             <a:r>
@@ -12364,16 +12425,6 @@
               </a:rPr>
               <a:t>C1: Zero-RTT TLS 1.3 Handshake &amp; Heuristic DDoS Protection (Level 2 / Tab Tab)</a:t>
             </a:r>
-            <a:r>
-              <a:rPr sz="1200">
-                <a:solidFill>
-                  <a:srgbClr val="94A3B8"/>
-                </a:solidFill>
-                <a:latin typeface="+mn-lt"/>
-                <a:cs typeface="+mn-lt"/>
-              </a:rPr>
-              <a:t>↳ P99 latency SLA: &lt; 1.2ms across all geographic regions with zero cold starts.</a:t>
-            </a:r>
             <a:br>
               <a:rPr sz="1200">
                 <a:solidFill>
@@ -12383,10 +12434,19 @@
                 <a:cs typeface="+mn-lt"/>
               </a:rPr>
             </a:br>
-          </a:p>
-          <a:p>
-            <a:pPr lvl="3">
-              <a:buFont typeface="Arial" panose="020B0604020202020204" pitchFamily="34" charset="0"/>
+            <a:r>
+              <a:rPr sz="1200">
+                <a:solidFill>
+                  <a:srgbClr val="94A3B8"/>
+                </a:solidFill>
+                <a:latin typeface="+mn-lt"/>
+                <a:cs typeface="+mn-lt"/>
+              </a:rPr>
+              <a:t>↳ P99 latency SLA: &lt; 1.2ms across all geographic regions with zero cold starts.</a:t>
+            </a:r>
+          </a:p>
+          <a:p>
+            <a:pPr algn="l" lvl="3" marL="838200" indent="-152400">
               <a:buChar char="•"/>
             </a:pPr>
             <a:r>
@@ -12401,8 +12461,7 @@
             </a:r>
           </a:p>
           <a:p>
-            <a:pPr>
-              <a:buFont typeface="Arial" panose="020B0604020202020204" pitchFamily="34" charset="0"/>
+            <a:pPr algn="l" lvl="0" marL="152400" indent="-152400">
               <a:buChar char="•"/>
             </a:pPr>
             <a:r>
@@ -12415,16 +12474,6 @@
               </a:rPr>
               <a:t>A2: Automated State &amp; Cache Synchronization (Level 0 / Shift+Tab)</a:t>
             </a:r>
-            <a:r>
-              <a:rPr sz="1200">
-                <a:solidFill>
-                  <a:srgbClr val="94A3B8"/>
-                </a:solidFill>
-                <a:latin typeface="+mn-lt"/>
-                <a:cs typeface="+mn-lt"/>
-              </a:rPr>
-              <a:t>↳ Shift+Tab returns seamlessly to the root bullet level, matching PowerPoint desktop editing behavior.</a:t>
-            </a:r>
             <a:br>
               <a:rPr sz="1200">
                 <a:solidFill>
@@ -12434,10 +12483,19 @@
                 <a:cs typeface="+mn-lt"/>
               </a:rPr>
             </a:br>
-          </a:p>
-          <a:p>
-            <a:pPr lvl="1">
-              <a:buFont typeface="Arial" panose="020B0604020202020204" pitchFamily="34" charset="0"/>
+            <a:r>
+              <a:rPr sz="1200">
+                <a:solidFill>
+                  <a:srgbClr val="94A3B8"/>
+                </a:solidFill>
+                <a:latin typeface="+mn-lt"/>
+                <a:cs typeface="+mn-lt"/>
+              </a:rPr>
+              <a:t>↳ Shift+Tab returns seamlessly to the root bullet level, matching PowerPoint desktop editing behavior.</a:t>
+            </a:r>
+          </a:p>
+          <a:p>
+            <a:pPr algn="l" lvl="1" marL="381000" indent="-152400">
               <a:buChar char="•"/>
             </a:pPr>
             <a:r>
@@ -12469,7 +12527,7 @@
           </a:prstGeom>
         </p:spPr>
         <p:txBody>
-          <a:bodyPr/>
+          <a:bodyPr anchor="t"/>
           <a:lstStyle/>
           <a:p>
             <a:pPr algn="ctr"/>
@@ -12498,7 +12556,7 @@
 </file>
 
 <file path=ppt/slides/slide9.xml><?xml version="1.0" encoding="utf-8"?>
-<p:sld xmlns:a="http://schemas.openxmlformats.org/drawingml/2006/main" xmlns:r="http://schemas.openxmlformats.org/officeDocument/2006/relationships" xmlns:p="http://schemas.openxmlformats.org/presentationml/2006/main">
+<p:sld xmlns:a="http://schemas.openxmlformats.org/drawingml/2006/main" xmlns:p="http://schemas.openxmlformats.org/presentationml/2006/main" xmlns:r="http://schemas.openxmlformats.org/officeDocument/2006/relationships">
   <p:cSld>
     <p:bg>
       <p:bgPr>
@@ -12538,9 +12596,10 @@
           </a:prstGeom>
         </p:spPr>
         <p:txBody>
-          <a:bodyPr/>
-          <a:lstStyle/>
-          <a:p>
+          <a:bodyPr anchor="t"/>
+          <a:lstStyle/>
+          <a:p>
+            <a:pPr algn="l"/>
             <a:r>
               <a:rPr b="1" sz="2400">
                 <a:solidFill>
@@ -12570,9 +12629,10 @@
           </a:prstGeom>
         </p:spPr>
         <p:txBody>
-          <a:bodyPr/>
-          <a:lstStyle/>
-          <a:p>
+          <a:bodyPr anchor="t"/>
+          <a:lstStyle/>
+          <a:p>
+            <a:pPr algn="l"/>
             <a:r>
               <a:rPr sz="1300">
                 <a:solidFill>
@@ -12640,9 +12700,10 @@
           </a:prstGeom>
         </p:spPr>
         <p:txBody>
-          <a:bodyPr/>
-          <a:lstStyle/>
-          <a:p>
+          <a:bodyPr anchor="t"/>
+          <a:lstStyle/>
+          <a:p>
+            <a:pPr algn="l"/>
             <a:r>
               <a:rPr b="1" sz="1400">
                 <a:solidFill>
@@ -12672,11 +12733,10 @@
           </a:prstGeom>
         </p:spPr>
         <p:txBody>
-          <a:bodyPr/>
-          <a:lstStyle/>
-          <a:p>
-            <a:pPr>
-              <a:buFont typeface="Arial" panose="020B0604020202020204" pitchFamily="34" charset="0"/>
+          <a:bodyPr anchor="t"/>
+          <a:lstStyle/>
+          <a:p>
+            <a:pPr algn="l" lvl="0" marL="152400" indent="-152400">
               <a:buChar char="•"/>
             </a:pPr>
             <a:r>
@@ -12691,7 +12751,7 @@
             </a:r>
           </a:p>
           <a:p>
-            <a:pPr lvl="1">
+            <a:pPr algn="l" lvl="1">
               <a:buNone/>
             </a:pPr>
             <a:r>
@@ -12704,16 +12764,6 @@
               </a:rPr>
               <a:t>↳ level: 1, bullet: false — Block explanation indented under Level 0</a:t>
             </a:r>
-            <a:r>
-              <a:rPr sz="1050">
-                <a:solidFill>
-                  <a:srgbClr val="64748B"/>
-                </a:solidFill>
-                <a:latin typeface="+mn-lt"/>
-                <a:cs typeface="+mn-lt"/>
-              </a:rPr>
-              <a:t>Maintains strict linearizable consistency across all state machine nodes.</a:t>
-            </a:r>
             <a:br>
               <a:rPr sz="1050">
                 <a:solidFill>
@@ -12723,9 +12773,19 @@
                 <a:cs typeface="+mn-lt"/>
               </a:rPr>
             </a:br>
-          </a:p>
-          <a:p>
-            <a:pPr lvl="2">
+            <a:r>
+              <a:rPr sz="1050">
+                <a:solidFill>
+                  <a:srgbClr val="64748B"/>
+                </a:solidFill>
+                <a:latin typeface="+mn-lt"/>
+                <a:cs typeface="+mn-lt"/>
+              </a:rPr>
+              <a:t>Maintains strict linearizable consistency across all state machine nodes.</a:t>
+            </a:r>
+          </a:p>
+          <a:p>
+            <a:pPr algn="l" lvl="2">
               <a:buNone/>
             </a:pPr>
             <a:r>
@@ -12750,8 +12810,7 @@
             </a:r>
           </a:p>
           <a:p>
-            <a:pPr>
-              <a:buFont typeface="Arial" panose="020B0604020202020204" pitchFamily="34" charset="0"/>
+            <a:pPr algn="l" lvl="0" marL="152400" indent="-152400">
               <a:buChar char="•"/>
             </a:pPr>
             <a:r>
@@ -12766,7 +12825,7 @@
             </a:r>
           </a:p>
           <a:p>
-            <a:pPr lvl="1">
+            <a:pPr algn="l" lvl="1">
               <a:buNone/>
             </a:pPr>
             <a:r>
@@ -12779,16 +12838,6 @@
               </a:rPr>
               <a:t>↳ level: 1, bullet: false — Block commentary (no bullet glyph)</a:t>
             </a:r>
-            <a:r>
-              <a:rPr sz="1050">
-                <a:solidFill>
-                  <a:srgbClr val="64748B"/>
-                </a:solidFill>
-                <a:latin typeface="+mn-lt"/>
-                <a:cs typeface="+mn-lt"/>
-              </a:rPr>
-              <a:t>Automatic failover orchestration with zero operational downtime.</a:t>
-            </a:r>
             <a:br>
               <a:rPr sz="1050">
                 <a:solidFill>
@@ -12798,9 +12847,19 @@
                 <a:cs typeface="+mn-lt"/>
               </a:rPr>
             </a:br>
-          </a:p>
-          <a:p>
-            <a:pPr lvl="2">
+            <a:r>
+              <a:rPr sz="1050">
+                <a:solidFill>
+                  <a:srgbClr val="64748B"/>
+                </a:solidFill>
+                <a:latin typeface="+mn-lt"/>
+                <a:cs typeface="+mn-lt"/>
+              </a:rPr>
+              <a:t>Automatic failover orchestration with zero operational downtime.</a:t>
+            </a:r>
+          </a:p>
+          <a:p>
+            <a:pPr algn="l" lvl="2">
               <a:buNone/>
             </a:pPr>
             <a:r>
@@ -12880,9 +12939,10 @@
           </a:prstGeom>
         </p:spPr>
         <p:txBody>
-          <a:bodyPr/>
-          <a:lstStyle/>
-          <a:p>
+          <a:bodyPr anchor="t"/>
+          <a:lstStyle/>
+          <a:p>
+            <a:pPr algn="l"/>
             <a:r>
               <a:rPr b="1" sz="1400">
                 <a:solidFill>
@@ -12912,10 +12972,10 @@
           </a:prstGeom>
         </p:spPr>
         <p:txBody>
-          <a:bodyPr/>
-          <a:lstStyle/>
-          <a:p>
-            <a:pPr>
+          <a:bodyPr anchor="t"/>
+          <a:lstStyle/>
+          <a:p>
+            <a:pPr algn="l" lvl="0">
               <a:buNone/>
             </a:pPr>
             <a:r>
@@ -12950,7 +13010,7 @@
             </a:r>
           </a:p>
           <a:p>
-            <a:pPr lvl="1">
+            <a:pPr algn="l" lvl="1">
               <a:buNone/>
             </a:pPr>
             <a:r>
@@ -12985,7 +13045,7 @@
             </a:r>
           </a:p>
           <a:p>
-            <a:pPr lvl="1">
+            <a:pPr algn="l" lvl="1">
               <a:buNone/>
             </a:pPr>
             <a:r>
@@ -13010,7 +13070,7 @@
             </a:r>
           </a:p>
           <a:p>
-            <a:pPr lvl="2">
+            <a:pPr algn="l" lvl="2">
               <a:buNone/>
             </a:pPr>
             <a:r>
@@ -13045,7 +13105,7 @@
             </a:r>
           </a:p>
           <a:p>
-            <a:pPr lvl="2">
+            <a:pPr algn="l" lvl="2">
               <a:buNone/>
             </a:pPr>
             <a:r>
@@ -13080,7 +13140,7 @@
             </a:r>
           </a:p>
           <a:p>
-            <a:pPr lvl="1">
+            <a:pPr algn="l" lvl="1">
               <a:buNone/>
             </a:pPr>
             <a:r>
@@ -13095,7 +13155,7 @@
             </a:r>
           </a:p>
           <a:p>
-            <a:pPr lvl="1">
+            <a:pPr algn="l" lvl="1">
               <a:buNone/>
             </a:pPr>
             <a:r>
@@ -13120,7 +13180,7 @@
             </a:r>
           </a:p>
           <a:p>
-            <a:pPr lvl="2">
+            <a:pPr algn="l" lvl="2">
               <a:buNone/>
             </a:pPr>
             <a:r>
@@ -13155,7 +13215,7 @@
             </a:r>
           </a:p>
           <a:p>
-            <a:pPr lvl="1">
+            <a:pPr algn="l" lvl="1">
               <a:buNone/>
             </a:pPr>
             <a:r>
@@ -13170,7 +13230,7 @@
             </a:r>
           </a:p>
           <a:p>
-            <a:pPr>
+            <a:pPr algn="l" lvl="0">
               <a:buNone/>
             </a:pPr>
             <a:r>
@@ -13202,7 +13262,7 @@
           </a:prstGeom>
         </p:spPr>
         <p:txBody>
-          <a:bodyPr/>
+          <a:bodyPr anchor="t"/>
           <a:lstStyle/>
           <a:p>
             <a:pPr algn="ctr"/>

--- a/hokkyss_showcase_deck.pptx
+++ b/hokkyss_showcase_deck.pptx
@@ -5,7 +5,7 @@
     <p:sldMasterId id="2147483648" r:id="rId1"/>
   </p:sldMasterIdLst>
   <p:notesMasterIdLst>
-    <p:notesMasterId r:id="rId16"/>
+    <p:notesMasterId r:id="rId18"/>
   </p:notesMasterIdLst>
   <p:sldIdLst>
     <p:sldId id="256" r:id="rId2"/>
@@ -22,10 +22,106 @@
     <p:sldId id="267" r:id="rId13"/>
     <p:sldId id="268" r:id="rId14"/>
     <p:sldId id="269" r:id="rId15"/>
+    <p:sldId id="270" r:id="rId16"/>
+    <p:sldId id="271" r:id="rId17"/>
   </p:sldIdLst>
   <p:sldSz cx="12192000" cy="6858000"/>
   <p:notesSz cx="6858000" cy="9144000"/>
-  <p:defaultTextStyle/>
+  <p:defaultTextStyle>
+    <a:defPPr>
+      <a:defRPr lang="en-US"/>
+    </a:defPPr>
+    <a:lvl1pPr algn="l" defTabSz="914400" eaLnBrk="1" hangingPunct="1" latinLnBrk="0" marL="0" rtl="0">
+      <a:defRPr kern="1200" sz="1800">
+        <a:solidFill>
+          <a:schemeClr val="tx1"/>
+        </a:solidFill>
+        <a:latin typeface="+mn-lt"/>
+        <a:ea typeface="+mn-ea"/>
+        <a:cs typeface="+mn-cs"/>
+      </a:defRPr>
+    </a:lvl1pPr>
+    <a:lvl2pPr algn="l" defTabSz="914400" eaLnBrk="1" hangingPunct="1" latinLnBrk="0" marL="457200" rtl="0">
+      <a:defRPr kern="1200" sz="1800">
+        <a:solidFill>
+          <a:schemeClr val="tx1"/>
+        </a:solidFill>
+        <a:latin typeface="+mn-lt"/>
+        <a:ea typeface="+mn-ea"/>
+        <a:cs typeface="+mn-cs"/>
+      </a:defRPr>
+    </a:lvl2pPr>
+    <a:lvl3pPr algn="l" defTabSz="914400" eaLnBrk="1" hangingPunct="1" latinLnBrk="0" marL="914400" rtl="0">
+      <a:defRPr kern="1200" sz="1800">
+        <a:solidFill>
+          <a:schemeClr val="tx1"/>
+        </a:solidFill>
+        <a:latin typeface="+mn-lt"/>
+        <a:ea typeface="+mn-ea"/>
+        <a:cs typeface="+mn-cs"/>
+      </a:defRPr>
+    </a:lvl3pPr>
+    <a:lvl4pPr algn="l" defTabSz="914400" eaLnBrk="1" hangingPunct="1" latinLnBrk="0" marL="1371600" rtl="0">
+      <a:defRPr kern="1200" sz="1800">
+        <a:solidFill>
+          <a:schemeClr val="tx1"/>
+        </a:solidFill>
+        <a:latin typeface="+mn-lt"/>
+        <a:ea typeface="+mn-ea"/>
+        <a:cs typeface="+mn-cs"/>
+      </a:defRPr>
+    </a:lvl4pPr>
+    <a:lvl5pPr algn="l" defTabSz="914400" eaLnBrk="1" hangingPunct="1" latinLnBrk="0" marL="1828800" rtl="0">
+      <a:defRPr kern="1200" sz="1800">
+        <a:solidFill>
+          <a:schemeClr val="tx1"/>
+        </a:solidFill>
+        <a:latin typeface="+mn-lt"/>
+        <a:ea typeface="+mn-ea"/>
+        <a:cs typeface="+mn-cs"/>
+      </a:defRPr>
+    </a:lvl5pPr>
+    <a:lvl6pPr algn="l" defTabSz="914400" eaLnBrk="1" hangingPunct="1" latinLnBrk="0" marL="2286000" rtl="0">
+      <a:defRPr kern="1200" sz="1800">
+        <a:solidFill>
+          <a:schemeClr val="tx1"/>
+        </a:solidFill>
+        <a:latin typeface="+mn-lt"/>
+        <a:ea typeface="+mn-ea"/>
+        <a:cs typeface="+mn-cs"/>
+      </a:defRPr>
+    </a:lvl6pPr>
+    <a:lvl7pPr algn="l" defTabSz="914400" eaLnBrk="1" hangingPunct="1" latinLnBrk="0" marL="2743200" rtl="0">
+      <a:defRPr kern="1200" sz="1800">
+        <a:solidFill>
+          <a:schemeClr val="tx1"/>
+        </a:solidFill>
+        <a:latin typeface="+mn-lt"/>
+        <a:ea typeface="+mn-ea"/>
+        <a:cs typeface="+mn-cs"/>
+      </a:defRPr>
+    </a:lvl7pPr>
+    <a:lvl8pPr algn="l" defTabSz="914400" eaLnBrk="1" hangingPunct="1" latinLnBrk="0" marL="3200400" rtl="0">
+      <a:defRPr kern="1200" sz="1800">
+        <a:solidFill>
+          <a:schemeClr val="tx1"/>
+        </a:solidFill>
+        <a:latin typeface="+mn-lt"/>
+        <a:ea typeface="+mn-ea"/>
+        <a:cs typeface="+mn-cs"/>
+      </a:defRPr>
+    </a:lvl8pPr>
+    <a:lvl9pPr algn="l" defTabSz="914400" eaLnBrk="1" hangingPunct="1" latinLnBrk="0" marL="3657600" rtl="0">
+      <a:defRPr kern="1200" sz="1800">
+        <a:solidFill>
+          <a:schemeClr val="tx1"/>
+        </a:solidFill>
+        <a:latin typeface="+mn-lt"/>
+        <a:ea typeface="+mn-ea"/>
+        <a:cs typeface="+mn-cs"/>
+      </a:defRPr>
+    </a:lvl9pPr>
+  </p:defaultTextStyle>
 </p:presentation>
 </file>
 
@@ -1969,6 +2065,218 @@
                 <a:latin typeface="+mn-lt"/>
                 <a:cs typeface="+mn-lt"/>
               </a:rPr>
+              <a:t>Hyperlinks &amp; Slide Navigation Keynote: </a:t>
+            </a:r>
+            <a:r>
+              <a:rPr u="sng">
+                <a:latin typeface="+mn-lt"/>
+                <a:cs typeface="+mn-lt"/>
+              </a:rPr>
+              <a:t>Interactive OpenXML Actions &amp; Relationships</a:t>
+            </a:r>
+          </a:p>
+          <a:p>
+            <a:pPr algn="l" lvl="0" marL="152400" indent="-152400">
+              <a:buChar char="•"/>
+            </a:pPr>
+            <a:r>
+              <a:rPr>
+                <a:latin typeface="+mn-lt"/>
+                <a:cs typeface="+mn-lt"/>
+              </a:rPr>
+              <a:t>Full support for external web links, custom URLs, and hover tooltips.</a:t>
+            </a:r>
+          </a:p>
+          <a:p>
+            <a:pPr algn="l" lvl="0" marL="152400" indent="-152400">
+              <a:buChar char="•"/>
+            </a:pPr>
+            <a:r>
+              <a:rPr>
+                <a:latin typeface="+mn-lt"/>
+                <a:cs typeface="+mn-lt"/>
+              </a:rPr>
+              <a:t>Internal slide jumping using strongly typed slideIndex referencing.</a:t>
+            </a:r>
+          </a:p>
+          <a:p>
+            <a:pPr algn="l" lvl="0" marL="152400" indent="-152400">
+              <a:buChar char="•"/>
+            </a:pPr>
+            <a:r>
+              <a:rPr>
+                <a:latin typeface="+mn-lt"/>
+                <a:cs typeface="+mn-lt"/>
+              </a:rPr>
+              <a:t>Built-in slide show control actions: firstSlide, lastSlide, nextSlide, previousSlide, endShow.</a:t>
+            </a:r>
+          </a:p>
+        </p:txBody>
+      </p:sp>
+    </p:spTree>
+  </p:cSld>
+  <p:clrMapOvr>
+    <a:masterClrMapping/>
+  </p:clrMapOvr>
+</p:notes>
+</file>
+
+<file path=ppt/notesSlides/notesSlide11.xml><?xml version="1.0" encoding="utf-8"?>
+<p:notes xmlns:a="http://schemas.openxmlformats.org/drawingml/2006/main" xmlns:p="http://schemas.openxmlformats.org/presentationml/2006/main" xmlns:r="http://schemas.openxmlformats.org/officeDocument/2006/relationships">
+  <p:cSld>
+    <p:spTree>
+      <p:nvGrpSpPr>
+        <p:cNvPr id="1" name=""/>
+        <p:cNvGrpSpPr/>
+        <p:nvPr/>
+      </p:nvGrpSpPr>
+      <p:grpSpPr>
+        <a:xfrm>
+          <a:off x="0" y="0"/>
+          <a:ext cx="0" cy="0"/>
+          <a:chOff x="0" y="0"/>
+          <a:chExt cx="0" cy="0"/>
+        </a:xfrm>
+      </p:grpSpPr>
+      <p:sp>
+        <p:nvSpPr>
+          <p:cNvPr id="2" name="Slide Image Placeholder 1"/>
+          <p:cNvSpPr>
+            <a:spLocks noChangeAspect="1" noGrp="1" noRot="1"/>
+          </p:cNvSpPr>
+          <p:nvPr>
+            <p:ph type="sldImg"/>
+          </p:nvPr>
+        </p:nvSpPr>
+        <p:spPr/>
+      </p:sp>
+      <p:sp>
+        <p:nvSpPr>
+          <p:cNvPr id="3" name="Notes Placeholder 2"/>
+          <p:cNvSpPr>
+            <a:spLocks noGrp="1"/>
+          </p:cNvSpPr>
+          <p:nvPr>
+            <p:ph idx="1" type="body"/>
+          </p:nvPr>
+        </p:nvSpPr>
+        <p:spPr/>
+        <p:txBody>
+          <a:bodyPr anchor="t"/>
+          <a:lstStyle/>
+          <a:p>
+            <a:pPr algn="l" lvl="0"/>
+            <a:r>
+              <a:rPr b="1">
+                <a:latin typeface="+mn-lt"/>
+                <a:cs typeface="+mn-lt"/>
+              </a:rPr>
+              <a:t>DrawingML Gradient Engine Keynote: </a:t>
+            </a:r>
+            <a:r>
+              <a:rPr u="sng">
+                <a:latin typeface="+mn-lt"/>
+                <a:cs typeface="+mn-lt"/>
+              </a:rPr>
+              <a:t>Full Vector Fidelity &amp; Transparency</a:t>
+            </a:r>
+          </a:p>
+          <a:p>
+            <a:pPr algn="l" lvl="0" marL="152400" indent="-152400">
+              <a:buChar char="•"/>
+            </a:pPr>
+            <a:r>
+              <a:rPr>
+                <a:latin typeface="+mn-lt"/>
+                <a:cs typeface="+mn-lt"/>
+              </a:rPr>
+              <a:t>Native &lt;a:gradFill&gt; support with linear, radial, and path gradients.</a:t>
+            </a:r>
+          </a:p>
+          <a:p>
+            <a:pPr algn="l" lvl="0" marL="152400" indent="-152400">
+              <a:buChar char="•"/>
+            </a:pPr>
+            <a:r>
+              <a:rPr>
+                <a:latin typeface="+mn-lt"/>
+                <a:cs typeface="+mn-lt"/>
+              </a:rPr>
+              <a:t>Full alpha transparency channel support across all color stops.</a:t>
+            </a:r>
+          </a:p>
+          <a:p>
+            <a:pPr algn="l" lvl="0" marL="152400" indent="-152400">
+              <a:buChar char="•"/>
+            </a:pPr>
+            <a:r>
+              <a:rPr>
+                <a:latin typeface="+mn-lt"/>
+                <a:cs typeface="+mn-lt"/>
+              </a:rPr>
+              <a:t>Seamless integration with shapes, cards, outlines, and slide backgrounds.</a:t>
+            </a:r>
+          </a:p>
+        </p:txBody>
+      </p:sp>
+    </p:spTree>
+  </p:cSld>
+  <p:clrMapOvr>
+    <a:masterClrMapping/>
+  </p:clrMapOvr>
+</p:notes>
+</file>
+
+<file path=ppt/notesSlides/notesSlide12.xml><?xml version="1.0" encoding="utf-8"?>
+<p:notes xmlns:a="http://schemas.openxmlformats.org/drawingml/2006/main" xmlns:p="http://schemas.openxmlformats.org/presentationml/2006/main" xmlns:r="http://schemas.openxmlformats.org/officeDocument/2006/relationships">
+  <p:cSld>
+    <p:spTree>
+      <p:nvGrpSpPr>
+        <p:cNvPr id="1" name=""/>
+        <p:cNvGrpSpPr/>
+        <p:nvPr/>
+      </p:nvGrpSpPr>
+      <p:grpSpPr>
+        <a:xfrm>
+          <a:off x="0" y="0"/>
+          <a:ext cx="0" cy="0"/>
+          <a:chOff x="0" y="0"/>
+          <a:chExt cx="0" cy="0"/>
+        </a:xfrm>
+      </p:grpSpPr>
+      <p:sp>
+        <p:nvSpPr>
+          <p:cNvPr id="2" name="Slide Image Placeholder 1"/>
+          <p:cNvSpPr>
+            <a:spLocks noChangeAspect="1" noGrp="1" noRot="1"/>
+          </p:cNvSpPr>
+          <p:nvPr>
+            <p:ph type="sldImg"/>
+          </p:nvPr>
+        </p:nvSpPr>
+        <p:spPr/>
+      </p:sp>
+      <p:sp>
+        <p:nvSpPr>
+          <p:cNvPr id="3" name="Notes Placeholder 2"/>
+          <p:cNvSpPr>
+            <a:spLocks noGrp="1"/>
+          </p:cNvSpPr>
+          <p:nvPr>
+            <p:ph idx="1" type="body"/>
+          </p:nvPr>
+        </p:nvSpPr>
+        <p:spPr/>
+        <p:txBody>
+          <a:bodyPr anchor="t"/>
+          <a:lstStyle/>
+          <a:p>
+            <a:pPr algn="l" lvl="0"/>
+            <a:r>
+              <a:rPr b="1">
+                <a:latin typeface="+mn-lt"/>
+                <a:cs typeface="+mn-lt"/>
+              </a:rPr>
               <a:t>Empirical Benchmark Keynote: </a:t>
             </a:r>
             <a:r>
@@ -2169,7 +2477,7 @@
                 <a:latin typeface="+mn-lt"/>
                 <a:cs typeface="+mn-lt"/>
               </a:rPr>
-              <a:t>Presenter Notes — Multi-Level Hierarchy Details: </a:t>
+              <a:t>Presenter Notes — Multi-Level Hierarchy &amp; PowerPoint Parity: </a:t>
             </a:r>
           </a:p>
           <a:p>
@@ -2181,7 +2489,19 @@
                 <a:latin typeface="+mn-lt"/>
                 <a:cs typeface="+mn-lt"/>
               </a:rPr>
-              <a:t>Explain how levels 0 through 3 compute distinct left margins and hanging indents.</a:t>
+              <a:t>Shift+Enter behavior: serialized as &lt;a:br&gt; within same &lt;a:p&gt;, preserving bullet alignment on multi-line text.</a:t>
+            </a:r>
+          </a:p>
+          <a:p>
+            <a:pPr algn="l" lvl="0" marL="152400" indent="-152400">
+              <a:buChar char="•"/>
+            </a:pPr>
+            <a:r>
+              <a:rPr>
+                <a:latin typeface="+mn-lt"/>
+                <a:cs typeface="+mn-lt"/>
+              </a:rPr>
+              <a:t>Tab / Shift+Tab levels (0-3): hierarchical indentation matching PowerPoint desktop behavior.</a:t>
             </a:r>
           </a:p>
           <a:p>
@@ -2193,7 +2513,7 @@
                 <a:latin typeface="+mn-lt"/>
                 <a:cs typeface="+mn-lt"/>
               </a:rPr>
-              <a:t>Level 0: 0.166" bullet gap, 0" margin</a:t>
+              <a:t>Level 0: root indent (0" margin)</a:t>
             </a:r>
           </a:p>
           <a:p>
@@ -2205,7 +2525,7 @@
                 <a:latin typeface="+mn-lt"/>
                 <a:cs typeface="+mn-lt"/>
               </a:rPr>
-              <a:t>Level 1: 0.166" bullet gap, 0.25" margin</a:t>
+              <a:t>Level 1: 0.25" margin</a:t>
             </a:r>
           </a:p>
           <a:p>
@@ -2217,7 +2537,7 @@
                 <a:latin typeface="+mn-lt"/>
                 <a:cs typeface="+mn-lt"/>
               </a:rPr>
-              <a:t>Level 2: 0.166" bullet gap, 0.50" margin</a:t>
+              <a:t>Level 2: 0.50" margin</a:t>
             </a:r>
           </a:p>
           <a:p>
@@ -2229,7 +2549,7 @@
                 <a:latin typeface="+mn-lt"/>
                 <a:cs typeface="+mn-lt"/>
               </a:rPr>
-              <a:t>Level 3: 0.166" bullet gap, 0.75" margin</a:t>
+              <a:t>Level 3: 0.75" margin</a:t>
             </a:r>
           </a:p>
           <a:p>
@@ -2241,7 +2561,7 @@
                 <a:latin typeface="+mn-lt"/>
                 <a:cs typeface="+mn-lt"/>
               </a:rPr>
-              <a:t>Emphasize that number lists automatically use 0.222" clearance for digits.</a:t>
+              <a:t>Clean slide master inheritance: when bullet is not overridden, marL/indent are not auto-injected, allowing theme inheritance.</a:t>
             </a:r>
           </a:p>
         </p:txBody>
@@ -2300,18 +2620,11 @@
           <a:p>
             <a:pPr algn="l" lvl="0"/>
             <a:r>
-              <a:rPr b="1">
-                <a:latin typeface="+mn-lt"/>
-                <a:cs typeface="+mn-lt"/>
-              </a:rPr>
-              <a:t>Architecture Deep Dive: </a:t>
-            </a:r>
-            <a:r>
-              <a:rPr u="sng">
-                <a:latin typeface="+mn-lt"/>
-                <a:cs typeface="+mn-lt"/>
-              </a:rPr>
-              <a:t>Composite Groups &amp; Vector Connectors</a:t>
+              <a:rPr b="1" u="sng">
+                <a:latin typeface="+mn-lt"/>
+                <a:cs typeface="+mn-lt"/>
+              </a:rPr>
+              <a:t>Presenter Notes — Native Content Placeholder: </a:t>
             </a:r>
           </a:p>
           <a:p>
@@ -2323,7 +2636,7 @@
                 <a:latin typeface="+mn-lt"/>
                 <a:cs typeface="+mn-lt"/>
               </a:rPr>
-              <a:t>addGroup wraps child elements inside &lt;p:grpSp&gt; with coordinated bounding transforms.</a:t>
+              <a:t>This element is serialized as &lt;p:nvPr&gt;&lt;p:ph idx="1"/&gt;&lt;/p:nvPr&gt; — a real PowerPoint Content Placeholder.</a:t>
             </a:r>
           </a:p>
           <a:p>
@@ -2335,7 +2648,31 @@
                 <a:latin typeface="+mn-lt"/>
                 <a:cs typeface="+mn-lt"/>
               </a:rPr>
-              <a:t>addConnector emits &lt;p:cxnSp&gt; connecting arbitrary coordinates across slide elements.</a:t>
+              <a:t>Unlike a normal shape or floating textbox, PowerPoint desktop recognizes this as the primary content box.</a:t>
+            </a:r>
+          </a:p>
+          <a:p>
+            <a:pPr algn="l" lvl="1" marL="381000" indent="-152400">
+              <a:buChar char="•"/>
+            </a:pPr>
+            <a:r>
+              <a:rPr>
+                <a:latin typeface="+mn-lt"/>
+                <a:cs typeface="+mn-lt"/>
+              </a:rPr>
+              <a:t>Shift+Enter breaks (&lt;a:br&gt;) allow multiple sentences per bullet point with perfect visual alignment.</a:t>
+            </a:r>
+          </a:p>
+          <a:p>
+            <a:pPr algn="l" lvl="1" marL="381000" indent="-152400">
+              <a:buChar char="•"/>
+            </a:pPr>
+            <a:r>
+              <a:rPr>
+                <a:latin typeface="+mn-lt"/>
+                <a:cs typeface="+mn-lt"/>
+              </a:rPr>
+              <a:t>Levels 0 through 3 cleanly follow Master &lt;p:bodyStyle&gt; formatting.</a:t>
             </a:r>
           </a:p>
         </p:txBody>
@@ -2394,18 +2731,11 @@
           <a:p>
             <a:pPr algn="l" lvl="0"/>
             <a:r>
-              <a:rPr b="1">
-                <a:latin typeface="+mn-lt"/>
-                <a:cs typeface="+mn-lt"/>
-              </a:rPr>
-              <a:t>Chart Keynote: </a:t>
-            </a:r>
-            <a:r>
-              <a:rPr u="sng">
-                <a:latin typeface="+mn-lt"/>
-                <a:cs typeface="+mn-lt"/>
-              </a:rPr>
-              <a:t>Native OpenXML DrawingML Charts</a:t>
+              <a:rPr b="1" u="sng">
+                <a:latin typeface="+mn-lt"/>
+                <a:cs typeface="+mn-lt"/>
+              </a:rPr>
+              <a:t>Presenter Notes — Non-Bulleted Hierarchical Indentation: </a:t>
             </a:r>
           </a:p>
           <a:p>
@@ -2417,7 +2747,7 @@
                 <a:latin typeface="+mn-lt"/>
                 <a:cs typeface="+mn-lt"/>
               </a:rPr>
-              <a:t>Emits standard &lt;c:chartSpace&gt; parts under ppt/charts/chartN.xml.</a:t>
+              <a:t>Demonstrates { level: N, bullet: false } which emits &lt;a:buNone/&gt; with &lt;a:pPr lvl="N"&gt;.</a:t>
             </a:r>
           </a:p>
           <a:p>
@@ -2429,11 +2759,11 @@
                 <a:latin typeface="+mn-lt"/>
                 <a:cs typeface="+mn-lt"/>
               </a:rPr>
-              <a:t>Fully editable in PowerPoint without external Excel binary dependencies.</a:t>
-            </a:r>
-          </a:p>
-          <a:p>
-            <a:pPr algn="l" lvl="0" marL="152400" indent="-152400">
+              <a:t>Enables block quotes, explanatory notes, and code blocks that indent hierarchically under bullets without rendering a dot.</a:t>
+            </a:r>
+          </a:p>
+          <a:p>
+            <a:pPr algn="l" lvl="1" marL="381000" indent="-152400">
               <a:buChar char="•"/>
             </a:pPr>
             <a:r>
@@ -2441,7 +2771,7 @@
                 <a:latin typeface="+mn-lt"/>
                 <a:cs typeface="+mn-lt"/>
               </a:rPr>
-              <a:t>Custom series color fills and categorical string/number axis mapping.</a:t>
+              <a:t>Tab and Shift+Tab continue to promote and demote indentation depth seamlessly.</a:t>
             </a:r>
           </a:p>
         </p:txBody>
@@ -2504,14 +2834,14 @@
                 <a:latin typeface="+mn-lt"/>
                 <a:cs typeface="+mn-lt"/>
               </a:rPr>
-              <a:t>Chart Suite Overview: </a:t>
+              <a:t>Architecture Deep Dive: </a:t>
             </a:r>
             <a:r>
               <a:rPr u="sng">
                 <a:latin typeface="+mn-lt"/>
                 <a:cs typeface="+mn-lt"/>
               </a:rPr>
-              <a:t>Line, Doughnut &amp; Horizontal Bar Support</a:t>
+              <a:t>Composite Groups &amp; Vector Connectors</a:t>
             </a:r>
           </a:p>
           <a:p>
@@ -2523,7 +2853,7 @@
                 <a:latin typeface="+mn-lt"/>
                 <a:cs typeface="+mn-lt"/>
               </a:rPr>
-              <a:t>Smooth spline curves for continuous time-series metrics.</a:t>
+              <a:t>addGroup wraps child elements inside &lt;p:grpSp&gt; with coordinated bounding transforms.</a:t>
             </a:r>
           </a:p>
           <a:p>
@@ -2535,19 +2865,7 @@
                 <a:latin typeface="+mn-lt"/>
                 <a:cs typeface="+mn-lt"/>
               </a:rPr>
-              <a:t>Customizable doughnut hole radii and automated data label percentages.</a:t>
-            </a:r>
-          </a:p>
-          <a:p>
-            <a:pPr algn="l" lvl="0" marL="152400" indent="-152400">
-              <a:buChar char="•"/>
-            </a:pPr>
-            <a:r>
-              <a:rPr>
-                <a:latin typeface="+mn-lt"/>
-                <a:cs typeface="+mn-lt"/>
-              </a:rPr>
-              <a:t>Horizontal bar orientation for ranked ordinal comparisons.</a:t>
+              <a:t>addConnector emits &lt;p:cxnSp&gt; connecting arbitrary coordinates across slide elements.</a:t>
             </a:r>
           </a:p>
         </p:txBody>
@@ -2610,14 +2928,14 @@
                 <a:latin typeface="+mn-lt"/>
                 <a:cs typeface="+mn-lt"/>
               </a:rPr>
-              <a:t>Analytical Topology Keynote: </a:t>
+              <a:t>Chart Keynote: </a:t>
             </a:r>
             <a:r>
               <a:rPr u="sng">
                 <a:latin typeface="+mn-lt"/>
                 <a:cs typeface="+mn-lt"/>
               </a:rPr>
-              <a:t>Area, Pie &amp; Radar Spider Visualizations</a:t>
+              <a:t>Native OpenXML DrawingML Charts</a:t>
             </a:r>
           </a:p>
           <a:p>
@@ -2629,7 +2947,7 @@
                 <a:latin typeface="+mn-lt"/>
                 <a:cs typeface="+mn-lt"/>
               </a:rPr>
-              <a:t>Stacked area topologies for cumulative resource metric trends.</a:t>
+              <a:t>Emits standard &lt;c:chartSpace&gt; parts under ppt/charts/chartN.xml.</a:t>
             </a:r>
           </a:p>
           <a:p>
@@ -2641,7 +2959,7 @@
                 <a:latin typeface="+mn-lt"/>
                 <a:cs typeface="+mn-lt"/>
               </a:rPr>
-              <a:t>Standard pie charts with automatic slice percentage data labels.</a:t>
+              <a:t>Fully editable in PowerPoint without external Excel binary dependencies.</a:t>
             </a:r>
           </a:p>
           <a:p>
@@ -2653,7 +2971,7 @@
                 <a:latin typeface="+mn-lt"/>
                 <a:cs typeface="+mn-lt"/>
               </a:rPr>
-              <a:t>Radar / spider charts for multi-dimensional multi-series competitive scorecards.</a:t>
+              <a:t>Custom series color fills and categorical string/number axis mapping.</a:t>
             </a:r>
           </a:p>
         </p:txBody>
@@ -2716,14 +3034,14 @@
                 <a:latin typeface="+mn-lt"/>
                 <a:cs typeface="+mn-lt"/>
               </a:rPr>
-              <a:t>Hyperlinks &amp; Slide Navigation Keynote: </a:t>
+              <a:t>Chart Suite Overview: </a:t>
             </a:r>
             <a:r>
               <a:rPr u="sng">
                 <a:latin typeface="+mn-lt"/>
                 <a:cs typeface="+mn-lt"/>
               </a:rPr>
-              <a:t>Interactive OpenXML Actions &amp; Relationships</a:t>
+              <a:t>Line, Doughnut &amp; Horizontal Bar Support</a:t>
             </a:r>
           </a:p>
           <a:p>
@@ -2735,7 +3053,7 @@
                 <a:latin typeface="+mn-lt"/>
                 <a:cs typeface="+mn-lt"/>
               </a:rPr>
-              <a:t>Full support for external web links, custom URLs, and hover tooltips.</a:t>
+              <a:t>Smooth spline curves for continuous time-series metrics.</a:t>
             </a:r>
           </a:p>
           <a:p>
@@ -2747,7 +3065,7 @@
                 <a:latin typeface="+mn-lt"/>
                 <a:cs typeface="+mn-lt"/>
               </a:rPr>
-              <a:t>Internal slide jumping using strongly typed slideIndex referencing.</a:t>
+              <a:t>Customizable doughnut hole radii and automated data label percentages.</a:t>
             </a:r>
           </a:p>
           <a:p>
@@ -2759,7 +3077,7 @@
                 <a:latin typeface="+mn-lt"/>
                 <a:cs typeface="+mn-lt"/>
               </a:rPr>
-              <a:t>Built-in slide show control actions: firstSlide, lastSlide, nextSlide, previousSlide, endShow.</a:t>
+              <a:t>Horizontal bar orientation for ranked ordinal comparisons.</a:t>
             </a:r>
           </a:p>
         </p:txBody>
@@ -2822,14 +3140,14 @@
                 <a:latin typeface="+mn-lt"/>
                 <a:cs typeface="+mn-lt"/>
               </a:rPr>
-              <a:t>DrawingML Gradient Engine Keynote: </a:t>
+              <a:t>Analytical Topology Keynote: </a:t>
             </a:r>
             <a:r>
               <a:rPr u="sng">
                 <a:latin typeface="+mn-lt"/>
                 <a:cs typeface="+mn-lt"/>
               </a:rPr>
-              <a:t>Full Vector Fidelity &amp; Transparency</a:t>
+              <a:t>Area, Pie &amp; Radar Spider Visualizations</a:t>
             </a:r>
           </a:p>
           <a:p>
@@ -2841,7 +3159,7 @@
                 <a:latin typeface="+mn-lt"/>
                 <a:cs typeface="+mn-lt"/>
               </a:rPr>
-              <a:t>Native &lt;a:gradFill&gt; support with linear, radial, and path gradients.</a:t>
+              <a:t>Stacked area topologies for cumulative resource metric trends.</a:t>
             </a:r>
           </a:p>
           <a:p>
@@ -2853,7 +3171,7 @@
                 <a:latin typeface="+mn-lt"/>
                 <a:cs typeface="+mn-lt"/>
               </a:rPr>
-              <a:t>Full alpha transparency channel support across all color stops.</a:t>
+              <a:t>Standard pie charts with automatic slice percentage data labels.</a:t>
             </a:r>
           </a:p>
           <a:p>
@@ -2865,7 +3183,7 @@
                 <a:latin typeface="+mn-lt"/>
                 <a:cs typeface="+mn-lt"/>
               </a:rPr>
-              <a:t>Seamless integration with shapes, cards, outlines, and slide backgrounds.</a:t>
+              <a:t>Radar / spider charts for multi-dimensional multi-series competitive scorecards.</a:t>
             </a:r>
           </a:p>
         </p:txBody>
@@ -2933,12 +3251,15 @@
   </p:sldLayoutIdLst>
   <p:txStyles>
     <p:titleStyle>
-      <a:lvl1pPr algn="l" defTabSz="914400" rtl="0" eaLnBrk="1" fontAlgn="ctr" latinLnBrk="0" hangingPunct="1">
+      <a:lvl1pPr algn="l" defTabSz="914400" rtl="0" eaLnBrk="1" latinLnBrk="0" hangingPunct="1">
+        <a:lnSpc>
+          <a:spcPct val="90000"/>
+        </a:lnSpc>
         <a:spcBef>
           <a:spcPct val="0"/>
         </a:spcBef>
         <a:buNone/>
-        <a:defRPr sz="3600" b="1" kern="1200">
+        <a:defRPr sz="4400" kern="1200">
           <a:solidFill>
             <a:schemeClr val="tx1"/>
           </a:solidFill>
@@ -2949,11 +3270,174 @@
       </a:lvl1pPr>
     </p:titleStyle>
     <p:bodyStyle>
-      <a:lvl1pPr marL="0" algn="l" defTabSz="914400" rtl="0" eaLnBrk="1" fontAlgn="ctr" latinLnBrk="0" hangingPunct="1">
+      <a:lvl1pPr marL="228600" indent="-228600" algn="l" defTabSz="914400" rtl="0" eaLnBrk="1" latinLnBrk="0" hangingPunct="1">
+        <a:lnSpc>
+          <a:spcPct val="90000"/>
+        </a:lnSpc>
         <a:spcBef>
-          <a:spcPts val="200"/>
+          <a:spcPts val="1000"/>
         </a:spcBef>
-        <a:buNone/>
+        <a:buFont typeface="Arial" panose="020B0604020202020204" pitchFamily="34" charset="0"/>
+        <a:buChar char="•"/>
+        <a:defRPr sz="2800" kern="1200">
+          <a:solidFill>
+            <a:schemeClr val="tx1"/>
+          </a:solidFill>
+          <a:latin typeface="+mn-lt"/>
+          <a:ea typeface="+mn-ea"/>
+          <a:cs typeface="+mn-cs"/>
+        </a:defRPr>
+      </a:lvl1pPr>
+      <a:lvl2pPr marL="685800" indent="-228600" algn="l" defTabSz="914400" rtl="0" eaLnBrk="1" latinLnBrk="0" hangingPunct="1">
+        <a:lnSpc>
+          <a:spcPct val="90000"/>
+        </a:lnSpc>
+        <a:spcBef>
+          <a:spcPts val="500"/>
+        </a:spcBef>
+        <a:buFont typeface="Arial" panose="020B0604020202020204" pitchFamily="34" charset="0"/>
+        <a:buChar char="•"/>
+        <a:defRPr sz="2400" kern="1200">
+          <a:solidFill>
+            <a:schemeClr val="tx1"/>
+          </a:solidFill>
+          <a:latin typeface="+mn-lt"/>
+          <a:ea typeface="+mn-ea"/>
+          <a:cs typeface="+mn-cs"/>
+        </a:defRPr>
+      </a:lvl2pPr>
+      <a:lvl3pPr marL="1143000" indent="-228600" algn="l" defTabSz="914400" rtl="0" eaLnBrk="1" latinLnBrk="0" hangingPunct="1">
+        <a:lnSpc>
+          <a:spcPct val="90000"/>
+        </a:lnSpc>
+        <a:spcBef>
+          <a:spcPts val="500"/>
+        </a:spcBef>
+        <a:buFont typeface="Arial" panose="020B0604020202020204" pitchFamily="34" charset="0"/>
+        <a:buChar char="•"/>
+        <a:defRPr sz="2000" kern="1200">
+          <a:solidFill>
+            <a:schemeClr val="tx1"/>
+          </a:solidFill>
+          <a:latin typeface="+mn-lt"/>
+          <a:ea typeface="+mn-ea"/>
+          <a:cs typeface="+mn-cs"/>
+        </a:defRPr>
+      </a:lvl3pPr>
+      <a:lvl4pPr marL="1600200" indent="-228600" algn="l" defTabSz="914400" rtl="0" eaLnBrk="1" latinLnBrk="0" hangingPunct="1">
+        <a:lnSpc>
+          <a:spcPct val="90000"/>
+        </a:lnSpc>
+        <a:spcBef>
+          <a:spcPts val="500"/>
+        </a:spcBef>
+        <a:buFont typeface="Arial" panose="020B0604020202020204" pitchFamily="34" charset="0"/>
+        <a:buChar char="•"/>
+        <a:defRPr sz="1800" kern="1200">
+          <a:solidFill>
+            <a:schemeClr val="tx1"/>
+          </a:solidFill>
+          <a:latin typeface="+mn-lt"/>
+          <a:ea typeface="+mn-ea"/>
+          <a:cs typeface="+mn-cs"/>
+        </a:defRPr>
+      </a:lvl4pPr>
+      <a:lvl5pPr marL="2057400" indent="-228600" algn="l" defTabSz="914400" rtl="0" eaLnBrk="1" latinLnBrk="0" hangingPunct="1">
+        <a:lnSpc>
+          <a:spcPct val="90000"/>
+        </a:lnSpc>
+        <a:spcBef>
+          <a:spcPts val="500"/>
+        </a:spcBef>
+        <a:buFont typeface="Arial" panose="020B0604020202020204" pitchFamily="34" charset="0"/>
+        <a:buChar char="•"/>
+        <a:defRPr sz="1800" kern="1200">
+          <a:solidFill>
+            <a:schemeClr val="tx1"/>
+          </a:solidFill>
+          <a:latin typeface="+mn-lt"/>
+          <a:ea typeface="+mn-ea"/>
+          <a:cs typeface="+mn-cs"/>
+        </a:defRPr>
+      </a:lvl5pPr>
+      <a:lvl6pPr marL="2514600" indent="-228600" algn="l" defTabSz="914400" rtl="0" eaLnBrk="1" latinLnBrk="0" hangingPunct="1">
+        <a:lnSpc>
+          <a:spcPct val="90000"/>
+        </a:lnSpc>
+        <a:spcBef>
+          <a:spcPts val="500"/>
+        </a:spcBef>
+        <a:buFont typeface="Arial" panose="020B0604020202020204" pitchFamily="34" charset="0"/>
+        <a:buChar char="•"/>
+        <a:defRPr sz="1800" kern="1200">
+          <a:solidFill>
+            <a:schemeClr val="tx1"/>
+          </a:solidFill>
+          <a:latin typeface="+mn-lt"/>
+          <a:ea typeface="+mn-ea"/>
+          <a:cs typeface="+mn-cs"/>
+        </a:defRPr>
+      </a:lvl6pPr>
+      <a:lvl7pPr marL="2971800" indent="-228600" algn="l" defTabSz="914400" rtl="0" eaLnBrk="1" latinLnBrk="0" hangingPunct="1">
+        <a:lnSpc>
+          <a:spcPct val="90000"/>
+        </a:lnSpc>
+        <a:spcBef>
+          <a:spcPts val="500"/>
+        </a:spcBef>
+        <a:buFont typeface="Arial" panose="020B0604020202020204" pitchFamily="34" charset="0"/>
+        <a:buChar char="•"/>
+        <a:defRPr sz="1800" kern="1200">
+          <a:solidFill>
+            <a:schemeClr val="tx1"/>
+          </a:solidFill>
+          <a:latin typeface="+mn-lt"/>
+          <a:ea typeface="+mn-ea"/>
+          <a:cs typeface="+mn-cs"/>
+        </a:defRPr>
+      </a:lvl7pPr>
+      <a:lvl8pPr marL="3429000" indent="-228600" algn="l" defTabSz="914400" rtl="0" eaLnBrk="1" latinLnBrk="0" hangingPunct="1">
+        <a:lnSpc>
+          <a:spcPct val="90000"/>
+        </a:lnSpc>
+        <a:spcBef>
+          <a:spcPts val="500"/>
+        </a:spcBef>
+        <a:buFont typeface="Arial" panose="020B0604020202020204" pitchFamily="34" charset="0"/>
+        <a:buChar char="•"/>
+        <a:defRPr sz="1800" kern="1200">
+          <a:solidFill>
+            <a:schemeClr val="tx1"/>
+          </a:solidFill>
+          <a:latin typeface="+mn-lt"/>
+          <a:ea typeface="+mn-ea"/>
+          <a:cs typeface="+mn-cs"/>
+        </a:defRPr>
+      </a:lvl8pPr>
+      <a:lvl9pPr marL="3886200" indent="-228600" algn="l" defTabSz="914400" rtl="0" eaLnBrk="1" latinLnBrk="0" hangingPunct="1">
+        <a:lnSpc>
+          <a:spcPct val="90000"/>
+        </a:lnSpc>
+        <a:spcBef>
+          <a:spcPts val="500"/>
+        </a:spcBef>
+        <a:buFont typeface="Arial" panose="020B0604020202020204" pitchFamily="34" charset="0"/>
+        <a:buChar char="•"/>
+        <a:defRPr sz="1800" kern="1200">
+          <a:solidFill>
+            <a:schemeClr val="tx1"/>
+          </a:solidFill>
+          <a:latin typeface="+mn-lt"/>
+          <a:ea typeface="+mn-ea"/>
+          <a:cs typeface="+mn-cs"/>
+        </a:defRPr>
+      </a:lvl9pPr>
+    </p:bodyStyle>
+    <p:otherStyle>
+      <a:defPPr>
+        <a:defRPr lang="en-US"/>
+      </a:defPPr>
+      <a:lvl1pPr marL="0" algn="l" defTabSz="914400" rtl="0" eaLnBrk="1" latinLnBrk="0" hangingPunct="1">
         <a:defRPr sz="1800" kern="1200">
           <a:solidFill>
             <a:schemeClr val="tx1"/>
@@ -2963,10 +3447,8 @@
           <a:cs typeface="+mn-cs"/>
         </a:defRPr>
       </a:lvl1pPr>
-    </p:bodyStyle>
-    <p:otherStyle>
-      <a:defPPr>
-        <a:defRPr sz="1800">
+      <a:lvl2pPr marL="457200" algn="l" defTabSz="914400" rtl="0" eaLnBrk="1" latinLnBrk="0" hangingPunct="1">
+        <a:defRPr sz="1800" kern="1200">
           <a:solidFill>
             <a:schemeClr val="tx1"/>
           </a:solidFill>
@@ -2974,7 +3456,77 @@
           <a:ea typeface="+mn-ea"/>
           <a:cs typeface="+mn-cs"/>
         </a:defRPr>
-      </a:defPPr>
+      </a:lvl2pPr>
+      <a:lvl3pPr marL="914400" algn="l" defTabSz="914400" rtl="0" eaLnBrk="1" latinLnBrk="0" hangingPunct="1">
+        <a:defRPr sz="1800" kern="1200">
+          <a:solidFill>
+            <a:schemeClr val="tx1"/>
+          </a:solidFill>
+          <a:latin typeface="+mn-lt"/>
+          <a:ea typeface="+mn-ea"/>
+          <a:cs typeface="+mn-cs"/>
+        </a:defRPr>
+      </a:lvl3pPr>
+      <a:lvl4pPr marL="1371600" algn="l" defTabSz="914400" rtl="0" eaLnBrk="1" latinLnBrk="0" hangingPunct="1">
+        <a:defRPr sz="1800" kern="1200">
+          <a:solidFill>
+            <a:schemeClr val="tx1"/>
+          </a:solidFill>
+          <a:latin typeface="+mn-lt"/>
+          <a:ea typeface="+mn-ea"/>
+          <a:cs typeface="+mn-cs"/>
+        </a:defRPr>
+      </a:lvl4pPr>
+      <a:lvl5pPr marL="1828800" algn="l" defTabSz="914400" rtl="0" eaLnBrk="1" latinLnBrk="0" hangingPunct="1">
+        <a:defRPr sz="1800" kern="1200">
+          <a:solidFill>
+            <a:schemeClr val="tx1"/>
+          </a:solidFill>
+          <a:latin typeface="+mn-lt"/>
+          <a:ea typeface="+mn-ea"/>
+          <a:cs typeface="+mn-cs"/>
+        </a:defRPr>
+      </a:lvl5pPr>
+      <a:lvl6pPr marL="2286000" algn="l" defTabSz="914400" rtl="0" eaLnBrk="1" latinLnBrk="0" hangingPunct="1">
+        <a:defRPr sz="1800" kern="1200">
+          <a:solidFill>
+            <a:schemeClr val="tx1"/>
+          </a:solidFill>
+          <a:latin typeface="+mn-lt"/>
+          <a:ea typeface="+mn-ea"/>
+          <a:cs typeface="+mn-cs"/>
+        </a:defRPr>
+      </a:lvl6pPr>
+      <a:lvl7pPr marL="2743200" algn="l" defTabSz="914400" rtl="0" eaLnBrk="1" latinLnBrk="0" hangingPunct="1">
+        <a:defRPr sz="1800" kern="1200">
+          <a:solidFill>
+            <a:schemeClr val="tx1"/>
+          </a:solidFill>
+          <a:latin typeface="+mn-lt"/>
+          <a:ea typeface="+mn-ea"/>
+          <a:cs typeface="+mn-cs"/>
+        </a:defRPr>
+      </a:lvl7pPr>
+      <a:lvl8pPr marL="3200400" algn="l" defTabSz="914400" rtl="0" eaLnBrk="1" latinLnBrk="0" hangingPunct="1">
+        <a:defRPr sz="1800" kern="1200">
+          <a:solidFill>
+            <a:schemeClr val="tx1"/>
+          </a:solidFill>
+          <a:latin typeface="+mn-lt"/>
+          <a:ea typeface="+mn-ea"/>
+          <a:cs typeface="+mn-cs"/>
+        </a:defRPr>
+      </a:lvl8pPr>
+      <a:lvl9pPr marL="3657600" algn="l" defTabSz="914400" rtl="0" eaLnBrk="1" latinLnBrk="0" hangingPunct="1">
+        <a:defRPr sz="1800" kern="1200">
+          <a:solidFill>
+            <a:schemeClr val="tx1"/>
+          </a:solidFill>
+          <a:latin typeface="+mn-lt"/>
+          <a:ea typeface="+mn-ea"/>
+          <a:cs typeface="+mn-cs"/>
+        </a:defRPr>
+      </a:lvl9pPr>
     </p:otherStyle>
   </p:txStyles>
 </p:sldMaster>
@@ -3058,7 +3610,7 @@
           <p:cNvPr id="3" name="Text Box 2">
             <a:hlinkClick r:id="rId2" tooltip="GitHub Repository: @hokkyss/pptx"/>
           </p:cNvPr>
-          <p:cNvSpPr/>
+          <p:cNvSpPr txBox="1"/>
           <p:nvPr/>
         </p:nvSpPr>
         <p:spPr>
@@ -3092,7 +3644,7 @@
       <p:sp>
         <p:nvSpPr>
           <p:cNvPr id="4" name="Text Box 3"/>
-          <p:cNvSpPr/>
+          <p:cNvSpPr txBox="1"/>
           <p:nvPr/>
         </p:nvSpPr>
         <p:spPr>
@@ -3320,7 +3872,7 @@
       <p:sp>
         <p:nvSpPr>
           <p:cNvPr id="8" name="Text Box 7"/>
-          <p:cNvSpPr/>
+          <p:cNvSpPr txBox="1"/>
           <p:nvPr/>
         </p:nvSpPr>
         <p:spPr>
@@ -3389,7 +3941,7 @@
       <p:sp>
         <p:nvSpPr>
           <p:cNvPr id="2" name="Text Box 1"/>
-          <p:cNvSpPr/>
+          <p:cNvSpPr txBox="1"/>
           <p:nvPr/>
         </p:nvSpPr>
         <p:spPr>
@@ -3414,7 +3966,7 @@
                 <a:latin typeface="+mj-lt"/>
                 <a:cs typeface="+mj-lt"/>
               </a:rPr>
-              <a:t>Multi-Topology Chart Gallery</a:t>
+              <a:t>Flow Connectors &amp; Composite Group Architecture</a:t>
             </a:r>
           </a:p>
         </p:txBody>
@@ -3422,7 +3974,7 @@
       <p:sp>
         <p:nvSpPr>
           <p:cNvPr id="3" name="Text Box 2"/>
-          <p:cNvSpPr/>
+          <p:cNvSpPr txBox="1"/>
           <p:nvPr/>
         </p:nvSpPr>
         <p:spPr>
@@ -3447,59 +3999,563 @@
                 <a:latin typeface="+mn-lt"/>
                 <a:cs typeface="+mn-lt"/>
               </a:rPr>
-              <a:t>Smooth spline line trends, radial doughnut distributions, and horizontal bar comparisons</a:t>
-            </a:r>
-          </a:p>
-        </p:txBody>
-      </p:sp>
-      <p:sp>
-        <p:nvSpPr>
-          <p:cNvPr id="4" name="roundRect 3"/>
-          <p:cNvSpPr/>
-          <p:nvPr/>
-        </p:nvSpPr>
-        <p:spPr>
-          <a:xfrm>
-            <a:off x="914400" y="1828800"/>
-            <a:ext cx="3291840" cy="4114800"/>
-          </a:xfrm>
-          <a:prstGeom prst="roundRect">
-            <a:avLst/>
-          </a:prstGeom>
-          <a:solidFill>
-            <a:srgbClr val="FFFFFF"/>
-          </a:solidFill>
-          <a:ln w="13716">
+              <a:t>Demonstrating vector connectors (solid, dashed), coordinates, and composite group containers (addGroup)</a:t>
+            </a:r>
+          </a:p>
+        </p:txBody>
+      </p:sp>
+      <p:grpSp>
+        <p:nvGrpSpPr>
+          <p:cNvPr id="4" name="Stage 1 Ingress Container"/>
+          <p:cNvGrpSpPr/>
+          <p:nvPr/>
+        </p:nvGrpSpPr>
+        <p:grpSpPr>
+          <a:xfrm>
+            <a:off x="914400" y="2011680"/>
+            <a:ext cx="2926080" cy="3200400"/>
+            <a:chOff x="914400" y="2011680"/>
+            <a:chExt cx="2926080" cy="3200400"/>
+          </a:xfrm>
+        </p:grpSpPr>
+        <p:sp>
+          <p:nvSpPr>
+            <p:cNvPr id="5" name="Stage 1 Background"/>
+            <p:cNvSpPr/>
+            <p:nvPr/>
+          </p:nvSpPr>
+          <p:spPr>
+            <a:xfrm>
+              <a:off x="914400" y="2011680"/>
+              <a:ext cx="2926080" cy="3200400"/>
+            </a:xfrm>
+            <a:prstGeom prst="roundRect">
+              <a:avLst/>
+            </a:prstGeom>
             <a:solidFill>
-              <a:srgbClr val="E2E8F0"/>
+              <a:srgbClr val="FFFFFF"/>
             </a:solidFill>
+            <a:ln w="13716">
+              <a:solidFill>
+                <a:srgbClr val="0284C7"/>
+              </a:solidFill>
+            </a:ln>
+            <a:effectLst>
+              <a:outerShdw blurRad="109728" dist="38100" dir="5400000">
+                <a:srgbClr val="0F172A">
+                  <a:alpha val="10000"/>
+                </a:srgbClr>
+              </a:outerShdw>
+            </a:effectLst>
+          </p:spPr>
+          <p:txBody>
+            <a:bodyPr/>
+            <a:lstStyle/>
+            <a:p>
+              <a:endParaRPr/>
+            </a:p>
+          </p:txBody>
+        </p:sp>
+        <p:sp>
+          <p:nvSpPr>
+            <p:cNvPr id="6" name="roundRect 5"/>
+            <p:cNvSpPr/>
+            <p:nvPr/>
+          </p:nvSpPr>
+          <p:spPr>
+            <a:xfrm>
+              <a:off x="1188720" y="2286000"/>
+              <a:ext cx="2377440" cy="365760"/>
+            </a:xfrm>
+            <a:prstGeom prst="roundRect">
+              <a:avLst/>
+            </a:prstGeom>
+            <a:solidFill>
+              <a:srgbClr val="0284C7"/>
+            </a:solidFill>
+          </p:spPr>
+          <p:txBody>
+            <a:bodyPr anchor="t"/>
+            <a:lstStyle/>
+            <a:p>
+              <a:pPr algn="ctr"/>
+              <a:r>
+                <a:rPr b="1" sz="1000">
+                  <a:solidFill>
+                    <a:srgbClr val="FFFFFF"/>
+                  </a:solidFill>
+                  <a:latin typeface="+mn-lt"/>
+                  <a:cs typeface="+mn-lt"/>
+                </a:rPr>
+                <a:t>STEP 1: INGESTION</a:t>
+              </a:r>
+            </a:p>
+          </p:txBody>
+        </p:sp>
+        <p:sp>
+          <p:nvSpPr>
+            <p:cNvPr id="7" name="Text Box 6"/>
+            <p:cNvSpPr/>
+            <p:nvPr/>
+          </p:nvSpPr>
+          <p:spPr>
+            <a:xfrm>
+              <a:off x="1188720" y="2926080"/>
+              <a:ext cx="2377440" cy="1828800"/>
+            </a:xfrm>
+            <a:prstGeom prst="rect">
+              <a:avLst/>
+            </a:prstGeom>
+          </p:spPr>
+          <p:txBody>
+            <a:bodyPr anchor="t"/>
+            <a:lstStyle/>
+            <a:p>
+              <a:pPr algn="l" lvl="0" marL="152400" indent="-152400">
+                <a:buChar char="•"/>
+              </a:pPr>
+              <a:r>
+                <a:rPr sz="1100">
+                  <a:solidFill>
+                    <a:srgbClr val="475569"/>
+                  </a:solidFill>
+                  <a:latin typeface="+mn-lt"/>
+                  <a:cs typeface="+mn-lt"/>
+                </a:rPr>
+                <a:t>Streaming ZIP decompression</a:t>
+              </a:r>
+            </a:p>
+            <a:p>
+              <a:pPr algn="l" lvl="0" marL="152400" indent="-152400">
+                <a:buChar char="•"/>
+              </a:pPr>
+              <a:r>
+                <a:rPr sz="1100">
+                  <a:solidFill>
+                    <a:srgbClr val="475569"/>
+                  </a:solidFill>
+                  <a:latin typeface="+mn-lt"/>
+                  <a:cs typeface="+mn-lt"/>
+                </a:rPr>
+                <a:t>XML DOM part resolution</a:t>
+              </a:r>
+            </a:p>
+            <a:p>
+              <a:pPr algn="l" lvl="0" marL="152400" indent="-152400">
+                <a:buChar char="•"/>
+              </a:pPr>
+              <a:r>
+                <a:rPr sz="1100">
+                  <a:solidFill>
+                    <a:srgbClr val="475569"/>
+                  </a:solidFill>
+                  <a:latin typeface="+mn-lt"/>
+                  <a:cs typeface="+mn-lt"/>
+                </a:rPr>
+                <a:t>Extract relationships map</a:t>
+              </a:r>
+            </a:p>
+          </p:txBody>
+        </p:sp>
+      </p:grpSp>
+      <p:grpSp>
+        <p:nvGrpSpPr>
+          <p:cNvPr id="8" name="Stage 2 AST Container"/>
+          <p:cNvGrpSpPr/>
+          <p:nvPr/>
+        </p:nvGrpSpPr>
+        <p:grpSpPr>
+          <a:xfrm>
+            <a:off x="4572000" y="2011680"/>
+            <a:ext cx="2926080" cy="3200400"/>
+            <a:chOff x="4572000" y="2011680"/>
+            <a:chExt cx="2926080" cy="3200400"/>
+          </a:xfrm>
+        </p:grpSpPr>
+        <p:sp>
+          <p:nvSpPr>
+            <p:cNvPr id="9" name="Stage 2 Background"/>
+            <p:cNvSpPr/>
+            <p:nvPr/>
+          </p:nvSpPr>
+          <p:spPr>
+            <a:xfrm>
+              <a:off x="4572000" y="2011680"/>
+              <a:ext cx="2926080" cy="3200400"/>
+            </a:xfrm>
+            <a:prstGeom prst="roundRect">
+              <a:avLst/>
+            </a:prstGeom>
+            <a:solidFill>
+              <a:srgbClr val="FFFFFF"/>
+            </a:solidFill>
+            <a:ln w="13716">
+              <a:solidFill>
+                <a:srgbClr val="6366F1"/>
+              </a:solidFill>
+            </a:ln>
+            <a:effectLst>
+              <a:outerShdw blurRad="109728" dist="38100" dir="5400000">
+                <a:srgbClr val="0F172A">
+                  <a:alpha val="10000"/>
+                </a:srgbClr>
+              </a:outerShdw>
+            </a:effectLst>
+          </p:spPr>
+          <p:txBody>
+            <a:bodyPr/>
+            <a:lstStyle/>
+            <a:p>
+              <a:endParaRPr/>
+            </a:p>
+          </p:txBody>
+        </p:sp>
+        <p:sp>
+          <p:nvSpPr>
+            <p:cNvPr id="10" name="roundRect 9"/>
+            <p:cNvSpPr/>
+            <p:nvPr/>
+          </p:nvSpPr>
+          <p:spPr>
+            <a:xfrm>
+              <a:off x="4846320" y="2286000"/>
+              <a:ext cx="2377440" cy="365760"/>
+            </a:xfrm>
+            <a:prstGeom prst="roundRect">
+              <a:avLst/>
+            </a:prstGeom>
+            <a:solidFill>
+              <a:srgbClr val="6366F1"/>
+            </a:solidFill>
+          </p:spPr>
+          <p:txBody>
+            <a:bodyPr anchor="t"/>
+            <a:lstStyle/>
+            <a:p>
+              <a:pPr algn="ctr"/>
+              <a:r>
+                <a:rPr b="1" sz="1000">
+                  <a:solidFill>
+                    <a:srgbClr val="FFFFFF"/>
+                  </a:solidFill>
+                  <a:latin typeface="+mn-lt"/>
+                  <a:cs typeface="+mn-lt"/>
+                </a:rPr>
+                <a:t>STEP 2: MODELING</a:t>
+              </a:r>
+            </a:p>
+          </p:txBody>
+        </p:sp>
+        <p:sp>
+          <p:nvSpPr>
+            <p:cNvPr id="11" name="Text Box 10"/>
+            <p:cNvSpPr/>
+            <p:nvPr/>
+          </p:nvSpPr>
+          <p:spPr>
+            <a:xfrm>
+              <a:off x="4846320" y="2926080"/>
+              <a:ext cx="2377440" cy="1828800"/>
+            </a:xfrm>
+            <a:prstGeom prst="rect">
+              <a:avLst/>
+            </a:prstGeom>
+          </p:spPr>
+          <p:txBody>
+            <a:bodyPr anchor="t"/>
+            <a:lstStyle/>
+            <a:p>
+              <a:pPr algn="l" lvl="0" marL="152400" indent="-152400">
+                <a:buChar char="•"/>
+              </a:pPr>
+              <a:r>
+                <a:rPr sz="1100">
+                  <a:solidFill>
+                    <a:srgbClr val="475569"/>
+                  </a:solidFill>
+                  <a:latin typeface="+mn-lt"/>
+                  <a:cs typeface="+mn-lt"/>
+                </a:rPr>
+                <a:t>Type-safe AST generation</a:t>
+              </a:r>
+            </a:p>
+            <a:p>
+              <a:pPr algn="l" lvl="0" marL="152400" indent="-152400">
+                <a:buChar char="•"/>
+              </a:pPr>
+              <a:r>
+                <a:rPr sz="1100">
+                  <a:solidFill>
+                    <a:srgbClr val="475569"/>
+                  </a:solidFill>
+                  <a:latin typeface="+mn-lt"/>
+                  <a:cs typeface="+mn-lt"/>
+                </a:rPr>
+                <a:t>Layer &amp; placeholder cascade</a:t>
+              </a:r>
+            </a:p>
+            <a:p>
+              <a:pPr algn="l" lvl="0" marL="152400" indent="-152400">
+                <a:buChar char="•"/>
+              </a:pPr>
+              <a:r>
+                <a:rPr sz="1100">
+                  <a:solidFill>
+                    <a:srgbClr val="475569"/>
+                  </a:solidFill>
+                  <a:latin typeface="+mn-lt"/>
+                  <a:cs typeface="+mn-lt"/>
+                </a:rPr>
+                <a:t>Fluent mutations &amp; styling</a:t>
+              </a:r>
+            </a:p>
+          </p:txBody>
+        </p:sp>
+      </p:grpSp>
+      <p:grpSp>
+        <p:nvGrpSpPr>
+          <p:cNvPr id="12" name="Stage 3 Packaging Container"/>
+          <p:cNvGrpSpPr/>
+          <p:nvPr/>
+        </p:nvGrpSpPr>
+        <p:grpSpPr>
+          <a:xfrm>
+            <a:off x="8229600" y="2011680"/>
+            <a:ext cx="2926080" cy="3200400"/>
+            <a:chOff x="8229600" y="2011680"/>
+            <a:chExt cx="2926080" cy="3200400"/>
+          </a:xfrm>
+        </p:grpSpPr>
+        <p:sp>
+          <p:nvSpPr>
+            <p:cNvPr id="13" name="Stage 3 Background"/>
+            <p:cNvSpPr/>
+            <p:nvPr/>
+          </p:nvSpPr>
+          <p:spPr>
+            <a:xfrm>
+              <a:off x="8229600" y="2011680"/>
+              <a:ext cx="2926080" cy="3200400"/>
+            </a:xfrm>
+            <a:prstGeom prst="roundRect">
+              <a:avLst/>
+            </a:prstGeom>
+            <a:solidFill>
+              <a:srgbClr val="FFFFFF"/>
+            </a:solidFill>
+            <a:ln w="13716">
+              <a:solidFill>
+                <a:srgbClr val="10B981"/>
+              </a:solidFill>
+            </a:ln>
+            <a:effectLst>
+              <a:outerShdw blurRad="109728" dist="38100" dir="5400000">
+                <a:srgbClr val="0F172A">
+                  <a:alpha val="10000"/>
+                </a:srgbClr>
+              </a:outerShdw>
+            </a:effectLst>
+          </p:spPr>
+          <p:txBody>
+            <a:bodyPr/>
+            <a:lstStyle/>
+            <a:p>
+              <a:endParaRPr/>
+            </a:p>
+          </p:txBody>
+        </p:sp>
+        <p:sp>
+          <p:nvSpPr>
+            <p:cNvPr id="14" name="roundRect 13"/>
+            <p:cNvSpPr/>
+            <p:nvPr/>
+          </p:nvSpPr>
+          <p:spPr>
+            <a:xfrm>
+              <a:off x="8503920" y="2286000"/>
+              <a:ext cx="2377440" cy="365760"/>
+            </a:xfrm>
+            <a:prstGeom prst="roundRect">
+              <a:avLst/>
+            </a:prstGeom>
+            <a:solidFill>
+              <a:srgbClr val="10B981"/>
+            </a:solidFill>
+          </p:spPr>
+          <p:txBody>
+            <a:bodyPr anchor="t"/>
+            <a:lstStyle/>
+            <a:p>
+              <a:pPr algn="ctr"/>
+              <a:r>
+                <a:rPr b="1" sz="1000">
+                  <a:solidFill>
+                    <a:srgbClr val="FFFFFF"/>
+                  </a:solidFill>
+                  <a:latin typeface="+mn-lt"/>
+                  <a:cs typeface="+mn-lt"/>
+                </a:rPr>
+                <a:t>STEP 3: COMPILATION</a:t>
+              </a:r>
+            </a:p>
+          </p:txBody>
+        </p:sp>
+        <p:sp>
+          <p:nvSpPr>
+            <p:cNvPr id="15" name="Text Box 14"/>
+            <p:cNvSpPr/>
+            <p:nvPr/>
+          </p:nvSpPr>
+          <p:spPr>
+            <a:xfrm>
+              <a:off x="8503920" y="2926080"/>
+              <a:ext cx="2377440" cy="1828800"/>
+            </a:xfrm>
+            <a:prstGeom prst="rect">
+              <a:avLst/>
+            </a:prstGeom>
+          </p:spPr>
+          <p:txBody>
+            <a:bodyPr anchor="t"/>
+            <a:lstStyle/>
+            <a:p>
+              <a:pPr algn="l" lvl="0" marL="152400" indent="-152400">
+                <a:buChar char="•"/>
+              </a:pPr>
+              <a:r>
+                <a:rPr sz="1100">
+                  <a:solidFill>
+                    <a:srgbClr val="475569"/>
+                  </a:solidFill>
+                  <a:latin typeface="+mn-lt"/>
+                  <a:cs typeface="+mn-lt"/>
+                </a:rPr>
+                <a:t>Deterministic XML emission</a:t>
+              </a:r>
+            </a:p>
+            <a:p>
+              <a:pPr algn="l" lvl="0" marL="152400" indent="-152400">
+                <a:buChar char="•"/>
+              </a:pPr>
+              <a:r>
+                <a:rPr sz="1100">
+                  <a:solidFill>
+                    <a:srgbClr val="475569"/>
+                  </a:solidFill>
+                  <a:latin typeface="+mn-lt"/>
+                  <a:cs typeface="+mn-lt"/>
+                </a:rPr>
+                <a:t>Zero-copy fflate compression</a:t>
+              </a:r>
+            </a:p>
+            <a:p>
+              <a:pPr algn="l" lvl="0" marL="152400" indent="-152400">
+                <a:buChar char="•"/>
+              </a:pPr>
+              <a:r>
+                <a:rPr sz="1100">
+                  <a:solidFill>
+                    <a:srgbClr val="475569"/>
+                  </a:solidFill>
+                  <a:latin typeface="+mn-lt"/>
+                  <a:cs typeface="+mn-lt"/>
+                </a:rPr>
+                <a:t>ECMA-376 compliant PPTX</a:t>
+              </a:r>
+            </a:p>
+          </p:txBody>
+        </p:sp>
+      </p:grpSp>
+      <p:cxnSp>
+        <p:nvCxnSpPr>
+          <p:cNvPr id="16" name="Connector 15"/>
+          <p:cNvCxnSpPr>
+            <a:cxnSpLocks/>
+            <a:stCxn id="5" idx="3"/>
+            <a:endCxn id="9" idx="1"/>
+          </p:cNvCxnSpPr>
+          <p:nvPr/>
+        </p:nvCxnSpPr>
+        <p:spPr>
+          <a:xfrm>
+            <a:off x="3840480" y="3611880"/>
+            <a:ext cx="731520" cy="0"/>
+          </a:xfrm>
+          <a:prstGeom prst="line">
+            <a:avLst/>
+          </a:prstGeom>
+          <a:ln w="27432">
+            <a:solidFill>
+              <a:srgbClr val="0284C7"/>
+            </a:solidFill>
+            <a:prstDash val="solid"/>
+            <a:headEnd type="triangle" w="lg" len="lg"/>
           </a:ln>
-          <a:effectLst>
-            <a:outerShdw blurRad="109728" dist="38100" dir="5400000">
-              <a:srgbClr val="0F172A">
-                <a:alpha val="8000"/>
-              </a:srgbClr>
-            </a:outerShdw>
-          </a:effectLst>
-        </p:spPr>
-        <p:txBody>
-          <a:bodyPr/>
-          <a:lstStyle/>
-          <a:p>
-            <a:endParaRPr/>
-          </a:p>
-        </p:txBody>
-      </p:sp>
-      <p:sp>
-        <p:nvSpPr>
-          <p:cNvPr id="5" name="Text Box 4"/>
-          <p:cNvSpPr/>
-          <p:nvPr/>
-        </p:nvSpPr>
-        <p:spPr>
-          <a:xfrm>
-            <a:off x="1097280" y="2011680"/>
-            <a:ext cx="2926080" cy="320040"/>
+        </p:spPr>
+      </p:cxnSp>
+      <p:cxnSp>
+        <p:nvCxnSpPr>
+          <p:cNvPr id="17" name="Connector 16"/>
+          <p:cNvCxnSpPr>
+            <a:cxnSpLocks/>
+            <a:stCxn id="9" idx="3"/>
+            <a:endCxn id="13" idx="1"/>
+          </p:cNvCxnSpPr>
+          <p:nvPr/>
+        </p:nvCxnSpPr>
+        <p:spPr>
+          <a:xfrm>
+            <a:off x="7498080" y="3611880"/>
+            <a:ext cx="731520" cy="0"/>
+          </a:xfrm>
+          <a:prstGeom prst="line">
+            <a:avLst/>
+          </a:prstGeom>
+          <a:ln w="27432">
+            <a:solidFill>
+              <a:srgbClr val="6366F1"/>
+            </a:solidFill>
+            <a:prstDash val="solid"/>
+            <a:headEnd type="stealth" w="lg" len="lg"/>
+          </a:ln>
+        </p:spPr>
+      </p:cxnSp>
+      <p:cxnSp>
+        <p:nvCxnSpPr>
+          <p:cNvPr id="18" name="Connector 17"/>
+          <p:cNvCxnSpPr>
+            <a:cxnSpLocks/>
+          </p:cNvCxnSpPr>
+          <p:nvPr/>
+        </p:nvCxnSpPr>
+        <p:spPr>
+          <a:xfrm>
+            <a:off x="914400" y="5669280"/>
+            <a:ext cx="10241280" cy="0"/>
+          </a:xfrm>
+          <a:prstGeom prst="line">
+            <a:avLst/>
+          </a:prstGeom>
+          <a:ln w="18288">
+            <a:solidFill>
+              <a:srgbClr val="94A3B8"/>
+            </a:solidFill>
+            <a:prstDash val="dash"/>
+            <a:headEnd type="triangle"/>
+            <a:tailEnd type="oval"/>
+          </a:ln>
+        </p:spPr>
+      </p:cxnSp>
+      <p:sp>
+        <p:nvSpPr>
+          <p:cNvPr id="19" name="Text Box 18"/>
+          <p:cNvSpPr txBox="1"/>
+          <p:nvPr/>
+        </p:nvSpPr>
+        <p:spPr>
+          <a:xfrm>
+            <a:off x="914400" y="5806440"/>
+            <a:ext cx="10241280" cy="365760"/>
           </a:xfrm>
           <a:prstGeom prst="rect">
             <a:avLst/>
@@ -3509,214 +4565,24 @@
           <a:bodyPr anchor="t"/>
           <a:lstStyle/>
           <a:p>
-            <a:pPr algn="l"/>
-            <a:r>
-              <a:rPr b="1" sz="1200">
-                <a:solidFill>
-                  <a:srgbClr val="0F172A"/>
-                </a:solidFill>
-                <a:latin typeface="+mn-lt"/>
-                <a:cs typeface="+mn-lt"/>
-              </a:rPr>
-              <a:t>📈 Latency Curve vs Payload (ms)</a:t>
-            </a:r>
-          </a:p>
-        </p:txBody>
-      </p:sp>
-      <p:graphicFrame>
-        <p:nvGraphicFramePr>
-          <p:cNvPr id="6" name="Chart 5"/>
-          <p:cNvGraphicFramePr/>
-          <p:nvPr/>
-        </p:nvGraphicFramePr>
-        <p:xfrm>
-          <a:off x="1097280" y="2377440"/>
-          <a:ext cx="2926080" cy="3291840"/>
-        </p:xfrm>
-        <a:graphic>
-          <a:graphicData uri="http://schemas.openxmlformats.org/drawingml/2006/chart">
-            <c:chart xmlns:c="http://schemas.openxmlformats.org/drawingml/2006/chart" xmlns:r="http://schemas.openxmlformats.org/officeDocument/2006/relationships" r:id="rId2"/>
-          </a:graphicData>
-        </a:graphic>
-      </p:graphicFrame>
-      <p:sp>
-        <p:nvSpPr>
-          <p:cNvPr id="7" name="roundRect 6"/>
-          <p:cNvSpPr/>
-          <p:nvPr/>
-        </p:nvSpPr>
-        <p:spPr>
-          <a:xfrm>
-            <a:off x="4443984" y="1828800"/>
-            <a:ext cx="3291840" cy="4114800"/>
-          </a:xfrm>
-          <a:prstGeom prst="roundRect">
-            <a:avLst/>
-          </a:prstGeom>
-          <a:solidFill>
-            <a:srgbClr val="FFFFFF"/>
-          </a:solidFill>
-          <a:ln w="13716">
-            <a:solidFill>
-              <a:srgbClr val="E2E8F0"/>
-            </a:solidFill>
-          </a:ln>
-          <a:effectLst>
-            <a:outerShdw blurRad="109728" dist="38100" dir="5400000">
-              <a:srgbClr val="0F172A">
-                <a:alpha val="8000"/>
-              </a:srgbClr>
-            </a:outerShdw>
-          </a:effectLst>
-        </p:spPr>
-        <p:txBody>
-          <a:bodyPr/>
-          <a:lstStyle/>
-          <a:p>
-            <a:endParaRPr/>
-          </a:p>
-        </p:txBody>
-      </p:sp>
-      <p:sp>
-        <p:nvSpPr>
-          <p:cNvPr id="8" name="Text Box 7"/>
-          <p:cNvSpPr/>
-          <p:nvPr/>
-        </p:nvSpPr>
-        <p:spPr>
-          <a:xfrm>
-            <a:off x="4626864" y="2011680"/>
-            <a:ext cx="2926080" cy="320040"/>
-          </a:xfrm>
-          <a:prstGeom prst="rect">
-            <a:avLst/>
-          </a:prstGeom>
-        </p:spPr>
-        <p:txBody>
-          <a:bodyPr anchor="t"/>
-          <a:lstStyle/>
-          <a:p>
-            <a:pPr algn="l"/>
-            <a:r>
-              <a:rPr b="1" sz="1200">
-                <a:solidFill>
-                  <a:srgbClr val="0F172A"/>
-                </a:solidFill>
-                <a:latin typeface="+mn-lt"/>
-                <a:cs typeface="+mn-lt"/>
-              </a:rPr>
-              <a:t>🍩 Runtime Execution Share</a:t>
-            </a:r>
-          </a:p>
-        </p:txBody>
-      </p:sp>
-      <p:graphicFrame>
-        <p:nvGraphicFramePr>
-          <p:cNvPr id="9" name="Chart 8"/>
-          <p:cNvGraphicFramePr/>
-          <p:nvPr/>
-        </p:nvGraphicFramePr>
-        <p:xfrm>
-          <a:off x="4626864" y="2377440"/>
-          <a:ext cx="2926080" cy="3291840"/>
-        </p:xfrm>
-        <a:graphic>
-          <a:graphicData uri="http://schemas.openxmlformats.org/drawingml/2006/chart">
-            <c:chart xmlns:c="http://schemas.openxmlformats.org/drawingml/2006/chart" xmlns:r="http://schemas.openxmlformats.org/officeDocument/2006/relationships" r:id="rId3"/>
-          </a:graphicData>
-        </a:graphic>
-      </p:graphicFrame>
-      <p:sp>
-        <p:nvSpPr>
-          <p:cNvPr id="10" name="roundRect 9"/>
-          <p:cNvSpPr/>
-          <p:nvPr/>
-        </p:nvSpPr>
-        <p:spPr>
-          <a:xfrm>
-            <a:off x="7982712" y="1828800"/>
-            <a:ext cx="3291840" cy="4114800"/>
-          </a:xfrm>
-          <a:prstGeom prst="roundRect">
-            <a:avLst/>
-          </a:prstGeom>
-          <a:solidFill>
-            <a:srgbClr val="FFFFFF"/>
-          </a:solidFill>
-          <a:ln w="13716">
-            <a:solidFill>
-              <a:srgbClr val="E2E8F0"/>
-            </a:solidFill>
-          </a:ln>
-          <a:effectLst>
-            <a:outerShdw blurRad="109728" dist="38100" dir="5400000">
-              <a:srgbClr val="0F172A">
-                <a:alpha val="8000"/>
-              </a:srgbClr>
-            </a:outerShdw>
-          </a:effectLst>
-        </p:spPr>
-        <p:txBody>
-          <a:bodyPr/>
-          <a:lstStyle/>
-          <a:p>
-            <a:endParaRPr/>
-          </a:p>
-        </p:txBody>
-      </p:sp>
-      <p:sp>
-        <p:nvSpPr>
-          <p:cNvPr id="11" name="Text Box 10"/>
-          <p:cNvSpPr/>
-          <p:nvPr/>
-        </p:nvSpPr>
-        <p:spPr>
-          <a:xfrm>
-            <a:off x="8165592" y="2011680"/>
-            <a:ext cx="2926080" cy="320040"/>
-          </a:xfrm>
-          <a:prstGeom prst="rect">
-            <a:avLst/>
-          </a:prstGeom>
-        </p:spPr>
-        <p:txBody>
-          <a:bodyPr anchor="t"/>
-          <a:lstStyle/>
-          <a:p>
-            <a:pPr algn="l"/>
-            <a:r>
-              <a:rPr b="1" sz="1200">
-                <a:solidFill>
-                  <a:srgbClr val="0F172A"/>
-                </a:solidFill>
-                <a:latin typeface="+mn-lt"/>
-                <a:cs typeface="+mn-lt"/>
-              </a:rPr>
-              <a:t>📊 Ecosystem Compression (x)</a:t>
-            </a:r>
-          </a:p>
-        </p:txBody>
-      </p:sp>
-      <p:graphicFrame>
-        <p:nvGraphicFramePr>
-          <p:cNvPr id="12" name="Chart 11"/>
-          <p:cNvGraphicFramePr/>
-          <p:nvPr/>
-        </p:nvGraphicFramePr>
-        <p:xfrm>
-          <a:off x="8165592" y="2377440"/>
-          <a:ext cx="2926080" cy="3291840"/>
-        </p:xfrm>
-        <a:graphic>
-          <a:graphicData uri="http://schemas.openxmlformats.org/drawingml/2006/chart">
-            <c:chart xmlns:c="http://schemas.openxmlformats.org/drawingml/2006/chart" xmlns:r="http://schemas.openxmlformats.org/officeDocument/2006/relationships" r:id="rId4"/>
-          </a:graphicData>
-        </a:graphic>
-      </p:graphicFrame>
-      <p:sp>
-        <p:nvSpPr>
-          <p:cNvPr id="13" name="Text Box 12"/>
-          <p:cNvSpPr/>
+            <a:pPr algn="ctr"/>
+            <a:r>
+              <a:rPr sz="1100">
+                <a:solidFill>
+                  <a:srgbClr val="64748B"/>
+                </a:solidFill>
+                <a:latin typeface="+mn-lt"/>
+                <a:cs typeface="+mn-lt"/>
+              </a:rPr>
+              <a:t>Isomorphic Pipeline Feedback Loop: 100% Roundtrip Bit-Exact Precision</a:t>
+            </a:r>
+          </a:p>
+        </p:txBody>
+      </p:sp>
+      <p:sp>
+        <p:nvSpPr>
+          <p:cNvPr id="20" name="Text Box 19"/>
+          <p:cNvSpPr txBox="1"/>
           <p:nvPr/>
         </p:nvSpPr>
         <p:spPr>
@@ -3752,7 +4618,7 @@
     <a:masterClrMapping/>
   </p:clrMapOvr>
   <p:transition spd="fast">
-    <p:blinds dir="horz"/>
+    <p:pull dir="r"/>
   </p:transition>
 </p:sld>
 </file>
@@ -3785,7 +4651,7 @@
       <p:sp>
         <p:nvSpPr>
           <p:cNvPr id="2" name="Text Box 1"/>
-          <p:cNvSpPr/>
+          <p:cNvSpPr txBox="1"/>
           <p:nvPr/>
         </p:nvSpPr>
         <p:spPr>
@@ -3810,7 +4676,7 @@
                 <a:latin typeface="+mj-lt"/>
                 <a:cs typeface="+mj-lt"/>
               </a:rPr>
-              <a:t>Specialized Analytical Topologies</a:t>
+              <a:t>Native OpenXML Charts &amp; Visual Analytics</a:t>
             </a:r>
           </a:p>
         </p:txBody>
@@ -3818,7 +4684,7 @@
       <p:sp>
         <p:nvSpPr>
           <p:cNvPr id="3" name="Text Box 2"/>
-          <p:cNvSpPr/>
+          <p:cNvSpPr txBox="1"/>
           <p:nvPr/>
         </p:nvSpPr>
         <p:spPr>
@@ -3843,7 +4709,7 @@
                 <a:latin typeface="+mn-lt"/>
                 <a:cs typeface="+mn-lt"/>
               </a:rPr>
-              <a:t>Multi-series stacked area trends, radial composition pie distributions, and multi-axis radar scorecards</a:t>
+              <a:t>Zero-dependency generation of native PowerPoint &lt;c:chartSpace&gt; data visualizations and multi-series metrics</a:t>
             </a:r>
           </a:p>
         </p:txBody>
@@ -3857,7 +4723,7 @@
         <p:spPr>
           <a:xfrm>
             <a:off x="914400" y="1828800"/>
-            <a:ext cx="3291840" cy="4114800"/>
+            <a:ext cx="6400800" cy="4114800"/>
           </a:xfrm>
           <a:prstGeom prst="roundRect">
             <a:avLst/>
@@ -3871,7 +4737,7 @@
             </a:solidFill>
           </a:ln>
           <a:effectLst>
-            <a:outerShdw blurRad="109728" dist="38100" dir="5400000">
+            <a:outerShdw blurRad="137160" dist="38100" dir="5400000">
               <a:srgbClr val="000000">
                 <a:alpha val="30000"/>
               </a:srgbClr>
@@ -3886,48 +4752,15 @@
           </a:p>
         </p:txBody>
       </p:sp>
-      <p:sp>
-        <p:nvSpPr>
-          <p:cNvPr id="5" name="Text Box 4"/>
-          <p:cNvSpPr/>
-          <p:nvPr/>
-        </p:nvSpPr>
-        <p:spPr>
-          <a:xfrm>
-            <a:off x="1097280" y="2011680"/>
-            <a:ext cx="2926080" cy="320040"/>
-          </a:xfrm>
-          <a:prstGeom prst="rect">
-            <a:avLst/>
-          </a:prstGeom>
-        </p:spPr>
-        <p:txBody>
-          <a:bodyPr anchor="t"/>
-          <a:lstStyle/>
-          <a:p>
-            <a:pPr algn="l"/>
-            <a:r>
-              <a:rPr b="1" sz="1200">
-                <a:solidFill>
-                  <a:srgbClr val="38BDF8"/>
-                </a:solidFill>
-                <a:latin typeface="+mn-lt"/>
-                <a:cs typeface="+mn-lt"/>
-              </a:rPr>
-              <a:t>🌊 Stacked Area: Memory Footprint (MB)</a:t>
-            </a:r>
-          </a:p>
-        </p:txBody>
-      </p:sp>
       <p:graphicFrame>
         <p:nvGraphicFramePr>
-          <p:cNvPr id="6" name="Chart 5"/>
+          <p:cNvPr id="5" name="Chart 4"/>
           <p:cNvGraphicFramePr/>
           <p:nvPr/>
         </p:nvGraphicFramePr>
         <p:xfrm>
-          <a:off x="1097280" y="2377440"/>
-          <a:ext cx="2926080" cy="3291840"/>
+          <a:off x="1097280" y="2011680"/>
+          <a:ext cx="6035040" cy="3749040"/>
         </p:xfrm>
         <a:graphic>
           <a:graphicData uri="http://schemas.openxmlformats.org/drawingml/2006/chart">
@@ -3937,14 +4770,14 @@
       </p:graphicFrame>
       <p:sp>
         <p:nvSpPr>
-          <p:cNvPr id="7" name="roundRect 6"/>
+          <p:cNvPr id="6" name="roundRect 5"/>
           <p:cNvSpPr/>
           <p:nvPr/>
         </p:nvSpPr>
         <p:spPr>
           <a:xfrm>
-            <a:off x="4443984" y="1828800"/>
-            <a:ext cx="3291840" cy="4114800"/>
+            <a:off x="7589520" y="1828800"/>
+            <a:ext cx="3657600" cy="1234440"/>
           </a:xfrm>
           <a:prstGeom prst="roundRect">
             <a:avLst/>
@@ -3954,84 +4787,71 @@
           </a:solidFill>
           <a:ln w="13716">
             <a:solidFill>
-              <a:srgbClr val="334155"/>
+              <a:srgbClr val="0284C7"/>
             </a:solidFill>
           </a:ln>
-          <a:effectLst>
-            <a:outerShdw blurRad="109728" dist="38100" dir="5400000">
-              <a:srgbClr val="000000">
-                <a:alpha val="30000"/>
-              </a:srgbClr>
-            </a:outerShdw>
-          </a:effectLst>
-        </p:spPr>
-        <p:txBody>
-          <a:bodyPr/>
-          <a:lstStyle/>
-          <a:p>
-            <a:endParaRPr/>
-          </a:p>
-        </p:txBody>
-      </p:sp>
-      <p:sp>
-        <p:nvSpPr>
-          <p:cNvPr id="8" name="Text Box 7"/>
+        </p:spPr>
+        <p:txBody>
+          <a:bodyPr anchor="t"/>
+          <a:lstStyle/>
+          <a:p>
+            <a:pPr algn="l"/>
+            <a:r>
+              <a:rPr b="1" sz="1300">
+                <a:solidFill>
+                  <a:srgbClr val="38BDF8"/>
+                </a:solidFill>
+                <a:latin typeface="+mn-lt"/>
+                <a:cs typeface="+mn-lt"/>
+              </a:rPr>
+              <a:t>⚡ Zero Native Bindings</a:t>
+            </a:r>
+          </a:p>
+        </p:txBody>
+      </p:sp>
+      <p:sp>
+        <p:nvSpPr>
+          <p:cNvPr id="7" name="Text Box 6"/>
+          <p:cNvSpPr txBox="1"/>
+          <p:nvPr/>
+        </p:nvSpPr>
+        <p:spPr>
+          <a:xfrm>
+            <a:off x="7772400" y="2240280"/>
+            <a:ext cx="3291840" cy="731520"/>
+          </a:xfrm>
+          <a:prstGeom prst="rect">
+            <a:avLst/>
+          </a:prstGeom>
+        </p:spPr>
+        <p:txBody>
+          <a:bodyPr anchor="t"/>
+          <a:lstStyle/>
+          <a:p>
+            <a:pPr algn="l"/>
+            <a:r>
+              <a:rPr sz="1000">
+                <a:solidFill>
+                  <a:srgbClr val="94A3B8"/>
+                </a:solidFill>
+                <a:latin typeface="+mn-lt"/>
+                <a:cs typeface="+mn-lt"/>
+              </a:rPr>
+              <a:t>Generates ECMA-376 compliant DrawingML charts directly from pure TypeScript arrays without spawning Python, Java, or Excel subprocesses.</a:t>
+            </a:r>
+          </a:p>
+        </p:txBody>
+      </p:sp>
+      <p:sp>
+        <p:nvSpPr>
+          <p:cNvPr id="8" name="roundRect 7"/>
           <p:cNvSpPr/>
           <p:nvPr/>
         </p:nvSpPr>
         <p:spPr>
           <a:xfrm>
-            <a:off x="4626864" y="2011680"/>
-            <a:ext cx="2926080" cy="320040"/>
-          </a:xfrm>
-          <a:prstGeom prst="rect">
-            <a:avLst/>
-          </a:prstGeom>
-        </p:spPr>
-        <p:txBody>
-          <a:bodyPr anchor="t"/>
-          <a:lstStyle/>
-          <a:p>
-            <a:pPr algn="l"/>
-            <a:r>
-              <a:rPr b="1" sz="1200">
-                <a:solidFill>
-                  <a:srgbClr val="34D399"/>
-                </a:solidFill>
-                <a:latin typeface="+mn-lt"/>
-                <a:cs typeface="+mn-lt"/>
-              </a:rPr>
-              <a:t>🥧 2D Pie: Bundle Contribution</a:t>
-            </a:r>
-          </a:p>
-        </p:txBody>
-      </p:sp>
-      <p:graphicFrame>
-        <p:nvGraphicFramePr>
-          <p:cNvPr id="9" name="Chart 8"/>
-          <p:cNvGraphicFramePr/>
-          <p:nvPr/>
-        </p:nvGraphicFramePr>
-        <p:xfrm>
-          <a:off x="4626864" y="2377440"/>
-          <a:ext cx="2926080" cy="3291840"/>
-        </p:xfrm>
-        <a:graphic>
-          <a:graphicData uri="http://schemas.openxmlformats.org/drawingml/2006/chart">
-            <c:chart xmlns:c="http://schemas.openxmlformats.org/drawingml/2006/chart" xmlns:r="http://schemas.openxmlformats.org/officeDocument/2006/relationships" r:id="rId3"/>
-          </a:graphicData>
-        </a:graphic>
-      </p:graphicFrame>
-      <p:sp>
-        <p:nvSpPr>
-          <p:cNvPr id="10" name="roundRect 9"/>
-          <p:cNvSpPr/>
-          <p:nvPr/>
-        </p:nvSpPr>
-        <p:spPr>
-          <a:xfrm>
-            <a:off x="7982712" y="1828800"/>
-            <a:ext cx="3291840" cy="4114800"/>
+            <a:off x="7589520" y="3246120"/>
+            <a:ext cx="3657600" cy="1234440"/>
           </a:xfrm>
           <a:prstGeom prst="roundRect">
             <a:avLst/>
@@ -4041,35 +4861,112 @@
           </a:solidFill>
           <a:ln w="13716">
             <a:solidFill>
-              <a:srgbClr val="334155"/>
+              <a:srgbClr val="10B981"/>
             </a:solidFill>
           </a:ln>
-          <a:effectLst>
-            <a:outerShdw blurRad="109728" dist="38100" dir="5400000">
-              <a:srgbClr val="000000">
-                <a:alpha val="30000"/>
-              </a:srgbClr>
-            </a:outerShdw>
-          </a:effectLst>
-        </p:spPr>
-        <p:txBody>
-          <a:bodyPr/>
-          <a:lstStyle/>
-          <a:p>
-            <a:endParaRPr/>
+        </p:spPr>
+        <p:txBody>
+          <a:bodyPr anchor="t"/>
+          <a:lstStyle/>
+          <a:p>
+            <a:pPr algn="l"/>
+            <a:r>
+              <a:rPr b="1" sz="1300">
+                <a:solidFill>
+                  <a:srgbClr val="34D399"/>
+                </a:solidFill>
+                <a:latin typeface="+mn-lt"/>
+                <a:cs typeface="+mn-lt"/>
+              </a:rPr>
+              <a:t>📈 Fully Editable &amp; Scalable</a:t>
+            </a:r>
+          </a:p>
+        </p:txBody>
+      </p:sp>
+      <p:sp>
+        <p:nvSpPr>
+          <p:cNvPr id="9" name="Text Box 8"/>
+          <p:cNvSpPr txBox="1"/>
+          <p:nvPr/>
+        </p:nvSpPr>
+        <p:spPr>
+          <a:xfrm>
+            <a:off x="7772400" y="3657600"/>
+            <a:ext cx="3291840" cy="731520"/>
+          </a:xfrm>
+          <a:prstGeom prst="rect">
+            <a:avLst/>
+          </a:prstGeom>
+        </p:spPr>
+        <p:txBody>
+          <a:bodyPr anchor="t"/>
+          <a:lstStyle/>
+          <a:p>
+            <a:pPr algn="l"/>
+            <a:r>
+              <a:rPr sz="1000">
+                <a:solidFill>
+                  <a:srgbClr val="94A3B8"/>
+                </a:solidFill>
+                <a:latin typeface="+mn-lt"/>
+                <a:cs typeface="+mn-lt"/>
+              </a:rPr>
+              <a:t>Embedded as vector OpenXML chart spaces. Users can edit values, change themes, or modify series formatting natively inside Microsoft PowerPoint.</a:t>
+            </a:r>
+          </a:p>
+        </p:txBody>
+      </p:sp>
+      <p:sp>
+        <p:nvSpPr>
+          <p:cNvPr id="10" name="roundRect 9"/>
+          <p:cNvSpPr/>
+          <p:nvPr/>
+        </p:nvSpPr>
+        <p:spPr>
+          <a:xfrm>
+            <a:off x="7589520" y="4663440"/>
+            <a:ext cx="3657600" cy="1234440"/>
+          </a:xfrm>
+          <a:prstGeom prst="roundRect">
+            <a:avLst/>
+          </a:prstGeom>
+          <a:solidFill>
+            <a:srgbClr val="1E293B"/>
+          </a:solidFill>
+          <a:ln w="13716">
+            <a:solidFill>
+              <a:srgbClr val="6366F1"/>
+            </a:solidFill>
+          </a:ln>
+        </p:spPr>
+        <p:txBody>
+          <a:bodyPr anchor="t"/>
+          <a:lstStyle/>
+          <a:p>
+            <a:pPr algn="l"/>
+            <a:r>
+              <a:rPr b="1" sz="1300">
+                <a:solidFill>
+                  <a:srgbClr val="818CF8"/>
+                </a:solidFill>
+                <a:latin typeface="+mn-lt"/>
+                <a:cs typeface="+mn-lt"/>
+              </a:rPr>
+              <a:t>🎨 Multi-Type Chart Engine</a:t>
+            </a:r>
           </a:p>
         </p:txBody>
       </p:sp>
       <p:sp>
         <p:nvSpPr>
           <p:cNvPr id="11" name="Text Box 10"/>
-          <p:cNvSpPr/>
-          <p:nvPr/>
-        </p:nvSpPr>
-        <p:spPr>
-          <a:xfrm>
-            <a:off x="8165592" y="2011680"/>
-            <a:ext cx="2926080" cy="320040"/>
+          <p:cNvSpPr txBox="1"/>
+          <p:nvPr/>
+        </p:nvSpPr>
+        <p:spPr>
+          <a:xfrm>
+            <a:off x="7772400" y="5074920"/>
+            <a:ext cx="3291840" cy="731520"/>
           </a:xfrm>
           <a:prstGeom prst="rect">
             <a:avLst/>
@@ -4081,38 +4978,22 @@
           <a:p>
             <a:pPr algn="l"/>
             <a:r>
-              <a:rPr b="1" sz="1200">
-                <a:solidFill>
-                  <a:srgbClr val="818CF8"/>
-                </a:solidFill>
-                <a:latin typeface="+mn-lt"/>
-                <a:cs typeface="+mn-lt"/>
-              </a:rPr>
-              <a:t>🎯 Radar: Performance Scorecard</a:t>
-            </a:r>
-          </a:p>
-        </p:txBody>
-      </p:sp>
-      <p:graphicFrame>
-        <p:nvGraphicFramePr>
-          <p:cNvPr id="12" name="Chart 11"/>
-          <p:cNvGraphicFramePr/>
-          <p:nvPr/>
-        </p:nvGraphicFramePr>
-        <p:xfrm>
-          <a:off x="8165592" y="2377440"/>
-          <a:ext cx="2926080" cy="3291840"/>
-        </p:xfrm>
-        <a:graphic>
-          <a:graphicData uri="http://schemas.openxmlformats.org/drawingml/2006/chart">
-            <c:chart xmlns:c="http://schemas.openxmlformats.org/drawingml/2006/chart" xmlns:r="http://schemas.openxmlformats.org/officeDocument/2006/relationships" r:id="rId4"/>
-          </a:graphicData>
-        </a:graphic>
-      </p:graphicFrame>
-      <p:sp>
-        <p:nvSpPr>
-          <p:cNvPr id="13" name="Text Box 12"/>
-          <p:cNvSpPr/>
+              <a:rPr sz="1000">
+                <a:solidFill>
+                  <a:srgbClr val="94A3B8"/>
+                </a:solidFill>
+                <a:latin typeface="+mn-lt"/>
+                <a:cs typeface="+mn-lt"/>
+              </a:rPr>
+              <a:t>Supports column, bar, line, area, and pie chart topologies with custom series coloring, categorical axes, and configurable legend alignments.</a:t>
+            </a:r>
+          </a:p>
+        </p:txBody>
+      </p:sp>
+      <p:sp>
+        <p:nvSpPr>
+          <p:cNvPr id="12" name="Text Box 11"/>
+          <p:cNvSpPr txBox="1"/>
           <p:nvPr/>
         </p:nvSpPr>
         <p:spPr>
@@ -4147,8 +5028,8 @@
   <p:clrMapOvr>
     <a:masterClrMapping/>
   </p:clrMapOvr>
-  <p:transition spd="fast">
-    <p:checker dir="vert"/>
+  <p:transition spd="med">
+    <p:wheel spokes="4"/>
   </p:transition>
 </p:sld>
 </file>
@@ -4181,13 +5062,13 @@
       <p:sp>
         <p:nvSpPr>
           <p:cNvPr id="2" name="Text Box 1"/>
-          <p:cNvSpPr/>
-          <p:nvPr/>
-        </p:nvSpPr>
-        <p:spPr>
-          <a:xfrm>
-            <a:off x="731520" y="731520"/>
-            <a:ext cx="10725912" cy="548640"/>
+          <p:cNvSpPr txBox="1"/>
+          <p:nvPr/>
+        </p:nvSpPr>
+        <p:spPr>
+          <a:xfrm>
+            <a:off x="914400" y="731520"/>
+            <a:ext cx="10360152" cy="548640"/>
           </a:xfrm>
           <a:prstGeom prst="rect">
             <a:avLst/>
@@ -4206,7 +5087,7 @@
                 <a:latin typeface="+mj-lt"/>
                 <a:cs typeface="+mj-lt"/>
               </a:rPr>
-              <a:t>Native Hyperlinks &amp; Interactive Navigation System</a:t>
+              <a:t>Multi-Topology Chart Gallery</a:t>
             </a:r>
           </a:p>
         </p:txBody>
@@ -4214,13 +5095,13 @@
       <p:sp>
         <p:nvSpPr>
           <p:cNvPr id="3" name="Text Box 2"/>
-          <p:cNvSpPr/>
-          <p:nvPr/>
-        </p:nvSpPr>
-        <p:spPr>
-          <a:xfrm>
-            <a:off x="731520" y="1280160"/>
-            <a:ext cx="10725912" cy="365760"/>
+          <p:cNvSpPr txBox="1"/>
+          <p:nvPr/>
+        </p:nvSpPr>
+        <p:spPr>
+          <a:xfrm>
+            <a:off x="914400" y="1280160"/>
+            <a:ext cx="10360152" cy="365760"/>
           </a:xfrm>
           <a:prstGeom prst="rect">
             <a:avLst/>
@@ -4239,7 +5120,7 @@
                 <a:latin typeface="+mn-lt"/>
                 <a:cs typeface="+mn-lt"/>
               </a:rPr>
-              <a:t>OpenXML DrawingML &lt;a:hlinkClick&gt; external URLs, slide navigation jumps, hover ScreenTips, and presentation controls</a:t>
+              <a:t>Smooth spline line trends, radial doughnut distributions, and horizontal bar comparisons</a:t>
             </a:r>
           </a:p>
         </p:txBody>
@@ -4252,8 +5133,8 @@
         </p:nvSpPr>
         <p:spPr>
           <a:xfrm>
-            <a:off x="731520" y="1828800"/>
-            <a:ext cx="5212080" cy="4480560"/>
+            <a:off x="914400" y="1828800"/>
+            <a:ext cx="3291840" cy="4114800"/>
           </a:xfrm>
           <a:prstGeom prst="roundRect">
             <a:avLst/>
@@ -4285,303 +5166,62 @@
       <p:sp>
         <p:nvSpPr>
           <p:cNvPr id="5" name="Text Box 4"/>
+          <p:cNvSpPr txBox="1"/>
+          <p:nvPr/>
+        </p:nvSpPr>
+        <p:spPr>
+          <a:xfrm>
+            <a:off x="1097280" y="2011680"/>
+            <a:ext cx="2926080" cy="320040"/>
+          </a:xfrm>
+          <a:prstGeom prst="rect">
+            <a:avLst/>
+          </a:prstGeom>
+        </p:spPr>
+        <p:txBody>
+          <a:bodyPr anchor="t"/>
+          <a:lstStyle/>
+          <a:p>
+            <a:pPr algn="l"/>
+            <a:r>
+              <a:rPr b="1" sz="1200">
+                <a:solidFill>
+                  <a:srgbClr val="0F172A"/>
+                </a:solidFill>
+                <a:latin typeface="+mn-lt"/>
+                <a:cs typeface="+mn-lt"/>
+              </a:rPr>
+              <a:t>📈 Latency Curve vs Payload (ms)</a:t>
+            </a:r>
+          </a:p>
+        </p:txBody>
+      </p:sp>
+      <p:graphicFrame>
+        <p:nvGraphicFramePr>
+          <p:cNvPr id="6" name="Chart 5"/>
+          <p:cNvGraphicFramePr/>
+          <p:nvPr/>
+        </p:nvGraphicFramePr>
+        <p:xfrm>
+          <a:off x="1097280" y="2377440"/>
+          <a:ext cx="2926080" cy="3291840"/>
+        </p:xfrm>
+        <a:graphic>
+          <a:graphicData uri="http://schemas.openxmlformats.org/drawingml/2006/chart">
+            <c:chart xmlns:c="http://schemas.openxmlformats.org/drawingml/2006/chart" xmlns:r="http://schemas.openxmlformats.org/officeDocument/2006/relationships" r:id="rId2"/>
+          </a:graphicData>
+        </a:graphic>
+      </p:graphicFrame>
+      <p:sp>
+        <p:nvSpPr>
+          <p:cNvPr id="7" name="roundRect 6"/>
           <p:cNvSpPr/>
           <p:nvPr/>
         </p:nvSpPr>
         <p:spPr>
           <a:xfrm>
-            <a:off x="914400" y="2011680"/>
-            <a:ext cx="4846320" cy="320040"/>
-          </a:xfrm>
-          <a:prstGeom prst="rect">
-            <a:avLst/>
-          </a:prstGeom>
-        </p:spPr>
-        <p:txBody>
-          <a:bodyPr anchor="t"/>
-          <a:lstStyle/>
-          <a:p>
-            <a:pPr algn="l"/>
-            <a:r>
-              <a:rPr b="1" sz="1300">
-                <a:solidFill>
-                  <a:srgbClr val="0F172A"/>
-                </a:solidFill>
-                <a:latin typeface="+mn-lt"/>
-                <a:cs typeface="+mn-lt"/>
-              </a:rPr>
-              <a:t>🧭 Interactive Presentation Jump Hub</a:t>
-            </a:r>
-          </a:p>
-        </p:txBody>
-      </p:sp>
-      <p:sp>
-        <p:nvSpPr>
-          <p:cNvPr id="6" name="Text Box 5"/>
-          <p:cNvSpPr/>
-          <p:nvPr/>
-        </p:nvSpPr>
-        <p:spPr>
-          <a:xfrm>
-            <a:off x="914400" y="2331720"/>
-            <a:ext cx="4846320" cy="274320"/>
-          </a:xfrm>
-          <a:prstGeom prst="rect">
-            <a:avLst/>
-          </a:prstGeom>
-        </p:spPr>
-        <p:txBody>
-          <a:bodyPr anchor="t"/>
-          <a:lstStyle/>
-          <a:p>
-            <a:pPr algn="l"/>
-            <a:r>
-              <a:rPr sz="1050">
-                <a:solidFill>
-                  <a:srgbClr val="64748B"/>
-                </a:solidFill>
-                <a:latin typeface="+mn-lt"/>
-                <a:cs typeface="+mn-lt"/>
-              </a:rPr>
-              <a:t>Click any card below during slide show mode to immediately jump to that section:</a:t>
-            </a:r>
-          </a:p>
-        </p:txBody>
-      </p:sp>
-      <p:sp>
-        <p:nvSpPr>
-          <p:cNvPr id="7" name="roundRect 6">
-            <a:hlinkClick r:id="rId2" tooltip="Jump directly to Slide 2" action="ppaction://hlinksldjump"/>
-          </p:cNvPr>
-          <p:cNvSpPr/>
-          <p:nvPr/>
-        </p:nvSpPr>
-        <p:spPr>
-          <a:xfrm>
-            <a:off x="914400" y="2697480"/>
-            <a:ext cx="4846320" cy="749808"/>
-          </a:xfrm>
-          <a:prstGeom prst="roundRect">
-            <a:avLst/>
-          </a:prstGeom>
-          <a:solidFill>
-            <a:srgbClr val="EFF6FF"/>
-          </a:solidFill>
-          <a:ln w="13716">
-            <a:solidFill>
-              <a:srgbClr val="3B82F6"/>
-            </a:solidFill>
-          </a:ln>
-        </p:spPr>
-        <p:txBody>
-          <a:bodyPr anchor="t"/>
-          <a:lstStyle/>
-          <a:p>
-            <a:pPr algn="l"/>
-            <a:r>
-              <a:rPr b="1" sz="1100">
-                <a:solidFill>
-                  <a:srgbClr val="1D4ED8"/>
-                </a:solidFill>
-                <a:latin typeface="+mn-lt"/>
-                <a:cs typeface="+mn-lt"/>
-              </a:rPr>
-              <a:t>📐 Slide 2: Modular Architecture ➔</a:t>
-            </a:r>
-          </a:p>
-          <a:p>
-            <a:pPr algn="l"/>
-            <a:r>
-              <a:rPr sz="950">
-                <a:solidFill>
-                  <a:srgbClr val="64748B"/>
-                </a:solidFill>
-                <a:latin typeface="+mn-lt"/>
-                <a:cs typeface="+mn-lt"/>
-              </a:rPr>
-              <a:t>3-tier modular schemas &amp; strict units</a:t>
-            </a:r>
-          </a:p>
-        </p:txBody>
-      </p:sp>
-      <p:sp>
-        <p:nvSpPr>
-          <p:cNvPr id="8" name="roundRect 7">
-            <a:hlinkClick r:id="rId3" tooltip="Jump directly to Slide 9" action="ppaction://hlinksldjump"/>
-          </p:cNvPr>
-          <p:cNvSpPr/>
-          <p:nvPr/>
-        </p:nvSpPr>
-        <p:spPr>
-          <a:xfrm>
-            <a:off x="914400" y="3566160"/>
-            <a:ext cx="4846320" cy="749808"/>
-          </a:xfrm>
-          <a:prstGeom prst="roundRect">
-            <a:avLst/>
-          </a:prstGeom>
-          <a:solidFill>
-            <a:srgbClr val="ECFDF5"/>
-          </a:solidFill>
-          <a:ln w="13716">
-            <a:solidFill>
-              <a:srgbClr val="10B981"/>
-            </a:solidFill>
-          </a:ln>
-        </p:spPr>
-        <p:txBody>
-          <a:bodyPr anchor="t"/>
-          <a:lstStyle/>
-          <a:p>
-            <a:pPr algn="l"/>
-            <a:r>
-              <a:rPr b="1" sz="1100">
-                <a:solidFill>
-                  <a:srgbClr val="047857"/>
-                </a:solidFill>
-                <a:latin typeface="+mn-lt"/>
-                <a:cs typeface="+mn-lt"/>
-              </a:rPr>
-              <a:t>📈 Slide 9: OpenXML Charts &amp; Graphs ➔</a:t>
-            </a:r>
-          </a:p>
-          <a:p>
-            <a:pPr algn="l"/>
-            <a:r>
-              <a:rPr sz="950">
-                <a:solidFill>
-                  <a:srgbClr val="64748B"/>
-                </a:solidFill>
-                <a:latin typeface="+mn-lt"/>
-                <a:cs typeface="+mn-lt"/>
-              </a:rPr>
-              <a:t>Clustered bar &amp; line dual-series analytics</a:t>
-            </a:r>
-          </a:p>
-        </p:txBody>
-      </p:sp>
-      <p:sp>
-        <p:nvSpPr>
-          <p:cNvPr id="9" name="roundRect 8">
-            <a:hlinkClick r:id="rId4" tooltip="Jump directly to Slide 13" action="ppaction://hlinksldjump"/>
-          </p:cNvPr>
-          <p:cNvSpPr/>
-          <p:nvPr/>
-        </p:nvSpPr>
-        <p:spPr>
-          <a:xfrm>
-            <a:off x="914400" y="4434840"/>
-            <a:ext cx="4846320" cy="749808"/>
-          </a:xfrm>
-          <a:prstGeom prst="roundRect">
-            <a:avLst/>
-          </a:prstGeom>
-          <a:solidFill>
-            <a:srgbClr val="F5F3FF"/>
-          </a:solidFill>
-          <a:ln w="13716">
-            <a:solidFill>
-              <a:srgbClr val="8B5CF6"/>
-            </a:solidFill>
-          </a:ln>
-        </p:spPr>
-        <p:txBody>
-          <a:bodyPr anchor="t"/>
-          <a:lstStyle/>
-          <a:p>
-            <a:pPr algn="l"/>
-            <a:r>
-              <a:rPr b="1" sz="1100">
-                <a:solidFill>
-                  <a:srgbClr val="6D28D9"/>
-                </a:solidFill>
-                <a:latin typeface="+mn-lt"/>
-                <a:cs typeface="+mn-lt"/>
-              </a:rPr>
-              <a:t>🎨 Slide 13: DrawingML Gradient Engine ➔</a:t>
-            </a:r>
-          </a:p>
-          <a:p>
-            <a:pPr algn="l"/>
-            <a:r>
-              <a:rPr sz="950">
-                <a:solidFill>
-                  <a:srgbClr val="64748B"/>
-                </a:solidFill>
-                <a:latin typeface="+mn-lt"/>
-                <a:cs typeface="+mn-lt"/>
-              </a:rPr>
-              <a:t>Linear, radial, alpha &amp; multi-stop mesh cards</a:t>
-            </a:r>
-          </a:p>
-        </p:txBody>
-      </p:sp>
-      <p:sp>
-        <p:nvSpPr>
-          <p:cNvPr id="10" name="roundRect 9">
-            <a:hlinkClick r:id="rId5" tooltip="Jump directly to Slide 14" action="ppaction://hlinksldjump"/>
-          </p:cNvPr>
-          <p:cNvSpPr/>
-          <p:nvPr/>
-        </p:nvSpPr>
-        <p:spPr>
-          <a:xfrm>
-            <a:off x="914400" y="5303520"/>
-            <a:ext cx="4846320" cy="749808"/>
-          </a:xfrm>
-          <a:prstGeom prst="roundRect">
-            <a:avLst/>
-          </a:prstGeom>
-          <a:solidFill>
-            <a:srgbClr val="FFFBEB"/>
-          </a:solidFill>
-          <a:ln w="13716">
-            <a:solidFill>
-              <a:srgbClr val="F59E0B"/>
-            </a:solidFill>
-          </a:ln>
-        </p:spPr>
-        <p:txBody>
-          <a:bodyPr anchor="t"/>
-          <a:lstStyle/>
-          <a:p>
-            <a:pPr algn="l"/>
-            <a:r>
-              <a:rPr b="1" sz="1100">
-                <a:solidFill>
-                  <a:srgbClr val="B45309"/>
-                </a:solidFill>
-                <a:latin typeface="+mn-lt"/>
-                <a:cs typeface="+mn-lt"/>
-              </a:rPr>
-              <a:t>⚡ Slide 14: Engine Benchmark Matrix ➔</a:t>
-            </a:r>
-          </a:p>
-          <a:p>
-            <a:pPr algn="l"/>
-            <a:r>
-              <a:rPr sz="950">
-                <a:solidFill>
-                  <a:srgbClr val="64748B"/>
-                </a:solidFill>
-                <a:latin typeface="+mn-lt"/>
-                <a:cs typeface="+mn-lt"/>
-              </a:rPr>
-              <a:t>Empirical throughput &amp; bundle size matrix</a:t>
-            </a:r>
-          </a:p>
-        </p:txBody>
-      </p:sp>
-      <p:sp>
-        <p:nvSpPr>
-          <p:cNvPr id="11" name="roundRect 10"/>
-          <p:cNvSpPr/>
-          <p:nvPr/>
-        </p:nvSpPr>
-        <p:spPr>
-          <a:xfrm>
-            <a:off x="6217920" y="1828800"/>
-            <a:ext cx="5212080" cy="2377440"/>
+            <a:off x="4443984" y="1828800"/>
+            <a:ext cx="3291840" cy="4114800"/>
           </a:xfrm>
           <a:prstGeom prst="roundRect">
             <a:avLst/>
@@ -4612,151 +5252,63 @@
       </p:sp>
       <p:sp>
         <p:nvSpPr>
-          <p:cNvPr id="12" name="Text Box 11"/>
+          <p:cNvPr id="8" name="Text Box 7"/>
+          <p:cNvSpPr txBox="1"/>
+          <p:nvPr/>
+        </p:nvSpPr>
+        <p:spPr>
+          <a:xfrm>
+            <a:off x="4626864" y="2011680"/>
+            <a:ext cx="2926080" cy="320040"/>
+          </a:xfrm>
+          <a:prstGeom prst="rect">
+            <a:avLst/>
+          </a:prstGeom>
+        </p:spPr>
+        <p:txBody>
+          <a:bodyPr anchor="t"/>
+          <a:lstStyle/>
+          <a:p>
+            <a:pPr algn="l"/>
+            <a:r>
+              <a:rPr b="1" sz="1200">
+                <a:solidFill>
+                  <a:srgbClr val="0F172A"/>
+                </a:solidFill>
+                <a:latin typeface="+mn-lt"/>
+                <a:cs typeface="+mn-lt"/>
+              </a:rPr>
+              <a:t>🍩 Runtime Execution Share</a:t>
+            </a:r>
+          </a:p>
+        </p:txBody>
+      </p:sp>
+      <p:graphicFrame>
+        <p:nvGraphicFramePr>
+          <p:cNvPr id="9" name="Chart 8"/>
+          <p:cNvGraphicFramePr/>
+          <p:nvPr/>
+        </p:nvGraphicFramePr>
+        <p:xfrm>
+          <a:off x="4626864" y="2377440"/>
+          <a:ext cx="2926080" cy="3291840"/>
+        </p:xfrm>
+        <a:graphic>
+          <a:graphicData uri="http://schemas.openxmlformats.org/drawingml/2006/chart">
+            <c:chart xmlns:c="http://schemas.openxmlformats.org/drawingml/2006/chart" xmlns:r="http://schemas.openxmlformats.org/officeDocument/2006/relationships" r:id="rId3"/>
+          </a:graphicData>
+        </a:graphic>
+      </p:graphicFrame>
+      <p:sp>
+        <p:nvSpPr>
+          <p:cNvPr id="10" name="roundRect 9"/>
           <p:cNvSpPr/>
           <p:nvPr/>
         </p:nvSpPr>
         <p:spPr>
           <a:xfrm>
-            <a:off x="6400800" y="2011680"/>
-            <a:ext cx="4846320" cy="320040"/>
-          </a:xfrm>
-          <a:prstGeom prst="rect">
-            <a:avLst/>
-          </a:prstGeom>
-        </p:spPr>
-        <p:txBody>
-          <a:bodyPr anchor="t"/>
-          <a:lstStyle/>
-          <a:p>
-            <a:pPr algn="l"/>
-            <a:r>
-              <a:rPr b="1" sz="1300">
-                <a:solidFill>
-                  <a:srgbClr val="0F172A"/>
-                </a:solidFill>
-                <a:latin typeface="+mn-lt"/>
-                <a:cs typeface="+mn-lt"/>
-              </a:rPr>
-              <a:t>🔗 External Web &amp; Ecosystem Endpoints</a:t>
-            </a:r>
-          </a:p>
-        </p:txBody>
-      </p:sp>
-      <p:sp>
-        <p:nvSpPr>
-          <p:cNvPr id="13" name="Text Box 12"/>
-          <p:cNvSpPr/>
-          <p:nvPr/>
-        </p:nvSpPr>
-        <p:spPr>
-          <a:xfrm>
-            <a:off x="6400800" y="2377440"/>
-            <a:ext cx="4846320" cy="1645920"/>
-          </a:xfrm>
-          <a:prstGeom prst="rect">
-            <a:avLst/>
-          </a:prstGeom>
-        </p:spPr>
-        <p:txBody>
-          <a:bodyPr anchor="t"/>
-          <a:lstStyle/>
-          <a:p>
-            <a:pPr algn="l" lvl="0"/>
-            <a:r>
-              <a:rPr>
-                <a:latin typeface="+mn-lt"/>
-                <a:cs typeface="+mn-lt"/>
-              </a:rPr>
-              <a:t>• </a:t>
-            </a:r>
-            <a:r>
-              <a:rPr b="1" u="sng">
-                <a:solidFill>
-                  <a:srgbClr val="0284C7"/>
-                </a:solidFill>
-                <a:hlinkClick r:id="rId6" tooltip="View GitHub Repository &amp; Source Code"/>
-                <a:latin typeface="+mn-lt"/>
-                <a:cs typeface="+mn-lt"/>
-              </a:rPr>
-              <a:t>GitHub Repository (hokkyss/pptx-parser)</a:t>
-            </a:r>
-            <a:r>
-              <a:rPr>
-                <a:latin typeface="+mn-lt"/>
-                <a:cs typeface="+mn-lt"/>
-              </a:rPr>
-              <a:t> — Star &amp; contribute.</a:t>
-            </a:r>
-          </a:p>
-          <a:p>
-            <a:pPr algn="l" lvl="0"/>
-            <a:r>
-              <a:rPr>
-                <a:latin typeface="+mn-lt"/>
-                <a:cs typeface="+mn-lt"/>
-              </a:rPr>
-              <a:t>• </a:t>
-            </a:r>
-            <a:r>
-              <a:rPr b="1" u="sng">
-                <a:solidFill>
-                  <a:srgbClr val="6366F1"/>
-                </a:solidFill>
-                <a:hlinkClick r:id="rId7" tooltip="Inspect NPM Package Registry"/>
-                <a:latin typeface="+mn-lt"/>
-                <a:cs typeface="+mn-lt"/>
-              </a:rPr>
-              <a:t>NPM Package Registry (@hokkyss/pptx)</a:t>
-            </a:r>
-            <a:r>
-              <a:rPr>
-                <a:latin typeface="+mn-lt"/>
-                <a:cs typeface="+mn-lt"/>
-              </a:rPr>
-              <a:t> — Published release.</a:t>
-            </a:r>
-          </a:p>
-          <a:p>
-            <a:pPr algn="l" lvl="0"/>
-            <a:r>
-              <a:rPr>
-                <a:latin typeface="+mn-lt"/>
-                <a:cs typeface="+mn-lt"/>
-              </a:rPr>
-              <a:t>• </a:t>
-            </a:r>
-            <a:r>
-              <a:rPr b="1" u="sng">
-                <a:solidFill>
-                  <a:srgbClr val="10B981"/>
-                </a:solidFill>
-                <a:hlinkClick r:id="rId8" tooltip="View Issue Tracker &amp; Discussions"/>
-                <a:latin typeface="+mn-lt"/>
-                <a:cs typeface="+mn-lt"/>
-              </a:rPr>
-              <a:t>GitHub Issue Tracker &amp; Community</a:t>
-            </a:r>
-            <a:r>
-              <a:rPr>
-                <a:latin typeface="+mn-lt"/>
-                <a:cs typeface="+mn-lt"/>
-              </a:rPr>
-              <a:t> — Discussions &amp; issues.</a:t>
-            </a:r>
-          </a:p>
-        </p:txBody>
-      </p:sp>
-      <p:sp>
-        <p:nvSpPr>
-          <p:cNvPr id="14" name="roundRect 13"/>
-          <p:cNvSpPr/>
-          <p:nvPr/>
-        </p:nvSpPr>
-        <p:spPr>
-          <a:xfrm>
-            <a:off x="6217920" y="4389120"/>
-            <a:ext cx="5212080" cy="1920240"/>
+            <a:off x="7982712" y="1828800"/>
+            <a:ext cx="3291840" cy="4114800"/>
           </a:xfrm>
           <a:prstGeom prst="roundRect">
             <a:avLst/>
@@ -4787,8 +5339,1129 @@
       </p:sp>
       <p:sp>
         <p:nvSpPr>
+          <p:cNvPr id="11" name="Text Box 10"/>
+          <p:cNvSpPr txBox="1"/>
+          <p:nvPr/>
+        </p:nvSpPr>
+        <p:spPr>
+          <a:xfrm>
+            <a:off x="8165592" y="2011680"/>
+            <a:ext cx="2926080" cy="320040"/>
+          </a:xfrm>
+          <a:prstGeom prst="rect">
+            <a:avLst/>
+          </a:prstGeom>
+        </p:spPr>
+        <p:txBody>
+          <a:bodyPr anchor="t"/>
+          <a:lstStyle/>
+          <a:p>
+            <a:pPr algn="l"/>
+            <a:r>
+              <a:rPr b="1" sz="1200">
+                <a:solidFill>
+                  <a:srgbClr val="0F172A"/>
+                </a:solidFill>
+                <a:latin typeface="+mn-lt"/>
+                <a:cs typeface="+mn-lt"/>
+              </a:rPr>
+              <a:t>📊 Ecosystem Compression (x)</a:t>
+            </a:r>
+          </a:p>
+        </p:txBody>
+      </p:sp>
+      <p:graphicFrame>
+        <p:nvGraphicFramePr>
+          <p:cNvPr id="12" name="Chart 11"/>
+          <p:cNvGraphicFramePr/>
+          <p:nvPr/>
+        </p:nvGraphicFramePr>
+        <p:xfrm>
+          <a:off x="8165592" y="2377440"/>
+          <a:ext cx="2926080" cy="3291840"/>
+        </p:xfrm>
+        <a:graphic>
+          <a:graphicData uri="http://schemas.openxmlformats.org/drawingml/2006/chart">
+            <c:chart xmlns:c="http://schemas.openxmlformats.org/drawingml/2006/chart" xmlns:r="http://schemas.openxmlformats.org/officeDocument/2006/relationships" r:id="rId4"/>
+          </a:graphicData>
+        </a:graphic>
+      </p:graphicFrame>
+      <p:sp>
+        <p:nvSpPr>
+          <p:cNvPr id="13" name="Text Box 12"/>
+          <p:cNvSpPr txBox="1"/>
+          <p:nvPr/>
+        </p:nvSpPr>
+        <p:spPr>
+          <a:xfrm>
+            <a:off x="731520" y="6510528"/>
+            <a:ext cx="10725912" cy="228600"/>
+          </a:xfrm>
+          <a:prstGeom prst="rect">
+            <a:avLst/>
+          </a:prstGeom>
+        </p:spPr>
+        <p:txBody>
+          <a:bodyPr anchor="t"/>
+          <a:lstStyle/>
+          <a:p>
+            <a:pPr algn="ctr"/>
+            <a:r>
+              <a:rPr i="1" sz="800">
+                <a:solidFill>
+                  <a:srgbClr val="94A3B8"/>
+                </a:solidFill>
+                <a:latin typeface="+mn-lt"/>
+                <a:cs typeface="+mn-lt"/>
+              </a:rPr>
+              <a:t>* Disclaimer: All benchmark metrics, performance figures, and simulated architectures in this deck are synthetic demonstration values generated solely to showcase the authoring, formatting, and rendering capabilities of @hokkyss/pptx.</a:t>
+            </a:r>
+          </a:p>
+        </p:txBody>
+      </p:sp>
+    </p:spTree>
+  </p:cSld>
+  <p:clrMapOvr>
+    <a:masterClrMapping/>
+  </p:clrMapOvr>
+  <p:transition spd="fast">
+    <p:blinds dir="horz"/>
+  </p:transition>
+</p:sld>
+</file>
+
+<file path=ppt/slides/slide13.xml><?xml version="1.0" encoding="utf-8"?>
+<p:sld xmlns:a="http://schemas.openxmlformats.org/drawingml/2006/main" xmlns:p="http://schemas.openxmlformats.org/presentationml/2006/main" xmlns:r="http://schemas.openxmlformats.org/officeDocument/2006/relationships">
+  <p:cSld>
+    <p:bg>
+      <p:bgPr>
+        <a:solidFill>
+          <a:srgbClr val="0F172A"/>
+        </a:solidFill>
+        <a:effectLst/>
+      </p:bgPr>
+    </p:bg>
+    <p:spTree>
+      <p:nvGrpSpPr>
+        <p:cNvPr id="1" name=""/>
+        <p:cNvGrpSpPr/>
+        <p:nvPr/>
+      </p:nvGrpSpPr>
+      <p:grpSpPr>
+        <a:xfrm>
+          <a:off x="0" y="0"/>
+          <a:ext cx="0" cy="0"/>
+          <a:chOff x="0" y="0"/>
+          <a:chExt cx="0" cy="0"/>
+        </a:xfrm>
+      </p:grpSpPr>
+      <p:sp>
+        <p:nvSpPr>
+          <p:cNvPr id="2" name="Text Box 1"/>
+          <p:cNvSpPr txBox="1"/>
+          <p:nvPr/>
+        </p:nvSpPr>
+        <p:spPr>
+          <a:xfrm>
+            <a:off x="914400" y="731520"/>
+            <a:ext cx="10360152" cy="548640"/>
+          </a:xfrm>
+          <a:prstGeom prst="rect">
+            <a:avLst/>
+          </a:prstGeom>
+        </p:spPr>
+        <p:txBody>
+          <a:bodyPr anchor="t"/>
+          <a:lstStyle/>
+          <a:p>
+            <a:pPr algn="l"/>
+            <a:r>
+              <a:rPr b="1" sz="2400">
+                <a:solidFill>
+                  <a:srgbClr val="38BDF8"/>
+                </a:solidFill>
+                <a:latin typeface="+mj-lt"/>
+                <a:cs typeface="+mj-lt"/>
+              </a:rPr>
+              <a:t>Specialized Analytical Topologies</a:t>
+            </a:r>
+          </a:p>
+        </p:txBody>
+      </p:sp>
+      <p:sp>
+        <p:nvSpPr>
+          <p:cNvPr id="3" name="Text Box 2"/>
+          <p:cNvSpPr txBox="1"/>
+          <p:nvPr/>
+        </p:nvSpPr>
+        <p:spPr>
+          <a:xfrm>
+            <a:off x="914400" y="1280160"/>
+            <a:ext cx="10360152" cy="365760"/>
+          </a:xfrm>
+          <a:prstGeom prst="rect">
+            <a:avLst/>
+          </a:prstGeom>
+        </p:spPr>
+        <p:txBody>
+          <a:bodyPr anchor="t"/>
+          <a:lstStyle/>
+          <a:p>
+            <a:pPr algn="l"/>
+            <a:r>
+              <a:rPr sz="1400">
+                <a:solidFill>
+                  <a:srgbClr val="94A3B8"/>
+                </a:solidFill>
+                <a:latin typeface="+mn-lt"/>
+                <a:cs typeface="+mn-lt"/>
+              </a:rPr>
+              <a:t>Multi-series stacked area trends, radial composition pie distributions, and multi-axis radar scorecards</a:t>
+            </a:r>
+          </a:p>
+        </p:txBody>
+      </p:sp>
+      <p:sp>
+        <p:nvSpPr>
+          <p:cNvPr id="4" name="roundRect 3"/>
+          <p:cNvSpPr/>
+          <p:nvPr/>
+        </p:nvSpPr>
+        <p:spPr>
+          <a:xfrm>
+            <a:off x="914400" y="1828800"/>
+            <a:ext cx="3291840" cy="4114800"/>
+          </a:xfrm>
+          <a:prstGeom prst="roundRect">
+            <a:avLst/>
+          </a:prstGeom>
+          <a:solidFill>
+            <a:srgbClr val="1E293B"/>
+          </a:solidFill>
+          <a:ln w="13716">
+            <a:solidFill>
+              <a:srgbClr val="334155"/>
+            </a:solidFill>
+          </a:ln>
+          <a:effectLst>
+            <a:outerShdw blurRad="109728" dist="38100" dir="5400000">
+              <a:srgbClr val="000000">
+                <a:alpha val="30000"/>
+              </a:srgbClr>
+            </a:outerShdw>
+          </a:effectLst>
+        </p:spPr>
+        <p:txBody>
+          <a:bodyPr/>
+          <a:lstStyle/>
+          <a:p>
+            <a:endParaRPr/>
+          </a:p>
+        </p:txBody>
+      </p:sp>
+      <p:sp>
+        <p:nvSpPr>
+          <p:cNvPr id="5" name="Text Box 4"/>
+          <p:cNvSpPr txBox="1"/>
+          <p:nvPr/>
+        </p:nvSpPr>
+        <p:spPr>
+          <a:xfrm>
+            <a:off x="1097280" y="2011680"/>
+            <a:ext cx="2926080" cy="320040"/>
+          </a:xfrm>
+          <a:prstGeom prst="rect">
+            <a:avLst/>
+          </a:prstGeom>
+        </p:spPr>
+        <p:txBody>
+          <a:bodyPr anchor="t"/>
+          <a:lstStyle/>
+          <a:p>
+            <a:pPr algn="l"/>
+            <a:r>
+              <a:rPr b="1" sz="1200">
+                <a:solidFill>
+                  <a:srgbClr val="38BDF8"/>
+                </a:solidFill>
+                <a:latin typeface="+mn-lt"/>
+                <a:cs typeface="+mn-lt"/>
+              </a:rPr>
+              <a:t>🌊 Stacked Area: Memory Footprint (MB)</a:t>
+            </a:r>
+          </a:p>
+        </p:txBody>
+      </p:sp>
+      <p:graphicFrame>
+        <p:nvGraphicFramePr>
+          <p:cNvPr id="6" name="Chart 5"/>
+          <p:cNvGraphicFramePr/>
+          <p:nvPr/>
+        </p:nvGraphicFramePr>
+        <p:xfrm>
+          <a:off x="1097280" y="2377440"/>
+          <a:ext cx="2926080" cy="3291840"/>
+        </p:xfrm>
+        <a:graphic>
+          <a:graphicData uri="http://schemas.openxmlformats.org/drawingml/2006/chart">
+            <c:chart xmlns:c="http://schemas.openxmlformats.org/drawingml/2006/chart" xmlns:r="http://schemas.openxmlformats.org/officeDocument/2006/relationships" r:id="rId2"/>
+          </a:graphicData>
+        </a:graphic>
+      </p:graphicFrame>
+      <p:sp>
+        <p:nvSpPr>
+          <p:cNvPr id="7" name="roundRect 6"/>
+          <p:cNvSpPr/>
+          <p:nvPr/>
+        </p:nvSpPr>
+        <p:spPr>
+          <a:xfrm>
+            <a:off x="4443984" y="1828800"/>
+            <a:ext cx="3291840" cy="4114800"/>
+          </a:xfrm>
+          <a:prstGeom prst="roundRect">
+            <a:avLst/>
+          </a:prstGeom>
+          <a:solidFill>
+            <a:srgbClr val="1E293B"/>
+          </a:solidFill>
+          <a:ln w="13716">
+            <a:solidFill>
+              <a:srgbClr val="334155"/>
+            </a:solidFill>
+          </a:ln>
+          <a:effectLst>
+            <a:outerShdw blurRad="109728" dist="38100" dir="5400000">
+              <a:srgbClr val="000000">
+                <a:alpha val="30000"/>
+              </a:srgbClr>
+            </a:outerShdw>
+          </a:effectLst>
+        </p:spPr>
+        <p:txBody>
+          <a:bodyPr/>
+          <a:lstStyle/>
+          <a:p>
+            <a:endParaRPr/>
+          </a:p>
+        </p:txBody>
+      </p:sp>
+      <p:sp>
+        <p:nvSpPr>
+          <p:cNvPr id="8" name="Text Box 7"/>
+          <p:cNvSpPr txBox="1"/>
+          <p:nvPr/>
+        </p:nvSpPr>
+        <p:spPr>
+          <a:xfrm>
+            <a:off x="4626864" y="2011680"/>
+            <a:ext cx="2926080" cy="320040"/>
+          </a:xfrm>
+          <a:prstGeom prst="rect">
+            <a:avLst/>
+          </a:prstGeom>
+        </p:spPr>
+        <p:txBody>
+          <a:bodyPr anchor="t"/>
+          <a:lstStyle/>
+          <a:p>
+            <a:pPr algn="l"/>
+            <a:r>
+              <a:rPr b="1" sz="1200">
+                <a:solidFill>
+                  <a:srgbClr val="34D399"/>
+                </a:solidFill>
+                <a:latin typeface="+mn-lt"/>
+                <a:cs typeface="+mn-lt"/>
+              </a:rPr>
+              <a:t>🥧 2D Pie: Bundle Contribution</a:t>
+            </a:r>
+          </a:p>
+        </p:txBody>
+      </p:sp>
+      <p:graphicFrame>
+        <p:nvGraphicFramePr>
+          <p:cNvPr id="9" name="Chart 8"/>
+          <p:cNvGraphicFramePr/>
+          <p:nvPr/>
+        </p:nvGraphicFramePr>
+        <p:xfrm>
+          <a:off x="4626864" y="2377440"/>
+          <a:ext cx="2926080" cy="3291840"/>
+        </p:xfrm>
+        <a:graphic>
+          <a:graphicData uri="http://schemas.openxmlformats.org/drawingml/2006/chart">
+            <c:chart xmlns:c="http://schemas.openxmlformats.org/drawingml/2006/chart" xmlns:r="http://schemas.openxmlformats.org/officeDocument/2006/relationships" r:id="rId3"/>
+          </a:graphicData>
+        </a:graphic>
+      </p:graphicFrame>
+      <p:sp>
+        <p:nvSpPr>
+          <p:cNvPr id="10" name="roundRect 9"/>
+          <p:cNvSpPr/>
+          <p:nvPr/>
+        </p:nvSpPr>
+        <p:spPr>
+          <a:xfrm>
+            <a:off x="7982712" y="1828800"/>
+            <a:ext cx="3291840" cy="4114800"/>
+          </a:xfrm>
+          <a:prstGeom prst="roundRect">
+            <a:avLst/>
+          </a:prstGeom>
+          <a:solidFill>
+            <a:srgbClr val="1E293B"/>
+          </a:solidFill>
+          <a:ln w="13716">
+            <a:solidFill>
+              <a:srgbClr val="334155"/>
+            </a:solidFill>
+          </a:ln>
+          <a:effectLst>
+            <a:outerShdw blurRad="109728" dist="38100" dir="5400000">
+              <a:srgbClr val="000000">
+                <a:alpha val="30000"/>
+              </a:srgbClr>
+            </a:outerShdw>
+          </a:effectLst>
+        </p:spPr>
+        <p:txBody>
+          <a:bodyPr/>
+          <a:lstStyle/>
+          <a:p>
+            <a:endParaRPr/>
+          </a:p>
+        </p:txBody>
+      </p:sp>
+      <p:sp>
+        <p:nvSpPr>
+          <p:cNvPr id="11" name="Text Box 10"/>
+          <p:cNvSpPr txBox="1"/>
+          <p:nvPr/>
+        </p:nvSpPr>
+        <p:spPr>
+          <a:xfrm>
+            <a:off x="8165592" y="2011680"/>
+            <a:ext cx="2926080" cy="320040"/>
+          </a:xfrm>
+          <a:prstGeom prst="rect">
+            <a:avLst/>
+          </a:prstGeom>
+        </p:spPr>
+        <p:txBody>
+          <a:bodyPr anchor="t"/>
+          <a:lstStyle/>
+          <a:p>
+            <a:pPr algn="l"/>
+            <a:r>
+              <a:rPr b="1" sz="1200">
+                <a:solidFill>
+                  <a:srgbClr val="818CF8"/>
+                </a:solidFill>
+                <a:latin typeface="+mn-lt"/>
+                <a:cs typeface="+mn-lt"/>
+              </a:rPr>
+              <a:t>🎯 Radar: Performance Scorecard</a:t>
+            </a:r>
+          </a:p>
+        </p:txBody>
+      </p:sp>
+      <p:graphicFrame>
+        <p:nvGraphicFramePr>
+          <p:cNvPr id="12" name="Chart 11"/>
+          <p:cNvGraphicFramePr/>
+          <p:nvPr/>
+        </p:nvGraphicFramePr>
+        <p:xfrm>
+          <a:off x="8165592" y="2377440"/>
+          <a:ext cx="2926080" cy="3291840"/>
+        </p:xfrm>
+        <a:graphic>
+          <a:graphicData uri="http://schemas.openxmlformats.org/drawingml/2006/chart">
+            <c:chart xmlns:c="http://schemas.openxmlformats.org/drawingml/2006/chart" xmlns:r="http://schemas.openxmlformats.org/officeDocument/2006/relationships" r:id="rId4"/>
+          </a:graphicData>
+        </a:graphic>
+      </p:graphicFrame>
+      <p:sp>
+        <p:nvSpPr>
+          <p:cNvPr id="13" name="Text Box 12"/>
+          <p:cNvSpPr txBox="1"/>
+          <p:nvPr/>
+        </p:nvSpPr>
+        <p:spPr>
+          <a:xfrm>
+            <a:off x="731520" y="6510528"/>
+            <a:ext cx="10725912" cy="228600"/>
+          </a:xfrm>
+          <a:prstGeom prst="rect">
+            <a:avLst/>
+          </a:prstGeom>
+        </p:spPr>
+        <p:txBody>
+          <a:bodyPr anchor="t"/>
+          <a:lstStyle/>
+          <a:p>
+            <a:pPr algn="ctr"/>
+            <a:r>
+              <a:rPr i="1" sz="800">
+                <a:solidFill>
+                  <a:srgbClr val="64748B"/>
+                </a:solidFill>
+                <a:latin typeface="+mn-lt"/>
+                <a:cs typeface="+mn-lt"/>
+              </a:rPr>
+              <a:t>* Disclaimer: All benchmark metrics, performance figures, and simulated architectures in this deck are synthetic demonstration values generated solely to showcase the authoring, formatting, and rendering capabilities of @hokkyss/pptx.</a:t>
+            </a:r>
+          </a:p>
+        </p:txBody>
+      </p:sp>
+    </p:spTree>
+  </p:cSld>
+  <p:clrMapOvr>
+    <a:masterClrMapping/>
+  </p:clrMapOvr>
+  <p:transition spd="fast">
+    <p:checker dir="vert"/>
+  </p:transition>
+</p:sld>
+</file>
+
+<file path=ppt/slides/slide14.xml><?xml version="1.0" encoding="utf-8"?>
+<p:sld xmlns:a="http://schemas.openxmlformats.org/drawingml/2006/main" xmlns:p="http://schemas.openxmlformats.org/presentationml/2006/main" xmlns:r="http://schemas.openxmlformats.org/officeDocument/2006/relationships">
+  <p:cSld>
+    <p:bg>
+      <p:bgPr>
+        <a:solidFill>
+          <a:srgbClr val="F8FAFC"/>
+        </a:solidFill>
+        <a:effectLst/>
+      </p:bgPr>
+    </p:bg>
+    <p:spTree>
+      <p:nvGrpSpPr>
+        <p:cNvPr id="1" name=""/>
+        <p:cNvGrpSpPr/>
+        <p:nvPr/>
+      </p:nvGrpSpPr>
+      <p:grpSpPr>
+        <a:xfrm>
+          <a:off x="0" y="0"/>
+          <a:ext cx="0" cy="0"/>
+          <a:chOff x="0" y="0"/>
+          <a:chExt cx="0" cy="0"/>
+        </a:xfrm>
+      </p:grpSpPr>
+      <p:sp>
+        <p:nvSpPr>
+          <p:cNvPr id="2" name="Text Box 1"/>
+          <p:cNvSpPr txBox="1"/>
+          <p:nvPr/>
+        </p:nvSpPr>
+        <p:spPr>
+          <a:xfrm>
+            <a:off x="731520" y="731520"/>
+            <a:ext cx="10725912" cy="548640"/>
+          </a:xfrm>
+          <a:prstGeom prst="rect">
+            <a:avLst/>
+          </a:prstGeom>
+        </p:spPr>
+        <p:txBody>
+          <a:bodyPr anchor="t"/>
+          <a:lstStyle/>
+          <a:p>
+            <a:pPr algn="l"/>
+            <a:r>
+              <a:rPr b="1" sz="2400">
+                <a:solidFill>
+                  <a:srgbClr val="0F172A"/>
+                </a:solidFill>
+                <a:latin typeface="+mj-lt"/>
+                <a:cs typeface="+mj-lt"/>
+              </a:rPr>
+              <a:t>Native Hyperlinks &amp; Interactive Navigation System</a:t>
+            </a:r>
+          </a:p>
+        </p:txBody>
+      </p:sp>
+      <p:sp>
+        <p:nvSpPr>
+          <p:cNvPr id="3" name="Text Box 2"/>
+          <p:cNvSpPr txBox="1"/>
+          <p:nvPr/>
+        </p:nvSpPr>
+        <p:spPr>
+          <a:xfrm>
+            <a:off x="731520" y="1280160"/>
+            <a:ext cx="10725912" cy="365760"/>
+          </a:xfrm>
+          <a:prstGeom prst="rect">
+            <a:avLst/>
+          </a:prstGeom>
+        </p:spPr>
+        <p:txBody>
+          <a:bodyPr anchor="t"/>
+          <a:lstStyle/>
+          <a:p>
+            <a:pPr algn="l"/>
+            <a:r>
+              <a:rPr sz="1400">
+                <a:solidFill>
+                  <a:srgbClr val="64748B"/>
+                </a:solidFill>
+                <a:latin typeface="+mn-lt"/>
+                <a:cs typeface="+mn-lt"/>
+              </a:rPr>
+              <a:t>OpenXML DrawingML &lt;a:hlinkClick&gt; external URLs, slide navigation jumps, hover ScreenTips, and presentation controls</a:t>
+            </a:r>
+          </a:p>
+        </p:txBody>
+      </p:sp>
+      <p:sp>
+        <p:nvSpPr>
+          <p:cNvPr id="4" name="roundRect 3"/>
+          <p:cNvSpPr/>
+          <p:nvPr/>
+        </p:nvSpPr>
+        <p:spPr>
+          <a:xfrm>
+            <a:off x="731520" y="1828800"/>
+            <a:ext cx="5212080" cy="4480560"/>
+          </a:xfrm>
+          <a:prstGeom prst="roundRect">
+            <a:avLst/>
+          </a:prstGeom>
+          <a:solidFill>
+            <a:srgbClr val="FFFFFF"/>
+          </a:solidFill>
+          <a:ln w="13716">
+            <a:solidFill>
+              <a:srgbClr val="E2E8F0"/>
+            </a:solidFill>
+          </a:ln>
+          <a:effectLst>
+            <a:outerShdw blurRad="109728" dist="38100" dir="5400000">
+              <a:srgbClr val="0F172A">
+                <a:alpha val="8000"/>
+              </a:srgbClr>
+            </a:outerShdw>
+          </a:effectLst>
+        </p:spPr>
+        <p:txBody>
+          <a:bodyPr/>
+          <a:lstStyle/>
+          <a:p>
+            <a:endParaRPr/>
+          </a:p>
+        </p:txBody>
+      </p:sp>
+      <p:sp>
+        <p:nvSpPr>
+          <p:cNvPr id="5" name="Text Box 4"/>
+          <p:cNvSpPr txBox="1"/>
+          <p:nvPr/>
+        </p:nvSpPr>
+        <p:spPr>
+          <a:xfrm>
+            <a:off x="914400" y="2011680"/>
+            <a:ext cx="4846320" cy="320040"/>
+          </a:xfrm>
+          <a:prstGeom prst="rect">
+            <a:avLst/>
+          </a:prstGeom>
+        </p:spPr>
+        <p:txBody>
+          <a:bodyPr anchor="t"/>
+          <a:lstStyle/>
+          <a:p>
+            <a:pPr algn="l"/>
+            <a:r>
+              <a:rPr b="1" sz="1300">
+                <a:solidFill>
+                  <a:srgbClr val="0F172A"/>
+                </a:solidFill>
+                <a:latin typeface="+mn-lt"/>
+                <a:cs typeface="+mn-lt"/>
+              </a:rPr>
+              <a:t>🧭 Interactive Presentation Jump Hub</a:t>
+            </a:r>
+          </a:p>
+        </p:txBody>
+      </p:sp>
+      <p:sp>
+        <p:nvSpPr>
+          <p:cNvPr id="6" name="Text Box 5"/>
+          <p:cNvSpPr txBox="1"/>
+          <p:nvPr/>
+        </p:nvSpPr>
+        <p:spPr>
+          <a:xfrm>
+            <a:off x="914400" y="2331720"/>
+            <a:ext cx="4846320" cy="274320"/>
+          </a:xfrm>
+          <a:prstGeom prst="rect">
+            <a:avLst/>
+          </a:prstGeom>
+        </p:spPr>
+        <p:txBody>
+          <a:bodyPr anchor="t"/>
+          <a:lstStyle/>
+          <a:p>
+            <a:pPr algn="l"/>
+            <a:r>
+              <a:rPr sz="1050">
+                <a:solidFill>
+                  <a:srgbClr val="64748B"/>
+                </a:solidFill>
+                <a:latin typeface="+mn-lt"/>
+                <a:cs typeface="+mn-lt"/>
+              </a:rPr>
+              <a:t>Click any card below during slide show mode to immediately jump to that section:</a:t>
+            </a:r>
+          </a:p>
+        </p:txBody>
+      </p:sp>
+      <p:sp>
+        <p:nvSpPr>
+          <p:cNvPr id="7" name="roundRect 6">
+            <a:hlinkClick r:id="rId2" tooltip="Jump directly to Slide 2" action="ppaction://hlinksldjump"/>
+          </p:cNvPr>
+          <p:cNvSpPr/>
+          <p:nvPr/>
+        </p:nvSpPr>
+        <p:spPr>
+          <a:xfrm>
+            <a:off x="914400" y="2697480"/>
+            <a:ext cx="4846320" cy="749808"/>
+          </a:xfrm>
+          <a:prstGeom prst="roundRect">
+            <a:avLst/>
+          </a:prstGeom>
+          <a:solidFill>
+            <a:srgbClr val="EFF6FF"/>
+          </a:solidFill>
+          <a:ln w="13716">
+            <a:solidFill>
+              <a:srgbClr val="3B82F6"/>
+            </a:solidFill>
+          </a:ln>
+        </p:spPr>
+        <p:txBody>
+          <a:bodyPr anchor="t"/>
+          <a:lstStyle/>
+          <a:p>
+            <a:pPr algn="l"/>
+            <a:r>
+              <a:rPr b="1" sz="1100">
+                <a:solidFill>
+                  <a:srgbClr val="1D4ED8"/>
+                </a:solidFill>
+                <a:latin typeface="+mn-lt"/>
+                <a:cs typeface="+mn-lt"/>
+              </a:rPr>
+              <a:t>📐 Slide 2: Modular Architecture ➔</a:t>
+            </a:r>
+          </a:p>
+          <a:p>
+            <a:pPr algn="l"/>
+            <a:r>
+              <a:rPr sz="950">
+                <a:solidFill>
+                  <a:srgbClr val="64748B"/>
+                </a:solidFill>
+                <a:latin typeface="+mn-lt"/>
+                <a:cs typeface="+mn-lt"/>
+              </a:rPr>
+              <a:t>3-tier modular schemas &amp; strict units</a:t>
+            </a:r>
+          </a:p>
+        </p:txBody>
+      </p:sp>
+      <p:sp>
+        <p:nvSpPr>
+          <p:cNvPr id="8" name="roundRect 7">
+            <a:hlinkClick r:id="rId3" tooltip="Jump directly to Slide 8" action="ppaction://hlinksldjump"/>
+          </p:cNvPr>
+          <p:cNvSpPr/>
+          <p:nvPr/>
+        </p:nvSpPr>
+        <p:spPr>
+          <a:xfrm>
+            <a:off x="914400" y="3566160"/>
+            <a:ext cx="4846320" cy="749808"/>
+          </a:xfrm>
+          <a:prstGeom prst="roundRect">
+            <a:avLst/>
+          </a:prstGeom>
+          <a:solidFill>
+            <a:srgbClr val="F0FDF4"/>
+          </a:solidFill>
+          <a:ln w="13716">
+            <a:solidFill>
+              <a:srgbClr val="22C55E"/>
+            </a:solidFill>
+          </a:ln>
+        </p:spPr>
+        <p:txBody>
+          <a:bodyPr anchor="t"/>
+          <a:lstStyle/>
+          <a:p>
+            <a:pPr algn="l"/>
+            <a:r>
+              <a:rPr b="1" sz="1100">
+                <a:solidFill>
+                  <a:srgbClr val="15803D"/>
+                </a:solidFill>
+                <a:latin typeface="+mn-lt"/>
+                <a:cs typeface="+mn-lt"/>
+              </a:rPr>
+              <a:t>📑 Slide 8: Content Placeholder ➔</a:t>
+            </a:r>
+          </a:p>
+          <a:p>
+            <a:pPr algn="l"/>
+            <a:r>
+              <a:rPr sz="950">
+                <a:solidFill>
+                  <a:srgbClr val="64748B"/>
+                </a:solidFill>
+                <a:latin typeface="+mn-lt"/>
+                <a:cs typeface="+mn-lt"/>
+              </a:rPr>
+              <a:t>Native &lt;p:ph idx="1"/&gt; &amp; Shift+Enter breaks</a:t>
+            </a:r>
+          </a:p>
+        </p:txBody>
+      </p:sp>
+      <p:sp>
+        <p:nvSpPr>
+          <p:cNvPr id="9" name="roundRect 8">
+            <a:hlinkClick r:id="rId4" tooltip="Jump directly to Slide 11" action="ppaction://hlinksldjump"/>
+          </p:cNvPr>
+          <p:cNvSpPr/>
+          <p:nvPr/>
+        </p:nvSpPr>
+        <p:spPr>
+          <a:xfrm>
+            <a:off x="914400" y="4434840"/>
+            <a:ext cx="4846320" cy="749808"/>
+          </a:xfrm>
+          <a:prstGeom prst="roundRect">
+            <a:avLst/>
+          </a:prstGeom>
+          <a:solidFill>
+            <a:srgbClr val="ECFDF5"/>
+          </a:solidFill>
+          <a:ln w="13716">
+            <a:solidFill>
+              <a:srgbClr val="10B981"/>
+            </a:solidFill>
+          </a:ln>
+        </p:spPr>
+        <p:txBody>
+          <a:bodyPr anchor="t"/>
+          <a:lstStyle/>
+          <a:p>
+            <a:pPr algn="l"/>
+            <a:r>
+              <a:rPr b="1" sz="1100">
+                <a:solidFill>
+                  <a:srgbClr val="047857"/>
+                </a:solidFill>
+                <a:latin typeface="+mn-lt"/>
+                <a:cs typeface="+mn-lt"/>
+              </a:rPr>
+              <a:t>📈 Slide 11: OpenXML Charts &amp; Graphs ➔</a:t>
+            </a:r>
+          </a:p>
+          <a:p>
+            <a:pPr algn="l"/>
+            <a:r>
+              <a:rPr sz="950">
+                <a:solidFill>
+                  <a:srgbClr val="64748B"/>
+                </a:solidFill>
+                <a:latin typeface="+mn-lt"/>
+                <a:cs typeface="+mn-lt"/>
+              </a:rPr>
+              <a:t>Clustered bar &amp; line dual-series analytics</a:t>
+            </a:r>
+          </a:p>
+        </p:txBody>
+      </p:sp>
+      <p:sp>
+        <p:nvSpPr>
+          <p:cNvPr id="10" name="roundRect 9">
+            <a:hlinkClick r:id="rId5" tooltip="Jump directly to Slide 16" action="ppaction://hlinksldjump"/>
+          </p:cNvPr>
+          <p:cNvSpPr/>
+          <p:nvPr/>
+        </p:nvSpPr>
+        <p:spPr>
+          <a:xfrm>
+            <a:off x="914400" y="5303520"/>
+            <a:ext cx="4846320" cy="749808"/>
+          </a:xfrm>
+          <a:prstGeom prst="roundRect">
+            <a:avLst/>
+          </a:prstGeom>
+          <a:solidFill>
+            <a:srgbClr val="FFFBEB"/>
+          </a:solidFill>
+          <a:ln w="13716">
+            <a:solidFill>
+              <a:srgbClr val="F59E0B"/>
+            </a:solidFill>
+          </a:ln>
+        </p:spPr>
+        <p:txBody>
+          <a:bodyPr anchor="t"/>
+          <a:lstStyle/>
+          <a:p>
+            <a:pPr algn="l"/>
+            <a:r>
+              <a:rPr b="1" sz="1100">
+                <a:solidFill>
+                  <a:srgbClr val="B45309"/>
+                </a:solidFill>
+                <a:latin typeface="+mn-lt"/>
+                <a:cs typeface="+mn-lt"/>
+              </a:rPr>
+              <a:t>⚡ Slide 16: Engine Benchmark Matrix ➔</a:t>
+            </a:r>
+          </a:p>
+          <a:p>
+            <a:pPr algn="l"/>
+            <a:r>
+              <a:rPr sz="950">
+                <a:solidFill>
+                  <a:srgbClr val="64748B"/>
+                </a:solidFill>
+                <a:latin typeface="+mn-lt"/>
+                <a:cs typeface="+mn-lt"/>
+              </a:rPr>
+              <a:t>Empirical throughput &amp; bundle size matrix</a:t>
+            </a:r>
+          </a:p>
+        </p:txBody>
+      </p:sp>
+      <p:sp>
+        <p:nvSpPr>
+          <p:cNvPr id="11" name="roundRect 10"/>
+          <p:cNvSpPr/>
+          <p:nvPr/>
+        </p:nvSpPr>
+        <p:spPr>
+          <a:xfrm>
+            <a:off x="6217920" y="1828800"/>
+            <a:ext cx="5212080" cy="2377440"/>
+          </a:xfrm>
+          <a:prstGeom prst="roundRect">
+            <a:avLst/>
+          </a:prstGeom>
+          <a:solidFill>
+            <a:srgbClr val="FFFFFF"/>
+          </a:solidFill>
+          <a:ln w="13716">
+            <a:solidFill>
+              <a:srgbClr val="E2E8F0"/>
+            </a:solidFill>
+          </a:ln>
+          <a:effectLst>
+            <a:outerShdw blurRad="109728" dist="38100" dir="5400000">
+              <a:srgbClr val="0F172A">
+                <a:alpha val="8000"/>
+              </a:srgbClr>
+            </a:outerShdw>
+          </a:effectLst>
+        </p:spPr>
+        <p:txBody>
+          <a:bodyPr/>
+          <a:lstStyle/>
+          <a:p>
+            <a:endParaRPr/>
+          </a:p>
+        </p:txBody>
+      </p:sp>
+      <p:sp>
+        <p:nvSpPr>
+          <p:cNvPr id="12" name="Text Box 11"/>
+          <p:cNvSpPr txBox="1"/>
+          <p:nvPr/>
+        </p:nvSpPr>
+        <p:spPr>
+          <a:xfrm>
+            <a:off x="6400800" y="2011680"/>
+            <a:ext cx="4846320" cy="320040"/>
+          </a:xfrm>
+          <a:prstGeom prst="rect">
+            <a:avLst/>
+          </a:prstGeom>
+        </p:spPr>
+        <p:txBody>
+          <a:bodyPr anchor="t"/>
+          <a:lstStyle/>
+          <a:p>
+            <a:pPr algn="l"/>
+            <a:r>
+              <a:rPr b="1" sz="1300">
+                <a:solidFill>
+                  <a:srgbClr val="0F172A"/>
+                </a:solidFill>
+                <a:latin typeface="+mn-lt"/>
+                <a:cs typeface="+mn-lt"/>
+              </a:rPr>
+              <a:t>🔗 External Web &amp; Ecosystem Endpoints</a:t>
+            </a:r>
+          </a:p>
+        </p:txBody>
+      </p:sp>
+      <p:sp>
+        <p:nvSpPr>
+          <p:cNvPr id="13" name="Text Box 12"/>
+          <p:cNvSpPr txBox="1"/>
+          <p:nvPr/>
+        </p:nvSpPr>
+        <p:spPr>
+          <a:xfrm>
+            <a:off x="6400800" y="2377440"/>
+            <a:ext cx="4846320" cy="1645920"/>
+          </a:xfrm>
+          <a:prstGeom prst="rect">
+            <a:avLst/>
+          </a:prstGeom>
+        </p:spPr>
+        <p:txBody>
+          <a:bodyPr anchor="t"/>
+          <a:lstStyle/>
+          <a:p>
+            <a:pPr algn="l" lvl="0"/>
+            <a:r>
+              <a:rPr>
+                <a:latin typeface="+mn-lt"/>
+                <a:cs typeface="+mn-lt"/>
+              </a:rPr>
+              <a:t>• </a:t>
+            </a:r>
+            <a:r>
+              <a:rPr b="1" u="sng">
+                <a:solidFill>
+                  <a:srgbClr val="0284C7"/>
+                </a:solidFill>
+                <a:hlinkClick r:id="rId6" tooltip="View GitHub Repository &amp; Source Code"/>
+                <a:latin typeface="+mn-lt"/>
+                <a:cs typeface="+mn-lt"/>
+              </a:rPr>
+              <a:t>GitHub Repository (hokkyss/pptx-parser)</a:t>
+            </a:r>
+            <a:r>
+              <a:rPr>
+                <a:latin typeface="+mn-lt"/>
+                <a:cs typeface="+mn-lt"/>
+              </a:rPr>
+              <a:t> — Star &amp; contribute.</a:t>
+            </a:r>
+          </a:p>
+          <a:p>
+            <a:pPr algn="l" lvl="0"/>
+            <a:r>
+              <a:rPr>
+                <a:latin typeface="+mn-lt"/>
+                <a:cs typeface="+mn-lt"/>
+              </a:rPr>
+              <a:t>• </a:t>
+            </a:r>
+            <a:r>
+              <a:rPr b="1" u="sng">
+                <a:solidFill>
+                  <a:srgbClr val="6366F1"/>
+                </a:solidFill>
+                <a:hlinkClick r:id="rId7" tooltip="Inspect NPM Package Registry"/>
+                <a:latin typeface="+mn-lt"/>
+                <a:cs typeface="+mn-lt"/>
+              </a:rPr>
+              <a:t>NPM Package Registry (@hokkyss/pptx)</a:t>
+            </a:r>
+            <a:r>
+              <a:rPr>
+                <a:latin typeface="+mn-lt"/>
+                <a:cs typeface="+mn-lt"/>
+              </a:rPr>
+              <a:t> — Published release.</a:t>
+            </a:r>
+          </a:p>
+          <a:p>
+            <a:pPr algn="l" lvl="0"/>
+            <a:r>
+              <a:rPr>
+                <a:latin typeface="+mn-lt"/>
+                <a:cs typeface="+mn-lt"/>
+              </a:rPr>
+              <a:t>• </a:t>
+            </a:r>
+            <a:r>
+              <a:rPr b="1" u="sng">
+                <a:solidFill>
+                  <a:srgbClr val="10B981"/>
+                </a:solidFill>
+                <a:hlinkClick r:id="rId8" tooltip="View Issue Tracker &amp; Discussions"/>
+                <a:latin typeface="+mn-lt"/>
+                <a:cs typeface="+mn-lt"/>
+              </a:rPr>
+              <a:t>GitHub Issue Tracker &amp; Community</a:t>
+            </a:r>
+            <a:r>
+              <a:rPr>
+                <a:latin typeface="+mn-lt"/>
+                <a:cs typeface="+mn-lt"/>
+              </a:rPr>
+              <a:t> — Discussions &amp; issues.</a:t>
+            </a:r>
+          </a:p>
+        </p:txBody>
+      </p:sp>
+      <p:sp>
+        <p:nvSpPr>
+          <p:cNvPr id="14" name="roundRect 13"/>
+          <p:cNvSpPr/>
+          <p:nvPr/>
+        </p:nvSpPr>
+        <p:spPr>
+          <a:xfrm>
+            <a:off x="6217920" y="4389120"/>
+            <a:ext cx="5212080" cy="1920240"/>
+          </a:xfrm>
+          <a:prstGeom prst="roundRect">
+            <a:avLst/>
+          </a:prstGeom>
+          <a:solidFill>
+            <a:srgbClr val="FFFFFF"/>
+          </a:solidFill>
+          <a:ln w="13716">
+            <a:solidFill>
+              <a:srgbClr val="E2E8F0"/>
+            </a:solidFill>
+          </a:ln>
+          <a:effectLst>
+            <a:outerShdw blurRad="109728" dist="38100" dir="5400000">
+              <a:srgbClr val="0F172A">
+                <a:alpha val="8000"/>
+              </a:srgbClr>
+            </a:outerShdw>
+          </a:effectLst>
+        </p:spPr>
+        <p:txBody>
+          <a:bodyPr/>
+          <a:lstStyle/>
+          <a:p>
+            <a:endParaRPr/>
+          </a:p>
+        </p:txBody>
+      </p:sp>
+      <p:sp>
+        <p:nvSpPr>
           <p:cNvPr id="15" name="Text Box 14"/>
-          <p:cNvSpPr/>
+          <p:cNvSpPr txBox="1"/>
           <p:nvPr/>
         </p:nvSpPr>
         <p:spPr>
@@ -4821,7 +6494,7 @@
       <p:sp>
         <p:nvSpPr>
           <p:cNvPr id="16" name="Text Box 15"/>
-          <p:cNvSpPr/>
+          <p:cNvSpPr txBox="1"/>
           <p:nvPr/>
         </p:nvSpPr>
         <p:spPr>
@@ -4892,7 +6565,7 @@
       <p:sp>
         <p:nvSpPr>
           <p:cNvPr id="18" name="roundRect 17">
-            <a:hlinkClick tooltip="Jump to Slide 11" action="ppaction://hlinkshowjump?jump=previousslide"/>
+            <a:hlinkClick tooltip="Jump to Slide 13" action="ppaction://hlinkshowjump?jump=previousslide"/>
           </p:cNvPr>
           <p:cNvSpPr/>
           <p:nvPr/>
@@ -4930,7 +6603,7 @@
       <p:sp>
         <p:nvSpPr>
           <p:cNvPr id="19" name="roundRect 18">
-            <a:hlinkClick tooltip="Jump to Slide 13" action="ppaction://hlinkshowjump?jump=nextslide"/>
+            <a:hlinkClick tooltip="Jump to Slide 15" action="ppaction://hlinkshowjump?jump=nextslide"/>
           </p:cNvPr>
           <p:cNvSpPr/>
           <p:nvPr/>
@@ -5006,7 +6679,7 @@
       <p:sp>
         <p:nvSpPr>
           <p:cNvPr id="21" name="Text Box 20"/>
-          <p:cNvSpPr/>
+          <p:cNvSpPr txBox="1"/>
           <p:nvPr/>
         </p:nvSpPr>
         <p:spPr>
@@ -5047,7 +6720,7 @@
 </p:sld>
 </file>
 
-<file path=ppt/slides/slide13.xml><?xml version="1.0" encoding="utf-8"?>
+<file path=ppt/slides/slide15.xml><?xml version="1.0" encoding="utf-8"?>
 <p:sld xmlns:a="http://schemas.openxmlformats.org/drawingml/2006/main" xmlns:p="http://schemas.openxmlformats.org/presentationml/2006/main" xmlns:r="http://schemas.openxmlformats.org/officeDocument/2006/relationships">
   <p:cSld>
     <p:bg>
@@ -5086,7 +6759,7 @@
       <p:sp>
         <p:nvSpPr>
           <p:cNvPr id="2" name="Text Box 1"/>
-          <p:cNvSpPr/>
+          <p:cNvSpPr txBox="1"/>
           <p:nvPr/>
         </p:nvSpPr>
         <p:spPr>
@@ -5119,7 +6792,7 @@
       <p:sp>
         <p:nvSpPr>
           <p:cNvPr id="3" name="Text Box 2"/>
-          <p:cNvSpPr/>
+          <p:cNvSpPr txBox="1"/>
           <p:nvPr/>
         </p:nvSpPr>
         <p:spPr>
@@ -5152,7 +6825,7 @@
       <p:sp>
         <p:nvSpPr>
           <p:cNvPr id="4" name="roundRect 3">
-            <a:hlinkClick r:id="rId2" tooltip="Return to Hyperlinks Hub (Slide 12)" action="ppaction://hlinksldjump"/>
+            <a:hlinkClick r:id="rId2" tooltip="Return to Hyperlinks Hub (Slide 14)" action="ppaction://hlinksldjump"/>
           </p:cNvPr>
           <p:cNvSpPr/>
           <p:nvPr/>
@@ -5202,7 +6875,7 @@
       <p:sp>
         <p:nvSpPr>
           <p:cNvPr id="5" name="roundRect 4">
-            <a:hlinkClick r:id="rId3" tooltip="Advance to Live Benchmarks (Slide 14)" action="ppaction://hlinksldjump"/>
+            <a:hlinkClick r:id="rId3" tooltip="Advance to Live Benchmarks (Slide 16)" action="ppaction://hlinksldjump"/>
           </p:cNvPr>
           <p:cNvSpPr/>
           <p:nvPr/>
@@ -5298,7 +6971,7 @@
       <p:sp>
         <p:nvSpPr>
           <p:cNvPr id="7" name="Text Box 6"/>
-          <p:cNvSpPr/>
+          <p:cNvSpPr txBox="1"/>
           <p:nvPr/>
         </p:nvSpPr>
         <p:spPr>
@@ -5585,7 +7258,7 @@
       <p:sp>
         <p:nvSpPr>
           <p:cNvPr id="12" name="Text Box 11"/>
-          <p:cNvSpPr/>
+          <p:cNvSpPr txBox="1"/>
           <p:nvPr/>
         </p:nvSpPr>
         <p:spPr>
@@ -5669,7 +7342,7 @@
       <p:sp>
         <p:nvSpPr>
           <p:cNvPr id="14" name="Text Box 13"/>
-          <p:cNvSpPr/>
+          <p:cNvSpPr txBox="1"/>
           <p:nvPr/>
         </p:nvSpPr>
         <p:spPr>
@@ -5873,7 +7546,7 @@
       <p:sp>
         <p:nvSpPr>
           <p:cNvPr id="17" name="Text Box 16"/>
-          <p:cNvSpPr/>
+          <p:cNvSpPr txBox="1"/>
           <p:nvPr/>
         </p:nvSpPr>
         <p:spPr>
@@ -5914,7 +7587,7 @@
 </p:sld>
 </file>
 
-<file path=ppt/slides/slide14.xml><?xml version="1.0" encoding="utf-8"?>
+<file path=ppt/slides/slide16.xml><?xml version="1.0" encoding="utf-8"?>
 <p:sld xmlns:a="http://schemas.openxmlformats.org/drawingml/2006/main" xmlns:p="http://schemas.openxmlformats.org/presentationml/2006/main" xmlns:r="http://schemas.openxmlformats.org/officeDocument/2006/relationships">
   <p:cSld>
     <p:bg>
@@ -5942,7 +7615,7 @@
       <p:sp>
         <p:nvSpPr>
           <p:cNvPr id="2" name="Text Box 1"/>
-          <p:cNvSpPr/>
+          <p:cNvSpPr txBox="1"/>
           <p:nvPr/>
         </p:nvSpPr>
         <p:spPr>
@@ -5975,7 +7648,7 @@
       <p:sp>
         <p:nvSpPr>
           <p:cNvPr id="3" name="Text Box 2"/>
-          <p:cNvSpPr/>
+          <p:cNvSpPr txBox="1"/>
           <p:nvPr/>
         </p:nvSpPr>
         <p:spPr>
@@ -6046,7 +7719,7 @@
       <p:sp>
         <p:nvSpPr>
           <p:cNvPr id="5" name="Text Box 4"/>
-          <p:cNvSpPr/>
+          <p:cNvSpPr txBox="1"/>
           <p:nvPr/>
         </p:nvSpPr>
         <p:spPr>
@@ -6829,7 +8502,7 @@
       <p:sp>
         <p:nvSpPr>
           <p:cNvPr id="8" name="Text Box 7"/>
-          <p:cNvSpPr/>
+          <p:cNvSpPr txBox="1"/>
           <p:nvPr/>
         </p:nvSpPr>
         <p:spPr>
@@ -6878,7 +8551,7 @@
       <p:sp>
         <p:nvSpPr>
           <p:cNvPr id="10" name="roundRect 9">
-            <a:hlinkClick r:id="rId3" tooltip="Return to Hyperlinks Hub (Slide 12)" action="ppaction://hlinksldjump"/>
+            <a:hlinkClick r:id="rId3" tooltip="Return to Hyperlinks Hub (Slide 14)" action="ppaction://hlinksldjump"/>
           </p:cNvPr>
           <p:cNvSpPr/>
           <p:nvPr/>
@@ -6928,7 +8601,7 @@
       <p:sp>
         <p:nvSpPr>
           <p:cNvPr id="11" name="Text Box 10"/>
-          <p:cNvSpPr/>
+          <p:cNvSpPr txBox="1"/>
           <p:nvPr/>
         </p:nvSpPr>
         <p:spPr>
@@ -6997,7 +8670,7 @@
       <p:sp>
         <p:nvSpPr>
           <p:cNvPr id="2" name="Text Box 1"/>
-          <p:cNvSpPr/>
+          <p:cNvSpPr txBox="1"/>
           <p:nvPr/>
         </p:nvSpPr>
         <p:spPr>
@@ -7030,7 +8703,7 @@
       <p:sp>
         <p:nvSpPr>
           <p:cNvPr id="3" name="Text Box 2"/>
-          <p:cNvSpPr/>
+          <p:cNvSpPr txBox="1"/>
           <p:nvPr/>
         </p:nvSpPr>
         <p:spPr>
@@ -7460,7 +9133,7 @@
       <p:sp>
         <p:nvSpPr>
           <p:cNvPr id="12" name="Text Box 11"/>
-          <p:cNvSpPr/>
+          <p:cNvSpPr txBox="1"/>
           <p:nvPr/>
         </p:nvSpPr>
         <p:spPr>
@@ -7529,7 +9202,7 @@
       <p:sp>
         <p:nvSpPr>
           <p:cNvPr id="2" name="Text Box 1"/>
-          <p:cNvSpPr/>
+          <p:cNvSpPr txBox="1"/>
           <p:nvPr/>
         </p:nvSpPr>
         <p:spPr>
@@ -7562,7 +9235,7 @@
       <p:sp>
         <p:nvSpPr>
           <p:cNvPr id="3" name="Text Box 2"/>
-          <p:cNvSpPr/>
+          <p:cNvSpPr txBox="1"/>
           <p:nvPr/>
         </p:nvSpPr>
         <p:spPr>
@@ -8354,7 +10027,7 @@
       <p:sp>
         <p:nvSpPr>
           <p:cNvPr id="5" name="Text Box 4"/>
-          <p:cNvSpPr/>
+          <p:cNvSpPr txBox="1"/>
           <p:nvPr/>
         </p:nvSpPr>
         <p:spPr>
@@ -8423,7 +10096,7 @@
       <p:sp>
         <p:nvSpPr>
           <p:cNvPr id="2" name="Text Box 1"/>
-          <p:cNvSpPr/>
+          <p:cNvSpPr txBox="1"/>
           <p:nvPr/>
         </p:nvSpPr>
         <p:spPr>
@@ -8456,7 +10129,7 @@
       <p:sp>
         <p:nvSpPr>
           <p:cNvPr id="3" name="Text Box 2"/>
-          <p:cNvSpPr/>
+          <p:cNvSpPr txBox="1"/>
           <p:nvPr/>
         </p:nvSpPr>
         <p:spPr>
@@ -8472,7 +10145,9 @@
           <a:bodyPr anchor="t"/>
           <a:lstStyle/>
           <a:p>
-            <a:pPr algn="l" lvl="0"/>
+            <a:pPr algn="l" lvl="0" marL="152400" indent="-152400">
+              <a:buChar char="•"/>
+            </a:pPr>
             <a:r>
               <a:rPr sz="1200">
                 <a:solidFill>
@@ -8485,7 +10160,9 @@
             </a:r>
           </a:p>
           <a:p>
-            <a:pPr algn="l" lvl="1"/>
+            <a:pPr algn="l" lvl="1" marL="381000" indent="-152400">
+              <a:buChar char="•"/>
+            </a:pPr>
             <a:r>
               <a:rPr sz="1200">
                 <a:solidFill>
@@ -8498,7 +10175,9 @@
             </a:r>
           </a:p>
           <a:p>
-            <a:pPr algn="l" lvl="2"/>
+            <a:pPr algn="l" lvl="2" marL="609600" indent="-152400">
+              <a:buChar char="•"/>
+            </a:pPr>
             <a:r>
               <a:rPr sz="1200">
                 <a:solidFill>
@@ -8541,7 +10220,9 @@
             </a:r>
           </a:p>
           <a:p>
-            <a:pPr algn="l" lvl="2"/>
+            <a:pPr algn="l" lvl="2" marL="609600" indent="-152400">
+              <a:buChar char="•"/>
+            </a:pPr>
             <a:r>
               <a:rPr sz="1200">
                 <a:solidFill>
@@ -8584,7 +10265,9 @@
             </a:r>
           </a:p>
           <a:p>
-            <a:pPr algn="l" lvl="2"/>
+            <a:pPr algn="l" lvl="2" marL="609600" indent="-152400">
+              <a:buChar char="•"/>
+            </a:pPr>
             <a:r>
               <a:rPr sz="1200">
                 <a:solidFill>
@@ -8627,7 +10310,9 @@
             </a:r>
           </a:p>
           <a:p>
-            <a:pPr algn="l" lvl="0"/>
+            <a:pPr algn="l" lvl="0" marL="152400" indent="-152400">
+              <a:buChar char="•"/>
+            </a:pPr>
             <a:r>
               <a:rPr sz="1200">
                 <a:solidFill>
@@ -8640,7 +10325,9 @@
             </a:r>
           </a:p>
           <a:p>
-            <a:pPr algn="l" lvl="1"/>
+            <a:pPr algn="l" lvl="1" marL="381000" indent="-152400">
+              <a:buChar char="•"/>
+            </a:pPr>
             <a:r>
               <a:rPr sz="1200">
                 <a:solidFill>
@@ -8653,7 +10340,9 @@
             </a:r>
           </a:p>
           <a:p>
-            <a:pPr algn="l" lvl="2"/>
+            <a:pPr algn="l" lvl="2" marL="609600" indent="-152400">
+              <a:buChar char="•"/>
+            </a:pPr>
             <a:r>
               <a:rPr sz="1200">
                 <a:solidFill>
@@ -8760,7 +10449,7 @@
       <p:sp>
         <p:nvSpPr>
           <p:cNvPr id="4" name="Text Box 3"/>
-          <p:cNvSpPr/>
+          <p:cNvSpPr txBox="1"/>
           <p:nvPr/>
         </p:nvSpPr>
         <p:spPr>
@@ -8829,7 +10518,7 @@
       <p:sp>
         <p:nvSpPr>
           <p:cNvPr id="2" name="Text Box 1"/>
-          <p:cNvSpPr/>
+          <p:cNvSpPr txBox="1"/>
           <p:nvPr/>
         </p:nvSpPr>
         <p:spPr>
@@ -8862,7 +10551,7 @@
       <p:sp>
         <p:nvSpPr>
           <p:cNvPr id="3" name="Text Box 2"/>
-          <p:cNvSpPr/>
+          <p:cNvSpPr txBox="1"/>
           <p:nvPr/>
         </p:nvSpPr>
         <p:spPr>
@@ -8974,7 +10663,7 @@
       <p:sp>
         <p:nvSpPr>
           <p:cNvPr id="6" name="Text Box 5"/>
-          <p:cNvSpPr/>
+          <p:cNvSpPr txBox="1"/>
           <p:nvPr/>
         </p:nvSpPr>
         <p:spPr>
@@ -9007,7 +10696,7 @@
       <p:sp>
         <p:nvSpPr>
           <p:cNvPr id="7" name="Text Box 6"/>
-          <p:cNvSpPr/>
+          <p:cNvSpPr txBox="1"/>
           <p:nvPr/>
         </p:nvSpPr>
         <p:spPr>
@@ -9145,7 +10834,7 @@
       <p:sp>
         <p:nvSpPr>
           <p:cNvPr id="10" name="Text Box 9"/>
-          <p:cNvSpPr/>
+          <p:cNvSpPr txBox="1"/>
           <p:nvPr/>
         </p:nvSpPr>
         <p:spPr>
@@ -9178,7 +10867,7 @@
       <p:sp>
         <p:nvSpPr>
           <p:cNvPr id="11" name="Text Box 10"/>
-          <p:cNvSpPr/>
+          <p:cNvSpPr txBox="1"/>
           <p:nvPr/>
         </p:nvSpPr>
         <p:spPr>
@@ -9316,7 +11005,7 @@
       <p:sp>
         <p:nvSpPr>
           <p:cNvPr id="14" name="Text Box 13"/>
-          <p:cNvSpPr/>
+          <p:cNvSpPr txBox="1"/>
           <p:nvPr/>
         </p:nvSpPr>
         <p:spPr>
@@ -9349,7 +11038,7 @@
       <p:sp>
         <p:nvSpPr>
           <p:cNvPr id="15" name="Text Box 14"/>
-          <p:cNvSpPr/>
+          <p:cNvSpPr txBox="1"/>
           <p:nvPr/>
         </p:nvSpPr>
         <p:spPr>
@@ -9408,7 +11097,7 @@
       <p:sp>
         <p:nvSpPr>
           <p:cNvPr id="16" name="Text Box 15"/>
-          <p:cNvSpPr/>
+          <p:cNvSpPr txBox="1"/>
           <p:nvPr/>
         </p:nvSpPr>
         <p:spPr>
@@ -9477,7 +11166,7 @@
       <p:sp>
         <p:nvSpPr>
           <p:cNvPr id="2" name="Text Box 1"/>
-          <p:cNvSpPr/>
+          <p:cNvSpPr txBox="1"/>
           <p:nvPr/>
         </p:nvSpPr>
         <p:spPr>
@@ -9510,7 +11199,7 @@
       <p:sp>
         <p:nvSpPr>
           <p:cNvPr id="3" name="Text Box 2"/>
-          <p:cNvSpPr/>
+          <p:cNvSpPr txBox="1"/>
           <p:nvPr/>
         </p:nvSpPr>
         <p:spPr>
@@ -9605,7 +11294,7 @@
       <p:sp>
         <p:nvSpPr>
           <p:cNvPr id="6" name="Text Box 5"/>
-          <p:cNvSpPr/>
+          <p:cNvSpPr txBox="1"/>
           <p:nvPr/>
         </p:nvSpPr>
         <p:spPr>
@@ -9638,7 +11327,7 @@
       <p:sp>
         <p:nvSpPr>
           <p:cNvPr id="7" name="Text Box 6"/>
-          <p:cNvSpPr/>
+          <p:cNvSpPr txBox="1"/>
           <p:nvPr/>
         </p:nvSpPr>
         <p:spPr>
@@ -9759,7 +11448,7 @@
       <p:sp>
         <p:nvSpPr>
           <p:cNvPr id="11" name="Text Box 10"/>
-          <p:cNvSpPr/>
+          <p:cNvSpPr txBox="1"/>
           <p:nvPr/>
         </p:nvSpPr>
         <p:spPr>
@@ -9792,7 +11481,7 @@
       <p:sp>
         <p:nvSpPr>
           <p:cNvPr id="12" name="Text Box 11"/>
-          <p:cNvSpPr/>
+          <p:cNvSpPr txBox="1"/>
           <p:nvPr/>
         </p:nvSpPr>
         <p:spPr>
@@ -9872,7 +11561,7 @@
       <p:sp>
         <p:nvSpPr>
           <p:cNvPr id="13" name="Text Box 12"/>
-          <p:cNvSpPr/>
+          <p:cNvSpPr txBox="1"/>
           <p:nvPr/>
         </p:nvSpPr>
         <p:spPr>
@@ -9941,7 +11630,7 @@
       <p:sp>
         <p:nvSpPr>
           <p:cNvPr id="2" name="Text Box 1"/>
-          <p:cNvSpPr/>
+          <p:cNvSpPr txBox="1"/>
           <p:nvPr/>
         </p:nvSpPr>
         <p:spPr>
@@ -9966,7 +11655,7 @@
                 <a:latin typeface="+mj-lt"/>
                 <a:cs typeface="+mj-lt"/>
               </a:rPr>
-              <a:t>Complex Multi-Level Outlining &amp; Hierarchy Matrix</a:t>
+              <a:t>Complex Multi-Level Outlining &amp; PowerPoint Parity Matrix</a:t>
             </a:r>
           </a:p>
         </p:txBody>
@@ -9974,7 +11663,7 @@
       <p:sp>
         <p:nvSpPr>
           <p:cNvPr id="3" name="Text Box 2"/>
-          <p:cNvSpPr/>
+          <p:cNvSpPr txBox="1"/>
           <p:nvPr/>
         </p:nvSpPr>
         <p:spPr>
@@ -9992,14 +11681,14 @@
           <a:p>
             <a:pPr algn="l"/>
             <a:r>
-              <a:rPr sz="1400">
+              <a:rPr sz="1300">
                 <a:solidFill>
                   <a:srgbClr val="94A3B8"/>
                 </a:solidFill>
                 <a:latin typeface="+mn-lt"/>
                 <a:cs typeface="+mn-lt"/>
               </a:rPr>
-              <a:t>Demonstrating 4 levels of hierarchical indentation, mixed bullet glyphs, auto-numbering, and paragraph spacing</a:t>
+              <a:t>Demonstrating Shift + Enter soft breaks (&lt;a:br&gt;), Tab / Shift + Tab hierarchical levels (0-3), and master styling inheritance</a:t>
             </a:r>
           </a:p>
         </p:txBody>
@@ -10045,7 +11734,7 @@
       <p:sp>
         <p:nvSpPr>
           <p:cNvPr id="5" name="Text Box 4"/>
-          <p:cNvSpPr/>
+          <p:cNvSpPr txBox="1"/>
           <p:nvPr/>
         </p:nvSpPr>
         <p:spPr>
@@ -10070,7 +11759,7 @@
                 <a:latin typeface="+mn-lt"/>
                 <a:cs typeface="+mn-lt"/>
               </a:rPr>
-              <a:t>System Topology Outlining</a:t>
+              <a:t>PowerPoint Parity: Shift+Enter &amp; Tab Levels</a:t>
             </a:r>
           </a:p>
         </p:txBody>
@@ -10078,7 +11767,7 @@
       <p:sp>
         <p:nvSpPr>
           <p:cNvPr id="6" name="Text Box 5"/>
-          <p:cNvSpPr/>
+          <p:cNvSpPr txBox="1"/>
           <p:nvPr/>
         </p:nvSpPr>
         <p:spPr>
@@ -10098,7 +11787,7 @@
               <a:buChar char="•"/>
             </a:pPr>
             <a:r>
-              <a:rPr sz="1100">
+              <a:rPr b="1" sz="1050">
                 <a:solidFill>
                   <a:srgbClr val="CBD5E1"/>
                 </a:solidFill>
@@ -10106,6 +11795,25 @@
                 <a:cs typeface="+mn-lt"/>
               </a:rPr>
               <a:t>Core Infrastructure Fleet</a:t>
+            </a:r>
+            <a:br>
+              <a:rPr sz="1050">
+                <a:solidFill>
+                  <a:srgbClr val="CBD5E1"/>
+                </a:solidFill>
+                <a:latin typeface="+mn-lt"/>
+                <a:cs typeface="+mn-lt"/>
+              </a:rPr>
+            </a:br>
+            <a:r>
+              <a:rPr sz="1050">
+                <a:solidFill>
+                  <a:srgbClr val="94A3B8"/>
+                </a:solidFill>
+                <a:latin typeface="+mn-lt"/>
+                <a:cs typeface="+mn-lt"/>
+              </a:rPr>
+              <a:t>↳ Shift+Enter: soft break continuation under same bullet</a:t>
             </a:r>
           </a:p>
           <a:p>
@@ -10113,7 +11821,7 @@
               <a:buChar char="•"/>
             </a:pPr>
             <a:r>
-              <a:rPr sz="1100">
+              <a:rPr sz="1050">
                 <a:solidFill>
                   <a:srgbClr val="CBD5E1"/>
                 </a:solidFill>
@@ -10121,6 +11829,25 @@
                 <a:cs typeface="+mn-lt"/>
               </a:rPr>
               <a:t>Edge Routing Layer (Anycast DNS)</a:t>
+            </a:r>
+            <a:br>
+              <a:rPr sz="1050">
+                <a:solidFill>
+                  <a:srgbClr val="CBD5E1"/>
+                </a:solidFill>
+                <a:latin typeface="+mn-lt"/>
+                <a:cs typeface="+mn-lt"/>
+              </a:rPr>
+            </a:br>
+            <a:r>
+              <a:rPr sz="1050">
+                <a:solidFill>
+                  <a:srgbClr val="94A3B8"/>
+                </a:solidFill>
+                <a:latin typeface="+mn-lt"/>
+                <a:cs typeface="+mn-lt"/>
+              </a:rPr>
+              <a:t>↳ Tab indent: sub-ms global route resolution</a:t>
             </a:r>
           </a:p>
           <a:p>
@@ -10128,14 +11855,33 @@
               <a:buChar char="•"/>
             </a:pPr>
             <a:r>
-              <a:rPr sz="1100">
+              <a:rPr sz="1050">
                 <a:solidFill>
                   <a:srgbClr val="CBD5E1"/>
                 </a:solidFill>
                 <a:latin typeface="+mn-lt"/>
                 <a:cs typeface="+mn-lt"/>
               </a:rPr>
-              <a:t>TLS 1.3 Handshake Termination</a:t>
+              <a:t>TLS 1.3 Security Envelope</a:t>
+            </a:r>
+            <a:br>
+              <a:rPr sz="1050">
+                <a:solidFill>
+                  <a:srgbClr val="CBD5E1"/>
+                </a:solidFill>
+                <a:latin typeface="+mn-lt"/>
+                <a:cs typeface="+mn-lt"/>
+              </a:rPr>
+            </a:br>
+            <a:r>
+              <a:rPr sz="1050">
+                <a:solidFill>
+                  <a:srgbClr val="94A3B8"/>
+                </a:solidFill>
+                <a:latin typeface="+mn-lt"/>
+                <a:cs typeface="+mn-lt"/>
+              </a:rPr>
+              <a:t>↳ Tab Tab: 0-RTT session resumption</a:t>
             </a:r>
           </a:p>
           <a:p>
@@ -10143,59 +11889,48 @@
               <a:buChar char="•"/>
             </a:pPr>
             <a:r>
-              <a:rPr sz="1100">
+              <a:rPr sz="1050">
                 <a:solidFill>
                   <a:srgbClr val="CBD5E1"/>
                 </a:solidFill>
                 <a:latin typeface="+mn-lt"/>
                 <a:cs typeface="+mn-lt"/>
               </a:rPr>
-              <a:t>Zero-RTT session resumption</a:t>
-            </a:r>
-          </a:p>
-          <a:p>
-            <a:pPr algn="l" lvl="3" marL="838200" indent="-152400">
+              <a:t>DDoS heuristic anomaly mitigation filter</a:t>
+            </a:r>
+          </a:p>
+          <a:p>
+            <a:pPr algn="l" lvl="0" marL="152400" indent="-152400">
               <a:buChar char="•"/>
             </a:pPr>
             <a:r>
-              <a:rPr sz="1100">
+              <a:rPr b="1" sz="1050">
                 <a:solidFill>
                   <a:srgbClr val="CBD5E1"/>
                 </a:solidFill>
                 <a:latin typeface="+mn-lt"/>
                 <a:cs typeface="+mn-lt"/>
               </a:rPr>
-              <a:t>DDoS mitigation heuristic filters</a:t>
-            </a:r>
-          </a:p>
-          <a:p>
-            <a:pPr algn="l" lvl="2" marL="609600" indent="-152400">
-              <a:buChar char="•"/>
-            </a:pPr>
-            <a:r>
-              <a:rPr sz="1100">
+              <a:t>Global State &amp; Cache Synchronization</a:t>
+            </a:r>
+            <a:br>
+              <a:rPr sz="1050">
                 <a:solidFill>
                   <a:srgbClr val="CBD5E1"/>
                 </a:solidFill>
                 <a:latin typeface="+mn-lt"/>
                 <a:cs typeface="+mn-lt"/>
               </a:rPr>
-              <a:t>Geo-Distributed Compute Mesh</a:t>
-            </a:r>
-          </a:p>
-          <a:p>
-            <a:pPr algn="l" lvl="3" marL="838200" indent="-152400">
-              <a:buChar char="•"/>
-            </a:pPr>
-            <a:r>
-              <a:rPr sz="1100">
-                <a:solidFill>
-                  <a:srgbClr val="CBD5E1"/>
-                </a:solidFill>
-                <a:latin typeface="+mn-lt"/>
-                <a:cs typeface="+mn-lt"/>
-              </a:rPr>
-              <a:t>Sub-millisecond V8 isolate provisioning</a:t>
+            </a:br>
+            <a:r>
+              <a:rPr sz="1050">
+                <a:solidFill>
+                  <a:srgbClr val="94A3B8"/>
+                </a:solidFill>
+                <a:latin typeface="+mn-lt"/>
+                <a:cs typeface="+mn-lt"/>
+              </a:rPr>
+              <a:t>↳ Shift+Tab: returns to level 0 root bullet</a:t>
             </a:r>
           </a:p>
           <a:p>
@@ -10203,44 +11938,14 @@
               <a:buChar char="•"/>
             </a:pPr>
             <a:r>
-              <a:rPr sz="1100">
+              <a:rPr sz="1050">
                 <a:solidFill>
                   <a:srgbClr val="CBD5E1"/>
                 </a:solidFill>
                 <a:latin typeface="+mn-lt"/>
                 <a:cs typeface="+mn-lt"/>
               </a:rPr>
-              <a:t>Global State &amp; Cache Synchronization</a:t>
-            </a:r>
-          </a:p>
-          <a:p>
-            <a:pPr algn="l" lvl="2" marL="609600" indent="-152400">
-              <a:buChar char="•"/>
-            </a:pPr>
-            <a:r>
-              <a:rPr sz="1100">
-                <a:solidFill>
-                  <a:srgbClr val="CBD5E1"/>
-                </a:solidFill>
-                <a:latin typeface="+mn-lt"/>
-                <a:cs typeface="+mn-lt"/>
-              </a:rPr>
-              <a:t>D1 Relational Database SQLite Replicas</a:t>
-            </a:r>
-          </a:p>
-          <a:p>
-            <a:pPr algn="l" lvl="2" marL="609600" indent="-152400">
-              <a:buChar char="•"/>
-            </a:pPr>
-            <a:r>
-              <a:rPr sz="1100">
-                <a:solidFill>
-                  <a:srgbClr val="CBD5E1"/>
-                </a:solidFill>
-                <a:latin typeface="+mn-lt"/>
-                <a:cs typeface="+mn-lt"/>
-              </a:rPr>
-              <a:t>KV Cache (Read-heavy eventual consistency)</a:t>
+              <a:t>D1 SQLite Replicas + KV Cache</a:t>
             </a:r>
           </a:p>
         </p:txBody>
@@ -10286,7 +11991,7 @@
       <p:sp>
         <p:nvSpPr>
           <p:cNvPr id="8" name="Text Box 7"/>
-          <p:cNvSpPr/>
+          <p:cNvSpPr txBox="1"/>
           <p:nvPr/>
         </p:nvSpPr>
         <p:spPr>
@@ -10311,7 +12016,7 @@
                 <a:latin typeface="+mn-lt"/>
                 <a:cs typeface="+mn-lt"/>
               </a:rPr>
-              <a:t>Compilation Pipeline Lifecycle</a:t>
+              <a:t>Compilation Lifecycle with Soft Breaks</a:t>
             </a:r>
           </a:p>
         </p:txBody>
@@ -10319,7 +12024,7 @@
       <p:sp>
         <p:nvSpPr>
           <p:cNvPr id="9" name="Text Box 8"/>
-          <p:cNvSpPr/>
+          <p:cNvSpPr txBox="1"/>
           <p:nvPr/>
         </p:nvSpPr>
         <p:spPr>
@@ -10339,7 +12044,7 @@
               <a:buAutoNum type="arabicPeriod"/>
             </a:pPr>
             <a:r>
-              <a:rPr sz="1100">
+              <a:rPr b="1" sz="1050">
                 <a:solidFill>
                   <a:srgbClr val="CBD5E1"/>
                 </a:solidFill>
@@ -10347,6 +12052,25 @@
                 <a:cs typeface="+mn-lt"/>
               </a:rPr>
               <a:t>Phase 1: Ingestion &amp; Parsing</a:t>
+            </a:r>
+            <a:br>
+              <a:rPr sz="1050">
+                <a:solidFill>
+                  <a:srgbClr val="CBD5E1"/>
+                </a:solidFill>
+                <a:latin typeface="+mn-lt"/>
+                <a:cs typeface="+mn-lt"/>
+              </a:rPr>
+            </a:br>
+            <a:r>
+              <a:rPr sz="1050">
+                <a:solidFill>
+                  <a:srgbClr val="94A3B8"/>
+                </a:solidFill>
+                <a:latin typeface="+mn-lt"/>
+                <a:cs typeface="+mn-lt"/>
+              </a:rPr>
+              <a:t>Decompresses container with fflate &amp; streams XML parts</a:t>
             </a:r>
           </a:p>
           <a:p>
@@ -10354,44 +12078,14 @@
               <a:buChar char="•"/>
             </a:pPr>
             <a:r>
-              <a:rPr sz="1100">
+              <a:rPr sz="1050">
                 <a:solidFill>
                   <a:srgbClr val="CBD5E1"/>
                 </a:solidFill>
                 <a:latin typeface="+mn-lt"/>
                 <a:cs typeface="+mn-lt"/>
               </a:rPr>
-              <a:t>Decompress OpenXML container with fflate</a:t>
-            </a:r>
-          </a:p>
-          <a:p>
-            <a:pPr algn="l" lvl="2" marL="609600" indent="-152400">
-              <a:buChar char="•"/>
-            </a:pPr>
-            <a:r>
-              <a:rPr sz="1100">
-                <a:solidFill>
-                  <a:srgbClr val="CBD5E1"/>
-                </a:solidFill>
-                <a:latin typeface="+mn-lt"/>
-                <a:cs typeface="+mn-lt"/>
-              </a:rPr>
-              <a:t>Stream XML parts directly to DOM parser</a:t>
-            </a:r>
-          </a:p>
-          <a:p>
-            <a:pPr algn="l" lvl="2" marL="609600" indent="-152400">
-              <a:buChar char="•"/>
-            </a:pPr>
-            <a:r>
-              <a:rPr sz="1100">
-                <a:solidFill>
-                  <a:srgbClr val="CBD5E1"/>
-                </a:solidFill>
-                <a:latin typeface="+mn-lt"/>
-                <a:cs typeface="+mn-lt"/>
-              </a:rPr>
-              <a:t>Extract theme, slideMaster, and slideLayouts</a:t>
+              <a:t>Extract theme, slideMaster, and layout hierarchies</a:t>
             </a:r>
           </a:p>
           <a:p>
@@ -10399,7 +12093,7 @@
               <a:buAutoNum type="arabicPeriod"/>
             </a:pPr>
             <a:r>
-              <a:rPr sz="1100">
+              <a:rPr b="1" sz="1050">
                 <a:solidFill>
                   <a:srgbClr val="CBD5E1"/>
                 </a:solidFill>
@@ -10407,6 +12101,25 @@
                 <a:cs typeface="+mn-lt"/>
               </a:rPr>
               <a:t>Phase 2: AST Mutation &amp; Modeling</a:t>
+            </a:r>
+            <a:br>
+              <a:rPr sz="1050">
+                <a:solidFill>
+                  <a:srgbClr val="CBD5E1"/>
+                </a:solidFill>
+                <a:latin typeface="+mn-lt"/>
+                <a:cs typeface="+mn-lt"/>
+              </a:rPr>
+            </a:br>
+            <a:r>
+              <a:rPr sz="1050">
+                <a:solidFill>
+                  <a:srgbClr val="94A3B8"/>
+                </a:solidFill>
+                <a:latin typeface="+mn-lt"/>
+                <a:cs typeface="+mn-lt"/>
+              </a:rPr>
+              <a:t>Applies shapes, tables, shadows, gradients, and formulas</a:t>
             </a:r>
           </a:p>
           <a:p>
@@ -10414,29 +12127,14 @@
               <a:buChar char="•"/>
             </a:pPr>
             <a:r>
-              <a:rPr sz="1100">
+              <a:rPr sz="1050">
                 <a:solidFill>
                   <a:srgbClr val="CBD5E1"/>
                 </a:solidFill>
                 <a:latin typeface="+mn-lt"/>
                 <a:cs typeface="+mn-lt"/>
               </a:rPr>
-              <a:t>Apply shape geometries, tables, and drop shadows</a:t>
-            </a:r>
-          </a:p>
-          <a:p>
-            <a:pPr algn="l" lvl="2" marL="609600" indent="-152400">
-              <a:buChar char="•"/>
-            </a:pPr>
-            <a:r>
-              <a:rPr sz="1100">
-                <a:solidFill>
-                  <a:srgbClr val="CBD5E1"/>
-                </a:solidFill>
-                <a:latin typeface="+mn-lt"/>
-                <a:cs typeface="+mn-lt"/>
-              </a:rPr>
-              <a:t>Calculate type-safe EMU, points, and inches</a:t>
+              <a:t>Computes nominal dimensional types (EMU, pt, in)</a:t>
             </a:r>
           </a:p>
           <a:p>
@@ -10444,7 +12142,7 @@
               <a:buAutoNum type="arabicPeriod"/>
             </a:pPr>
             <a:r>
-              <a:rPr sz="1100">
+              <a:rPr b="1" sz="1050">
                 <a:solidFill>
                   <a:srgbClr val="CBD5E1"/>
                 </a:solidFill>
@@ -10452,6 +12150,25 @@
                 <a:cs typeface="+mn-lt"/>
               </a:rPr>
               <a:t>Phase 3: Serialization &amp; Packaging</a:t>
+            </a:r>
+            <a:br>
+              <a:rPr sz="1050">
+                <a:solidFill>
+                  <a:srgbClr val="CBD5E1"/>
+                </a:solidFill>
+                <a:latin typeface="+mn-lt"/>
+                <a:cs typeface="+mn-lt"/>
+              </a:rPr>
+            </a:br>
+            <a:r>
+              <a:rPr sz="1050">
+                <a:solidFill>
+                  <a:srgbClr val="94A3B8"/>
+                </a:solidFill>
+                <a:latin typeface="+mn-lt"/>
+                <a:cs typeface="+mn-lt"/>
+              </a:rPr>
+              <a:t>Emits deterministic OpenXML parts and compiles binary</a:t>
             </a:r>
           </a:p>
           <a:p>
@@ -10459,29 +12176,14 @@
               <a:buChar char="•"/>
             </a:pPr>
             <a:r>
-              <a:rPr sz="1100">
+              <a:rPr sz="1050">
                 <a:solidFill>
                   <a:srgbClr val="CBD5E1"/>
                 </a:solidFill>
                 <a:latin typeface="+mn-lt"/>
                 <a:cs typeface="+mn-lt"/>
               </a:rPr>
-              <a:t>Emit deterministic XML parts and relationship files</a:t>
-            </a:r>
-          </a:p>
-          <a:p>
-            <a:pPr algn="l" lvl="1" marL="381000" indent="-152400">
-              <a:buChar char="•"/>
-            </a:pPr>
-            <a:r>
-              <a:rPr sz="1100">
-                <a:solidFill>
-                  <a:srgbClr val="CBD5E1"/>
-                </a:solidFill>
-                <a:latin typeface="+mn-lt"/>
-                <a:cs typeface="+mn-lt"/>
-              </a:rPr>
-              <a:t>Generate zero-copy ArrayBuffer presentation binary</a:t>
+              <a:t>Generates zero-copy Uint8Array presentation buffer</a:t>
             </a:r>
           </a:p>
         </p:txBody>
@@ -10489,7 +12191,7 @@
       <p:sp>
         <p:nvSpPr>
           <p:cNvPr id="10" name="Text Box 9"/>
-          <p:cNvSpPr/>
+          <p:cNvSpPr txBox="1"/>
           <p:nvPr/>
         </p:nvSpPr>
         <p:spPr>
@@ -10536,7 +12238,7 @@
     <p:bg>
       <p:bgPr>
         <a:solidFill>
-          <a:srgbClr val="F8FAFC"/>
+          <a:srgbClr val="0F172A"/>
         </a:solidFill>
         <a:effectLst/>
       </p:bgPr>
@@ -10557,14 +12259,16 @@
       </p:grpSpPr>
       <p:sp>
         <p:nvSpPr>
-          <p:cNvPr id="2" name="Text Box 1"/>
+          <p:cNvPr id="2" name="placeholder:title"/>
           <p:cNvSpPr/>
-          <p:nvPr/>
+          <p:nvPr>
+            <p:ph type="title"/>
+          </p:nvPr>
         </p:nvSpPr>
         <p:spPr>
           <a:xfrm>
             <a:off x="914400" y="731520"/>
-            <a:ext cx="10360152" cy="548640"/>
+            <a:ext cx="10360152" cy="731520"/>
           </a:xfrm>
           <a:prstGeom prst="rect">
             <a:avLst/>
@@ -10578,12 +12282,12 @@
             <a:r>
               <a:rPr b="1" sz="2400">
                 <a:solidFill>
-                  <a:srgbClr val="0F172A"/>
+                  <a:srgbClr val="38BDF8"/>
                 </a:solidFill>
                 <a:latin typeface="+mj-lt"/>
                 <a:cs typeface="+mj-lt"/>
               </a:rPr>
-              <a:t>Flow Connectors &amp; Composite Group Architecture</a:t>
+              <a:t>Native Content Placeholder (&lt;p:ph idx="1"/&gt;) &amp; Master Inheritance</a:t>
             </a:r>
           </a:p>
         </p:txBody>
@@ -10591,13 +12295,46 @@
       <p:sp>
         <p:nvSpPr>
           <p:cNvPr id="3" name="Text Box 2"/>
+          <p:cNvSpPr txBox="1"/>
+          <p:nvPr/>
+        </p:nvSpPr>
+        <p:spPr>
+          <a:xfrm>
+            <a:off x="914400" y="1371600"/>
+            <a:ext cx="10360152" cy="365760"/>
+          </a:xfrm>
+          <a:prstGeom prst="rect">
+            <a:avLst/>
+          </a:prstGeom>
+        </p:spPr>
+        <p:txBody>
+          <a:bodyPr anchor="t"/>
+          <a:lstStyle/>
+          <a:p>
+            <a:pPr algn="l"/>
+            <a:r>
+              <a:rPr sz="1300">
+                <a:solidFill>
+                  <a:srgbClr val="94A3B8"/>
+                </a:solidFill>
+                <a:latin typeface="+mn-lt"/>
+                <a:cs typeface="+mn-lt"/>
+              </a:rPr>
+              <a:t>This slide demonstrates a genuine OpenXML Content Placeholder box bound to the Slide Master body styles (&lt;p:bodyStyle&gt;) with native multi-level indentation and Shift+Enter line breaks</a:t>
+            </a:r>
+          </a:p>
+        </p:txBody>
+      </p:sp>
+      <p:sp>
+        <p:nvSpPr>
+          <p:cNvPr id="4" name="placeholder:1"/>
           <p:cNvSpPr/>
           <p:nvPr/>
         </p:nvSpPr>
         <p:spPr>
           <a:xfrm>
-            <a:off x="914400" y="1280160"/>
-            <a:ext cx="10360152" cy="365760"/>
+            <a:off x="914400" y="1920240"/>
+            <a:ext cx="10360152" cy="4389120"/>
           </a:xfrm>
           <a:prstGeom prst="rect">
             <a:avLst/>
@@ -10607,599 +12344,177 @@
           <a:bodyPr anchor="t"/>
           <a:lstStyle/>
           <a:p>
-            <a:pPr algn="l"/>
-            <a:r>
-              <a:rPr sz="1400">
-                <a:solidFill>
-                  <a:srgbClr val="64748B"/>
-                </a:solidFill>
-                <a:latin typeface="+mn-lt"/>
-                <a:cs typeface="+mn-lt"/>
-              </a:rPr>
-              <a:t>Demonstrating vector connectors (solid, dashed), coordinates, and composite group containers (addGroup)</a:t>
-            </a:r>
-          </a:p>
-        </p:txBody>
-      </p:sp>
-      <p:grpSp>
-        <p:nvGrpSpPr>
-          <p:cNvPr id="4" name="Stage 1 Ingress Container"/>
-          <p:cNvGrpSpPr/>
-          <p:nvPr/>
-        </p:nvGrpSpPr>
-        <p:grpSpPr>
-          <a:xfrm>
-            <a:off x="914400" y="2011680"/>
-            <a:ext cx="2926080" cy="3200400"/>
-            <a:chOff x="914400" y="2011680"/>
-            <a:chExt cx="2926080" cy="3200400"/>
-          </a:xfrm>
-        </p:grpSpPr>
-        <p:sp>
-          <p:nvSpPr>
-            <p:cNvPr id="5" name="Stage 1 Background"/>
-            <p:cNvSpPr/>
-            <p:nvPr/>
-          </p:nvSpPr>
-          <p:spPr>
-            <a:xfrm>
-              <a:off x="914400" y="2011680"/>
-              <a:ext cx="2926080" cy="3200400"/>
-            </a:xfrm>
-            <a:prstGeom prst="roundRect">
-              <a:avLst/>
-            </a:prstGeom>
-            <a:solidFill>
-              <a:srgbClr val="FFFFFF"/>
-            </a:solidFill>
-            <a:ln w="13716">
-              <a:solidFill>
-                <a:srgbClr val="0284C7"/>
-              </a:solidFill>
-            </a:ln>
-            <a:effectLst>
-              <a:outerShdw blurRad="109728" dist="38100" dir="5400000">
-                <a:srgbClr val="0F172A">
-                  <a:alpha val="10000"/>
-                </a:srgbClr>
-              </a:outerShdw>
-            </a:effectLst>
-          </p:spPr>
-          <p:txBody>
-            <a:bodyPr/>
-            <a:lstStyle/>
-            <a:p>
-              <a:endParaRPr/>
-            </a:p>
-          </p:txBody>
-        </p:sp>
-        <p:sp>
-          <p:nvSpPr>
-            <p:cNvPr id="6" name="roundRect 5"/>
-            <p:cNvSpPr/>
-            <p:nvPr/>
-          </p:nvSpPr>
-          <p:spPr>
-            <a:xfrm>
-              <a:off x="1188720" y="2286000"/>
-              <a:ext cx="2377440" cy="365760"/>
-            </a:xfrm>
-            <a:prstGeom prst="roundRect">
-              <a:avLst/>
-            </a:prstGeom>
-            <a:solidFill>
-              <a:srgbClr val="0284C7"/>
-            </a:solidFill>
-          </p:spPr>
-          <p:txBody>
-            <a:bodyPr anchor="t"/>
-            <a:lstStyle/>
-            <a:p>
-              <a:pPr algn="ctr"/>
-              <a:r>
-                <a:rPr b="1" sz="1000">
-                  <a:solidFill>
-                    <a:srgbClr val="FFFFFF"/>
-                  </a:solidFill>
-                  <a:latin typeface="+mn-lt"/>
-                  <a:cs typeface="+mn-lt"/>
-                </a:rPr>
-                <a:t>STEP 1: INGESTION</a:t>
-              </a:r>
-            </a:p>
-          </p:txBody>
-        </p:sp>
-        <p:sp>
-          <p:nvSpPr>
-            <p:cNvPr id="7" name="Text Box 6"/>
-            <p:cNvSpPr/>
-            <p:nvPr/>
-          </p:nvSpPr>
-          <p:spPr>
-            <a:xfrm>
-              <a:off x="1188720" y="2926080"/>
-              <a:ext cx="2377440" cy="1828800"/>
-            </a:xfrm>
-            <a:prstGeom prst="rect">
-              <a:avLst/>
-            </a:prstGeom>
-          </p:spPr>
-          <p:txBody>
-            <a:bodyPr anchor="t"/>
-            <a:lstStyle/>
-            <a:p>
-              <a:pPr algn="l" lvl="0" marL="152400" indent="-152400">
-                <a:buChar char="•"/>
-              </a:pPr>
-              <a:r>
-                <a:rPr sz="1100">
-                  <a:solidFill>
-                    <a:srgbClr val="475569"/>
-                  </a:solidFill>
-                  <a:latin typeface="+mn-lt"/>
-                  <a:cs typeface="+mn-lt"/>
-                </a:rPr>
-                <a:t>Streaming ZIP decompression</a:t>
-              </a:r>
-            </a:p>
-            <a:p>
-              <a:pPr algn="l" lvl="0" marL="152400" indent="-152400">
-                <a:buChar char="•"/>
-              </a:pPr>
-              <a:r>
-                <a:rPr sz="1100">
-                  <a:solidFill>
-                    <a:srgbClr val="475569"/>
-                  </a:solidFill>
-                  <a:latin typeface="+mn-lt"/>
-                  <a:cs typeface="+mn-lt"/>
-                </a:rPr>
-                <a:t>XML DOM part resolution</a:t>
-              </a:r>
-            </a:p>
-            <a:p>
-              <a:pPr algn="l" lvl="0" marL="152400" indent="-152400">
-                <a:buChar char="•"/>
-              </a:pPr>
-              <a:r>
-                <a:rPr sz="1100">
-                  <a:solidFill>
-                    <a:srgbClr val="475569"/>
-                  </a:solidFill>
-                  <a:latin typeface="+mn-lt"/>
-                  <a:cs typeface="+mn-lt"/>
-                </a:rPr>
-                <a:t>Extract relationships map</a:t>
-              </a:r>
-            </a:p>
-          </p:txBody>
-        </p:sp>
-      </p:grpSp>
-      <p:grpSp>
-        <p:nvGrpSpPr>
-          <p:cNvPr id="8" name="Stage 2 AST Container"/>
-          <p:cNvGrpSpPr/>
-          <p:nvPr/>
-        </p:nvGrpSpPr>
-        <p:grpSpPr>
-          <a:xfrm>
-            <a:off x="4572000" y="2011680"/>
-            <a:ext cx="2926080" cy="3200400"/>
-            <a:chOff x="4572000" y="2011680"/>
-            <a:chExt cx="2926080" cy="3200400"/>
-          </a:xfrm>
-        </p:grpSpPr>
-        <p:sp>
-          <p:nvSpPr>
-            <p:cNvPr id="9" name="Stage 2 Background"/>
-            <p:cNvSpPr/>
-            <p:nvPr/>
-          </p:nvSpPr>
-          <p:spPr>
-            <a:xfrm>
-              <a:off x="4572000" y="2011680"/>
-              <a:ext cx="2926080" cy="3200400"/>
-            </a:xfrm>
-            <a:prstGeom prst="roundRect">
-              <a:avLst/>
-            </a:prstGeom>
-            <a:solidFill>
-              <a:srgbClr val="FFFFFF"/>
-            </a:solidFill>
-            <a:ln w="13716">
-              <a:solidFill>
-                <a:srgbClr val="6366F1"/>
-              </a:solidFill>
-            </a:ln>
-            <a:effectLst>
-              <a:outerShdw blurRad="109728" dist="38100" dir="5400000">
-                <a:srgbClr val="0F172A">
-                  <a:alpha val="10000"/>
-                </a:srgbClr>
-              </a:outerShdw>
-            </a:effectLst>
-          </p:spPr>
-          <p:txBody>
-            <a:bodyPr/>
-            <a:lstStyle/>
-            <a:p>
-              <a:endParaRPr/>
-            </a:p>
-          </p:txBody>
-        </p:sp>
-        <p:sp>
-          <p:nvSpPr>
-            <p:cNvPr id="10" name="roundRect 9"/>
-            <p:cNvSpPr/>
-            <p:nvPr/>
-          </p:nvSpPr>
-          <p:spPr>
-            <a:xfrm>
-              <a:off x="4846320" y="2286000"/>
-              <a:ext cx="2377440" cy="365760"/>
-            </a:xfrm>
-            <a:prstGeom prst="roundRect">
-              <a:avLst/>
-            </a:prstGeom>
-            <a:solidFill>
-              <a:srgbClr val="6366F1"/>
-            </a:solidFill>
-          </p:spPr>
-          <p:txBody>
-            <a:bodyPr anchor="t"/>
-            <a:lstStyle/>
-            <a:p>
-              <a:pPr algn="ctr"/>
-              <a:r>
-                <a:rPr b="1" sz="1000">
-                  <a:solidFill>
-                    <a:srgbClr val="FFFFFF"/>
-                  </a:solidFill>
-                  <a:latin typeface="+mn-lt"/>
-                  <a:cs typeface="+mn-lt"/>
-                </a:rPr>
-                <a:t>STEP 2: MODELING</a:t>
-              </a:r>
-            </a:p>
-          </p:txBody>
-        </p:sp>
-        <p:sp>
-          <p:nvSpPr>
-            <p:cNvPr id="11" name="Text Box 10"/>
-            <p:cNvSpPr/>
-            <p:nvPr/>
-          </p:nvSpPr>
-          <p:spPr>
-            <a:xfrm>
-              <a:off x="4846320" y="2926080"/>
-              <a:ext cx="2377440" cy="1828800"/>
-            </a:xfrm>
-            <a:prstGeom prst="rect">
-              <a:avLst/>
-            </a:prstGeom>
-          </p:spPr>
-          <p:txBody>
-            <a:bodyPr anchor="t"/>
-            <a:lstStyle/>
-            <a:p>
-              <a:pPr algn="l" lvl="0" marL="152400" indent="-152400">
-                <a:buChar char="•"/>
-              </a:pPr>
-              <a:r>
-                <a:rPr sz="1100">
-                  <a:solidFill>
-                    <a:srgbClr val="475569"/>
-                  </a:solidFill>
-                  <a:latin typeface="+mn-lt"/>
-                  <a:cs typeface="+mn-lt"/>
-                </a:rPr>
-                <a:t>Type-safe AST generation</a:t>
-              </a:r>
-            </a:p>
-            <a:p>
-              <a:pPr algn="l" lvl="0" marL="152400" indent="-152400">
-                <a:buChar char="•"/>
-              </a:pPr>
-              <a:r>
-                <a:rPr sz="1100">
-                  <a:solidFill>
-                    <a:srgbClr val="475569"/>
-                  </a:solidFill>
-                  <a:latin typeface="+mn-lt"/>
-                  <a:cs typeface="+mn-lt"/>
-                </a:rPr>
-                <a:t>Layer &amp; placeholder cascade</a:t>
-              </a:r>
-            </a:p>
-            <a:p>
-              <a:pPr algn="l" lvl="0" marL="152400" indent="-152400">
-                <a:buChar char="•"/>
-              </a:pPr>
-              <a:r>
-                <a:rPr sz="1100">
-                  <a:solidFill>
-                    <a:srgbClr val="475569"/>
-                  </a:solidFill>
-                  <a:latin typeface="+mn-lt"/>
-                  <a:cs typeface="+mn-lt"/>
-                </a:rPr>
-                <a:t>Fluent mutations &amp; styling</a:t>
-              </a:r>
-            </a:p>
-          </p:txBody>
-        </p:sp>
-      </p:grpSp>
-      <p:grpSp>
-        <p:nvGrpSpPr>
-          <p:cNvPr id="12" name="Stage 3 Packaging Container"/>
-          <p:cNvGrpSpPr/>
-          <p:nvPr/>
-        </p:nvGrpSpPr>
-        <p:grpSpPr>
-          <a:xfrm>
-            <a:off x="8229600" y="2011680"/>
-            <a:ext cx="2926080" cy="3200400"/>
-            <a:chOff x="8229600" y="2011680"/>
-            <a:chExt cx="2926080" cy="3200400"/>
-          </a:xfrm>
-        </p:grpSpPr>
-        <p:sp>
-          <p:nvSpPr>
-            <p:cNvPr id="13" name="Stage 3 Background"/>
-            <p:cNvSpPr/>
-            <p:nvPr/>
-          </p:nvSpPr>
-          <p:spPr>
-            <a:xfrm>
-              <a:off x="8229600" y="2011680"/>
-              <a:ext cx="2926080" cy="3200400"/>
-            </a:xfrm>
-            <a:prstGeom prst="roundRect">
-              <a:avLst/>
-            </a:prstGeom>
-            <a:solidFill>
-              <a:srgbClr val="FFFFFF"/>
-            </a:solidFill>
-            <a:ln w="13716">
-              <a:solidFill>
-                <a:srgbClr val="10B981"/>
-              </a:solidFill>
-            </a:ln>
-            <a:effectLst>
-              <a:outerShdw blurRad="109728" dist="38100" dir="5400000">
-                <a:srgbClr val="0F172A">
-                  <a:alpha val="10000"/>
-                </a:srgbClr>
-              </a:outerShdw>
-            </a:effectLst>
-          </p:spPr>
-          <p:txBody>
-            <a:bodyPr/>
-            <a:lstStyle/>
-            <a:p>
-              <a:endParaRPr/>
-            </a:p>
-          </p:txBody>
-        </p:sp>
-        <p:sp>
-          <p:nvSpPr>
-            <p:cNvPr id="14" name="roundRect 13"/>
-            <p:cNvSpPr/>
-            <p:nvPr/>
-          </p:nvSpPr>
-          <p:spPr>
-            <a:xfrm>
-              <a:off x="8503920" y="2286000"/>
-              <a:ext cx="2377440" cy="365760"/>
-            </a:xfrm>
-            <a:prstGeom prst="roundRect">
-              <a:avLst/>
-            </a:prstGeom>
-            <a:solidFill>
-              <a:srgbClr val="10B981"/>
-            </a:solidFill>
-          </p:spPr>
-          <p:txBody>
-            <a:bodyPr anchor="t"/>
-            <a:lstStyle/>
-            <a:p>
-              <a:pPr algn="ctr"/>
-              <a:r>
-                <a:rPr b="1" sz="1000">
-                  <a:solidFill>
-                    <a:srgbClr val="FFFFFF"/>
-                  </a:solidFill>
-                  <a:latin typeface="+mn-lt"/>
-                  <a:cs typeface="+mn-lt"/>
-                </a:rPr>
-                <a:t>STEP 3: COMPILATION</a:t>
-              </a:r>
-            </a:p>
-          </p:txBody>
-        </p:sp>
-        <p:sp>
-          <p:nvSpPr>
-            <p:cNvPr id="15" name="Text Box 14"/>
-            <p:cNvSpPr/>
-            <p:nvPr/>
-          </p:nvSpPr>
-          <p:spPr>
-            <a:xfrm>
-              <a:off x="8503920" y="2926080"/>
-              <a:ext cx="2377440" cy="1828800"/>
-            </a:xfrm>
-            <a:prstGeom prst="rect">
-              <a:avLst/>
-            </a:prstGeom>
-          </p:spPr>
-          <p:txBody>
-            <a:bodyPr anchor="t"/>
-            <a:lstStyle/>
-            <a:p>
-              <a:pPr algn="l" lvl="0" marL="152400" indent="-152400">
-                <a:buChar char="•"/>
-              </a:pPr>
-              <a:r>
-                <a:rPr sz="1100">
-                  <a:solidFill>
-                    <a:srgbClr val="475569"/>
-                  </a:solidFill>
-                  <a:latin typeface="+mn-lt"/>
-                  <a:cs typeface="+mn-lt"/>
-                </a:rPr>
-                <a:t>Deterministic XML emission</a:t>
-              </a:r>
-            </a:p>
-            <a:p>
-              <a:pPr algn="l" lvl="0" marL="152400" indent="-152400">
-                <a:buChar char="•"/>
-              </a:pPr>
-              <a:r>
-                <a:rPr sz="1100">
-                  <a:solidFill>
-                    <a:srgbClr val="475569"/>
-                  </a:solidFill>
-                  <a:latin typeface="+mn-lt"/>
-                  <a:cs typeface="+mn-lt"/>
-                </a:rPr>
-                <a:t>Zero-copy fflate compression</a:t>
-              </a:r>
-            </a:p>
-            <a:p>
-              <a:pPr algn="l" lvl="0" marL="152400" indent="-152400">
-                <a:buChar char="•"/>
-              </a:pPr>
-              <a:r>
-                <a:rPr sz="1100">
-                  <a:solidFill>
-                    <a:srgbClr val="475569"/>
-                  </a:solidFill>
-                  <a:latin typeface="+mn-lt"/>
-                  <a:cs typeface="+mn-lt"/>
-                </a:rPr>
-                <a:t>ECMA-376 compliant PPTX</a:t>
-              </a:r>
-            </a:p>
-          </p:txBody>
-        </p:sp>
-      </p:grpSp>
-      <p:cxnSp>
-        <p:nvCxnSpPr>
-          <p:cNvPr id="16" name="Connector 15"/>
-          <p:cNvCxnSpPr>
-            <a:cxnSpLocks/>
-            <a:stCxn id="5" idx="3"/>
-            <a:endCxn id="9" idx="1"/>
-          </p:cNvCxnSpPr>
-          <p:nvPr/>
-        </p:nvCxnSpPr>
-        <p:spPr>
-          <a:xfrm>
-            <a:off x="3840480" y="3611880"/>
-            <a:ext cx="731520" cy="0"/>
-          </a:xfrm>
-          <a:prstGeom prst="line">
-            <a:avLst/>
-          </a:prstGeom>
-          <a:ln w="27432">
-            <a:solidFill>
-              <a:srgbClr val="0284C7"/>
-            </a:solidFill>
-            <a:prstDash val="solid"/>
-            <a:headEnd type="triangle" w="lg" len="lg"/>
-          </a:ln>
-        </p:spPr>
-      </p:cxnSp>
-      <p:cxnSp>
-        <p:nvCxnSpPr>
-          <p:cNvPr id="17" name="Connector 16"/>
-          <p:cNvCxnSpPr>
-            <a:cxnSpLocks/>
-            <a:stCxn id="9" idx="3"/>
-            <a:endCxn id="13" idx="1"/>
-          </p:cNvCxnSpPr>
-          <p:nvPr/>
-        </p:nvCxnSpPr>
-        <p:spPr>
-          <a:xfrm>
-            <a:off x="7498080" y="3611880"/>
-            <a:ext cx="731520" cy="0"/>
-          </a:xfrm>
-          <a:prstGeom prst="line">
-            <a:avLst/>
-          </a:prstGeom>
-          <a:ln w="27432">
-            <a:solidFill>
-              <a:srgbClr val="6366F1"/>
-            </a:solidFill>
-            <a:prstDash val="solid"/>
-            <a:headEnd type="stealth" w="lg" len="lg"/>
-          </a:ln>
-        </p:spPr>
-      </p:cxnSp>
-      <p:cxnSp>
-        <p:nvCxnSpPr>
-          <p:cNvPr id="18" name="Connector 17"/>
-          <p:cNvCxnSpPr>
-            <a:cxnSpLocks/>
-          </p:cNvCxnSpPr>
-          <p:nvPr/>
-        </p:nvCxnSpPr>
-        <p:spPr>
-          <a:xfrm>
-            <a:off x="914400" y="5669280"/>
-            <a:ext cx="10241280" cy="0"/>
-          </a:xfrm>
-          <a:prstGeom prst="line">
-            <a:avLst/>
-          </a:prstGeom>
-          <a:ln w="18288">
-            <a:solidFill>
-              <a:srgbClr val="94A3B8"/>
-            </a:solidFill>
-            <a:prstDash val="dash"/>
-            <a:headEnd type="triangle"/>
-            <a:tailEnd type="oval"/>
-          </a:ln>
-        </p:spPr>
-      </p:cxnSp>
-      <p:sp>
-        <p:nvSpPr>
-          <p:cNvPr id="19" name="Text Box 18"/>
-          <p:cNvSpPr/>
-          <p:nvPr/>
-        </p:nvSpPr>
-        <p:spPr>
-          <a:xfrm>
-            <a:off x="914400" y="5806440"/>
-            <a:ext cx="10241280" cy="365760"/>
-          </a:xfrm>
-          <a:prstGeom prst="rect">
-            <a:avLst/>
-          </a:prstGeom>
-        </p:spPr>
-        <p:txBody>
-          <a:bodyPr anchor="t"/>
-          <a:lstStyle/>
-          <a:p>
-            <a:pPr algn="ctr"/>
-            <a:r>
-              <a:rPr sz="1100">
-                <a:solidFill>
-                  <a:srgbClr val="64748B"/>
-                </a:solidFill>
-                <a:latin typeface="+mn-lt"/>
-                <a:cs typeface="+mn-lt"/>
-              </a:rPr>
-              <a:t>Isomorphic Pipeline Feedback Loop: 100% Roundtrip Bit-Exact Precision</a:t>
-            </a:r>
-          </a:p>
-        </p:txBody>
-      </p:sp>
-      <p:sp>
-        <p:nvSpPr>
-          <p:cNvPr id="20" name="Text Box 19"/>
-          <p:cNvSpPr/>
+            <a:pPr algn="l" lvl="0" marL="152400" indent="-152400">
+              <a:buChar char="•"/>
+            </a:pPr>
+            <a:r>
+              <a:rPr b="1" sz="1200">
+                <a:solidFill>
+                  <a:srgbClr val="E2E8F0"/>
+                </a:solidFill>
+                <a:latin typeface="+mn-lt"/>
+                <a:cs typeface="+mn-lt"/>
+              </a:rPr>
+              <a:t>A1: High Availability &amp; Multi-Region Fleet (Level 0 Root Bullet)</a:t>
+            </a:r>
+            <a:br>
+              <a:rPr sz="1200">
+                <a:solidFill>
+                  <a:srgbClr val="E2E8F0"/>
+                </a:solidFill>
+                <a:latin typeface="+mn-lt"/>
+                <a:cs typeface="+mn-lt"/>
+              </a:rPr>
+            </a:br>
+            <a:r>
+              <a:rPr sz="1200">
+                <a:solidFill>
+                  <a:srgbClr val="94A3B8"/>
+                </a:solidFill>
+                <a:latin typeface="+mn-lt"/>
+                <a:cs typeface="+mn-lt"/>
+              </a:rPr>
+              <a:t>↳ Shift+Enter: multi-line statement cleanly indented beneath the same bullet point without spawning an extra glyph.</a:t>
+            </a:r>
+          </a:p>
+          <a:p>
+            <a:pPr algn="l" lvl="1" marL="381000" indent="-152400">
+              <a:buChar char="•"/>
+            </a:pPr>
+            <a:r>
+              <a:rPr sz="1200">
+                <a:solidFill>
+                  <a:srgbClr val="E2E8F0"/>
+                </a:solidFill>
+                <a:latin typeface="+mn-lt"/>
+                <a:cs typeface="+mn-lt"/>
+              </a:rPr>
+              <a:t>B1: Anycast Edge Routing Layer with 300+ Global PoPs (Level 1 / Tab)</a:t>
+            </a:r>
+            <a:br>
+              <a:rPr sz="1200">
+                <a:solidFill>
+                  <a:srgbClr val="E2E8F0"/>
+                </a:solidFill>
+                <a:latin typeface="+mn-lt"/>
+                <a:cs typeface="+mn-lt"/>
+              </a:rPr>
+            </a:br>
+            <a:r>
+              <a:rPr sz="1200">
+                <a:solidFill>
+                  <a:srgbClr val="94A3B8"/>
+                </a:solidFill>
+                <a:latin typeface="+mn-lt"/>
+                <a:cs typeface="+mn-lt"/>
+              </a:rPr>
+              <a:t>↳ Automatically inherits level 1 margin and hanging indent directly from the Slide Master without inline overrides.</a:t>
+            </a:r>
+          </a:p>
+          <a:p>
+            <a:pPr algn="l" lvl="2" marL="609600" indent="-152400">
+              <a:buChar char="•"/>
+            </a:pPr>
+            <a:r>
+              <a:rPr sz="1200">
+                <a:solidFill>
+                  <a:srgbClr val="E2E8F0"/>
+                </a:solidFill>
+                <a:latin typeface="+mn-lt"/>
+                <a:cs typeface="+mn-lt"/>
+              </a:rPr>
+              <a:t>C1: Zero-RTT TLS 1.3 Handshake &amp; Heuristic DDoS Protection (Level 2 / Tab Tab)</a:t>
+            </a:r>
+            <a:br>
+              <a:rPr sz="1200">
+                <a:solidFill>
+                  <a:srgbClr val="E2E8F0"/>
+                </a:solidFill>
+                <a:latin typeface="+mn-lt"/>
+                <a:cs typeface="+mn-lt"/>
+              </a:rPr>
+            </a:br>
+            <a:r>
+              <a:rPr sz="1200">
+                <a:solidFill>
+                  <a:srgbClr val="94A3B8"/>
+                </a:solidFill>
+                <a:latin typeface="+mn-lt"/>
+                <a:cs typeface="+mn-lt"/>
+              </a:rPr>
+              <a:t>↳ P99 latency SLA: &lt; 1.2ms across all geographic regions with zero cold starts.</a:t>
+            </a:r>
+          </a:p>
+          <a:p>
+            <a:pPr algn="l" lvl="3" marL="838200" indent="-152400">
+              <a:buChar char="•"/>
+            </a:pPr>
+            <a:r>
+              <a:rPr sz="1200">
+                <a:solidFill>
+                  <a:srgbClr val="E2E8F0"/>
+                </a:solidFill>
+                <a:latin typeface="+mn-lt"/>
+                <a:cs typeface="+mn-lt"/>
+              </a:rPr>
+              <a:t>D1: Kernel-level eBPF packet inspection and anomaly heuristics (Level 3 / Tab Tab Tab)</a:t>
+            </a:r>
+          </a:p>
+          <a:p>
+            <a:pPr algn="l" lvl="0" marL="152400" indent="-152400">
+              <a:buChar char="•"/>
+            </a:pPr>
+            <a:r>
+              <a:rPr sz="1200">
+                <a:solidFill>
+                  <a:srgbClr val="E2E8F0"/>
+                </a:solidFill>
+                <a:latin typeface="+mn-lt"/>
+                <a:cs typeface="+mn-lt"/>
+              </a:rPr>
+              <a:t>A2: Automated State &amp; Cache Synchronization (Level 0 / Shift+Tab)</a:t>
+            </a:r>
+            <a:br>
+              <a:rPr sz="1200">
+                <a:solidFill>
+                  <a:srgbClr val="E2E8F0"/>
+                </a:solidFill>
+                <a:latin typeface="+mn-lt"/>
+                <a:cs typeface="+mn-lt"/>
+              </a:rPr>
+            </a:br>
+            <a:r>
+              <a:rPr sz="1200">
+                <a:solidFill>
+                  <a:srgbClr val="94A3B8"/>
+                </a:solidFill>
+                <a:latin typeface="+mn-lt"/>
+                <a:cs typeface="+mn-lt"/>
+              </a:rPr>
+              <a:t>↳ Shift+Tab returns seamlessly to the root bullet level, matching PowerPoint desktop editing behavior.</a:t>
+            </a:r>
+          </a:p>
+          <a:p>
+            <a:pPr algn="l" lvl="1" marL="381000" indent="-152400">
+              <a:buChar char="•"/>
+            </a:pPr>
+            <a:r>
+              <a:rPr sz="1200">
+                <a:solidFill>
+                  <a:srgbClr val="E2E8F0"/>
+                </a:solidFill>
+                <a:latin typeface="+mn-lt"/>
+                <a:cs typeface="+mn-lt"/>
+              </a:rPr>
+              <a:t>B2: D1 Relational SQLite Replicas + Globally Distributed KV Cache Layer</a:t>
+            </a:r>
+          </a:p>
+        </p:txBody>
+      </p:sp>
+      <p:sp>
+        <p:nvSpPr>
+          <p:cNvPr id="5" name="Text Box 4"/>
+          <p:cNvSpPr txBox="1"/>
           <p:nvPr/>
         </p:nvSpPr>
         <p:spPr>
@@ -11219,7 +12534,7 @@
             <a:r>
               <a:rPr i="1" sz="800">
                 <a:solidFill>
-                  <a:srgbClr val="94A3B8"/>
+                  <a:srgbClr val="64748B"/>
                 </a:solidFill>
                 <a:latin typeface="+mn-lt"/>
                 <a:cs typeface="+mn-lt"/>
@@ -11235,7 +12550,7 @@
     <a:masterClrMapping/>
   </p:clrMapOvr>
   <p:transition spd="fast">
-    <p:pull dir="r"/>
+    <p:fade/>
   </p:transition>
 </p:sld>
 </file>
@@ -11268,13 +12583,13 @@
       <p:sp>
         <p:nvSpPr>
           <p:cNvPr id="2" name="Text Box 1"/>
-          <p:cNvSpPr/>
+          <p:cNvSpPr txBox="1"/>
           <p:nvPr/>
         </p:nvSpPr>
         <p:spPr>
           <a:xfrm>
             <a:off x="914400" y="731520"/>
-            <a:ext cx="10360152" cy="548640"/>
+            <a:ext cx="10360152" cy="731520"/>
           </a:xfrm>
           <a:prstGeom prst="rect">
             <a:avLst/>
@@ -11293,7 +12608,7 @@
                 <a:latin typeface="+mj-lt"/>
                 <a:cs typeface="+mj-lt"/>
               </a:rPr>
-              <a:t>Native OpenXML Charts &amp; Visual Analytics</a:t>
+              <a:t>Hierarchical Block Indentation (bullet: false) &amp; Code Outlines</a:t>
             </a:r>
           </a:p>
         </p:txBody>
@@ -11301,12 +12616,12 @@
       <p:sp>
         <p:nvSpPr>
           <p:cNvPr id="3" name="Text Box 2"/>
-          <p:cNvSpPr/>
-          <p:nvPr/>
-        </p:nvSpPr>
-        <p:spPr>
-          <a:xfrm>
-            <a:off x="914400" y="1280160"/>
+          <p:cNvSpPr txBox="1"/>
+          <p:nvPr/>
+        </p:nvSpPr>
+        <p:spPr>
+          <a:xfrm>
+            <a:off x="914400" y="1371600"/>
             <a:ext cx="10360152" cy="365760"/>
           </a:xfrm>
           <a:prstGeom prst="rect">
@@ -11319,14 +12634,14 @@
           <a:p>
             <a:pPr algn="l"/>
             <a:r>
-              <a:rPr sz="1400">
+              <a:rPr sz="1300">
                 <a:solidFill>
                   <a:srgbClr val="94A3B8"/>
                 </a:solidFill>
                 <a:latin typeface="+mn-lt"/>
                 <a:cs typeface="+mn-lt"/>
               </a:rPr>
-              <a:t>Zero-dependency generation of native PowerPoint &lt;c:chartSpace&gt; data visualizations and multi-series metrics</a:t>
+              <a:t>Demonstrating { level: N, bullet: false } (&lt;a:buNone/&gt;) — suppresses bullet glyphs while preserving precise margin indentation, soft breaks, and Tab / Shift+Tab cycling</a:t>
             </a:r>
           </a:p>
         </p:txBody>
@@ -11340,7 +12655,7 @@
         <p:spPr>
           <a:xfrm>
             <a:off x="914400" y="1828800"/>
-            <a:ext cx="6400800" cy="4114800"/>
+            <a:ext cx="4937760" cy="4480560"/>
           </a:xfrm>
           <a:prstGeom prst="roundRect">
             <a:avLst/>
@@ -11350,13 +12665,13 @@
           </a:solidFill>
           <a:ln w="13716">
             <a:solidFill>
-              <a:srgbClr val="334155"/>
+              <a:srgbClr val="38BDF8"/>
             </a:solidFill>
           </a:ln>
           <a:effectLst>
-            <a:outerShdw blurRad="137160" dist="38100" dir="5400000">
+            <a:outerShdw blurRad="182880" dist="45720" dir="5400000">
               <a:srgbClr val="000000">
-                <a:alpha val="30000"/>
+                <a:alpha val="40000"/>
               </a:srgbClr>
             </a:outerShdw>
           </a:effectLst>
@@ -11369,180 +12684,217 @@
           </a:p>
         </p:txBody>
       </p:sp>
-      <p:graphicFrame>
-        <p:nvGraphicFramePr>
-          <p:cNvPr id="5" name="Chart 4"/>
-          <p:cNvGraphicFramePr/>
-          <p:nvPr/>
-        </p:nvGraphicFramePr>
-        <p:xfrm>
-          <a:off x="1097280" y="2011680"/>
-          <a:ext cx="6035040" cy="3749040"/>
-        </p:xfrm>
-        <a:graphic>
-          <a:graphicData uri="http://schemas.openxmlformats.org/drawingml/2006/chart">
-            <c:chart xmlns:c="http://schemas.openxmlformats.org/drawingml/2006/chart" xmlns:r="http://schemas.openxmlformats.org/officeDocument/2006/relationships" r:id="rId2"/>
-          </a:graphicData>
-        </a:graphic>
-      </p:graphicFrame>
-      <p:sp>
-        <p:nvSpPr>
-          <p:cNvPr id="6" name="roundRect 5"/>
+      <p:sp>
+        <p:nvSpPr>
+          <p:cNvPr id="5" name="Text Box 4"/>
+          <p:cNvSpPr txBox="1"/>
+          <p:nvPr/>
+        </p:nvSpPr>
+        <p:spPr>
+          <a:xfrm>
+            <a:off x="1097280" y="2011680"/>
+            <a:ext cx="4572000" cy="365760"/>
+          </a:xfrm>
+          <a:prstGeom prst="rect">
+            <a:avLst/>
+          </a:prstGeom>
+        </p:spPr>
+        <p:txBody>
+          <a:bodyPr anchor="t"/>
+          <a:lstStyle/>
+          <a:p>
+            <a:pPr algn="l"/>
+            <a:r>
+              <a:rPr b="1" sz="1400">
+                <a:solidFill>
+                  <a:srgbClr val="38BDF8"/>
+                </a:solidFill>
+                <a:latin typeface="+mn-lt"/>
+                <a:cs typeface="+mn-lt"/>
+              </a:rPr>
+              <a:t>📋 Architectural Block Outlining</a:t>
+            </a:r>
+          </a:p>
+        </p:txBody>
+      </p:sp>
+      <p:sp>
+        <p:nvSpPr>
+          <p:cNvPr id="6" name="Text Box 5"/>
+          <p:cNvSpPr txBox="1"/>
+          <p:nvPr/>
+        </p:nvSpPr>
+        <p:spPr>
+          <a:xfrm>
+            <a:off x="1097280" y="2423160"/>
+            <a:ext cx="4572000" cy="3749040"/>
+          </a:xfrm>
+          <a:prstGeom prst="rect">
+            <a:avLst/>
+          </a:prstGeom>
+        </p:spPr>
+        <p:txBody>
+          <a:bodyPr anchor="t"/>
+          <a:lstStyle/>
+          <a:p>
+            <a:pPr algn="l" lvl="0" marL="152400" indent="-152400">
+              <a:buChar char="•"/>
+            </a:pPr>
+            <a:r>
+              <a:rPr b="1" sz="1050">
+                <a:solidFill>
+                  <a:srgbClr val="E2E8F0"/>
+                </a:solidFill>
+                <a:latin typeface="+mn-lt"/>
+                <a:cs typeface="+mn-lt"/>
+              </a:rPr>
+              <a:t>1. Primary Storage Engine (Raft Consensus)</a:t>
+            </a:r>
+          </a:p>
+          <a:p>
+            <a:pPr algn="l" lvl="1">
+              <a:buNone/>
+            </a:pPr>
+            <a:r>
+              <a:rPr sz="1050">
+                <a:solidFill>
+                  <a:srgbClr val="94A3B8"/>
+                </a:solidFill>
+                <a:latin typeface="+mn-lt"/>
+                <a:cs typeface="+mn-lt"/>
+              </a:rPr>
+              <a:t>↳ level: 1, bullet: false — Block explanation indented under Level 0</a:t>
+            </a:r>
+            <a:br>
+              <a:rPr sz="1050">
+                <a:solidFill>
+                  <a:srgbClr val="E2E8F0"/>
+                </a:solidFill>
+                <a:latin typeface="+mn-lt"/>
+                <a:cs typeface="+mn-lt"/>
+              </a:rPr>
+            </a:br>
+            <a:r>
+              <a:rPr sz="1050">
+                <a:solidFill>
+                  <a:srgbClr val="64748B"/>
+                </a:solidFill>
+                <a:latin typeface="+mn-lt"/>
+                <a:cs typeface="+mn-lt"/>
+              </a:rPr>
+              <a:t>Maintains strict linearizable consistency across all state machine nodes.</a:t>
+            </a:r>
+          </a:p>
+          <a:p>
+            <a:pPr algn="l" lvl="2">
+              <a:buNone/>
+            </a:pPr>
+            <a:r>
+              <a:rPr sz="1050">
+                <a:solidFill>
+                  <a:srgbClr val="38BDF8"/>
+                </a:solidFill>
+                <a:latin typeface="+mn-lt"/>
+                <a:cs typeface="+mn-lt"/>
+              </a:rPr>
+              <a:t>• Technical SLA: </a:t>
+            </a:r>
+            <a:r>
+              <a:rPr sz="1050">
+                <a:solidFill>
+                  <a:srgbClr val="CBD5E1"/>
+                </a:solidFill>
+                <a:latin typeface="+mn-lt"/>
+                <a:cs typeface="+mn-lt"/>
+              </a:rPr>
+              <a:t>P99 commit latency &lt; 0.85ms over NVMe WAL</a:t>
+            </a:r>
+          </a:p>
+          <a:p>
+            <a:pPr algn="l" lvl="0" marL="152400" indent="-152400">
+              <a:buChar char="•"/>
+            </a:pPr>
+            <a:r>
+              <a:rPr b="1" sz="1050">
+                <a:solidFill>
+                  <a:srgbClr val="E2E8F0"/>
+                </a:solidFill>
+                <a:latin typeface="+mn-lt"/>
+                <a:cs typeface="+mn-lt"/>
+              </a:rPr>
+              <a:t>2. Multi-Region Active Replication</a:t>
+            </a:r>
+          </a:p>
+          <a:p>
+            <a:pPr algn="l" lvl="1">
+              <a:buNone/>
+            </a:pPr>
+            <a:r>
+              <a:rPr sz="1050">
+                <a:solidFill>
+                  <a:srgbClr val="94A3B8"/>
+                </a:solidFill>
+                <a:latin typeface="+mn-lt"/>
+                <a:cs typeface="+mn-lt"/>
+              </a:rPr>
+              <a:t>↳ level: 1, bullet: false — Block commentary (no bullet glyph)</a:t>
+            </a:r>
+            <a:br>
+              <a:rPr sz="1050">
+                <a:solidFill>
+                  <a:srgbClr val="E2E8F0"/>
+                </a:solidFill>
+                <a:latin typeface="+mn-lt"/>
+                <a:cs typeface="+mn-lt"/>
+              </a:rPr>
+            </a:br>
+            <a:r>
+              <a:rPr sz="1050">
+                <a:solidFill>
+                  <a:srgbClr val="64748B"/>
+                </a:solidFill>
+                <a:latin typeface="+mn-lt"/>
+                <a:cs typeface="+mn-lt"/>
+              </a:rPr>
+              <a:t>Automatic failover orchestration with zero operational downtime.</a:t>
+            </a:r>
+          </a:p>
+          <a:p>
+            <a:pPr algn="l" lvl="2">
+              <a:buNone/>
+            </a:pPr>
+            <a:r>
+              <a:rPr sz="1050">
+                <a:solidFill>
+                  <a:srgbClr val="10B981"/>
+                </a:solidFill>
+                <a:latin typeface="+mn-lt"/>
+                <a:cs typeface="+mn-lt"/>
+              </a:rPr>
+              <a:t>• Health Heartbeat: </a:t>
+            </a:r>
+            <a:r>
+              <a:rPr sz="1050">
+                <a:solidFill>
+                  <a:srgbClr val="CBD5E1"/>
+                </a:solidFill>
+                <a:latin typeface="+mn-lt"/>
+                <a:cs typeface="+mn-lt"/>
+              </a:rPr>
+              <a:t>Sub-50ms peer gossip discovery with eBPF probes</a:t>
+            </a:r>
+          </a:p>
+        </p:txBody>
+      </p:sp>
+      <p:sp>
+        <p:nvSpPr>
+          <p:cNvPr id="7" name="roundRect 6"/>
           <p:cNvSpPr/>
           <p:nvPr/>
         </p:nvSpPr>
         <p:spPr>
           <a:xfrm>
-            <a:off x="7589520" y="1828800"/>
-            <a:ext cx="3657600" cy="1234440"/>
-          </a:xfrm>
-          <a:prstGeom prst="roundRect">
-            <a:avLst/>
-          </a:prstGeom>
-          <a:solidFill>
-            <a:srgbClr val="1E293B"/>
-          </a:solidFill>
-          <a:ln w="13716">
-            <a:solidFill>
-              <a:srgbClr val="0284C7"/>
-            </a:solidFill>
-          </a:ln>
-        </p:spPr>
-        <p:txBody>
-          <a:bodyPr anchor="t"/>
-          <a:lstStyle/>
-          <a:p>
-            <a:pPr algn="l"/>
-            <a:r>
-              <a:rPr b="1" sz="1300">
-                <a:solidFill>
-                  <a:srgbClr val="38BDF8"/>
-                </a:solidFill>
-                <a:latin typeface="+mn-lt"/>
-                <a:cs typeface="+mn-lt"/>
-              </a:rPr>
-              <a:t>⚡ Zero Native Bindings</a:t>
-            </a:r>
-          </a:p>
-        </p:txBody>
-      </p:sp>
-      <p:sp>
-        <p:nvSpPr>
-          <p:cNvPr id="7" name="Text Box 6"/>
-          <p:cNvSpPr/>
-          <p:nvPr/>
-        </p:nvSpPr>
-        <p:spPr>
-          <a:xfrm>
-            <a:off x="7772400" y="2240280"/>
-            <a:ext cx="3291840" cy="731520"/>
-          </a:xfrm>
-          <a:prstGeom prst="rect">
-            <a:avLst/>
-          </a:prstGeom>
-        </p:spPr>
-        <p:txBody>
-          <a:bodyPr anchor="t"/>
-          <a:lstStyle/>
-          <a:p>
-            <a:pPr algn="l"/>
-            <a:r>
-              <a:rPr sz="1000">
-                <a:solidFill>
-                  <a:srgbClr val="94A3B8"/>
-                </a:solidFill>
-                <a:latin typeface="+mn-lt"/>
-                <a:cs typeface="+mn-lt"/>
-              </a:rPr>
-              <a:t>Generates ECMA-376 compliant DrawingML charts directly from pure TypeScript arrays without spawning Python, Java, or Excel subprocesses.</a:t>
-            </a:r>
-          </a:p>
-        </p:txBody>
-      </p:sp>
-      <p:sp>
-        <p:nvSpPr>
-          <p:cNvPr id="8" name="roundRect 7"/>
-          <p:cNvSpPr/>
-          <p:nvPr/>
-        </p:nvSpPr>
-        <p:spPr>
-          <a:xfrm>
-            <a:off x="7589520" y="3246120"/>
-            <a:ext cx="3657600" cy="1234440"/>
-          </a:xfrm>
-          <a:prstGeom prst="roundRect">
-            <a:avLst/>
-          </a:prstGeom>
-          <a:solidFill>
-            <a:srgbClr val="1E293B"/>
-          </a:solidFill>
-          <a:ln w="13716">
-            <a:solidFill>
-              <a:srgbClr val="10B981"/>
-            </a:solidFill>
-          </a:ln>
-        </p:spPr>
-        <p:txBody>
-          <a:bodyPr anchor="t"/>
-          <a:lstStyle/>
-          <a:p>
-            <a:pPr algn="l"/>
-            <a:r>
-              <a:rPr b="1" sz="1300">
-                <a:solidFill>
-                  <a:srgbClr val="34D399"/>
-                </a:solidFill>
-                <a:latin typeface="+mn-lt"/>
-                <a:cs typeface="+mn-lt"/>
-              </a:rPr>
-              <a:t>📈 Fully Editable &amp; Scalable</a:t>
-            </a:r>
-          </a:p>
-        </p:txBody>
-      </p:sp>
-      <p:sp>
-        <p:nvSpPr>
-          <p:cNvPr id="9" name="Text Box 8"/>
-          <p:cNvSpPr/>
-          <p:nvPr/>
-        </p:nvSpPr>
-        <p:spPr>
-          <a:xfrm>
-            <a:off x="7772400" y="3657600"/>
-            <a:ext cx="3291840" cy="731520"/>
-          </a:xfrm>
-          <a:prstGeom prst="rect">
-            <a:avLst/>
-          </a:prstGeom>
-        </p:spPr>
-        <p:txBody>
-          <a:bodyPr anchor="t"/>
-          <a:lstStyle/>
-          <a:p>
-            <a:pPr algn="l"/>
-            <a:r>
-              <a:rPr sz="1000">
-                <a:solidFill>
-                  <a:srgbClr val="94A3B8"/>
-                </a:solidFill>
-                <a:latin typeface="+mn-lt"/>
-                <a:cs typeface="+mn-lt"/>
-              </a:rPr>
-              <a:t>Embedded as vector OpenXML chart spaces. Users can edit values, change themes, or modify series formatting natively inside Microsoft PowerPoint.</a:t>
-            </a:r>
-          </a:p>
-        </p:txBody>
-      </p:sp>
-      <p:sp>
-        <p:nvSpPr>
-          <p:cNvPr id="10" name="roundRect 9"/>
-          <p:cNvSpPr/>
-          <p:nvPr/>
-        </p:nvSpPr>
-        <p:spPr>
-          <a:xfrm>
-            <a:off x="7589520" y="4663440"/>
-            <a:ext cx="3657600" cy="1234440"/>
+            <a:off x="6217920" y="1828800"/>
+            <a:ext cx="4937760" cy="4480560"/>
           </a:xfrm>
           <a:prstGeom prst="roundRect">
             <a:avLst/>
@@ -11555,6 +12907,36 @@
               <a:srgbClr val="6366F1"/>
             </a:solidFill>
           </a:ln>
+          <a:effectLst>
+            <a:outerShdw blurRad="182880" dist="45720" dir="5400000">
+              <a:srgbClr val="000000">
+                <a:alpha val="40000"/>
+              </a:srgbClr>
+            </a:outerShdw>
+          </a:effectLst>
+        </p:spPr>
+        <p:txBody>
+          <a:bodyPr/>
+          <a:lstStyle/>
+          <a:p>
+            <a:endParaRPr/>
+          </a:p>
+        </p:txBody>
+      </p:sp>
+      <p:sp>
+        <p:nvSpPr>
+          <p:cNvPr id="8" name="Text Box 7"/>
+          <p:cNvSpPr txBox="1"/>
+          <p:nvPr/>
+        </p:nvSpPr>
+        <p:spPr>
+          <a:xfrm>
+            <a:off x="6400800" y="2011680"/>
+            <a:ext cx="4572000" cy="365760"/>
+          </a:xfrm>
+          <a:prstGeom prst="rect">
+            <a:avLst/>
+          </a:prstGeom>
         </p:spPr>
         <p:txBody>
           <a:bodyPr anchor="t"/>
@@ -11562,28 +12944,28 @@
           <a:p>
             <a:pPr algn="l"/>
             <a:r>
-              <a:rPr b="1" sz="1300">
+              <a:rPr b="1" sz="1400">
                 <a:solidFill>
                   <a:srgbClr val="818CF8"/>
                 </a:solidFill>
                 <a:latin typeface="+mn-lt"/>
                 <a:cs typeface="+mn-lt"/>
               </a:rPr>
-              <a:t>🎨 Multi-Type Chart Engine</a:t>
-            </a:r>
-          </a:p>
-        </p:txBody>
-      </p:sp>
-      <p:sp>
-        <p:nvSpPr>
-          <p:cNvPr id="11" name="Text Box 10"/>
-          <p:cNvSpPr/>
-          <p:nvPr/>
-        </p:nvSpPr>
-        <p:spPr>
-          <a:xfrm>
-            <a:off x="7772400" y="5074920"/>
-            <a:ext cx="3291840" cy="731520"/>
+              <a:t>💻 Code &amp; Config Indentation Simulation</a:t>
+            </a:r>
+          </a:p>
+        </p:txBody>
+      </p:sp>
+      <p:sp>
+        <p:nvSpPr>
+          <p:cNvPr id="9" name="Text Box 8"/>
+          <p:cNvSpPr txBox="1"/>
+          <p:nvPr/>
+        </p:nvSpPr>
+        <p:spPr>
+          <a:xfrm>
+            <a:off x="6400800" y="2423160"/>
+            <a:ext cx="4572000" cy="3749040"/>
           </a:xfrm>
           <a:prstGeom prst="rect">
             <a:avLst/>
@@ -11593,24 +12975,281 @@
           <a:bodyPr anchor="t"/>
           <a:lstStyle/>
           <a:p>
-            <a:pPr algn="l"/>
-            <a:r>
-              <a:rPr sz="1000">
-                <a:solidFill>
-                  <a:srgbClr val="94A3B8"/>
-                </a:solidFill>
-                <a:latin typeface="+mn-lt"/>
-                <a:cs typeface="+mn-lt"/>
-              </a:rPr>
-              <a:t>Supports column, bar, line, area, and pie chart topologies with custom series coloring, categorical axes, and configurable legend alignments.</a:t>
-            </a:r>
-          </a:p>
-        </p:txBody>
-      </p:sp>
-      <p:sp>
-        <p:nvSpPr>
-          <p:cNvPr id="12" name="Text Box 11"/>
-          <p:cNvSpPr/>
+            <a:pPr algn="l" lvl="0">
+              <a:buNone/>
+            </a:pPr>
+            <a:r>
+              <a:rPr sz="1100">
+                <a:solidFill>
+                  <a:srgbClr val="F43F5E"/>
+                </a:solidFill>
+                <a:latin typeface="Courier New"/>
+                <a:cs typeface="Courier New"/>
+              </a:rPr>
+              <a:t>export interface </a:t>
+            </a:r>
+            <a:r>
+              <a:rPr b="1" sz="1100">
+                <a:solidFill>
+                  <a:srgbClr val="38BDF8"/>
+                </a:solidFill>
+                <a:latin typeface="Courier New"/>
+                <a:cs typeface="Courier New"/>
+              </a:rPr>
+              <a:t>PresentationConfig </a:t>
+            </a:r>
+            <a:r>
+              <a:rPr sz="1100">
+                <a:solidFill>
+                  <a:srgbClr val="E2E8F0"/>
+                </a:solidFill>
+                <a:latin typeface="Courier New"/>
+                <a:cs typeface="Courier New"/>
+              </a:rPr>
+              <a:t>{</a:t>
+            </a:r>
+          </a:p>
+          <a:p>
+            <a:pPr algn="l" lvl="1">
+              <a:buNone/>
+            </a:pPr>
+            <a:r>
+              <a:rPr sz="1100">
+                <a:solidFill>
+                  <a:srgbClr val="CBD5E1"/>
+                </a:solidFill>
+                <a:latin typeface="Courier New"/>
+                <a:cs typeface="Courier New"/>
+              </a:rPr>
+              <a:t>author: </a:t>
+            </a:r>
+            <a:r>
+              <a:rPr sz="1100">
+                <a:solidFill>
+                  <a:srgbClr val="10B981"/>
+                </a:solidFill>
+                <a:latin typeface="Courier New"/>
+                <a:cs typeface="Courier New"/>
+              </a:rPr>
+              <a:t>'Hokkyss Core Team'</a:t>
+            </a:r>
+            <a:r>
+              <a:rPr sz="1100">
+                <a:solidFill>
+                  <a:srgbClr val="E2E8F0"/>
+                </a:solidFill>
+                <a:latin typeface="Courier New"/>
+                <a:cs typeface="Courier New"/>
+              </a:rPr>
+              <a:t>;</a:t>
+            </a:r>
+          </a:p>
+          <a:p>
+            <a:pPr algn="l" lvl="1">
+              <a:buNone/>
+            </a:pPr>
+            <a:r>
+              <a:rPr sz="1100">
+                <a:solidFill>
+                  <a:srgbClr val="CBD5E1"/>
+                </a:solidFill>
+                <a:latin typeface="Courier New"/>
+                <a:cs typeface="Courier New"/>
+              </a:rPr>
+              <a:t>dimensions: </a:t>
+            </a:r>
+            <a:r>
+              <a:rPr sz="1100">
+                <a:solidFill>
+                  <a:srgbClr val="E2E8F0"/>
+                </a:solidFill>
+                <a:latin typeface="Courier New"/>
+                <a:cs typeface="Courier New"/>
+              </a:rPr>
+              <a:t>{</a:t>
+            </a:r>
+          </a:p>
+          <a:p>
+            <a:pPr algn="l" lvl="2">
+              <a:buNone/>
+            </a:pPr>
+            <a:r>
+              <a:rPr sz="1100">
+                <a:solidFill>
+                  <a:srgbClr val="CBD5E1"/>
+                </a:solidFill>
+                <a:latin typeface="Courier New"/>
+                <a:cs typeface="Courier New"/>
+              </a:rPr>
+              <a:t>width: </a:t>
+            </a:r>
+            <a:r>
+              <a:rPr sz="1100">
+                <a:solidFill>
+                  <a:srgbClr val="F59E0B"/>
+                </a:solidFill>
+                <a:latin typeface="Courier New"/>
+                <a:cs typeface="Courier New"/>
+              </a:rPr>
+              <a:t>inches(13.33)</a:t>
+            </a:r>
+            <a:r>
+              <a:rPr sz="1100">
+                <a:solidFill>
+                  <a:srgbClr val="E2E8F0"/>
+                </a:solidFill>
+                <a:latin typeface="Courier New"/>
+                <a:cs typeface="Courier New"/>
+              </a:rPr>
+              <a:t>;</a:t>
+            </a:r>
+          </a:p>
+          <a:p>
+            <a:pPr algn="l" lvl="2">
+              <a:buNone/>
+            </a:pPr>
+            <a:r>
+              <a:rPr sz="1100">
+                <a:solidFill>
+                  <a:srgbClr val="CBD5E1"/>
+                </a:solidFill>
+                <a:latin typeface="Courier New"/>
+                <a:cs typeface="Courier New"/>
+              </a:rPr>
+              <a:t>height: </a:t>
+            </a:r>
+            <a:r>
+              <a:rPr sz="1100">
+                <a:solidFill>
+                  <a:srgbClr val="F59E0B"/>
+                </a:solidFill>
+                <a:latin typeface="Courier New"/>
+                <a:cs typeface="Courier New"/>
+              </a:rPr>
+              <a:t>inches(7.5)</a:t>
+            </a:r>
+            <a:r>
+              <a:rPr sz="1100">
+                <a:solidFill>
+                  <a:srgbClr val="E2E8F0"/>
+                </a:solidFill>
+                <a:latin typeface="Courier New"/>
+                <a:cs typeface="Courier New"/>
+              </a:rPr>
+              <a:t>;</a:t>
+            </a:r>
+          </a:p>
+          <a:p>
+            <a:pPr algn="l" lvl="1">
+              <a:buNone/>
+            </a:pPr>
+            <a:r>
+              <a:rPr sz="1100">
+                <a:solidFill>
+                  <a:srgbClr val="E2E8F0"/>
+                </a:solidFill>
+                <a:latin typeface="Courier New"/>
+                <a:cs typeface="Courier New"/>
+              </a:rPr>
+              <a:t>};</a:t>
+            </a:r>
+          </a:p>
+          <a:p>
+            <a:pPr algn="l" lvl="1">
+              <a:buNone/>
+            </a:pPr>
+            <a:r>
+              <a:rPr sz="1100">
+                <a:solidFill>
+                  <a:srgbClr val="CBD5E1"/>
+                </a:solidFill>
+                <a:latin typeface="Courier New"/>
+                <a:cs typeface="Courier New"/>
+              </a:rPr>
+              <a:t>bulletFormatting: </a:t>
+            </a:r>
+            <a:r>
+              <a:rPr sz="1100">
+                <a:solidFill>
+                  <a:srgbClr val="E2E8F0"/>
+                </a:solidFill>
+                <a:latin typeface="Courier New"/>
+                <a:cs typeface="Courier New"/>
+              </a:rPr>
+              <a:t>{</a:t>
+            </a:r>
+          </a:p>
+          <a:p>
+            <a:pPr algn="l" lvl="2">
+              <a:buNone/>
+            </a:pPr>
+            <a:r>
+              <a:rPr sz="1100">
+                <a:solidFill>
+                  <a:srgbClr val="CBD5E1"/>
+                </a:solidFill>
+                <a:latin typeface="Courier New"/>
+                <a:cs typeface="Courier New"/>
+              </a:rPr>
+              <a:t>type: </a:t>
+            </a:r>
+            <a:r>
+              <a:rPr sz="1100">
+                <a:solidFill>
+                  <a:srgbClr val="10B981"/>
+                </a:solidFill>
+                <a:latin typeface="Courier New"/>
+                <a:cs typeface="Courier New"/>
+              </a:rPr>
+              <a:t>'none'</a:t>
+            </a:r>
+            <a:r>
+              <a:rPr i="1" sz="1100">
+                <a:solidFill>
+                  <a:srgbClr val="64748B"/>
+                </a:solidFill>
+                <a:latin typeface="Courier New"/>
+                <a:cs typeface="Courier New"/>
+              </a:rPr>
+              <a:t> // &lt;a:buNone/&gt; suppresses glyph</a:t>
+            </a:r>
+          </a:p>
+          <a:p>
+            <a:pPr algn="l" lvl="1">
+              <a:buNone/>
+            </a:pPr>
+            <a:r>
+              <a:rPr sz="1100">
+                <a:solidFill>
+                  <a:srgbClr val="E2E8F0"/>
+                </a:solidFill>
+                <a:latin typeface="Courier New"/>
+                <a:cs typeface="Courier New"/>
+              </a:rPr>
+              <a:t>};</a:t>
+            </a:r>
+          </a:p>
+          <a:p>
+            <a:pPr algn="l" lvl="0">
+              <a:buNone/>
+            </a:pPr>
+            <a:r>
+              <a:rPr sz="1100">
+                <a:solidFill>
+                  <a:srgbClr val="E2E8F0"/>
+                </a:solidFill>
+                <a:latin typeface="Courier New"/>
+                <a:cs typeface="Courier New"/>
+              </a:rPr>
+              <a:t>}</a:t>
+            </a:r>
+          </a:p>
+        </p:txBody>
+      </p:sp>
+      <p:sp>
+        <p:nvSpPr>
+          <p:cNvPr id="10" name="Text Box 9"/>
+          <p:cNvSpPr txBox="1"/>
           <p:nvPr/>
         </p:nvSpPr>
         <p:spPr>
@@ -11645,8 +13284,8 @@
   <p:clrMapOvr>
     <a:masterClrMapping/>
   </p:clrMapOvr>
-  <p:transition spd="med">
-    <p:wheel spokes="4"/>
+  <p:transition spd="fast">
+    <p:wipe dir="r"/>
   </p:transition>
 </p:sld>
 </file>

--- a/hokkyss_showcase_deck.pptx
+++ b/hokkyss_showcase_deck.pptx
@@ -5,7 +5,7 @@
     <p:sldMasterId id="2147483648" r:id="rId1"/>
   </p:sldMasterIdLst>
   <p:notesMasterIdLst>
-    <p:notesMasterId r:id="rId18"/>
+    <p:notesMasterId r:id="rId19"/>
   </p:notesMasterIdLst>
   <p:sldIdLst>
     <p:sldId id="256" r:id="rId2"/>
@@ -24,6 +24,7 @@
     <p:sldId id="269" r:id="rId15"/>
     <p:sldId id="270" r:id="rId16"/>
     <p:sldId id="271" r:id="rId17"/>
+    <p:sldId id="272" r:id="rId18"/>
   </p:sldIdLst>
   <p:sldSz cx="12192000" cy="6858000"/>
   <p:notesSz cx="6858000" cy="9144000"/>
@@ -2277,6 +2278,112 @@
                 <a:latin typeface="+mn-lt"/>
                 <a:cs typeface="+mn-lt"/>
               </a:rPr>
+              <a:t>Multimedia Embedding Keynote: </a:t>
+            </a:r>
+            <a:r>
+              <a:rPr u="sng">
+                <a:latin typeface="+mn-lt"/>
+                <a:cs typeface="+mn-lt"/>
+              </a:rPr>
+              <a:t>Full OpenXML Audio &amp; Video Integration</a:t>
+            </a:r>
+          </a:p>
+          <a:p>
+            <a:pPr algn="l" lvl="0" marL="152400" indent="-152400">
+              <a:buChar char="•"/>
+            </a:pPr>
+            <a:r>
+              <a:rPr>
+                <a:latin typeface="+mn-lt"/>
+                <a:cs typeface="+mn-lt"/>
+              </a:rPr>
+              <a:t>Native PowerPoint speaker/film strip icons rendered with zero client-side dependencies.</a:t>
+            </a:r>
+          </a:p>
+          <a:p>
+            <a:pPr algn="l" lvl="0" marL="152400" indent="-152400">
+              <a:buChar char="•"/>
+            </a:pPr>
+            <a:r>
+              <a:rPr>
+                <a:latin typeface="+mn-lt"/>
+                <a:cs typeface="+mn-lt"/>
+              </a:rPr>
+              <a:t>Full relationship management with dual r:link (media) and r:embed (p14:media) entries.</a:t>
+            </a:r>
+          </a:p>
+          <a:p>
+            <a:pPr algn="l" lvl="0" marL="152400" indent="-152400">
+              <a:buChar char="•"/>
+            </a:pPr>
+            <a:r>
+              <a:rPr>
+                <a:latin typeface="+mn-lt"/>
+                <a:cs typeface="+mn-lt"/>
+              </a:rPr>
+              <a:t>Complete round-trip preservation when parsed and resaved with @hokkyss/pptx-reader.</a:t>
+            </a:r>
+          </a:p>
+        </p:txBody>
+      </p:sp>
+    </p:spTree>
+  </p:cSld>
+  <p:clrMapOvr>
+    <a:masterClrMapping/>
+  </p:clrMapOvr>
+</p:notes>
+</file>
+
+<file path=ppt/notesSlides/notesSlide13.xml><?xml version="1.0" encoding="utf-8"?>
+<p:notes xmlns:a="http://schemas.openxmlformats.org/drawingml/2006/main" xmlns:p="http://schemas.openxmlformats.org/presentationml/2006/main" xmlns:r="http://schemas.openxmlformats.org/officeDocument/2006/relationships">
+  <p:cSld>
+    <p:spTree>
+      <p:nvGrpSpPr>
+        <p:cNvPr id="1" name=""/>
+        <p:cNvGrpSpPr/>
+        <p:nvPr/>
+      </p:nvGrpSpPr>
+      <p:grpSpPr>
+        <a:xfrm>
+          <a:off x="0" y="0"/>
+          <a:ext cx="0" cy="0"/>
+          <a:chOff x="0" y="0"/>
+          <a:chExt cx="0" cy="0"/>
+        </a:xfrm>
+      </p:grpSpPr>
+      <p:sp>
+        <p:nvSpPr>
+          <p:cNvPr id="2" name="Slide Image Placeholder 1"/>
+          <p:cNvSpPr>
+            <a:spLocks noChangeAspect="1" noGrp="1" noRot="1"/>
+          </p:cNvSpPr>
+          <p:nvPr>
+            <p:ph type="sldImg"/>
+          </p:nvPr>
+        </p:nvSpPr>
+        <p:spPr/>
+      </p:sp>
+      <p:sp>
+        <p:nvSpPr>
+          <p:cNvPr id="3" name="Notes Placeholder 2"/>
+          <p:cNvSpPr>
+            <a:spLocks noGrp="1"/>
+          </p:cNvSpPr>
+          <p:nvPr>
+            <p:ph idx="1" type="body"/>
+          </p:nvPr>
+        </p:nvSpPr>
+        <p:spPr/>
+        <p:txBody>
+          <a:bodyPr anchor="t"/>
+          <a:lstStyle/>
+          <a:p>
+            <a:pPr algn="l" lvl="0"/>
+            <a:r>
+              <a:rPr b="1">
+                <a:latin typeface="+mn-lt"/>
+                <a:cs typeface="+mn-lt"/>
+              </a:rPr>
               <a:t>Empirical Benchmark Keynote: </a:t>
             </a:r>
             <a:r>
@@ -6192,7 +6299,7 @@
       <p:sp>
         <p:nvSpPr>
           <p:cNvPr id="10" name="roundRect 9">
-            <a:hlinkClick r:id="rId5" tooltip="Jump directly to Slide 16" action="ppaction://hlinksldjump"/>
+            <a:hlinkClick r:id="rId5" tooltip="Jump directly to Slide 17" action="ppaction://hlinksldjump"/>
           </p:cNvPr>
           <p:cNvSpPr/>
           <p:nvPr/>
@@ -6227,7 +6334,7 @@
                 <a:latin typeface="+mn-lt"/>
                 <a:cs typeface="+mn-lt"/>
               </a:rPr>
-              <a:t>⚡ Slide 16: Engine Benchmark Matrix ➔</a:t>
+              <a:t>⚡ Slide 17: Engine Benchmark Matrix ➔</a:t>
             </a:r>
           </a:p>
           <a:p>
@@ -6875,7 +6982,7 @@
       <p:sp>
         <p:nvSpPr>
           <p:cNvPr id="5" name="roundRect 4">
-            <a:hlinkClick r:id="rId3" tooltip="Advance to Live Benchmarks (Slide 16)" action="ppaction://hlinksldjump"/>
+            <a:hlinkClick r:id="rId3" tooltip="Advance to Multimedia (Slide 16)" action="ppaction://hlinksldjump"/>
           </p:cNvPr>
           <p:cNvSpPr/>
           <p:nvPr/>
@@ -6925,7 +7032,7 @@
                 <a:latin typeface="+mn-lt"/>
                 <a:cs typeface="+mn-lt"/>
               </a:rPr>
-              <a:t>Benchmarks ➔</a:t>
+              <a:t>Multimedia ➔</a:t>
             </a:r>
           </a:p>
         </p:txBody>
@@ -7588,6 +7695,1118 @@
 </file>
 
 <file path=ppt/slides/slide16.xml><?xml version="1.0" encoding="utf-8"?>
+<p:sld xmlns:a="http://schemas.openxmlformats.org/drawingml/2006/main" xmlns:p="http://schemas.openxmlformats.org/presentationml/2006/main" xmlns:r="http://schemas.openxmlformats.org/officeDocument/2006/relationships">
+  <p:cSld>
+    <p:bg>
+      <p:bgPr>
+        <a:solidFill>
+          <a:srgbClr val="F8FAFC"/>
+        </a:solidFill>
+        <a:effectLst/>
+      </p:bgPr>
+    </p:bg>
+    <p:spTree>
+      <p:nvGrpSpPr>
+        <p:cNvPr id="1" name=""/>
+        <p:cNvGrpSpPr/>
+        <p:nvPr/>
+      </p:nvGrpSpPr>
+      <p:grpSpPr>
+        <a:xfrm>
+          <a:off x="0" y="0"/>
+          <a:ext cx="0" cy="0"/>
+          <a:chOff x="0" y="0"/>
+          <a:chExt cx="0" cy="0"/>
+        </a:xfrm>
+      </p:grpSpPr>
+      <p:sp>
+        <p:nvSpPr>
+          <p:cNvPr id="2" name="Text Box 1"/>
+          <p:cNvSpPr txBox="1"/>
+          <p:nvPr/>
+        </p:nvSpPr>
+        <p:spPr>
+          <a:xfrm>
+            <a:off x="731520" y="731520"/>
+            <a:ext cx="10725912" cy="548640"/>
+          </a:xfrm>
+          <a:prstGeom prst="rect">
+            <a:avLst/>
+          </a:prstGeom>
+        </p:spPr>
+        <p:txBody>
+          <a:bodyPr anchor="t"/>
+          <a:lstStyle/>
+          <a:p>
+            <a:pPr algn="l"/>
+            <a:r>
+              <a:rPr b="1" sz="2400">
+                <a:solidFill>
+                  <a:srgbClr val="0F172A"/>
+                </a:solidFill>
+                <a:latin typeface="+mj-lt"/>
+                <a:cs typeface="+mj-lt"/>
+              </a:rPr>
+              <a:t>Native Audio &amp; Video Media Embedding Engine</a:t>
+            </a:r>
+          </a:p>
+        </p:txBody>
+      </p:sp>
+      <p:sp>
+        <p:nvSpPr>
+          <p:cNvPr id="3" name="Text Box 2"/>
+          <p:cNvSpPr txBox="1"/>
+          <p:nvPr/>
+        </p:nvSpPr>
+        <p:spPr>
+          <a:xfrm>
+            <a:off x="731520" y="1280160"/>
+            <a:ext cx="10725912" cy="365760"/>
+          </a:xfrm>
+          <a:prstGeom prst="rect">
+            <a:avLst/>
+          </a:prstGeom>
+        </p:spPr>
+        <p:txBody>
+          <a:bodyPr anchor="t"/>
+          <a:lstStyle/>
+          <a:p>
+            <a:pPr algn="l"/>
+            <a:r>
+              <a:rPr sz="1400">
+                <a:solidFill>
+                  <a:srgbClr val="64748B"/>
+                </a:solidFill>
+                <a:latin typeface="+mn-lt"/>
+                <a:cs typeface="+mn-lt"/>
+              </a:rPr>
+              <a:t>OpenXML DrawingML &lt;p:pic&gt; multimedia integration with automatic relationship linking, playback triggers &amp; timing</a:t>
+            </a:r>
+          </a:p>
+        </p:txBody>
+      </p:sp>
+      <p:sp>
+        <p:nvSpPr>
+          <p:cNvPr id="4" name="roundRect 3">
+            <a:hlinkClick r:id="rId2" tooltip="Return to Hyperlinks Hub (Slide 14)" action="ppaction://hlinksldjump"/>
+          </p:cNvPr>
+          <p:cNvSpPr/>
+          <p:nvPr/>
+        </p:nvSpPr>
+        <p:spPr>
+          <a:xfrm>
+            <a:off x="7315200" y="731520"/>
+            <a:ext cx="2011680" cy="411480"/>
+          </a:xfrm>
+          <a:prstGeom prst="roundRect">
+            <a:avLst/>
+          </a:prstGeom>
+          <a:solidFill>
+            <a:srgbClr val="0284C7"/>
+          </a:solidFill>
+          <a:ln w="13716">
+            <a:solidFill>
+              <a:srgbClr val="38BDF8"/>
+            </a:solidFill>
+          </a:ln>
+          <a:effectLst>
+            <a:outerShdw blurRad="109728" dist="38100" dir="5400000">
+              <a:srgbClr val="0284C7">
+                <a:alpha val="30000"/>
+              </a:srgbClr>
+            </a:outerShdw>
+          </a:effectLst>
+        </p:spPr>
+        <p:txBody>
+          <a:bodyPr anchor="t"/>
+          <a:lstStyle/>
+          <a:p>
+            <a:pPr algn="ctr"/>
+            <a:r>
+              <a:rPr b="1" sz="1000">
+                <a:solidFill>
+                  <a:srgbClr val="FFFFFF"/>
+                </a:solidFill>
+                <a:latin typeface="+mn-lt"/>
+                <a:cs typeface="+mn-lt"/>
+              </a:rPr>
+              <a:t>⬅ Back to Nav Hub</a:t>
+            </a:r>
+          </a:p>
+        </p:txBody>
+      </p:sp>
+      <p:sp>
+        <p:nvSpPr>
+          <p:cNvPr id="5" name="roundRect 4">
+            <a:hlinkClick r:id="rId3" tooltip="Advance to Live Benchmarks (Slide 17)" action="ppaction://hlinksldjump"/>
+          </p:cNvPr>
+          <p:cNvSpPr/>
+          <p:nvPr/>
+        </p:nvSpPr>
+        <p:spPr>
+          <a:xfrm>
+            <a:off x="9509760" y="731520"/>
+            <a:ext cx="1828800" cy="411480"/>
+          </a:xfrm>
+          <a:prstGeom prst="roundRect">
+            <a:avLst/>
+          </a:prstGeom>
+          <a:gradFill>
+            <a:gsLst>
+              <a:gs pos="0">
+                <a:srgbClr val="10B981"/>
+              </a:gs>
+              <a:gs pos="100000">
+                <a:srgbClr val="059669"/>
+              </a:gs>
+            </a:gsLst>
+            <a:lin ang="5400000" scaled="1"/>
+          </a:gradFill>
+          <a:ln w="13716">
+            <a:solidFill>
+              <a:srgbClr val="34D399"/>
+            </a:solidFill>
+          </a:ln>
+          <a:effectLst>
+            <a:outerShdw blurRad="109728" dist="38100" dir="5400000">
+              <a:srgbClr val="10B981">
+                <a:alpha val="30000"/>
+              </a:srgbClr>
+            </a:outerShdw>
+          </a:effectLst>
+        </p:spPr>
+        <p:txBody>
+          <a:bodyPr anchor="t"/>
+          <a:lstStyle/>
+          <a:p>
+            <a:pPr algn="ctr"/>
+            <a:r>
+              <a:rPr b="1" sz="1000">
+                <a:solidFill>
+                  <a:srgbClr val="FFFFFF"/>
+                </a:solidFill>
+                <a:latin typeface="+mn-lt"/>
+                <a:cs typeface="+mn-lt"/>
+              </a:rPr>
+              <a:t>Benchmarks ➔</a:t>
+            </a:r>
+          </a:p>
+        </p:txBody>
+      </p:sp>
+      <p:sp>
+        <p:nvSpPr>
+          <p:cNvPr id="6" name="roundRect 5"/>
+          <p:cNvSpPr/>
+          <p:nvPr/>
+        </p:nvSpPr>
+        <p:spPr>
+          <a:xfrm>
+            <a:off x="731520" y="1828800"/>
+            <a:ext cx="5212080" cy="4480560"/>
+          </a:xfrm>
+          <a:prstGeom prst="roundRect">
+            <a:avLst/>
+          </a:prstGeom>
+          <a:solidFill>
+            <a:srgbClr val="FFFFFF"/>
+          </a:solidFill>
+          <a:ln w="13716">
+            <a:solidFill>
+              <a:srgbClr val="E2E8F0"/>
+            </a:solidFill>
+          </a:ln>
+          <a:effectLst>
+            <a:outerShdw blurRad="109728" dist="38100" dir="5400000">
+              <a:srgbClr val="0F172A">
+                <a:alpha val="8000"/>
+              </a:srgbClr>
+            </a:outerShdw>
+          </a:effectLst>
+        </p:spPr>
+        <p:txBody>
+          <a:bodyPr/>
+          <a:lstStyle/>
+          <a:p>
+            <a:endParaRPr/>
+          </a:p>
+        </p:txBody>
+      </p:sp>
+      <p:sp>
+        <p:nvSpPr>
+          <p:cNvPr id="7" name="Text Box 6"/>
+          <p:cNvSpPr txBox="1"/>
+          <p:nvPr/>
+        </p:nvSpPr>
+        <p:spPr>
+          <a:xfrm>
+            <a:off x="914400" y="2011680"/>
+            <a:ext cx="4846320" cy="320040"/>
+          </a:xfrm>
+          <a:prstGeom prst="rect">
+            <a:avLst/>
+          </a:prstGeom>
+        </p:spPr>
+        <p:txBody>
+          <a:bodyPr anchor="t"/>
+          <a:lstStyle/>
+          <a:p>
+            <a:pPr algn="l"/>
+            <a:r>
+              <a:rPr b="1" sz="1300">
+                <a:solidFill>
+                  <a:srgbClr val="0F172A"/>
+                </a:solidFill>
+                <a:latin typeface="+mn-lt"/>
+                <a:cs typeface="+mn-lt"/>
+              </a:rPr>
+              <a:t>🔊 Embedded Audio &amp; Narration Tracks</a:t>
+            </a:r>
+          </a:p>
+        </p:txBody>
+      </p:sp>
+      <p:sp>
+        <p:nvSpPr>
+          <p:cNvPr id="8" name="Text Box 7"/>
+          <p:cNvSpPr txBox="1"/>
+          <p:nvPr/>
+        </p:nvSpPr>
+        <p:spPr>
+          <a:xfrm>
+            <a:off x="914400" y="2331720"/>
+            <a:ext cx="4846320" cy="411480"/>
+          </a:xfrm>
+          <a:prstGeom prst="rect">
+            <a:avLst/>
+          </a:prstGeom>
+        </p:spPr>
+        <p:txBody>
+          <a:bodyPr anchor="t"/>
+          <a:lstStyle/>
+          <a:p>
+            <a:pPr algn="l"/>
+            <a:r>
+              <a:rPr sz="1050">
+                <a:solidFill>
+                  <a:srgbClr val="64748B"/>
+                </a:solidFill>
+                <a:latin typeface="+mn-lt"/>
+                <a:cs typeface="+mn-lt"/>
+              </a:rPr>
+              <a:t>Native speaker icon rendered automatically with interactive click-to-play &amp; automatic slide load triggers:</a:t>
+            </a:r>
+          </a:p>
+        </p:txBody>
+      </p:sp>
+      <p:sp>
+        <p:nvSpPr>
+          <p:cNvPr id="9" name="roundRect 8"/>
+          <p:cNvSpPr/>
+          <p:nvPr/>
+        </p:nvSpPr>
+        <p:spPr>
+          <a:xfrm>
+            <a:off x="914400" y="2788920"/>
+            <a:ext cx="4846320" cy="1371600"/>
+          </a:xfrm>
+          <a:prstGeom prst="roundRect">
+            <a:avLst/>
+          </a:prstGeom>
+          <a:solidFill>
+            <a:srgbClr val="F1F5F9"/>
+          </a:solidFill>
+          <a:ln w="13716">
+            <a:solidFill>
+              <a:srgbClr val="CBD5E1"/>
+            </a:solidFill>
+          </a:ln>
+        </p:spPr>
+        <p:txBody>
+          <a:bodyPr/>
+          <a:lstStyle/>
+          <a:p>
+            <a:endParaRPr/>
+          </a:p>
+        </p:txBody>
+      </p:sp>
+      <p:pic>
+        <p:nvPicPr>
+          <p:cNvPr id="10" name="Showcase Audio Track"/>
+          <p:cNvPicPr>
+            <a:picLocks noChangeAspect="1"/>
+          </p:cNvPicPr>
+          <p:nvPr>
+            <a:audioFile r:link="rId5"/>
+            <p:extLst>
+              <p:ext uri="{DAA4B4D4-6D71-4841-9C94-3DE7FCFB9230}">
+                <p14:media xmlns:p14="http://schemas.microsoft.com/office/powerpoint/2010/main" r:embed="rId6"/>
+              </p:ext>
+            </p:extLst>
+          </p:nvPr>
+        </p:nvPicPr>
+        <p:blipFill>
+          <a:blip r:embed="rId4"/>
+          <a:stretch>
+            <a:fillRect/>
+          </a:stretch>
+        </p:blipFill>
+        <p:spPr>
+          <a:xfrm>
+            <a:off x="1097280" y="3017520"/>
+            <a:ext cx="914400" cy="914400"/>
+          </a:xfrm>
+          <a:prstGeom prst="rect">
+            <a:avLst/>
+          </a:prstGeom>
+          <a:noFill/>
+          <a:ln>
+            <a:noFill/>
+          </a:ln>
+        </p:spPr>
+      </p:pic>
+      <p:sp>
+        <p:nvSpPr>
+          <p:cNvPr id="11" name="Text Box 10"/>
+          <p:cNvSpPr txBox="1"/>
+          <p:nvPr/>
+        </p:nvSpPr>
+        <p:spPr>
+          <a:xfrm>
+            <a:off x="2103120" y="2926080"/>
+            <a:ext cx="3566160" cy="1097280"/>
+          </a:xfrm>
+          <a:prstGeom prst="rect">
+            <a:avLst/>
+          </a:prstGeom>
+        </p:spPr>
+        <p:txBody>
+          <a:bodyPr anchor="t"/>
+          <a:lstStyle/>
+          <a:p>
+            <a:pPr algn="l"/>
+            <a:r>
+              <a:rPr b="1" sz="1100">
+                <a:solidFill>
+                  <a:srgbClr val="0F172A"/>
+                </a:solidFill>
+                <a:latin typeface="+mn-lt"/>
+                <a:cs typeface="+mn-lt"/>
+              </a:rPr>
+              <a:t>Interactive Audio Clip (Click custom cover in slideshow)</a:t>
+            </a:r>
+          </a:p>
+          <a:p>
+            <a:pPr algn="l"/>
+            <a:r>
+              <a:rPr sz="950">
+                <a:solidFill>
+                  <a:srgbClr val="0284C7"/>
+                </a:solidFill>
+                <a:latin typeface="+mn-lt"/>
+                <a:cs typeface="+mn-lt"/>
+              </a:rPr>
+              <a:t>• Source: assets/sample-audio.mp3</a:t>
+            </a:r>
+          </a:p>
+          <a:p>
+            <a:pPr algn="l"/>
+            <a:r>
+              <a:rPr sz="950">
+                <a:solidFill>
+                  <a:srgbClr val="64748B"/>
+                </a:solidFill>
+                <a:latin typeface="+mn-lt"/>
+                <a:cs typeface="+mn-lt"/>
+              </a:rPr>
+              <a:t>• Poster: custom-audio-thumbnail.png (Album art)</a:t>
+            </a:r>
+          </a:p>
+          <a:p>
+            <a:pPr algn="l"/>
+            <a:r>
+              <a:rPr sz="950">
+                <a:solidFill>
+                  <a:srgbClr val="64748B"/>
+                </a:solidFill>
+                <a:latin typeface="+mn-lt"/>
+                <a:cs typeface="+mn-lt"/>
+              </a:rPr>
+              <a:t>• Trigger: onClick | Loop: true | Vol: 80%</a:t>
+            </a:r>
+          </a:p>
+        </p:txBody>
+      </p:sp>
+      <p:sp>
+        <p:nvSpPr>
+          <p:cNvPr id="12" name="roundRect 11"/>
+          <p:cNvSpPr/>
+          <p:nvPr/>
+        </p:nvSpPr>
+        <p:spPr>
+          <a:xfrm>
+            <a:off x="914400" y="4343400"/>
+            <a:ext cx="4846320" cy="1737360"/>
+          </a:xfrm>
+          <a:prstGeom prst="roundRect">
+            <a:avLst/>
+          </a:prstGeom>
+          <a:solidFill>
+            <a:srgbClr val="0F172A"/>
+          </a:solidFill>
+        </p:spPr>
+        <p:txBody>
+          <a:bodyPr/>
+          <a:lstStyle/>
+          <a:p>
+            <a:endParaRPr/>
+          </a:p>
+        </p:txBody>
+      </p:sp>
+      <p:sp>
+        <p:nvSpPr>
+          <p:cNvPr id="13" name="Text Box 12"/>
+          <p:cNvSpPr txBox="1"/>
+          <p:nvPr/>
+        </p:nvSpPr>
+        <p:spPr>
+          <a:xfrm>
+            <a:off x="1005840" y="4389120"/>
+            <a:ext cx="4663440" cy="1645920"/>
+          </a:xfrm>
+          <a:prstGeom prst="rect">
+            <a:avLst/>
+          </a:prstGeom>
+        </p:spPr>
+        <p:txBody>
+          <a:bodyPr anchor="t"/>
+          <a:lstStyle/>
+          <a:p>
+            <a:pPr algn="l"/>
+            <a:r>
+              <a:rPr b="1" sz="900">
+                <a:solidFill>
+                  <a:srgbClr val="38BDF8"/>
+                </a:solidFill>
+                <a:latin typeface="+mn-lt"/>
+                <a:cs typeface="+mn-lt"/>
+              </a:rPr>
+              <a:t>// Embed audio with custom album artwork poster</a:t>
+            </a:r>
+          </a:p>
+          <a:p>
+            <a:pPr algn="l"/>
+            <a:r>
+              <a:rPr sz="850">
+                <a:solidFill>
+                  <a:srgbClr val="E2E8F0"/>
+                </a:solidFill>
+                <a:latin typeface="+mn-lt"/>
+                <a:cs typeface="+mn-lt"/>
+              </a:rPr>
+              <a:t>slide.addAudio(audioBuffer, {</a:t>
+            </a:r>
+          </a:p>
+          <a:p>
+            <a:pPr algn="l"/>
+            <a:r>
+              <a:rPr sz="850">
+                <a:solidFill>
+                  <a:srgbClr val="E2E8F0"/>
+                </a:solidFill>
+                <a:latin typeface="+mn-lt"/>
+                <a:cs typeface="+mn-lt"/>
+              </a:rPr>
+              <a:t>  fileName: 'sample-audio.mp3',</a:t>
+            </a:r>
+          </a:p>
+          <a:p>
+            <a:pPr algn="l"/>
+            <a:r>
+              <a:rPr sz="850">
+                <a:solidFill>
+                  <a:srgbClr val="E2E8F0"/>
+                </a:solidFill>
+                <a:latin typeface="+mn-lt"/>
+                <a:cs typeface="+mn-lt"/>
+              </a:rPr>
+              <a:t>  mimeType: 'audio/mpeg',</a:t>
+            </a:r>
+          </a:p>
+          <a:p>
+            <a:pPr algn="l"/>
+            <a:r>
+              <a:rPr sz="850">
+                <a:solidFill>
+                  <a:srgbClr val="E2E8F0"/>
+                </a:solidFill>
+                <a:latin typeface="+mn-lt"/>
+                <a:cs typeface="+mn-lt"/>
+              </a:rPr>
+              <a:t>  poster: { data: albumArtBytes, mimeType: 'image/png' },</a:t>
+            </a:r>
+          </a:p>
+          <a:p>
+            <a:pPr algn="l"/>
+            <a:r>
+              <a:rPr sz="850">
+                <a:solidFill>
+                  <a:srgbClr val="E2E8F0"/>
+                </a:solidFill>
+                <a:latin typeface="+mn-lt"/>
+                <a:cs typeface="+mn-lt"/>
+              </a:rPr>
+              <a:t>  trigger: 'onClick', // or 'automatic'</a:t>
+            </a:r>
+          </a:p>
+          <a:p>
+            <a:pPr algn="l"/>
+            <a:r>
+              <a:rPr sz="850">
+                <a:solidFill>
+                  <a:srgbClr val="E2E8F0"/>
+                </a:solidFill>
+                <a:latin typeface="+mn-lt"/>
+                <a:cs typeface="+mn-lt"/>
+              </a:rPr>
+              <a:t>  loop: true,</a:t>
+            </a:r>
+          </a:p>
+          <a:p>
+            <a:pPr algn="l"/>
+            <a:r>
+              <a:rPr sz="850">
+                <a:solidFill>
+                  <a:srgbClr val="E2E8F0"/>
+                </a:solidFill>
+                <a:latin typeface="+mn-lt"/>
+                <a:cs typeface="+mn-lt"/>
+              </a:rPr>
+              <a:t>  volume: 0.8</a:t>
+            </a:r>
+          </a:p>
+          <a:p>
+            <a:pPr algn="l"/>
+            <a:r>
+              <a:rPr sz="850">
+                <a:solidFill>
+                  <a:srgbClr val="E2E8F0"/>
+                </a:solidFill>
+                <a:latin typeface="+mn-lt"/>
+                <a:cs typeface="+mn-lt"/>
+              </a:rPr>
+              <a:t>});</a:t>
+            </a:r>
+          </a:p>
+        </p:txBody>
+      </p:sp>
+      <p:sp>
+        <p:nvSpPr>
+          <p:cNvPr id="14" name="roundRect 13"/>
+          <p:cNvSpPr/>
+          <p:nvPr/>
+        </p:nvSpPr>
+        <p:spPr>
+          <a:xfrm>
+            <a:off x="6217920" y="1828800"/>
+            <a:ext cx="5212080" cy="4480560"/>
+          </a:xfrm>
+          <a:prstGeom prst="roundRect">
+            <a:avLst/>
+          </a:prstGeom>
+          <a:solidFill>
+            <a:srgbClr val="FFFFFF"/>
+          </a:solidFill>
+          <a:ln w="13716">
+            <a:solidFill>
+              <a:srgbClr val="E2E8F0"/>
+            </a:solidFill>
+          </a:ln>
+          <a:effectLst>
+            <a:outerShdw blurRad="109728" dist="38100" dir="5400000">
+              <a:srgbClr val="0F172A">
+                <a:alpha val="8000"/>
+              </a:srgbClr>
+            </a:outerShdw>
+          </a:effectLst>
+        </p:spPr>
+        <p:txBody>
+          <a:bodyPr/>
+          <a:lstStyle/>
+          <a:p>
+            <a:endParaRPr/>
+          </a:p>
+        </p:txBody>
+      </p:sp>
+      <p:sp>
+        <p:nvSpPr>
+          <p:cNvPr id="15" name="Text Box 14"/>
+          <p:cNvSpPr txBox="1"/>
+          <p:nvPr/>
+        </p:nvSpPr>
+        <p:spPr>
+          <a:xfrm>
+            <a:off x="6400800" y="2011680"/>
+            <a:ext cx="4846320" cy="320040"/>
+          </a:xfrm>
+          <a:prstGeom prst="rect">
+            <a:avLst/>
+          </a:prstGeom>
+        </p:spPr>
+        <p:txBody>
+          <a:bodyPr anchor="t"/>
+          <a:lstStyle/>
+          <a:p>
+            <a:pPr algn="l"/>
+            <a:r>
+              <a:rPr b="1" sz="1300">
+                <a:solidFill>
+                  <a:srgbClr val="0F172A"/>
+                </a:solidFill>
+                <a:latin typeface="+mn-lt"/>
+                <a:cs typeface="+mn-lt"/>
+              </a:rPr>
+              <a:t>🎬 High-Fidelity Video &amp; Motion Graphics</a:t>
+            </a:r>
+          </a:p>
+        </p:txBody>
+      </p:sp>
+      <p:sp>
+        <p:nvSpPr>
+          <p:cNvPr id="16" name="Text Box 15"/>
+          <p:cNvSpPr txBox="1"/>
+          <p:nvPr/>
+        </p:nvSpPr>
+        <p:spPr>
+          <a:xfrm>
+            <a:off x="6400800" y="2331720"/>
+            <a:ext cx="4846320" cy="411480"/>
+          </a:xfrm>
+          <a:prstGeom prst="rect">
+            <a:avLst/>
+          </a:prstGeom>
+        </p:spPr>
+        <p:txBody>
+          <a:bodyPr anchor="t"/>
+          <a:lstStyle/>
+          <a:p>
+            <a:pPr algn="l"/>
+            <a:r>
+              <a:rPr sz="1050">
+                <a:solidFill>
+                  <a:srgbClr val="64748B"/>
+                </a:solidFill>
+                <a:latin typeface="+mn-lt"/>
+                <a:cs typeface="+mn-lt"/>
+              </a:rPr>
+              <a:t>Embed cross-platform MP4/MOV/AVI video containers with custom poster thumbnails, looping, and mute:</a:t>
+            </a:r>
+          </a:p>
+        </p:txBody>
+      </p:sp>
+      <p:sp>
+        <p:nvSpPr>
+          <p:cNvPr id="17" name="roundRect 16"/>
+          <p:cNvSpPr/>
+          <p:nvPr/>
+        </p:nvSpPr>
+        <p:spPr>
+          <a:xfrm>
+            <a:off x="6400800" y="2788920"/>
+            <a:ext cx="4846320" cy="1371600"/>
+          </a:xfrm>
+          <a:prstGeom prst="roundRect">
+            <a:avLst/>
+          </a:prstGeom>
+          <a:solidFill>
+            <a:srgbClr val="0F172A"/>
+          </a:solidFill>
+          <a:ln w="13716">
+            <a:solidFill>
+              <a:srgbClr val="334155"/>
+            </a:solidFill>
+          </a:ln>
+        </p:spPr>
+        <p:txBody>
+          <a:bodyPr/>
+          <a:lstStyle/>
+          <a:p>
+            <a:endParaRPr/>
+          </a:p>
+        </p:txBody>
+      </p:sp>
+      <p:pic>
+        <p:nvPicPr>
+          <p:cNvPr id="18" name="Showcase Video Track"/>
+          <p:cNvPicPr>
+            <a:picLocks noChangeAspect="1"/>
+          </p:cNvPicPr>
+          <p:nvPr>
+            <a:videoFile r:link="rId8"/>
+            <p:extLst>
+              <p:ext uri="{DAA4B4D4-6D71-4841-9C94-3DE7FCFB9230}">
+                <p14:media xmlns:p14="http://schemas.microsoft.com/office/powerpoint/2010/main" r:embed="rId9"/>
+              </p:ext>
+            </p:extLst>
+          </p:nvPr>
+        </p:nvPicPr>
+        <p:blipFill>
+          <a:blip r:embed="rId7"/>
+          <a:stretch>
+            <a:fillRect/>
+          </a:stretch>
+        </p:blipFill>
+        <p:spPr>
+          <a:xfrm>
+            <a:off x="6537960" y="2880360"/>
+            <a:ext cx="1645920" cy="1188720"/>
+          </a:xfrm>
+          <a:prstGeom prst="rect">
+            <a:avLst/>
+          </a:prstGeom>
+          <a:noFill/>
+          <a:ln>
+            <a:noFill/>
+          </a:ln>
+        </p:spPr>
+      </p:pic>
+      <p:sp>
+        <p:nvSpPr>
+          <p:cNvPr id="19" name="Text Box 18"/>
+          <p:cNvSpPr txBox="1"/>
+          <p:nvPr/>
+        </p:nvSpPr>
+        <p:spPr>
+          <a:xfrm>
+            <a:off x="8321040" y="2926080"/>
+            <a:ext cx="2834640" cy="1097280"/>
+          </a:xfrm>
+          <a:prstGeom prst="rect">
+            <a:avLst/>
+          </a:prstGeom>
+        </p:spPr>
+        <p:txBody>
+          <a:bodyPr anchor="t"/>
+          <a:lstStyle/>
+          <a:p>
+            <a:pPr algn="l"/>
+            <a:r>
+              <a:rPr b="1" sz="1100">
+                <a:solidFill>
+                  <a:srgbClr val="FFFFFF"/>
+                </a:solidFill>
+                <a:latin typeface="+mn-lt"/>
+                <a:cs typeface="+mn-lt"/>
+              </a:rPr>
+              <a:t>Embedded Video Player Container</a:t>
+            </a:r>
+          </a:p>
+          <a:p>
+            <a:pPr algn="l"/>
+            <a:r>
+              <a:rPr sz="950">
+                <a:solidFill>
+                  <a:srgbClr val="38BDF8"/>
+                </a:solidFill>
+                <a:latin typeface="+mn-lt"/>
+                <a:cs typeface="+mn-lt"/>
+              </a:rPr>
+              <a:t>• Source: assets/sample-video.mp4 (H.264)</a:t>
+            </a:r>
+          </a:p>
+          <a:p>
+            <a:pPr algn="l"/>
+            <a:r>
+              <a:rPr sz="950">
+                <a:solidFill>
+                  <a:srgbClr val="94A3B8"/>
+                </a:solidFill>
+                <a:latin typeface="+mn-lt"/>
+                <a:cs typeface="+mn-lt"/>
+              </a:rPr>
+              <a:t>• Poster: custom-video-thumbnail.png (Cinematic 4K)</a:t>
+            </a:r>
+          </a:p>
+          <a:p>
+            <a:pPr algn="l"/>
+            <a:r>
+              <a:rPr sz="950">
+                <a:solidFill>
+                  <a:srgbClr val="94A3B8"/>
+                </a:solidFill>
+                <a:latin typeface="+mn-lt"/>
+                <a:cs typeface="+mn-lt"/>
+              </a:rPr>
+              <a:t>• Trigger: automatic | Muted: true</a:t>
+            </a:r>
+          </a:p>
+        </p:txBody>
+      </p:sp>
+      <p:sp>
+        <p:nvSpPr>
+          <p:cNvPr id="20" name="roundRect 19"/>
+          <p:cNvSpPr/>
+          <p:nvPr/>
+        </p:nvSpPr>
+        <p:spPr>
+          <a:xfrm>
+            <a:off x="6400800" y="4343400"/>
+            <a:ext cx="4846320" cy="1737360"/>
+          </a:xfrm>
+          <a:prstGeom prst="roundRect">
+            <a:avLst/>
+          </a:prstGeom>
+          <a:solidFill>
+            <a:srgbClr val="0F172A"/>
+          </a:solidFill>
+        </p:spPr>
+        <p:txBody>
+          <a:bodyPr/>
+          <a:lstStyle/>
+          <a:p>
+            <a:endParaRPr/>
+          </a:p>
+        </p:txBody>
+      </p:sp>
+      <p:sp>
+        <p:nvSpPr>
+          <p:cNvPr id="21" name="Text Box 20"/>
+          <p:cNvSpPr txBox="1"/>
+          <p:nvPr/>
+        </p:nvSpPr>
+        <p:spPr>
+          <a:xfrm>
+            <a:off x="6492240" y="4389120"/>
+            <a:ext cx="4663440" cy="1645920"/>
+          </a:xfrm>
+          <a:prstGeom prst="rect">
+            <a:avLst/>
+          </a:prstGeom>
+        </p:spPr>
+        <p:txBody>
+          <a:bodyPr anchor="t"/>
+          <a:lstStyle/>
+          <a:p>
+            <a:pPr algn="l"/>
+            <a:r>
+              <a:rPr b="1" sz="900">
+                <a:solidFill>
+                  <a:srgbClr val="38BDF8"/>
+                </a:solidFill>
+                <a:latin typeface="+mn-lt"/>
+                <a:cs typeface="+mn-lt"/>
+              </a:rPr>
+              <a:t>// Embed video with custom poster thumbnail &amp; controls</a:t>
+            </a:r>
+          </a:p>
+          <a:p>
+            <a:pPr algn="l"/>
+            <a:r>
+              <a:rPr sz="850">
+                <a:solidFill>
+                  <a:srgbClr val="E2E8F0"/>
+                </a:solidFill>
+                <a:latin typeface="+mn-lt"/>
+                <a:cs typeface="+mn-lt"/>
+              </a:rPr>
+              <a:t>slide.addVideo(videoBuffer, {</a:t>
+            </a:r>
+          </a:p>
+          <a:p>
+            <a:pPr algn="l"/>
+            <a:r>
+              <a:rPr sz="850">
+                <a:solidFill>
+                  <a:srgbClr val="E2E8F0"/>
+                </a:solidFill>
+                <a:latin typeface="+mn-lt"/>
+                <a:cs typeface="+mn-lt"/>
+              </a:rPr>
+              <a:t>  fileName: 'product_demo.mp4',</a:t>
+            </a:r>
+          </a:p>
+          <a:p>
+            <a:pPr algn="l"/>
+            <a:r>
+              <a:rPr sz="850">
+                <a:solidFill>
+                  <a:srgbClr val="E2E8F0"/>
+                </a:solidFill>
+                <a:latin typeface="+mn-lt"/>
+                <a:cs typeface="+mn-lt"/>
+              </a:rPr>
+              <a:t>  mimeType: 'video/mp4',</a:t>
+            </a:r>
+          </a:p>
+          <a:p>
+            <a:pPr algn="l"/>
+            <a:r>
+              <a:rPr sz="850">
+                <a:solidFill>
+                  <a:srgbClr val="E2E8F0"/>
+                </a:solidFill>
+                <a:latin typeface="+mn-lt"/>
+                <a:cs typeface="+mn-lt"/>
+              </a:rPr>
+              <a:t>  poster: { data: posterBytes, mimeType: 'image/png' },</a:t>
+            </a:r>
+          </a:p>
+          <a:p>
+            <a:pPr algn="l"/>
+            <a:r>
+              <a:rPr sz="850">
+                <a:solidFill>
+                  <a:srgbClr val="E2E8F0"/>
+                </a:solidFill>
+                <a:latin typeface="+mn-lt"/>
+                <a:cs typeface="+mn-lt"/>
+              </a:rPr>
+              <a:t>  x: inches(2), y: inches(1.5),</a:t>
+            </a:r>
+          </a:p>
+          <a:p>
+            <a:pPr algn="l"/>
+            <a:r>
+              <a:rPr sz="850">
+                <a:solidFill>
+                  <a:srgbClr val="E2E8F0"/>
+                </a:solidFill>
+                <a:latin typeface="+mn-lt"/>
+                <a:cs typeface="+mn-lt"/>
+              </a:rPr>
+              <a:t>  w: inches(6), h: inches(4.5),</a:t>
+            </a:r>
+          </a:p>
+          <a:p>
+            <a:pPr algn="l"/>
+            <a:r>
+              <a:rPr sz="850">
+                <a:solidFill>
+                  <a:srgbClr val="E2E8F0"/>
+                </a:solidFill>
+                <a:latin typeface="+mn-lt"/>
+                <a:cs typeface="+mn-lt"/>
+              </a:rPr>
+              <a:t>  muted: true, loop: true</a:t>
+            </a:r>
+          </a:p>
+          <a:p>
+            <a:pPr algn="l"/>
+            <a:r>
+              <a:rPr sz="850">
+                <a:solidFill>
+                  <a:srgbClr val="E2E8F0"/>
+                </a:solidFill>
+                <a:latin typeface="+mn-lt"/>
+                <a:cs typeface="+mn-lt"/>
+              </a:rPr>
+              <a:t>});</a:t>
+            </a:r>
+          </a:p>
+        </p:txBody>
+      </p:sp>
+      <p:sp>
+        <p:nvSpPr>
+          <p:cNvPr id="22" name="Text Box 21"/>
+          <p:cNvSpPr txBox="1"/>
+          <p:nvPr/>
+        </p:nvSpPr>
+        <p:spPr>
+          <a:xfrm>
+            <a:off x="731520" y="6510528"/>
+            <a:ext cx="10725912" cy="228600"/>
+          </a:xfrm>
+          <a:prstGeom prst="rect">
+            <a:avLst/>
+          </a:prstGeom>
+        </p:spPr>
+        <p:txBody>
+          <a:bodyPr anchor="t"/>
+          <a:lstStyle/>
+          <a:p>
+            <a:pPr algn="ctr"/>
+            <a:r>
+              <a:rPr i="1" sz="800">
+                <a:solidFill>
+                  <a:srgbClr val="94A3B8"/>
+                </a:solidFill>
+                <a:latin typeface="+mn-lt"/>
+                <a:cs typeface="+mn-lt"/>
+              </a:rPr>
+              <a:t>* Disclaimer: All benchmark metrics, performance figures, and simulated architectures in this deck are synthetic demonstration values generated solely to showcase the authoring, formatting, and rendering capabilities of @hokkyss/pptx.</a:t>
+            </a:r>
+          </a:p>
+        </p:txBody>
+      </p:sp>
+    </p:spTree>
+  </p:cSld>
+  <p:clrMapOvr>
+    <a:masterClrMapping/>
+  </p:clrMapOvr>
+  <p:transition spd="fast">
+    <p:fade/>
+  </p:transition>
+  <p:timing>
+    <p:tnLst>
+      <p:par>
+        <p:cTn dur="indefinite" id="1" nodeType="tmRoot" restart="never">
+          <p:childTnLst>
+            <p:seq concurrent="1" nextAc="seek">
+              <p:cTn dur="indefinite" id="2" nodeType="mainSeq">
+                <p:childTnLst>
+                  <p:video>
+                    <p:cMediaNode vol="0">
+                      <p:cTn dur="indefinite" id="5" nodeType="withEffect" restart="never" repeatCount="indefinite">
+                        <p:stCondLst>
+                          <p:cond delay="0"/>
+                        </p:stCondLst>
+                        <p:endCondLst>
+                          <p:cond delay="0" evt="onStopAudio"/>
+                        </p:endCondLst>
+                      </p:cTn>
+                      <p:tgtEl>
+                        <p:spTgt spid="18"/>
+                      </p:tgtEl>
+                    </p:cMediaNode>
+                  </p:video>
+                </p:childTnLst>
+              </p:cTn>
+            </p:seq>
+            <p:seq concurrent="1" nextAc="seek">
+              <p:cTn evtFilter="cancelBubble" fill="hold" id="4" nodeType="interactiveSeq" restart="whenNotActive">
+                <p:stCondLst>
+                  <p:cond delay="0" evt="onClick">
+                    <p:tgtEl>
+                      <p:spTgt spid="10"/>
+                    </p:tgtEl>
+                  </p:cond>
+                </p:stCondLst>
+                <p:childTnLst>
+                  <p:audio>
+                    <p:cMediaNode vol="80000">
+                      <p:cTn dur="indefinite" id="3" nodeType="clickEffect" restart="never" repeatCount="indefinite">
+                        <p:stCondLst>
+                          <p:cond delay="0"/>
+                        </p:stCondLst>
+                        <p:endCondLst>
+                          <p:cond delay="0" evt="onStopAudio"/>
+                        </p:endCondLst>
+                      </p:cTn>
+                      <p:tgtEl>
+                        <p:spTgt spid="10"/>
+                      </p:tgtEl>
+                    </p:cMediaNode>
+                  </p:audio>
+                </p:childTnLst>
+              </p:cTn>
+            </p:seq>
+          </p:childTnLst>
+        </p:cTn>
+      </p:par>
+    </p:tnLst>
+  </p:timing>
+</p:sld>
+</file>
+
+<file path=ppt/slides/slide17.xml><?xml version="1.0" encoding="utf-8"?>
 <p:sld xmlns:a="http://schemas.openxmlformats.org/drawingml/2006/main" xmlns:p="http://schemas.openxmlformats.org/presentationml/2006/main" xmlns:r="http://schemas.openxmlformats.org/officeDocument/2006/relationships">
   <p:cSld>
     <p:bg>
